--- a/slides/7_model_evaluation.pptx
+++ b/slides/7_model_evaluation.pptx
@@ -11,7 +11,7 @@
     <p:sldId id="256" r:id="rId2"/>
     <p:sldId id="265" r:id="rId3"/>
     <p:sldId id="266" r:id="rId4"/>
-    <p:sldId id="267" r:id="rId5"/>
+    <p:sldId id="299" r:id="rId5"/>
     <p:sldId id="268" r:id="rId6"/>
     <p:sldId id="269" r:id="rId7"/>
     <p:sldId id="270" r:id="rId8"/>
@@ -19,17 +19,17 @@
     <p:sldId id="272" r:id="rId10"/>
     <p:sldId id="273" r:id="rId11"/>
     <p:sldId id="274" r:id="rId12"/>
-    <p:sldId id="275" r:id="rId13"/>
-    <p:sldId id="276" r:id="rId14"/>
-    <p:sldId id="277" r:id="rId15"/>
-    <p:sldId id="290" r:id="rId16"/>
-    <p:sldId id="278" r:id="rId17"/>
-    <p:sldId id="279" r:id="rId18"/>
-    <p:sldId id="280" r:id="rId19"/>
-    <p:sldId id="281" r:id="rId20"/>
-    <p:sldId id="282" r:id="rId21"/>
-    <p:sldId id="283" r:id="rId22"/>
-    <p:sldId id="284" r:id="rId23"/>
+    <p:sldId id="300" r:id="rId13"/>
+    <p:sldId id="275" r:id="rId14"/>
+    <p:sldId id="276" r:id="rId15"/>
+    <p:sldId id="277" r:id="rId16"/>
+    <p:sldId id="290" r:id="rId17"/>
+    <p:sldId id="278" r:id="rId18"/>
+    <p:sldId id="279" r:id="rId19"/>
+    <p:sldId id="280" r:id="rId20"/>
+    <p:sldId id="281" r:id="rId21"/>
+    <p:sldId id="282" r:id="rId22"/>
+    <p:sldId id="283" r:id="rId23"/>
   </p:sldIdLst>
   <p:sldSz cx="12192000" cy="6858000"/>
   <p:notesSz cx="6858000" cy="9144000"/>
@@ -500,7 +500,7 @@
           <a:p>
             <a:fld id="{506E0FD1-891F-4B1E-916D-E9B585160BB8}" type="datetimeFigureOut">
               <a:rPr lang="en-GB" smtClean="0"/>
-              <a:t>11/01/2026</a:t>
+              <a:t>11/03/2026</a:t>
             </a:fld>
             <a:endParaRPr lang="en-GB"/>
           </a:p>
@@ -917,7 +917,7 @@
           <a:p>
             <a:fld id="{D68C3F22-27B2-44E3-9C5F-D08126455F6F}" type="datetime1">
               <a:rPr lang="en-GB" smtClean="0"/>
-              <a:t>11/01/2026</a:t>
+              <a:t>11/03/2026</a:t>
             </a:fld>
             <a:endParaRPr lang="en-GB"/>
           </a:p>
@@ -1117,7 +1117,7 @@
           <a:p>
             <a:fld id="{1CD03846-7BF6-4FB6-A921-FF3379ADBD4C}" type="datetime1">
               <a:rPr lang="en-GB" smtClean="0"/>
-              <a:t>11/01/2026</a:t>
+              <a:t>11/03/2026</a:t>
             </a:fld>
             <a:endParaRPr lang="en-GB"/>
           </a:p>
@@ -1327,7 +1327,7 @@
           <a:p>
             <a:fld id="{99E1B91A-3FD0-4144-9C84-63E9688ED2FE}" type="datetime1">
               <a:rPr lang="en-GB" smtClean="0"/>
-              <a:t>11/01/2026</a:t>
+              <a:t>11/03/2026</a:t>
             </a:fld>
             <a:endParaRPr lang="en-GB"/>
           </a:p>
@@ -1527,7 +1527,7 @@
           <a:p>
             <a:fld id="{5295ED7B-FEAD-4734-819F-93EF4B0EA908}" type="datetime1">
               <a:rPr lang="en-GB" smtClean="0"/>
-              <a:t>11/01/2026</a:t>
+              <a:t>11/03/2026</a:t>
             </a:fld>
             <a:endParaRPr lang="en-GB"/>
           </a:p>
@@ -1803,7 +1803,7 @@
           <a:p>
             <a:fld id="{D2D5D4B4-C926-4B45-8815-1ED8911179A2}" type="datetime1">
               <a:rPr lang="en-GB" smtClean="0"/>
-              <a:t>11/01/2026</a:t>
+              <a:t>11/03/2026</a:t>
             </a:fld>
             <a:endParaRPr lang="en-GB"/>
           </a:p>
@@ -2071,7 +2071,7 @@
           <a:p>
             <a:fld id="{B4C5210A-0E37-4935-93AF-69F21A5F712F}" type="datetime1">
               <a:rPr lang="en-GB" smtClean="0"/>
-              <a:t>11/01/2026</a:t>
+              <a:t>11/03/2026</a:t>
             </a:fld>
             <a:endParaRPr lang="en-GB"/>
           </a:p>
@@ -2486,7 +2486,7 @@
           <a:p>
             <a:fld id="{3D3A6B2F-436C-4691-80E8-9C890E000E9D}" type="datetime1">
               <a:rPr lang="en-GB" smtClean="0"/>
-              <a:t>11/01/2026</a:t>
+              <a:t>11/03/2026</a:t>
             </a:fld>
             <a:endParaRPr lang="en-GB"/>
           </a:p>
@@ -2628,7 +2628,7 @@
           <a:p>
             <a:fld id="{84385F4C-D74B-496F-8D21-97E3549C783B}" type="datetime1">
               <a:rPr lang="en-GB" smtClean="0"/>
-              <a:t>11/01/2026</a:t>
+              <a:t>11/03/2026</a:t>
             </a:fld>
             <a:endParaRPr lang="en-GB"/>
           </a:p>
@@ -2741,7 +2741,7 @@
           <a:p>
             <a:fld id="{0CBDCB32-C241-4703-A832-4EB47BD54E83}" type="datetime1">
               <a:rPr lang="en-GB" smtClean="0"/>
-              <a:t>11/01/2026</a:t>
+              <a:t>11/03/2026</a:t>
             </a:fld>
             <a:endParaRPr lang="en-GB"/>
           </a:p>
@@ -3054,7 +3054,7 @@
           <a:p>
             <a:fld id="{85C150FF-BE95-4D25-A16A-E368A81CBF24}" type="datetime1">
               <a:rPr lang="en-GB" smtClean="0"/>
-              <a:t>11/01/2026</a:t>
+              <a:t>11/03/2026</a:t>
             </a:fld>
             <a:endParaRPr lang="en-GB"/>
           </a:p>
@@ -3343,7 +3343,7 @@
           <a:p>
             <a:fld id="{F3C5DB4B-B349-43C9-A424-BADA723AD9F1}" type="datetime1">
               <a:rPr lang="en-GB" smtClean="0"/>
-              <a:t>11/01/2026</a:t>
+              <a:t>11/03/2026</a:t>
             </a:fld>
             <a:endParaRPr lang="en-GB"/>
           </a:p>
@@ -3586,7 +3586,7 @@
           <a:p>
             <a:fld id="{12632426-0A0C-405F-A3D0-2D11AA44702A}" type="datetime1">
               <a:rPr lang="en-GB" smtClean="0"/>
-              <a:t>11/01/2026</a:t>
+              <a:t>11/03/2026</a:t>
             </a:fld>
             <a:endParaRPr lang="en-GB"/>
           </a:p>
@@ -4327,7 +4327,7 @@
           <p:cNvPr id="2" name="Titel 1">
             <a:extLst>
               <a:ext uri="{FF2B5EF4-FFF2-40B4-BE49-F238E27FC236}">
-                <a16:creationId xmlns:a16="http://schemas.microsoft.com/office/drawing/2014/main" id="{152AC68C-8E51-D16D-9BB6-357B2A674BDF}"/>
+                <a16:creationId xmlns:a16="http://schemas.microsoft.com/office/drawing/2014/main" id="{C70FE7FD-E55A-75A1-2BCC-34FEE8D88300}"/>
               </a:ext>
             </a:extLst>
           </p:cNvPr>
@@ -4343,15 +4343,7 @@
           <a:bodyPr/>
           <a:lstStyle/>
           <a:p>
-            <a:r>
-              <a:rPr lang="de-DE" dirty="0"/>
-              <a:t>Cross-Validation </a:t>
-            </a:r>
-            <a:r>
-              <a:rPr lang="de-DE" dirty="0" err="1"/>
-              <a:t>Strategies</a:t>
-            </a:r>
-            <a:endParaRPr lang="de-DE" dirty="0"/>
+            <a:endParaRPr lang="de-DE"/>
           </a:p>
         </p:txBody>
       </p:sp>
@@ -4360,7 +4352,7 @@
           <p:cNvPr id="3" name="Inhaltsplatzhalter 2">
             <a:extLst>
               <a:ext uri="{FF2B5EF4-FFF2-40B4-BE49-F238E27FC236}">
-                <a16:creationId xmlns:a16="http://schemas.microsoft.com/office/drawing/2014/main" id="{749BBA53-25CB-44B1-3477-C0C8FFB229E0}"/>
+                <a16:creationId xmlns:a16="http://schemas.microsoft.com/office/drawing/2014/main" id="{EFF99967-6236-3DFB-504F-D1CEAF7D6BCA}"/>
               </a:ext>
             </a:extLst>
           </p:cNvPr>
@@ -4385,7 +4377,7 @@
           <p:cNvPr id="4" name="Foliennummernplatzhalter 3">
             <a:extLst>
               <a:ext uri="{FF2B5EF4-FFF2-40B4-BE49-F238E27FC236}">
-                <a16:creationId xmlns:a16="http://schemas.microsoft.com/office/drawing/2014/main" id="{B3242BE3-F324-23F7-81F5-17D5548B8C41}"/>
+                <a16:creationId xmlns:a16="http://schemas.microsoft.com/office/drawing/2014/main" id="{BA1DC205-AE15-F214-3B3C-956A09269819}"/>
               </a:ext>
             </a:extLst>
           </p:cNvPr>
@@ -4412,7 +4404,7 @@
     </p:spTree>
     <p:extLst>
       <p:ext uri="{BB962C8B-B14F-4D97-AF65-F5344CB8AC3E}">
-        <p14:creationId xmlns:p14="http://schemas.microsoft.com/office/powerpoint/2010/main" val="2900337028"/>
+        <p14:creationId xmlns:p14="http://schemas.microsoft.com/office/powerpoint/2010/main" val="2263489863"/>
       </p:ext>
     </p:extLst>
   </p:cSld>
@@ -4444,7 +4436,7 @@
           <p:cNvPr id="2" name="Titel 1">
             <a:extLst>
               <a:ext uri="{FF2B5EF4-FFF2-40B4-BE49-F238E27FC236}">
-                <a16:creationId xmlns:a16="http://schemas.microsoft.com/office/drawing/2014/main" id="{77FFF5D6-0FCB-1A64-D8A4-EF19A04AFB1B}"/>
+                <a16:creationId xmlns:a16="http://schemas.microsoft.com/office/drawing/2014/main" id="{152AC68C-8E51-D16D-9BB6-357B2A674BDF}"/>
               </a:ext>
             </a:extLst>
           </p:cNvPr>
@@ -4461,38 +4453,42 @@
           <a:lstStyle/>
           <a:p>
             <a:r>
+              <a:rPr lang="de-DE" dirty="0"/>
+              <a:t>Cross-Validation </a:t>
+            </a:r>
+            <a:r>
               <a:rPr lang="de-DE" dirty="0" err="1"/>
-              <a:t>k-Fold</a:t>
-            </a:r>
+              <a:t>Strategies</a:t>
+            </a:r>
+            <a:endParaRPr lang="de-DE" dirty="0"/>
+          </a:p>
+        </p:txBody>
+      </p:sp>
+      <p:sp>
+        <p:nvSpPr>
+          <p:cNvPr id="3" name="Inhaltsplatzhalter 2">
+            <a:extLst>
+              <a:ext uri="{FF2B5EF4-FFF2-40B4-BE49-F238E27FC236}">
+                <a16:creationId xmlns:a16="http://schemas.microsoft.com/office/drawing/2014/main" id="{749BBA53-25CB-44B1-3477-C0C8FFB229E0}"/>
+              </a:ext>
+            </a:extLst>
+          </p:cNvPr>
+          <p:cNvSpPr>
+            <a:spLocks noGrp="1"/>
+          </p:cNvSpPr>
+          <p:nvPr>
+            <p:ph idx="1"/>
+          </p:nvPr>
+        </p:nvSpPr>
+        <p:spPr/>
+        <p:txBody>
+          <a:bodyPr/>
+          <a:lstStyle/>
+          <a:p>
             <a:r>
               <a:rPr lang="de-DE" dirty="0"/>
-              <a:t> Cross-Validation</a:t>
-            </a:r>
-          </a:p>
-        </p:txBody>
-      </p:sp>
-      <p:sp>
-        <p:nvSpPr>
-          <p:cNvPr id="3" name="Inhaltsplatzhalter 2">
-            <a:extLst>
-              <a:ext uri="{FF2B5EF4-FFF2-40B4-BE49-F238E27FC236}">
-                <a16:creationId xmlns:a16="http://schemas.microsoft.com/office/drawing/2014/main" id="{592C0B87-A83F-A198-A1CB-7CCC171420D3}"/>
-              </a:ext>
-            </a:extLst>
-          </p:cNvPr>
-          <p:cNvSpPr>
-            <a:spLocks noGrp="1"/>
-          </p:cNvSpPr>
-          <p:nvPr>
-            <p:ph idx="1"/>
-          </p:nvPr>
-        </p:nvSpPr>
-        <p:spPr/>
-        <p:txBody>
-          <a:bodyPr/>
-          <a:lstStyle/>
-          <a:p>
-            <a:endParaRPr lang="de-DE"/>
+              <a:t>…</a:t>
+            </a:r>
           </a:p>
         </p:txBody>
       </p:sp>
@@ -4501,7 +4497,7 @@
           <p:cNvPr id="4" name="Foliennummernplatzhalter 3">
             <a:extLst>
               <a:ext uri="{FF2B5EF4-FFF2-40B4-BE49-F238E27FC236}">
-                <a16:creationId xmlns:a16="http://schemas.microsoft.com/office/drawing/2014/main" id="{04F83C66-D41C-833C-B12E-291DA9CF43B4}"/>
+                <a16:creationId xmlns:a16="http://schemas.microsoft.com/office/drawing/2014/main" id="{B3242BE3-F324-23F7-81F5-17D5548B8C41}"/>
               </a:ext>
             </a:extLst>
           </p:cNvPr>
@@ -4528,7 +4524,7 @@
     </p:spTree>
     <p:extLst>
       <p:ext uri="{BB962C8B-B14F-4D97-AF65-F5344CB8AC3E}">
-        <p14:creationId xmlns:p14="http://schemas.microsoft.com/office/powerpoint/2010/main" val="1284975876"/>
+        <p14:creationId xmlns:p14="http://schemas.microsoft.com/office/powerpoint/2010/main" val="2900337028"/>
       </p:ext>
     </p:extLst>
   </p:cSld>
@@ -4560,7 +4556,7 @@
           <p:cNvPr id="2" name="Titel 1">
             <a:extLst>
               <a:ext uri="{FF2B5EF4-FFF2-40B4-BE49-F238E27FC236}">
-                <a16:creationId xmlns:a16="http://schemas.microsoft.com/office/drawing/2014/main" id="{321539D0-D7CA-A083-0E99-6E50927AB917}"/>
+                <a16:creationId xmlns:a16="http://schemas.microsoft.com/office/drawing/2014/main" id="{77FFF5D6-0FCB-1A64-D8A4-EF19A04AFB1B}"/>
               </a:ext>
             </a:extLst>
           </p:cNvPr>
@@ -4578,7 +4574,7 @@
           <a:p>
             <a:r>
               <a:rPr lang="de-DE" dirty="0" err="1"/>
-              <a:t>Nested</a:t>
+              <a:t>k-Fold</a:t>
             </a:r>
             <a:r>
               <a:rPr lang="de-DE" dirty="0"/>
@@ -4592,7 +4588,7 @@
           <p:cNvPr id="3" name="Inhaltsplatzhalter 2">
             <a:extLst>
               <a:ext uri="{FF2B5EF4-FFF2-40B4-BE49-F238E27FC236}">
-                <a16:creationId xmlns:a16="http://schemas.microsoft.com/office/drawing/2014/main" id="{EBB5F476-08D3-EA5A-3327-C6FA9616EC18}"/>
+                <a16:creationId xmlns:a16="http://schemas.microsoft.com/office/drawing/2014/main" id="{592C0B87-A83F-A198-A1CB-7CCC171420D3}"/>
               </a:ext>
             </a:extLst>
           </p:cNvPr>
@@ -4608,7 +4604,10 @@
           <a:bodyPr/>
           <a:lstStyle/>
           <a:p>
-            <a:endParaRPr lang="de-DE"/>
+            <a:r>
+              <a:rPr lang="de-DE" dirty="0"/>
+              <a:t>…</a:t>
+            </a:r>
           </a:p>
         </p:txBody>
       </p:sp>
@@ -4617,7 +4616,7 @@
           <p:cNvPr id="4" name="Foliennummernplatzhalter 3">
             <a:extLst>
               <a:ext uri="{FF2B5EF4-FFF2-40B4-BE49-F238E27FC236}">
-                <a16:creationId xmlns:a16="http://schemas.microsoft.com/office/drawing/2014/main" id="{B83C44E1-9BD4-3F4F-BD01-67AB09FD4EC7}"/>
+                <a16:creationId xmlns:a16="http://schemas.microsoft.com/office/drawing/2014/main" id="{04F83C66-D41C-833C-B12E-291DA9CF43B4}"/>
               </a:ext>
             </a:extLst>
           </p:cNvPr>
@@ -4641,10 +4640,46 @@
           </a:p>
         </p:txBody>
       </p:sp>
+      <p:pic>
+        <p:nvPicPr>
+          <p:cNvPr id="5" name="Picture 4">
+            <a:extLst>
+              <a:ext uri="{FF2B5EF4-FFF2-40B4-BE49-F238E27FC236}">
+                <a16:creationId xmlns:a16="http://schemas.microsoft.com/office/drawing/2014/main" id="{024854C2-4076-8109-F166-E6AE965E1001}"/>
+              </a:ext>
+            </a:extLst>
+          </p:cNvPr>
+          <p:cNvPicPr>
+            <a:picLocks noChangeAspect="1"/>
+          </p:cNvPicPr>
+          <p:nvPr/>
+        </p:nvPicPr>
+        <p:blipFill>
+          <a:blip r:embed="rId2">
+            <a:extLst>
+              <a:ext uri="{28A0092B-C50C-407E-A947-70E740481C1C}">
+                <a14:useLocalDpi xmlns:a14="http://schemas.microsoft.com/office/drawing/2010/main" val="0"/>
+              </a:ext>
+            </a:extLst>
+          </a:blip>
+          <a:stretch>
+            <a:fillRect/>
+          </a:stretch>
+        </p:blipFill>
+        <p:spPr>
+          <a:xfrm>
+            <a:off x="393261" y="3404485"/>
+            <a:ext cx="11405478" cy="2772478"/>
+          </a:xfrm>
+          <a:prstGeom prst="rect">
+            <a:avLst/>
+          </a:prstGeom>
+        </p:spPr>
+      </p:pic>
     </p:spTree>
     <p:extLst>
       <p:ext uri="{BB962C8B-B14F-4D97-AF65-F5344CB8AC3E}">
-        <p14:creationId xmlns:p14="http://schemas.microsoft.com/office/powerpoint/2010/main" val="725974763"/>
+        <p14:creationId xmlns:p14="http://schemas.microsoft.com/office/powerpoint/2010/main" val="1284975876"/>
       </p:ext>
     </p:extLst>
   </p:cSld>
@@ -4673,10 +4708,10 @@
       </p:grpSpPr>
       <p:sp>
         <p:nvSpPr>
-          <p:cNvPr id="2" name="Title 1">
-            <a:extLst>
-              <a:ext uri="{FF2B5EF4-FFF2-40B4-BE49-F238E27FC236}">
-                <a16:creationId xmlns:a16="http://schemas.microsoft.com/office/drawing/2014/main" id="{21415F10-CF24-B798-1344-DCF9E363C05D}"/>
+          <p:cNvPr id="2" name="Titel 1">
+            <a:extLst>
+              <a:ext uri="{FF2B5EF4-FFF2-40B4-BE49-F238E27FC236}">
+                <a16:creationId xmlns:a16="http://schemas.microsoft.com/office/drawing/2014/main" id="{321539D0-D7CA-A083-0E99-6E50927AB917}"/>
               </a:ext>
             </a:extLst>
           </p:cNvPr>
@@ -4693,18 +4728,22 @@
           <a:lstStyle/>
           <a:p>
             <a:r>
-              <a:rPr lang="en-DE" dirty="0"/>
-              <a:t>Black-Box Models</a:t>
-            </a:r>
-          </a:p>
-        </p:txBody>
-      </p:sp>
-      <p:sp>
-        <p:nvSpPr>
-          <p:cNvPr id="3" name="Content Placeholder 2">
-            <a:extLst>
-              <a:ext uri="{FF2B5EF4-FFF2-40B4-BE49-F238E27FC236}">
-                <a16:creationId xmlns:a16="http://schemas.microsoft.com/office/drawing/2014/main" id="{455FDA38-027C-BDF2-FF70-B542E9092FBE}"/>
+              <a:rPr lang="de-DE" dirty="0" err="1"/>
+              <a:t>Nested</a:t>
+            </a:r>
+            <a:r>
+              <a:rPr lang="de-DE" dirty="0"/>
+              <a:t> Cross-Validation</a:t>
+            </a:r>
+          </a:p>
+        </p:txBody>
+      </p:sp>
+      <p:sp>
+        <p:nvSpPr>
+          <p:cNvPr id="3" name="Inhaltsplatzhalter 2">
+            <a:extLst>
+              <a:ext uri="{FF2B5EF4-FFF2-40B4-BE49-F238E27FC236}">
+                <a16:creationId xmlns:a16="http://schemas.microsoft.com/office/drawing/2014/main" id="{EBB5F476-08D3-EA5A-3327-C6FA9616EC18}"/>
               </a:ext>
             </a:extLst>
           </p:cNvPr>
@@ -4717,127 +4756,19 @@
         </p:nvSpPr>
         <p:spPr/>
         <p:txBody>
-          <a:bodyPr>
-            <a:normAutofit/>
-          </a:bodyPr>
-          <a:lstStyle/>
-          <a:p>
-            <a:pPr marL="0" indent="0">
-              <a:buNone/>
-            </a:pPr>
-            <a:r>
-              <a:rPr lang="en-GB" dirty="0"/>
-              <a:t>T</a:t>
-            </a:r>
-            <a:r>
-              <a:rPr lang="en-DE" dirty="0"/>
-              <a:t>o build trust in AI systems, individual predictions/actions need to be fully transparent, i.e., explainable.</a:t>
-            </a:r>
-            <a:endParaRPr lang="en-GB" dirty="0"/>
-          </a:p>
-          <a:p>
-            <a:pPr marL="0" indent="0">
-              <a:buNone/>
-            </a:pPr>
-            <a:r>
-              <a:rPr lang="en-GB" sz="2800" dirty="0"/>
-              <a:t>(do not confuse </a:t>
-            </a:r>
-            <a:r>
-              <a:rPr lang="en-GB" sz="2800" dirty="0" err="1"/>
-              <a:t>explainability</a:t>
-            </a:r>
-            <a:r>
-              <a:rPr lang="en-GB" sz="2800" dirty="0"/>
-              <a:t> with causality though)</a:t>
-            </a:r>
-            <a:endParaRPr lang="en-DE" dirty="0"/>
-          </a:p>
-          <a:p>
-            <a:pPr marL="0" indent="0">
-              <a:buNone/>
-            </a:pPr>
-            <a:endParaRPr lang="en-DE" dirty="0"/>
-          </a:p>
-          <a:p>
-            <a:pPr marL="0" indent="0">
-              <a:buNone/>
-            </a:pPr>
-            <a:r>
-              <a:rPr lang="en-DE" dirty="0"/>
-              <a:t>Unfortunately, complex models like deep learning methods are difficult to interpret.</a:t>
-            </a:r>
-          </a:p>
-          <a:p>
-            <a:pPr marL="0" indent="0">
-              <a:buNone/>
-            </a:pPr>
-            <a:r>
-              <a:rPr lang="en-GB" dirty="0">
-                <a:sym typeface="Wingdings" pitchFamily="2" charset="2"/>
-              </a:rPr>
-              <a:t> n</a:t>
-            </a:r>
-            <a:r>
-              <a:rPr lang="en-DE" dirty="0">
-                <a:sym typeface="Wingdings" pitchFamily="2" charset="2"/>
-              </a:rPr>
-              <a:t>eed for model-agnostic methods to explain black-box models</a:t>
-            </a:r>
-          </a:p>
-          <a:p>
-            <a:pPr marL="0" indent="0">
-              <a:buNone/>
-            </a:pPr>
-            <a:r>
-              <a:rPr lang="en-GB" dirty="0"/>
-              <a:t>e</a:t>
-            </a:r>
-            <a:r>
-              <a:rPr lang="en-DE" dirty="0"/>
-              <a:t>xamples: local surrogates (</a:t>
-            </a:r>
-            <a:r>
-              <a:rPr lang="en-GB" dirty="0">
-                <a:hlinkClick r:id="rId2"/>
-              </a:rPr>
-              <a:t>LIME</a:t>
-            </a:r>
-            <a:r>
-              <a:rPr lang="en-DE" dirty="0"/>
-              <a:t>), Shapley values (</a:t>
-            </a:r>
-            <a:r>
-              <a:rPr lang="en-DE" dirty="0">
-                <a:hlinkClick r:id="rId3"/>
-              </a:rPr>
-              <a:t>SHAP</a:t>
-            </a:r>
-            <a:r>
-              <a:rPr lang="en-DE" dirty="0"/>
-              <a:t>)</a:t>
-            </a:r>
-          </a:p>
-          <a:p>
-            <a:pPr marL="0" indent="0">
-              <a:buNone/>
-            </a:pPr>
-            <a:r>
-              <a:rPr lang="en-DE" dirty="0">
-                <a:hlinkClick r:id="rId4"/>
-              </a:rPr>
-              <a:t>overview</a:t>
-            </a:r>
-            <a:endParaRPr lang="en-DE" dirty="0"/>
-          </a:p>
-        </p:txBody>
-      </p:sp>
-      <p:sp>
-        <p:nvSpPr>
-          <p:cNvPr id="4" name="Slide Number Placeholder 3">
-            <a:extLst>
-              <a:ext uri="{FF2B5EF4-FFF2-40B4-BE49-F238E27FC236}">
-                <a16:creationId xmlns:a16="http://schemas.microsoft.com/office/drawing/2014/main" id="{E55D36A3-331F-0FB9-177B-14774E79DFD4}"/>
+          <a:bodyPr/>
+          <a:lstStyle/>
+          <a:p>
+            <a:endParaRPr lang="de-DE"/>
+          </a:p>
+        </p:txBody>
+      </p:sp>
+      <p:sp>
+        <p:nvSpPr>
+          <p:cNvPr id="4" name="Foliennummernplatzhalter 3">
+            <a:extLst>
+              <a:ext uri="{FF2B5EF4-FFF2-40B4-BE49-F238E27FC236}">
+                <a16:creationId xmlns:a16="http://schemas.microsoft.com/office/drawing/2014/main" id="{B83C44E1-9BD4-3F4F-BD01-67AB09FD4EC7}"/>
               </a:ext>
             </a:extLst>
           </p:cNvPr>
@@ -4853,18 +4784,18 @@
           <a:bodyPr/>
           <a:lstStyle/>
           <a:p>
-            <a:fld id="{290AF890-0265-4349-BF13-E30F01A2AA85}" type="slidenum">
-              <a:rPr lang="en-DE" smtClean="0"/>
+            <a:fld id="{08C366F5-AFAD-49CB-854A-9D9E238FCA13}" type="slidenum">
+              <a:rPr lang="en-GB" smtClean="0"/>
               <a:t>15</a:t>
             </a:fld>
-            <a:endParaRPr lang="en-DE"/>
+            <a:endParaRPr lang="en-GB"/>
           </a:p>
         </p:txBody>
       </p:sp>
     </p:spTree>
     <p:extLst>
       <p:ext uri="{BB962C8B-B14F-4D97-AF65-F5344CB8AC3E}">
-        <p14:creationId xmlns:p14="http://schemas.microsoft.com/office/powerpoint/2010/main" val="205709024"/>
+        <p14:creationId xmlns:p14="http://schemas.microsoft.com/office/powerpoint/2010/main" val="725974763"/>
       </p:ext>
     </p:extLst>
   </p:cSld>
@@ -4893,10 +4824,10 @@
       </p:grpSpPr>
       <p:sp>
         <p:nvSpPr>
-          <p:cNvPr id="2" name="Titel 1">
-            <a:extLst>
-              <a:ext uri="{FF2B5EF4-FFF2-40B4-BE49-F238E27FC236}">
-                <a16:creationId xmlns:a16="http://schemas.microsoft.com/office/drawing/2014/main" id="{EEA2EC02-7369-A23B-1151-CA1A9D85F3F3}"/>
+          <p:cNvPr id="2" name="Title 1">
+            <a:extLst>
+              <a:ext uri="{FF2B5EF4-FFF2-40B4-BE49-F238E27FC236}">
+                <a16:creationId xmlns:a16="http://schemas.microsoft.com/office/drawing/2014/main" id="{21415F10-CF24-B798-1344-DCF9E363C05D}"/>
               </a:ext>
             </a:extLst>
           </p:cNvPr>
@@ -4913,31 +4844,18 @@
           <a:lstStyle/>
           <a:p>
             <a:r>
-              <a:rPr lang="de-DE" dirty="0"/>
-              <a:t>Feature </a:t>
-            </a:r>
-            <a:r>
-              <a:rPr lang="de-DE" dirty="0" err="1"/>
-              <a:t>Importance</a:t>
-            </a:r>
-            <a:r>
-              <a:rPr lang="de-DE" dirty="0"/>
-              <a:t> </a:t>
-            </a:r>
-            <a:r>
-              <a:rPr lang="de-DE" dirty="0" err="1"/>
-              <a:t>Concepts</a:t>
-            </a:r>
-            <a:endParaRPr lang="de-DE" dirty="0"/>
-          </a:p>
-        </p:txBody>
-      </p:sp>
-      <p:sp>
-        <p:nvSpPr>
-          <p:cNvPr id="3" name="Inhaltsplatzhalter 2">
-            <a:extLst>
-              <a:ext uri="{FF2B5EF4-FFF2-40B4-BE49-F238E27FC236}">
-                <a16:creationId xmlns:a16="http://schemas.microsoft.com/office/drawing/2014/main" id="{AB31F79B-2E2E-D375-1697-3C02F474DC61}"/>
+              <a:rPr lang="en-DE" dirty="0"/>
+              <a:t>Black-Box Models</a:t>
+            </a:r>
+          </a:p>
+        </p:txBody>
+      </p:sp>
+      <p:sp>
+        <p:nvSpPr>
+          <p:cNvPr id="3" name="Content Placeholder 2">
+            <a:extLst>
+              <a:ext uri="{FF2B5EF4-FFF2-40B4-BE49-F238E27FC236}">
+                <a16:creationId xmlns:a16="http://schemas.microsoft.com/office/drawing/2014/main" id="{455FDA38-027C-BDF2-FF70-B542E9092FBE}"/>
               </a:ext>
             </a:extLst>
           </p:cNvPr>
@@ -4950,19 +4868,127 @@
         </p:nvSpPr>
         <p:spPr/>
         <p:txBody>
-          <a:bodyPr/>
-          <a:lstStyle/>
-          <a:p>
-            <a:endParaRPr lang="de-DE"/>
-          </a:p>
-        </p:txBody>
-      </p:sp>
-      <p:sp>
-        <p:nvSpPr>
-          <p:cNvPr id="4" name="Foliennummernplatzhalter 3">
-            <a:extLst>
-              <a:ext uri="{FF2B5EF4-FFF2-40B4-BE49-F238E27FC236}">
-                <a16:creationId xmlns:a16="http://schemas.microsoft.com/office/drawing/2014/main" id="{21BD6576-EA1B-4580-1AEA-9941C9ED6E23}"/>
+          <a:bodyPr>
+            <a:normAutofit/>
+          </a:bodyPr>
+          <a:lstStyle/>
+          <a:p>
+            <a:pPr marL="0" indent="0">
+              <a:buNone/>
+            </a:pPr>
+            <a:r>
+              <a:rPr lang="en-GB" dirty="0"/>
+              <a:t>T</a:t>
+            </a:r>
+            <a:r>
+              <a:rPr lang="en-DE" dirty="0"/>
+              <a:t>o build trust in AI systems, individual predictions/actions need to be fully transparent, i.e., explainable.</a:t>
+            </a:r>
+            <a:endParaRPr lang="en-GB" dirty="0"/>
+          </a:p>
+          <a:p>
+            <a:pPr marL="0" indent="0">
+              <a:buNone/>
+            </a:pPr>
+            <a:r>
+              <a:rPr lang="en-GB" sz="2800" dirty="0"/>
+              <a:t>(do not confuse </a:t>
+            </a:r>
+            <a:r>
+              <a:rPr lang="en-GB" sz="2800" dirty="0" err="1"/>
+              <a:t>explainability</a:t>
+            </a:r>
+            <a:r>
+              <a:rPr lang="en-GB" sz="2800" dirty="0"/>
+              <a:t> with causality though)</a:t>
+            </a:r>
+            <a:endParaRPr lang="en-DE" dirty="0"/>
+          </a:p>
+          <a:p>
+            <a:pPr marL="0" indent="0">
+              <a:buNone/>
+            </a:pPr>
+            <a:endParaRPr lang="en-DE" dirty="0"/>
+          </a:p>
+          <a:p>
+            <a:pPr marL="0" indent="0">
+              <a:buNone/>
+            </a:pPr>
+            <a:r>
+              <a:rPr lang="en-DE" dirty="0"/>
+              <a:t>Unfortunately, complex models like deep learning methods are difficult to interpret.</a:t>
+            </a:r>
+          </a:p>
+          <a:p>
+            <a:pPr marL="0" indent="0">
+              <a:buNone/>
+            </a:pPr>
+            <a:r>
+              <a:rPr lang="en-GB" dirty="0">
+                <a:sym typeface="Wingdings" pitchFamily="2" charset="2"/>
+              </a:rPr>
+              <a:t> n</a:t>
+            </a:r>
+            <a:r>
+              <a:rPr lang="en-DE" dirty="0">
+                <a:sym typeface="Wingdings" pitchFamily="2" charset="2"/>
+              </a:rPr>
+              <a:t>eed for model-agnostic methods to explain black-box models</a:t>
+            </a:r>
+          </a:p>
+          <a:p>
+            <a:pPr marL="0" indent="0">
+              <a:buNone/>
+            </a:pPr>
+            <a:r>
+              <a:rPr lang="en-GB" dirty="0"/>
+              <a:t>e</a:t>
+            </a:r>
+            <a:r>
+              <a:rPr lang="en-DE" dirty="0"/>
+              <a:t>xamples: local surrogates (</a:t>
+            </a:r>
+            <a:r>
+              <a:rPr lang="en-GB" dirty="0">
+                <a:hlinkClick r:id="rId2"/>
+              </a:rPr>
+              <a:t>LIME</a:t>
+            </a:r>
+            <a:r>
+              <a:rPr lang="en-DE" dirty="0"/>
+              <a:t>), Shapley values (</a:t>
+            </a:r>
+            <a:r>
+              <a:rPr lang="en-DE" dirty="0">
+                <a:hlinkClick r:id="rId3"/>
+              </a:rPr>
+              <a:t>SHAP</a:t>
+            </a:r>
+            <a:r>
+              <a:rPr lang="en-DE" dirty="0"/>
+              <a:t>)</a:t>
+            </a:r>
+          </a:p>
+          <a:p>
+            <a:pPr marL="0" indent="0">
+              <a:buNone/>
+            </a:pPr>
+            <a:r>
+              <a:rPr lang="en-DE" dirty="0">
+                <a:hlinkClick r:id="rId4"/>
+              </a:rPr>
+              <a:t>overview</a:t>
+            </a:r>
+            <a:endParaRPr lang="en-DE" dirty="0"/>
+          </a:p>
+        </p:txBody>
+      </p:sp>
+      <p:sp>
+        <p:nvSpPr>
+          <p:cNvPr id="4" name="Slide Number Placeholder 3">
+            <a:extLst>
+              <a:ext uri="{FF2B5EF4-FFF2-40B4-BE49-F238E27FC236}">
+                <a16:creationId xmlns:a16="http://schemas.microsoft.com/office/drawing/2014/main" id="{E55D36A3-331F-0FB9-177B-14774E79DFD4}"/>
               </a:ext>
             </a:extLst>
           </p:cNvPr>
@@ -4978,18 +5004,18 @@
           <a:bodyPr/>
           <a:lstStyle/>
           <a:p>
-            <a:fld id="{08C366F5-AFAD-49CB-854A-9D9E238FCA13}" type="slidenum">
-              <a:rPr lang="en-GB" smtClean="0"/>
+            <a:fld id="{290AF890-0265-4349-BF13-E30F01A2AA85}" type="slidenum">
+              <a:rPr lang="en-DE" smtClean="0"/>
               <a:t>16</a:t>
             </a:fld>
-            <a:endParaRPr lang="en-GB"/>
+            <a:endParaRPr lang="en-DE"/>
           </a:p>
         </p:txBody>
       </p:sp>
     </p:spTree>
     <p:extLst>
       <p:ext uri="{BB962C8B-B14F-4D97-AF65-F5344CB8AC3E}">
-        <p14:creationId xmlns:p14="http://schemas.microsoft.com/office/powerpoint/2010/main" val="394388186"/>
+        <p14:creationId xmlns:p14="http://schemas.microsoft.com/office/powerpoint/2010/main" val="205709024"/>
       </p:ext>
     </p:extLst>
   </p:cSld>
@@ -5021,7 +5047,7 @@
           <p:cNvPr id="2" name="Titel 1">
             <a:extLst>
               <a:ext uri="{FF2B5EF4-FFF2-40B4-BE49-F238E27FC236}">
-                <a16:creationId xmlns:a16="http://schemas.microsoft.com/office/drawing/2014/main" id="{5595687C-3D76-45C0-405C-128B90739BA0}"/>
+                <a16:creationId xmlns:a16="http://schemas.microsoft.com/office/drawing/2014/main" id="{EEA2EC02-7369-A23B-1151-CA1A9D85F3F3}"/>
               </a:ext>
             </a:extLst>
           </p:cNvPr>
@@ -5039,11 +5065,11 @@
           <a:p>
             <a:r>
               <a:rPr lang="de-DE" dirty="0"/>
-              <a:t>Model-</a:t>
+              <a:t>Feature </a:t>
             </a:r>
             <a:r>
               <a:rPr lang="de-DE" dirty="0" err="1"/>
-              <a:t>Specific</a:t>
+              <a:t>Importance</a:t>
             </a:r>
             <a:r>
               <a:rPr lang="de-DE" dirty="0"/>
@@ -5051,7 +5077,7 @@
             </a:r>
             <a:r>
               <a:rPr lang="de-DE" dirty="0" err="1"/>
-              <a:t>Importance</a:t>
+              <a:t>Concepts</a:t>
             </a:r>
             <a:endParaRPr lang="de-DE" dirty="0"/>
           </a:p>
@@ -5062,7 +5088,7 @@
           <p:cNvPr id="3" name="Inhaltsplatzhalter 2">
             <a:extLst>
               <a:ext uri="{FF2B5EF4-FFF2-40B4-BE49-F238E27FC236}">
-                <a16:creationId xmlns:a16="http://schemas.microsoft.com/office/drawing/2014/main" id="{57ACC007-E966-C8DC-8020-739D15E8A848}"/>
+                <a16:creationId xmlns:a16="http://schemas.microsoft.com/office/drawing/2014/main" id="{AB31F79B-2E2E-D375-1697-3C02F474DC61}"/>
               </a:ext>
             </a:extLst>
           </p:cNvPr>
@@ -5087,7 +5113,7 @@
           <p:cNvPr id="4" name="Foliennummernplatzhalter 3">
             <a:extLst>
               <a:ext uri="{FF2B5EF4-FFF2-40B4-BE49-F238E27FC236}">
-                <a16:creationId xmlns:a16="http://schemas.microsoft.com/office/drawing/2014/main" id="{90FEA500-EB45-413A-5886-C05A459D9590}"/>
+                <a16:creationId xmlns:a16="http://schemas.microsoft.com/office/drawing/2014/main" id="{21BD6576-EA1B-4580-1AEA-9941C9ED6E23}"/>
               </a:ext>
             </a:extLst>
           </p:cNvPr>
@@ -5114,7 +5140,7 @@
     </p:spTree>
     <p:extLst>
       <p:ext uri="{BB962C8B-B14F-4D97-AF65-F5344CB8AC3E}">
-        <p14:creationId xmlns:p14="http://schemas.microsoft.com/office/powerpoint/2010/main" val="1875124591"/>
+        <p14:creationId xmlns:p14="http://schemas.microsoft.com/office/powerpoint/2010/main" val="394388186"/>
       </p:ext>
     </p:extLst>
   </p:cSld>
@@ -5146,7 +5172,7 @@
           <p:cNvPr id="2" name="Titel 1">
             <a:extLst>
               <a:ext uri="{FF2B5EF4-FFF2-40B4-BE49-F238E27FC236}">
-                <a16:creationId xmlns:a16="http://schemas.microsoft.com/office/drawing/2014/main" id="{9A954931-0074-968B-0202-B8819C365CEF}"/>
+                <a16:creationId xmlns:a16="http://schemas.microsoft.com/office/drawing/2014/main" id="{5595687C-3D76-45C0-405C-128B90739BA0}"/>
               </a:ext>
             </a:extLst>
           </p:cNvPr>
@@ -5168,7 +5194,7 @@
             </a:r>
             <a:r>
               <a:rPr lang="de-DE" dirty="0" err="1"/>
-              <a:t>Agnostic</a:t>
+              <a:t>Specific</a:t>
             </a:r>
             <a:r>
               <a:rPr lang="de-DE" dirty="0"/>
@@ -5176,7 +5202,7 @@
             </a:r>
             <a:r>
               <a:rPr lang="de-DE" dirty="0" err="1"/>
-              <a:t>Explainability</a:t>
+              <a:t>Importance</a:t>
             </a:r>
             <a:endParaRPr lang="de-DE" dirty="0"/>
           </a:p>
@@ -5187,7 +5213,7 @@
           <p:cNvPr id="3" name="Inhaltsplatzhalter 2">
             <a:extLst>
               <a:ext uri="{FF2B5EF4-FFF2-40B4-BE49-F238E27FC236}">
-                <a16:creationId xmlns:a16="http://schemas.microsoft.com/office/drawing/2014/main" id="{9BCB5DF1-2981-0D12-9EED-56F5740597A7}"/>
+                <a16:creationId xmlns:a16="http://schemas.microsoft.com/office/drawing/2014/main" id="{57ACC007-E966-C8DC-8020-739D15E8A848}"/>
               </a:ext>
             </a:extLst>
           </p:cNvPr>
@@ -5212,7 +5238,7 @@
           <p:cNvPr id="4" name="Foliennummernplatzhalter 3">
             <a:extLst>
               <a:ext uri="{FF2B5EF4-FFF2-40B4-BE49-F238E27FC236}">
-                <a16:creationId xmlns:a16="http://schemas.microsoft.com/office/drawing/2014/main" id="{F7503E83-F57E-257D-4E6A-26E3EC944F12}"/>
+                <a16:creationId xmlns:a16="http://schemas.microsoft.com/office/drawing/2014/main" id="{90FEA500-EB45-413A-5886-C05A459D9590}"/>
               </a:ext>
             </a:extLst>
           </p:cNvPr>
@@ -5239,7 +5265,7 @@
     </p:spTree>
     <p:extLst>
       <p:ext uri="{BB962C8B-B14F-4D97-AF65-F5344CB8AC3E}">
-        <p14:creationId xmlns:p14="http://schemas.microsoft.com/office/powerpoint/2010/main" val="2746679437"/>
+        <p14:creationId xmlns:p14="http://schemas.microsoft.com/office/powerpoint/2010/main" val="1875124591"/>
       </p:ext>
     </p:extLst>
   </p:cSld>
@@ -5271,7 +5297,7 @@
           <p:cNvPr id="2" name="Titel 1">
             <a:extLst>
               <a:ext uri="{FF2B5EF4-FFF2-40B4-BE49-F238E27FC236}">
-                <a16:creationId xmlns:a16="http://schemas.microsoft.com/office/drawing/2014/main" id="{F6843E4B-7E71-2104-D4DE-DC5C793791C9}"/>
+                <a16:creationId xmlns:a16="http://schemas.microsoft.com/office/drawing/2014/main" id="{9A954931-0074-968B-0202-B8819C365CEF}"/>
               </a:ext>
             </a:extLst>
           </p:cNvPr>
@@ -5289,8 +5315,21 @@
           <a:p>
             <a:r>
               <a:rPr lang="de-DE" dirty="0"/>
-              <a:t>SHAP Values</a:t>
-            </a:r>
+              <a:t>Model-</a:t>
+            </a:r>
+            <a:r>
+              <a:rPr lang="de-DE" dirty="0" err="1"/>
+              <a:t>Agnostic</a:t>
+            </a:r>
+            <a:r>
+              <a:rPr lang="de-DE" dirty="0"/>
+              <a:t> </a:t>
+            </a:r>
+            <a:r>
+              <a:rPr lang="de-DE" dirty="0" err="1"/>
+              <a:t>Explainability</a:t>
+            </a:r>
+            <a:endParaRPr lang="de-DE" dirty="0"/>
           </a:p>
         </p:txBody>
       </p:sp>
@@ -5299,7 +5338,7 @@
           <p:cNvPr id="3" name="Inhaltsplatzhalter 2">
             <a:extLst>
               <a:ext uri="{FF2B5EF4-FFF2-40B4-BE49-F238E27FC236}">
-                <a16:creationId xmlns:a16="http://schemas.microsoft.com/office/drawing/2014/main" id="{F06D45B7-29AE-432E-6394-F1B22942AED8}"/>
+                <a16:creationId xmlns:a16="http://schemas.microsoft.com/office/drawing/2014/main" id="{9BCB5DF1-2981-0D12-9EED-56F5740597A7}"/>
               </a:ext>
             </a:extLst>
           </p:cNvPr>
@@ -5324,7 +5363,7 @@
           <p:cNvPr id="4" name="Foliennummernplatzhalter 3">
             <a:extLst>
               <a:ext uri="{FF2B5EF4-FFF2-40B4-BE49-F238E27FC236}">
-                <a16:creationId xmlns:a16="http://schemas.microsoft.com/office/drawing/2014/main" id="{016DBBC4-8F62-F70D-BD00-F3E97C83AEC5}"/>
+                <a16:creationId xmlns:a16="http://schemas.microsoft.com/office/drawing/2014/main" id="{F7503E83-F57E-257D-4E6A-26E3EC944F12}"/>
               </a:ext>
             </a:extLst>
           </p:cNvPr>
@@ -5351,7 +5390,7 @@
     </p:spTree>
     <p:extLst>
       <p:ext uri="{BB962C8B-B14F-4D97-AF65-F5344CB8AC3E}">
-        <p14:creationId xmlns:p14="http://schemas.microsoft.com/office/powerpoint/2010/main" val="761598268"/>
+        <p14:creationId xmlns:p14="http://schemas.microsoft.com/office/powerpoint/2010/main" val="2746679437"/>
       </p:ext>
     </p:extLst>
   </p:cSld>
@@ -5692,7 +5731,7 @@
           <p:cNvPr id="2" name="Titel 1">
             <a:extLst>
               <a:ext uri="{FF2B5EF4-FFF2-40B4-BE49-F238E27FC236}">
-                <a16:creationId xmlns:a16="http://schemas.microsoft.com/office/drawing/2014/main" id="{7FD9F2F3-7D06-9C50-F62E-390ABF38A3E4}"/>
+                <a16:creationId xmlns:a16="http://schemas.microsoft.com/office/drawing/2014/main" id="{F6843E4B-7E71-2104-D4DE-DC5C793791C9}"/>
               </a:ext>
             </a:extLst>
           </p:cNvPr>
@@ -5710,7 +5749,7 @@
           <a:p>
             <a:r>
               <a:rPr lang="de-DE" dirty="0"/>
-              <a:t>LIME</a:t>
+              <a:t>SHAP Values</a:t>
             </a:r>
           </a:p>
         </p:txBody>
@@ -5720,7 +5759,7 @@
           <p:cNvPr id="3" name="Inhaltsplatzhalter 2">
             <a:extLst>
               <a:ext uri="{FF2B5EF4-FFF2-40B4-BE49-F238E27FC236}">
-                <a16:creationId xmlns:a16="http://schemas.microsoft.com/office/drawing/2014/main" id="{F6F0507C-EE63-C14B-A96E-8F8C408B3708}"/>
+                <a16:creationId xmlns:a16="http://schemas.microsoft.com/office/drawing/2014/main" id="{F06D45B7-29AE-432E-6394-F1B22942AED8}"/>
               </a:ext>
             </a:extLst>
           </p:cNvPr>
@@ -5745,7 +5784,7 @@
           <p:cNvPr id="4" name="Foliennummernplatzhalter 3">
             <a:extLst>
               <a:ext uri="{FF2B5EF4-FFF2-40B4-BE49-F238E27FC236}">
-                <a16:creationId xmlns:a16="http://schemas.microsoft.com/office/drawing/2014/main" id="{8FDA568B-A2BE-4961-6F31-A0E7D6D2D4C7}"/>
+                <a16:creationId xmlns:a16="http://schemas.microsoft.com/office/drawing/2014/main" id="{016DBBC4-8F62-F70D-BD00-F3E97C83AEC5}"/>
               </a:ext>
             </a:extLst>
           </p:cNvPr>
@@ -5772,7 +5811,7 @@
     </p:spTree>
     <p:extLst>
       <p:ext uri="{BB962C8B-B14F-4D97-AF65-F5344CB8AC3E}">
-        <p14:creationId xmlns:p14="http://schemas.microsoft.com/office/powerpoint/2010/main" val="2671766254"/>
+        <p14:creationId xmlns:p14="http://schemas.microsoft.com/office/powerpoint/2010/main" val="761598268"/>
       </p:ext>
     </p:extLst>
   </p:cSld>
@@ -5804,7 +5843,7 @@
           <p:cNvPr id="2" name="Titel 1">
             <a:extLst>
               <a:ext uri="{FF2B5EF4-FFF2-40B4-BE49-F238E27FC236}">
-                <a16:creationId xmlns:a16="http://schemas.microsoft.com/office/drawing/2014/main" id="{ED3F7E35-5378-F602-0537-CF82941E6B11}"/>
+                <a16:creationId xmlns:a16="http://schemas.microsoft.com/office/drawing/2014/main" id="{7FD9F2F3-7D06-9C50-F62E-390ABF38A3E4}"/>
               </a:ext>
             </a:extLst>
           </p:cNvPr>
@@ -5821,18 +5860,9 @@
           <a:lstStyle/>
           <a:p>
             <a:r>
-              <a:rPr lang="de-DE" dirty="0" err="1"/>
-              <a:t>Interpreting</a:t>
-            </a:r>
-            <a:r>
               <a:rPr lang="de-DE" dirty="0"/>
-              <a:t> </a:t>
-            </a:r>
-            <a:r>
-              <a:rPr lang="de-DE" dirty="0" err="1"/>
-              <a:t>Explanations</a:t>
-            </a:r>
-            <a:endParaRPr lang="de-DE" dirty="0"/>
+              <a:t>LIME</a:t>
+            </a:r>
           </a:p>
         </p:txBody>
       </p:sp>
@@ -5841,7 +5871,7 @@
           <p:cNvPr id="3" name="Inhaltsplatzhalter 2">
             <a:extLst>
               <a:ext uri="{FF2B5EF4-FFF2-40B4-BE49-F238E27FC236}">
-                <a16:creationId xmlns:a16="http://schemas.microsoft.com/office/drawing/2014/main" id="{8504B4EF-FBB3-4531-6E08-A747A1F7D9B7}"/>
+                <a16:creationId xmlns:a16="http://schemas.microsoft.com/office/drawing/2014/main" id="{F6F0507C-EE63-C14B-A96E-8F8C408B3708}"/>
               </a:ext>
             </a:extLst>
           </p:cNvPr>
@@ -5866,7 +5896,7 @@
           <p:cNvPr id="4" name="Foliennummernplatzhalter 3">
             <a:extLst>
               <a:ext uri="{FF2B5EF4-FFF2-40B4-BE49-F238E27FC236}">
-                <a16:creationId xmlns:a16="http://schemas.microsoft.com/office/drawing/2014/main" id="{5E53D23A-D3BE-FB2D-ADBF-4F6F0560AAC5}"/>
+                <a16:creationId xmlns:a16="http://schemas.microsoft.com/office/drawing/2014/main" id="{8FDA568B-A2BE-4961-6F31-A0E7D6D2D4C7}"/>
               </a:ext>
             </a:extLst>
           </p:cNvPr>
@@ -5893,7 +5923,7 @@
     </p:spTree>
     <p:extLst>
       <p:ext uri="{BB962C8B-B14F-4D97-AF65-F5344CB8AC3E}">
-        <p14:creationId xmlns:p14="http://schemas.microsoft.com/office/powerpoint/2010/main" val="1867132667"/>
+        <p14:creationId xmlns:p14="http://schemas.microsoft.com/office/powerpoint/2010/main" val="2671766254"/>
       </p:ext>
     </p:extLst>
   </p:cSld>
@@ -5925,7 +5955,7 @@
           <p:cNvPr id="2" name="Titel 1">
             <a:extLst>
               <a:ext uri="{FF2B5EF4-FFF2-40B4-BE49-F238E27FC236}">
-                <a16:creationId xmlns:a16="http://schemas.microsoft.com/office/drawing/2014/main" id="{B56BAEE6-4BBA-BDD1-4B77-4DD1E54B8BB2}"/>
+                <a16:creationId xmlns:a16="http://schemas.microsoft.com/office/drawing/2014/main" id="{ED3F7E35-5378-F602-0537-CF82941E6B11}"/>
               </a:ext>
             </a:extLst>
           </p:cNvPr>
@@ -5942,12 +5972,16 @@
           <a:lstStyle/>
           <a:p>
             <a:r>
+              <a:rPr lang="de-DE" dirty="0" err="1"/>
+              <a:t>Interpreting</a:t>
+            </a:r>
+            <a:r>
               <a:rPr lang="de-DE" dirty="0"/>
-              <a:t>Evaluation </a:t>
+              <a:t> </a:t>
             </a:r>
             <a:r>
               <a:rPr lang="de-DE" dirty="0" err="1"/>
-              <a:t>Pitfalls</a:t>
+              <a:t>Explanations</a:t>
             </a:r>
             <a:endParaRPr lang="de-DE" dirty="0"/>
           </a:p>
@@ -5958,7 +5992,7 @@
           <p:cNvPr id="3" name="Inhaltsplatzhalter 2">
             <a:extLst>
               <a:ext uri="{FF2B5EF4-FFF2-40B4-BE49-F238E27FC236}">
-                <a16:creationId xmlns:a16="http://schemas.microsoft.com/office/drawing/2014/main" id="{0C013B42-8310-B252-D4FB-8D5A7BC72F6A}"/>
+                <a16:creationId xmlns:a16="http://schemas.microsoft.com/office/drawing/2014/main" id="{8504B4EF-FBB3-4531-6E08-A747A1F7D9B7}"/>
               </a:ext>
             </a:extLst>
           </p:cNvPr>
@@ -5983,7 +6017,7 @@
           <p:cNvPr id="4" name="Foliennummernplatzhalter 3">
             <a:extLst>
               <a:ext uri="{FF2B5EF4-FFF2-40B4-BE49-F238E27FC236}">
-                <a16:creationId xmlns:a16="http://schemas.microsoft.com/office/drawing/2014/main" id="{448F53F0-F858-AA09-ED80-7FE90FE630CC}"/>
+                <a16:creationId xmlns:a16="http://schemas.microsoft.com/office/drawing/2014/main" id="{5E53D23A-D3BE-FB2D-ADBF-4F6F0560AAC5}"/>
               </a:ext>
             </a:extLst>
           </p:cNvPr>
@@ -6010,7 +6044,7 @@
     </p:spTree>
     <p:extLst>
       <p:ext uri="{BB962C8B-B14F-4D97-AF65-F5344CB8AC3E}">
-        <p14:creationId xmlns:p14="http://schemas.microsoft.com/office/powerpoint/2010/main" val="3760941108"/>
+        <p14:creationId xmlns:p14="http://schemas.microsoft.com/office/powerpoint/2010/main" val="1867132667"/>
       </p:ext>
     </p:extLst>
   </p:cSld>
@@ -6203,10 +6237,10 @@
       </p:grpSpPr>
       <p:sp>
         <p:nvSpPr>
-          <p:cNvPr id="2" name="Titel 1">
-            <a:extLst>
-              <a:ext uri="{FF2B5EF4-FFF2-40B4-BE49-F238E27FC236}">
-                <a16:creationId xmlns:a16="http://schemas.microsoft.com/office/drawing/2014/main" id="{74E9A35A-C3A5-2AD6-3FFF-97DF1474713E}"/>
+          <p:cNvPr id="2" name="Title 1">
+            <a:extLst>
+              <a:ext uri="{FF2B5EF4-FFF2-40B4-BE49-F238E27FC236}">
+                <a16:creationId xmlns:a16="http://schemas.microsoft.com/office/drawing/2014/main" id="{FAF00118-42C4-0F41-5612-17227D0CB322}"/>
               </a:ext>
             </a:extLst>
           </p:cNvPr>
@@ -6223,47 +6257,121 @@
           <a:lstStyle/>
           <a:p>
             <a:r>
+              <a:rPr lang="de-DE" dirty="0"/>
+              <a:t>Evaluation Scenarios </a:t>
+            </a:r>
+            <a:endParaRPr lang="en-DE" dirty="0"/>
+          </a:p>
+        </p:txBody>
+      </p:sp>
+      <p:sp>
+        <p:nvSpPr>
+          <p:cNvPr id="18" name="Inhaltsplatzhalter 17">
+            <a:extLst>
+              <a:ext uri="{FF2B5EF4-FFF2-40B4-BE49-F238E27FC236}">
+                <a16:creationId xmlns:a16="http://schemas.microsoft.com/office/drawing/2014/main" id="{6E20920F-B47E-760E-5843-5D1830A3AE87}"/>
+              </a:ext>
+            </a:extLst>
+          </p:cNvPr>
+          <p:cNvSpPr>
+            <a:spLocks noGrp="1"/>
+          </p:cNvSpPr>
+          <p:nvPr>
+            <p:ph idx="1"/>
+          </p:nvPr>
+        </p:nvSpPr>
+        <p:spPr/>
+        <p:txBody>
+          <a:bodyPr/>
+          <a:lstStyle/>
+          <a:p>
+            <a:pPr marL="514350" indent="-514350">
+              <a:buFont typeface="+mj-lt"/>
+              <a:buAutoNum type="arabicPeriod"/>
+            </a:pPr>
+            <a:r>
+              <a:rPr lang="en-GB" dirty="0"/>
+              <a:t>loss function in training: proxy for later test accuracy</a:t>
+            </a:r>
+          </a:p>
+          <a:p>
+            <a:pPr marL="514350" indent="-514350">
+              <a:buFont typeface="+mj-lt"/>
+              <a:buAutoNum type="arabicPeriod"/>
+            </a:pPr>
+            <a:endParaRPr lang="de-DE" dirty="0"/>
+          </a:p>
+          <a:p>
+            <a:pPr marL="514350" indent="-514350">
+              <a:buFont typeface="+mj-lt"/>
+              <a:buAutoNum type="arabicPeriod"/>
+            </a:pPr>
+            <a:r>
               <a:rPr lang="de-DE" dirty="0" err="1"/>
-              <a:t>Why</a:t>
+              <a:t>model</a:t>
             </a:r>
             <a:r>
               <a:rPr lang="de-DE" dirty="0"/>
-              <a:t> Model Evaluation Matters</a:t>
-            </a:r>
-          </a:p>
-        </p:txBody>
-      </p:sp>
-      <p:sp>
-        <p:nvSpPr>
-          <p:cNvPr id="3" name="Inhaltsplatzhalter 2">
-            <a:extLst>
-              <a:ext uri="{FF2B5EF4-FFF2-40B4-BE49-F238E27FC236}">
-                <a16:creationId xmlns:a16="http://schemas.microsoft.com/office/drawing/2014/main" id="{4AF3800A-8534-5A43-EC92-65ACB76423F3}"/>
-              </a:ext>
-            </a:extLst>
-          </p:cNvPr>
-          <p:cNvSpPr>
-            <a:spLocks noGrp="1"/>
-          </p:cNvSpPr>
-          <p:nvPr>
-            <p:ph idx="1"/>
-          </p:nvPr>
-        </p:nvSpPr>
-        <p:spPr/>
-        <p:txBody>
-          <a:bodyPr/>
-          <a:lstStyle/>
-          <a:p>
-            <a:endParaRPr lang="de-DE"/>
-          </a:p>
-        </p:txBody>
-      </p:sp>
-      <p:sp>
-        <p:nvSpPr>
-          <p:cNvPr id="4" name="Foliennummernplatzhalter 3">
-            <a:extLst>
-              <a:ext uri="{FF2B5EF4-FFF2-40B4-BE49-F238E27FC236}">
-                <a16:creationId xmlns:a16="http://schemas.microsoft.com/office/drawing/2014/main" id="{14873CC6-C56D-B592-3249-339776C1AF49}"/>
+              <a:t> </a:t>
+            </a:r>
+            <a:r>
+              <a:rPr lang="de-DE" dirty="0" err="1"/>
+              <a:t>validation</a:t>
+            </a:r>
+            <a:r>
+              <a:rPr lang="de-DE" dirty="0"/>
+              <a:t>: </a:t>
+            </a:r>
+            <a:r>
+              <a:rPr lang="en-GB" dirty="0"/>
+              <a:t>decide on acceptance of model changes by means of accuracy measure </a:t>
+            </a:r>
+            <a:r>
+              <a:rPr lang="en-GB" dirty="0">
+                <a:sym typeface="Wingdings" pitchFamily="2" charset="2"/>
+              </a:rPr>
+              <a:t></a:t>
+            </a:r>
+            <a:r>
+              <a:rPr lang="en-GB" dirty="0"/>
+              <a:t> improved model vs baseline (current best)</a:t>
+            </a:r>
+            <a:endParaRPr lang="de-DE" dirty="0"/>
+          </a:p>
+          <a:p>
+            <a:pPr marL="514350" indent="-514350">
+              <a:buFont typeface="+mj-lt"/>
+              <a:buAutoNum type="arabicPeriod"/>
+            </a:pPr>
+            <a:endParaRPr lang="de-DE" dirty="0"/>
+          </a:p>
+          <a:p>
+            <a:pPr marL="514350" indent="-514350">
+              <a:buFont typeface="+mj-lt"/>
+              <a:buAutoNum type="arabicPeriod"/>
+            </a:pPr>
+            <a:r>
+              <a:rPr lang="de-DE" dirty="0" err="1"/>
+              <a:t>test</a:t>
+            </a:r>
+            <a:r>
+              <a:rPr lang="de-DE" dirty="0"/>
+              <a:t> </a:t>
+            </a:r>
+            <a:r>
+              <a:rPr lang="en-GB" dirty="0"/>
+              <a:t>(i.e., out-of-sample) accuracy of predictions: the final goal</a:t>
+            </a:r>
+            <a:endParaRPr lang="en-GB" b="1" dirty="0"/>
+          </a:p>
+        </p:txBody>
+      </p:sp>
+      <p:sp>
+        <p:nvSpPr>
+          <p:cNvPr id="4" name="Slide Number Placeholder 3">
+            <a:extLst>
+              <a:ext uri="{FF2B5EF4-FFF2-40B4-BE49-F238E27FC236}">
+                <a16:creationId xmlns:a16="http://schemas.microsoft.com/office/drawing/2014/main" id="{64ED337D-9FEE-AC0F-54C9-AE8B1187FB21}"/>
               </a:ext>
             </a:extLst>
           </p:cNvPr>
@@ -6279,18 +6387,18 @@
           <a:bodyPr/>
           <a:lstStyle/>
           <a:p>
-            <a:fld id="{08C366F5-AFAD-49CB-854A-9D9E238FCA13}" type="slidenum">
-              <a:rPr lang="en-GB" smtClean="0"/>
+            <a:fld id="{ADDEFC8A-584C-5E41-A633-418C2FB73F75}" type="slidenum">
+              <a:rPr lang="en-DE" smtClean="0"/>
               <a:t>4</a:t>
             </a:fld>
-            <a:endParaRPr lang="en-GB"/>
+            <a:endParaRPr lang="en-DE"/>
           </a:p>
         </p:txBody>
       </p:sp>
     </p:spTree>
     <p:extLst>
       <p:ext uri="{BB962C8B-B14F-4D97-AF65-F5344CB8AC3E}">
-        <p14:creationId xmlns:p14="http://schemas.microsoft.com/office/powerpoint/2010/main" val="726088916"/>
+        <p14:creationId xmlns:p14="http://schemas.microsoft.com/office/powerpoint/2010/main" val="1198576018"/>
       </p:ext>
     </p:extLst>
   </p:cSld>
@@ -6360,10 +6468,10 @@
       </p:sp>
       <p:sp>
         <p:nvSpPr>
-          <p:cNvPr id="3" name="Inhaltsplatzhalter 2">
-            <a:extLst>
-              <a:ext uri="{FF2B5EF4-FFF2-40B4-BE49-F238E27FC236}">
-                <a16:creationId xmlns:a16="http://schemas.microsoft.com/office/drawing/2014/main" id="{39A68F35-B328-9BC0-DF14-3516BE9BD6D2}"/>
+          <p:cNvPr id="5" name="Inhaltsplatzhalter 4">
+            <a:extLst>
+              <a:ext uri="{FF2B5EF4-FFF2-40B4-BE49-F238E27FC236}">
+                <a16:creationId xmlns:a16="http://schemas.microsoft.com/office/drawing/2014/main" id="{A8059522-DA13-61AB-9D10-9CFA80A00AD6}"/>
               </a:ext>
             </a:extLst>
           </p:cNvPr>
@@ -6735,12 +6843,20 @@
             <p:ph idx="1"/>
           </p:nvPr>
         </p:nvSpPr>
-        <p:spPr/>
-        <p:txBody>
-          <a:bodyPr/>
-          <a:lstStyle/>
-          <a:p>
-            <a:endParaRPr lang="de-DE"/>
+        <p:spPr>
+          <a:xfrm>
+            <a:off x="838200" y="1825625"/>
+            <a:ext cx="6225209" cy="4351338"/>
+          </a:xfrm>
+        </p:spPr>
+        <p:txBody>
+          <a:bodyPr/>
+          <a:lstStyle/>
+          <a:p>
+            <a:r>
+              <a:rPr lang="en-DE"/>
+              <a:t>true and false positve rates</a:t>
+            </a:r>
           </a:p>
         </p:txBody>
       </p:sp>
@@ -6773,6 +6889,42 @@
           </a:p>
         </p:txBody>
       </p:sp>
+      <p:pic>
+        <p:nvPicPr>
+          <p:cNvPr id="5" name="Grafik 4">
+            <a:extLst>
+              <a:ext uri="{FF2B5EF4-FFF2-40B4-BE49-F238E27FC236}">
+                <a16:creationId xmlns:a16="http://schemas.microsoft.com/office/drawing/2014/main" id="{F43BAEE3-87F9-8614-40EF-8A6A5F3C953C}"/>
+              </a:ext>
+            </a:extLst>
+          </p:cNvPr>
+          <p:cNvPicPr>
+            <a:picLocks noChangeAspect="1"/>
+          </p:cNvPicPr>
+          <p:nvPr/>
+        </p:nvPicPr>
+        <p:blipFill>
+          <a:blip>
+            <a:extLst>
+              <a:ext uri="{96DAC541-7B7A-43D3-8B79-37D633B846F1}">
+                <asvg:svgBlip xmlns:asvg="http://schemas.microsoft.com/office/drawing/2016/SVG/main" r:embed="rId2"/>
+              </a:ext>
+            </a:extLst>
+          </a:blip>
+          <a:stretch>
+            <a:fillRect/>
+          </a:stretch>
+        </p:blipFill>
+        <p:spPr>
+          <a:xfrm>
+            <a:off x="7063409" y="1227759"/>
+            <a:ext cx="5128591" cy="5128591"/>
+          </a:xfrm>
+          <a:prstGeom prst="rect">
+            <a:avLst/>
+          </a:prstGeom>
+        </p:spPr>
+      </p:pic>
     </p:spTree>
     <p:extLst>
       <p:ext uri="{BB962C8B-B14F-4D97-AF65-F5344CB8AC3E}">
@@ -6865,7 +7017,90 @@
           <a:bodyPr/>
           <a:lstStyle/>
           <a:p>
-            <a:endParaRPr lang="de-DE"/>
+            <a:pPr marL="52387" indent="0">
+              <a:buNone/>
+              <a:tabLst>
+                <a:tab pos="227013" algn="l"/>
+              </a:tabLst>
+            </a:pPr>
+            <a:r>
+              <a:rPr lang="en-US" dirty="0"/>
+              <a:t>p</a:t>
+            </a:r>
+            <a:r>
+              <a:rPr lang="en-DE"/>
+              <a:t>oint estimate:</a:t>
+            </a:r>
+            <a:endParaRPr lang="de-DE" dirty="0"/>
+          </a:p>
+          <a:p>
+            <a:pPr marL="509587" indent="-457200">
+              <a:tabLst>
+                <a:tab pos="227013" algn="l"/>
+              </a:tabLst>
+            </a:pPr>
+            <a:r>
+              <a:rPr lang="en-GB" dirty="0"/>
+              <a:t>a</a:t>
+            </a:r>
+            <a:r>
+              <a:rPr lang="en-DE"/>
+              <a:t>bsolute </a:t>
+            </a:r>
+            <a:r>
+              <a:rPr lang="de-DE" dirty="0" err="1"/>
+              <a:t>metrics</a:t>
+            </a:r>
+            <a:r>
+              <a:rPr lang="de-DE" dirty="0"/>
+              <a:t>: </a:t>
+            </a:r>
+            <a:r>
+              <a:rPr lang="en-DE"/>
+              <a:t>MAD, MSE, …</a:t>
+            </a:r>
+            <a:endParaRPr lang="de-DE" dirty="0"/>
+          </a:p>
+          <a:p>
+            <a:pPr marL="509587" indent="-457200">
+              <a:tabLst>
+                <a:tab pos="227013" algn="l"/>
+              </a:tabLst>
+            </a:pPr>
+            <a:r>
+              <a:rPr lang="en-DE"/>
+              <a:t>relative metrics</a:t>
+            </a:r>
+            <a:r>
+              <a:rPr lang="de-DE" dirty="0"/>
+              <a:t>: </a:t>
+            </a:r>
+            <a:r>
+              <a:rPr lang="en-DE"/>
+              <a:t>MAPE, …</a:t>
+            </a:r>
+          </a:p>
+          <a:p>
+            <a:pPr marL="60325" indent="0">
+              <a:buNone/>
+            </a:pPr>
+            <a:endParaRPr lang="en-GB" dirty="0"/>
+          </a:p>
+          <a:p>
+            <a:pPr marL="60325" indent="0">
+              <a:buNone/>
+            </a:pPr>
+            <a:r>
+              <a:rPr lang="en-GB" dirty="0"/>
+              <a:t>full probability distribution: </a:t>
+            </a:r>
+            <a:r>
+              <a:rPr lang="en-GB" dirty="0">
+                <a:hlinkClick r:id="rId2"/>
+              </a:rPr>
+              <a:t>a bit tricky</a:t>
+            </a:r>
+            <a:endParaRPr lang="en-DE"/>
           </a:p>
         </p:txBody>
       </p:sp>

--- a/slides/7_model_evaluation.pptx
+++ b/slides/7_model_evaluation.pptx
@@ -5,31 +5,30 @@
     <p:sldMasterId id="2147483648" r:id="rId1"/>
   </p:sldMasterIdLst>
   <p:notesMasterIdLst>
-    <p:notesMasterId r:id="rId24"/>
+    <p:notesMasterId r:id="rId23"/>
   </p:notesMasterIdLst>
   <p:sldIdLst>
     <p:sldId id="256" r:id="rId2"/>
-    <p:sldId id="265" r:id="rId3"/>
-    <p:sldId id="266" r:id="rId4"/>
-    <p:sldId id="299" r:id="rId5"/>
-    <p:sldId id="268" r:id="rId6"/>
-    <p:sldId id="269" r:id="rId7"/>
-    <p:sldId id="270" r:id="rId8"/>
-    <p:sldId id="271" r:id="rId9"/>
-    <p:sldId id="272" r:id="rId10"/>
-    <p:sldId id="273" r:id="rId11"/>
-    <p:sldId id="274" r:id="rId12"/>
-    <p:sldId id="300" r:id="rId13"/>
-    <p:sldId id="275" r:id="rId14"/>
-    <p:sldId id="276" r:id="rId15"/>
-    <p:sldId id="277" r:id="rId16"/>
-    <p:sldId id="290" r:id="rId17"/>
-    <p:sldId id="278" r:id="rId18"/>
-    <p:sldId id="279" r:id="rId19"/>
-    <p:sldId id="280" r:id="rId20"/>
-    <p:sldId id="281" r:id="rId21"/>
-    <p:sldId id="282" r:id="rId22"/>
-    <p:sldId id="283" r:id="rId23"/>
+    <p:sldId id="266" r:id="rId3"/>
+    <p:sldId id="299" r:id="rId4"/>
+    <p:sldId id="268" r:id="rId5"/>
+    <p:sldId id="269" r:id="rId6"/>
+    <p:sldId id="270" r:id="rId7"/>
+    <p:sldId id="271" r:id="rId8"/>
+    <p:sldId id="272" r:id="rId9"/>
+    <p:sldId id="273" r:id="rId10"/>
+    <p:sldId id="274" r:id="rId11"/>
+    <p:sldId id="300" r:id="rId12"/>
+    <p:sldId id="275" r:id="rId13"/>
+    <p:sldId id="276" r:id="rId14"/>
+    <p:sldId id="277" r:id="rId15"/>
+    <p:sldId id="290" r:id="rId16"/>
+    <p:sldId id="278" r:id="rId17"/>
+    <p:sldId id="279" r:id="rId18"/>
+    <p:sldId id="280" r:id="rId19"/>
+    <p:sldId id="281" r:id="rId20"/>
+    <p:sldId id="282" r:id="rId21"/>
+    <p:sldId id="283" r:id="rId22"/>
   </p:sldIdLst>
   <p:sldSz cx="12192000" cy="6858000"/>
   <p:notesSz cx="6858000" cy="9144000"/>
@@ -500,7 +499,7 @@
           <a:p>
             <a:fld id="{506E0FD1-891F-4B1E-916D-E9B585160BB8}" type="datetimeFigureOut">
               <a:rPr lang="en-GB" smtClean="0"/>
-              <a:t>11/03/2026</a:t>
+              <a:t>17/04/2026</a:t>
             </a:fld>
             <a:endParaRPr lang="en-GB"/>
           </a:p>
@@ -917,7 +916,7 @@
           <a:p>
             <a:fld id="{D68C3F22-27B2-44E3-9C5F-D08126455F6F}" type="datetime1">
               <a:rPr lang="en-GB" smtClean="0"/>
-              <a:t>11/03/2026</a:t>
+              <a:t>17/04/2026</a:t>
             </a:fld>
             <a:endParaRPr lang="en-GB"/>
           </a:p>
@@ -1117,7 +1116,7 @@
           <a:p>
             <a:fld id="{1CD03846-7BF6-4FB6-A921-FF3379ADBD4C}" type="datetime1">
               <a:rPr lang="en-GB" smtClean="0"/>
-              <a:t>11/03/2026</a:t>
+              <a:t>17/04/2026</a:t>
             </a:fld>
             <a:endParaRPr lang="en-GB"/>
           </a:p>
@@ -1327,7 +1326,7 @@
           <a:p>
             <a:fld id="{99E1B91A-3FD0-4144-9C84-63E9688ED2FE}" type="datetime1">
               <a:rPr lang="en-GB" smtClean="0"/>
-              <a:t>11/03/2026</a:t>
+              <a:t>17/04/2026</a:t>
             </a:fld>
             <a:endParaRPr lang="en-GB"/>
           </a:p>
@@ -1527,7 +1526,7 @@
           <a:p>
             <a:fld id="{5295ED7B-FEAD-4734-819F-93EF4B0EA908}" type="datetime1">
               <a:rPr lang="en-GB" smtClean="0"/>
-              <a:t>11/03/2026</a:t>
+              <a:t>17/04/2026</a:t>
             </a:fld>
             <a:endParaRPr lang="en-GB"/>
           </a:p>
@@ -1803,7 +1802,7 @@
           <a:p>
             <a:fld id="{D2D5D4B4-C926-4B45-8815-1ED8911179A2}" type="datetime1">
               <a:rPr lang="en-GB" smtClean="0"/>
-              <a:t>11/03/2026</a:t>
+              <a:t>17/04/2026</a:t>
             </a:fld>
             <a:endParaRPr lang="en-GB"/>
           </a:p>
@@ -2071,7 +2070,7 @@
           <a:p>
             <a:fld id="{B4C5210A-0E37-4935-93AF-69F21A5F712F}" type="datetime1">
               <a:rPr lang="en-GB" smtClean="0"/>
-              <a:t>11/03/2026</a:t>
+              <a:t>17/04/2026</a:t>
             </a:fld>
             <a:endParaRPr lang="en-GB"/>
           </a:p>
@@ -2486,7 +2485,7 @@
           <a:p>
             <a:fld id="{3D3A6B2F-436C-4691-80E8-9C890E000E9D}" type="datetime1">
               <a:rPr lang="en-GB" smtClean="0"/>
-              <a:t>11/03/2026</a:t>
+              <a:t>17/04/2026</a:t>
             </a:fld>
             <a:endParaRPr lang="en-GB"/>
           </a:p>
@@ -2628,7 +2627,7 @@
           <a:p>
             <a:fld id="{84385F4C-D74B-496F-8D21-97E3549C783B}" type="datetime1">
               <a:rPr lang="en-GB" smtClean="0"/>
-              <a:t>11/03/2026</a:t>
+              <a:t>17/04/2026</a:t>
             </a:fld>
             <a:endParaRPr lang="en-GB"/>
           </a:p>
@@ -2741,7 +2740,7 @@
           <a:p>
             <a:fld id="{0CBDCB32-C241-4703-A832-4EB47BD54E83}" type="datetime1">
               <a:rPr lang="en-GB" smtClean="0"/>
-              <a:t>11/03/2026</a:t>
+              <a:t>17/04/2026</a:t>
             </a:fld>
             <a:endParaRPr lang="en-GB"/>
           </a:p>
@@ -3054,7 +3053,7 @@
           <a:p>
             <a:fld id="{85C150FF-BE95-4D25-A16A-E368A81CBF24}" type="datetime1">
               <a:rPr lang="en-GB" smtClean="0"/>
-              <a:t>11/03/2026</a:t>
+              <a:t>17/04/2026</a:t>
             </a:fld>
             <a:endParaRPr lang="en-GB"/>
           </a:p>
@@ -3343,7 +3342,7 @@
           <a:p>
             <a:fld id="{F3C5DB4B-B349-43C9-A424-BADA723AD9F1}" type="datetime1">
               <a:rPr lang="en-GB" smtClean="0"/>
-              <a:t>11/03/2026</a:t>
+              <a:t>17/04/2026</a:t>
             </a:fld>
             <a:endParaRPr lang="en-GB"/>
           </a:p>
@@ -3586,7 +3585,7 @@
           <a:p>
             <a:fld id="{12632426-0A0C-405F-A3D0-2D11AA44702A}" type="datetime1">
               <a:rPr lang="en-GB" smtClean="0"/>
-              <a:t>11/03/2026</a:t>
+              <a:t>17/04/2026</a:t>
             </a:fld>
             <a:endParaRPr lang="en-GB"/>
           </a:p>
@@ -4095,7 +4094,7 @@
           <p:cNvPr id="2" name="Titel 1">
             <a:extLst>
               <a:ext uri="{FF2B5EF4-FFF2-40B4-BE49-F238E27FC236}">
-                <a16:creationId xmlns:a16="http://schemas.microsoft.com/office/drawing/2014/main" id="{F7D48AAE-28AC-8C0A-807E-EECDA41513C2}"/>
+                <a16:creationId xmlns:a16="http://schemas.microsoft.com/office/drawing/2014/main" id="{63B14969-5D2F-0A75-063E-EC6133ED9549}"/>
               </a:ext>
             </a:extLst>
           </p:cNvPr>
@@ -4113,15 +4112,7 @@
           <a:p>
             <a:r>
               <a:rPr lang="de-DE" dirty="0"/>
-              <a:t>Mean </a:t>
-            </a:r>
-            <a:r>
-              <a:rPr lang="de-DE" dirty="0" err="1"/>
-              <a:t>Squared</a:t>
-            </a:r>
-            <a:r>
-              <a:rPr lang="de-DE" dirty="0"/>
-              <a:t> Error (MSE)</a:t>
+              <a:t>Mean Absolute Error (MAE)</a:t>
             </a:r>
           </a:p>
         </p:txBody>
@@ -4131,7 +4122,7 @@
           <p:cNvPr id="3" name="Inhaltsplatzhalter 2">
             <a:extLst>
               <a:ext uri="{FF2B5EF4-FFF2-40B4-BE49-F238E27FC236}">
-                <a16:creationId xmlns:a16="http://schemas.microsoft.com/office/drawing/2014/main" id="{591121AB-A03C-208B-AADC-CE8997A83DD7}"/>
+                <a16:creationId xmlns:a16="http://schemas.microsoft.com/office/drawing/2014/main" id="{A0427EC5-B335-3C38-197A-EC3CE02AC2F2}"/>
               </a:ext>
             </a:extLst>
           </p:cNvPr>
@@ -4156,7 +4147,7 @@
           <p:cNvPr id="4" name="Foliennummernplatzhalter 3">
             <a:extLst>
               <a:ext uri="{FF2B5EF4-FFF2-40B4-BE49-F238E27FC236}">
-                <a16:creationId xmlns:a16="http://schemas.microsoft.com/office/drawing/2014/main" id="{B782E0FE-E0D6-E071-273A-26AAA32FE885}"/>
+                <a16:creationId xmlns:a16="http://schemas.microsoft.com/office/drawing/2014/main" id="{62032D6F-8295-C9EE-5CC7-B13B73728C54}"/>
               </a:ext>
             </a:extLst>
           </p:cNvPr>
@@ -4183,7 +4174,7 @@
     </p:spTree>
     <p:extLst>
       <p:ext uri="{BB962C8B-B14F-4D97-AF65-F5344CB8AC3E}">
-        <p14:creationId xmlns:p14="http://schemas.microsoft.com/office/powerpoint/2010/main" val="23702569"/>
+        <p14:creationId xmlns:p14="http://schemas.microsoft.com/office/powerpoint/2010/main" val="1654110841"/>
       </p:ext>
     </p:extLst>
   </p:cSld>
@@ -4215,7 +4206,7 @@
           <p:cNvPr id="2" name="Titel 1">
             <a:extLst>
               <a:ext uri="{FF2B5EF4-FFF2-40B4-BE49-F238E27FC236}">
-                <a16:creationId xmlns:a16="http://schemas.microsoft.com/office/drawing/2014/main" id="{63B14969-5D2F-0A75-063E-EC6133ED9549}"/>
+                <a16:creationId xmlns:a16="http://schemas.microsoft.com/office/drawing/2014/main" id="{C70FE7FD-E55A-75A1-2BCC-34FEE8D88300}"/>
               </a:ext>
             </a:extLst>
           </p:cNvPr>
@@ -4231,10 +4222,7 @@
           <a:bodyPr/>
           <a:lstStyle/>
           <a:p>
-            <a:r>
-              <a:rPr lang="de-DE" dirty="0"/>
-              <a:t>Mean Absolute Error (MAE)</a:t>
-            </a:r>
+            <a:endParaRPr lang="de-DE"/>
           </a:p>
         </p:txBody>
       </p:sp>
@@ -4243,7 +4231,7 @@
           <p:cNvPr id="3" name="Inhaltsplatzhalter 2">
             <a:extLst>
               <a:ext uri="{FF2B5EF4-FFF2-40B4-BE49-F238E27FC236}">
-                <a16:creationId xmlns:a16="http://schemas.microsoft.com/office/drawing/2014/main" id="{A0427EC5-B335-3C38-197A-EC3CE02AC2F2}"/>
+                <a16:creationId xmlns:a16="http://schemas.microsoft.com/office/drawing/2014/main" id="{EFF99967-6236-3DFB-504F-D1CEAF7D6BCA}"/>
               </a:ext>
             </a:extLst>
           </p:cNvPr>
@@ -4268,7 +4256,7 @@
           <p:cNvPr id="4" name="Foliennummernplatzhalter 3">
             <a:extLst>
               <a:ext uri="{FF2B5EF4-FFF2-40B4-BE49-F238E27FC236}">
-                <a16:creationId xmlns:a16="http://schemas.microsoft.com/office/drawing/2014/main" id="{62032D6F-8295-C9EE-5CC7-B13B73728C54}"/>
+                <a16:creationId xmlns:a16="http://schemas.microsoft.com/office/drawing/2014/main" id="{BA1DC205-AE15-F214-3B3C-956A09269819}"/>
               </a:ext>
             </a:extLst>
           </p:cNvPr>
@@ -4295,7 +4283,7 @@
     </p:spTree>
     <p:extLst>
       <p:ext uri="{BB962C8B-B14F-4D97-AF65-F5344CB8AC3E}">
-        <p14:creationId xmlns:p14="http://schemas.microsoft.com/office/powerpoint/2010/main" val="1654110841"/>
+        <p14:creationId xmlns:p14="http://schemas.microsoft.com/office/powerpoint/2010/main" val="2263489863"/>
       </p:ext>
     </p:extLst>
   </p:cSld>
@@ -4327,7 +4315,7 @@
           <p:cNvPr id="2" name="Titel 1">
             <a:extLst>
               <a:ext uri="{FF2B5EF4-FFF2-40B4-BE49-F238E27FC236}">
-                <a16:creationId xmlns:a16="http://schemas.microsoft.com/office/drawing/2014/main" id="{C70FE7FD-E55A-75A1-2BCC-34FEE8D88300}"/>
+                <a16:creationId xmlns:a16="http://schemas.microsoft.com/office/drawing/2014/main" id="{152AC68C-8E51-D16D-9BB6-357B2A674BDF}"/>
               </a:ext>
             </a:extLst>
           </p:cNvPr>
@@ -4343,7 +4331,15 @@
           <a:bodyPr/>
           <a:lstStyle/>
           <a:p>
-            <a:endParaRPr lang="de-DE"/>
+            <a:r>
+              <a:rPr lang="de-DE" dirty="0"/>
+              <a:t>Cross-Validation </a:t>
+            </a:r>
+            <a:r>
+              <a:rPr lang="de-DE" dirty="0" err="1"/>
+              <a:t>Strategies</a:t>
+            </a:r>
+            <a:endParaRPr lang="de-DE" dirty="0"/>
           </a:p>
         </p:txBody>
       </p:sp>
@@ -4352,7 +4348,7 @@
           <p:cNvPr id="3" name="Inhaltsplatzhalter 2">
             <a:extLst>
               <a:ext uri="{FF2B5EF4-FFF2-40B4-BE49-F238E27FC236}">
-                <a16:creationId xmlns:a16="http://schemas.microsoft.com/office/drawing/2014/main" id="{EFF99967-6236-3DFB-504F-D1CEAF7D6BCA}"/>
+                <a16:creationId xmlns:a16="http://schemas.microsoft.com/office/drawing/2014/main" id="{749BBA53-25CB-44B1-3477-C0C8FFB229E0}"/>
               </a:ext>
             </a:extLst>
           </p:cNvPr>
@@ -4368,7 +4364,10 @@
           <a:bodyPr/>
           <a:lstStyle/>
           <a:p>
-            <a:endParaRPr lang="de-DE"/>
+            <a:r>
+              <a:rPr lang="de-DE" dirty="0"/>
+              <a:t>…</a:t>
+            </a:r>
           </a:p>
         </p:txBody>
       </p:sp>
@@ -4377,7 +4376,7 @@
           <p:cNvPr id="4" name="Foliennummernplatzhalter 3">
             <a:extLst>
               <a:ext uri="{FF2B5EF4-FFF2-40B4-BE49-F238E27FC236}">
-                <a16:creationId xmlns:a16="http://schemas.microsoft.com/office/drawing/2014/main" id="{BA1DC205-AE15-F214-3B3C-956A09269819}"/>
+                <a16:creationId xmlns:a16="http://schemas.microsoft.com/office/drawing/2014/main" id="{B3242BE3-F324-23F7-81F5-17D5548B8C41}"/>
               </a:ext>
             </a:extLst>
           </p:cNvPr>
@@ -4404,7 +4403,7 @@
     </p:spTree>
     <p:extLst>
       <p:ext uri="{BB962C8B-B14F-4D97-AF65-F5344CB8AC3E}">
-        <p14:creationId xmlns:p14="http://schemas.microsoft.com/office/powerpoint/2010/main" val="2263489863"/>
+        <p14:creationId xmlns:p14="http://schemas.microsoft.com/office/powerpoint/2010/main" val="2900337028"/>
       </p:ext>
     </p:extLst>
   </p:cSld>
@@ -4436,7 +4435,7 @@
           <p:cNvPr id="2" name="Titel 1">
             <a:extLst>
               <a:ext uri="{FF2B5EF4-FFF2-40B4-BE49-F238E27FC236}">
-                <a16:creationId xmlns:a16="http://schemas.microsoft.com/office/drawing/2014/main" id="{152AC68C-8E51-D16D-9BB6-357B2A674BDF}"/>
+                <a16:creationId xmlns:a16="http://schemas.microsoft.com/office/drawing/2014/main" id="{77FFF5D6-0FCB-1A64-D8A4-EF19A04AFB1B}"/>
               </a:ext>
             </a:extLst>
           </p:cNvPr>
@@ -4453,14 +4452,13 @@
           <a:lstStyle/>
           <a:p>
             <a:r>
+              <a:rPr lang="de-DE" dirty="0" err="1"/>
+              <a:t>k-Fold</a:t>
+            </a:r>
+            <a:r>
               <a:rPr lang="de-DE" dirty="0"/>
-              <a:t>Cross-Validation </a:t>
-            </a:r>
-            <a:r>
-              <a:rPr lang="de-DE" dirty="0" err="1"/>
-              <a:t>Strategies</a:t>
-            </a:r>
-            <a:endParaRPr lang="de-DE" dirty="0"/>
+              <a:t> Cross-Validation</a:t>
+            </a:r>
           </a:p>
         </p:txBody>
       </p:sp>
@@ -4469,7 +4467,7 @@
           <p:cNvPr id="3" name="Inhaltsplatzhalter 2">
             <a:extLst>
               <a:ext uri="{FF2B5EF4-FFF2-40B4-BE49-F238E27FC236}">
-                <a16:creationId xmlns:a16="http://schemas.microsoft.com/office/drawing/2014/main" id="{749BBA53-25CB-44B1-3477-C0C8FFB229E0}"/>
+                <a16:creationId xmlns:a16="http://schemas.microsoft.com/office/drawing/2014/main" id="{592C0B87-A83F-A198-A1CB-7CCC171420D3}"/>
               </a:ext>
             </a:extLst>
           </p:cNvPr>
@@ -4497,7 +4495,7 @@
           <p:cNvPr id="4" name="Foliennummernplatzhalter 3">
             <a:extLst>
               <a:ext uri="{FF2B5EF4-FFF2-40B4-BE49-F238E27FC236}">
-                <a16:creationId xmlns:a16="http://schemas.microsoft.com/office/drawing/2014/main" id="{B3242BE3-F324-23F7-81F5-17D5548B8C41}"/>
+                <a16:creationId xmlns:a16="http://schemas.microsoft.com/office/drawing/2014/main" id="{04F83C66-D41C-833C-B12E-291DA9CF43B4}"/>
               </a:ext>
             </a:extLst>
           </p:cNvPr>
@@ -4516,125 +4514,6 @@
             <a:fld id="{08C366F5-AFAD-49CB-854A-9D9E238FCA13}" type="slidenum">
               <a:rPr lang="en-GB" smtClean="0"/>
               <a:t>13</a:t>
-            </a:fld>
-            <a:endParaRPr lang="en-GB"/>
-          </a:p>
-        </p:txBody>
-      </p:sp>
-    </p:spTree>
-    <p:extLst>
-      <p:ext uri="{BB962C8B-B14F-4D97-AF65-F5344CB8AC3E}">
-        <p14:creationId xmlns:p14="http://schemas.microsoft.com/office/powerpoint/2010/main" val="2900337028"/>
-      </p:ext>
-    </p:extLst>
-  </p:cSld>
-  <p:clrMapOvr>
-    <a:masterClrMapping/>
-  </p:clrMapOvr>
-</p:sld>
-</file>
-
-<file path=ppt/slides/slide14.xml><?xml version="1.0" encoding="utf-8"?>
-<p:sld xmlns:a="http://schemas.openxmlformats.org/drawingml/2006/main" xmlns:r="http://schemas.openxmlformats.org/officeDocument/2006/relationships" xmlns:p="http://schemas.openxmlformats.org/presentationml/2006/main">
-  <p:cSld>
-    <p:spTree>
-      <p:nvGrpSpPr>
-        <p:cNvPr id="1" name=""/>
-        <p:cNvGrpSpPr/>
-        <p:nvPr/>
-      </p:nvGrpSpPr>
-      <p:grpSpPr>
-        <a:xfrm>
-          <a:off x="0" y="0"/>
-          <a:ext cx="0" cy="0"/>
-          <a:chOff x="0" y="0"/>
-          <a:chExt cx="0" cy="0"/>
-        </a:xfrm>
-      </p:grpSpPr>
-      <p:sp>
-        <p:nvSpPr>
-          <p:cNvPr id="2" name="Titel 1">
-            <a:extLst>
-              <a:ext uri="{FF2B5EF4-FFF2-40B4-BE49-F238E27FC236}">
-                <a16:creationId xmlns:a16="http://schemas.microsoft.com/office/drawing/2014/main" id="{77FFF5D6-0FCB-1A64-D8A4-EF19A04AFB1B}"/>
-              </a:ext>
-            </a:extLst>
-          </p:cNvPr>
-          <p:cNvSpPr>
-            <a:spLocks noGrp="1"/>
-          </p:cNvSpPr>
-          <p:nvPr>
-            <p:ph type="title"/>
-          </p:nvPr>
-        </p:nvSpPr>
-        <p:spPr/>
-        <p:txBody>
-          <a:bodyPr/>
-          <a:lstStyle/>
-          <a:p>
-            <a:r>
-              <a:rPr lang="de-DE" dirty="0" err="1"/>
-              <a:t>k-Fold</a:t>
-            </a:r>
-            <a:r>
-              <a:rPr lang="de-DE" dirty="0"/>
-              <a:t> Cross-Validation</a:t>
-            </a:r>
-          </a:p>
-        </p:txBody>
-      </p:sp>
-      <p:sp>
-        <p:nvSpPr>
-          <p:cNvPr id="3" name="Inhaltsplatzhalter 2">
-            <a:extLst>
-              <a:ext uri="{FF2B5EF4-FFF2-40B4-BE49-F238E27FC236}">
-                <a16:creationId xmlns:a16="http://schemas.microsoft.com/office/drawing/2014/main" id="{592C0B87-A83F-A198-A1CB-7CCC171420D3}"/>
-              </a:ext>
-            </a:extLst>
-          </p:cNvPr>
-          <p:cNvSpPr>
-            <a:spLocks noGrp="1"/>
-          </p:cNvSpPr>
-          <p:nvPr>
-            <p:ph idx="1"/>
-          </p:nvPr>
-        </p:nvSpPr>
-        <p:spPr/>
-        <p:txBody>
-          <a:bodyPr/>
-          <a:lstStyle/>
-          <a:p>
-            <a:r>
-              <a:rPr lang="de-DE" dirty="0"/>
-              <a:t>…</a:t>
-            </a:r>
-          </a:p>
-        </p:txBody>
-      </p:sp>
-      <p:sp>
-        <p:nvSpPr>
-          <p:cNvPr id="4" name="Foliennummernplatzhalter 3">
-            <a:extLst>
-              <a:ext uri="{FF2B5EF4-FFF2-40B4-BE49-F238E27FC236}">
-                <a16:creationId xmlns:a16="http://schemas.microsoft.com/office/drawing/2014/main" id="{04F83C66-D41C-833C-B12E-291DA9CF43B4}"/>
-              </a:ext>
-            </a:extLst>
-          </p:cNvPr>
-          <p:cNvSpPr>
-            <a:spLocks noGrp="1"/>
-          </p:cNvSpPr>
-          <p:nvPr>
-            <p:ph type="sldNum" sz="quarter" idx="12"/>
-          </p:nvPr>
-        </p:nvSpPr>
-        <p:spPr/>
-        <p:txBody>
-          <a:bodyPr/>
-          <a:lstStyle/>
-          <a:p>
-            <a:fld id="{08C366F5-AFAD-49CB-854A-9D9E238FCA13}" type="slidenum">
-              <a:rPr lang="en-GB" smtClean="0"/>
-              <a:t>14</a:t>
             </a:fld>
             <a:endParaRPr lang="en-GB"/>
           </a:p>
@@ -4689,6 +4568,122 @@
 </p:sld>
 </file>
 
+<file path=ppt/slides/slide14.xml><?xml version="1.0" encoding="utf-8"?>
+<p:sld xmlns:a="http://schemas.openxmlformats.org/drawingml/2006/main" xmlns:r="http://schemas.openxmlformats.org/officeDocument/2006/relationships" xmlns:p="http://schemas.openxmlformats.org/presentationml/2006/main">
+  <p:cSld>
+    <p:spTree>
+      <p:nvGrpSpPr>
+        <p:cNvPr id="1" name=""/>
+        <p:cNvGrpSpPr/>
+        <p:nvPr/>
+      </p:nvGrpSpPr>
+      <p:grpSpPr>
+        <a:xfrm>
+          <a:off x="0" y="0"/>
+          <a:ext cx="0" cy="0"/>
+          <a:chOff x="0" y="0"/>
+          <a:chExt cx="0" cy="0"/>
+        </a:xfrm>
+      </p:grpSpPr>
+      <p:sp>
+        <p:nvSpPr>
+          <p:cNvPr id="2" name="Titel 1">
+            <a:extLst>
+              <a:ext uri="{FF2B5EF4-FFF2-40B4-BE49-F238E27FC236}">
+                <a16:creationId xmlns:a16="http://schemas.microsoft.com/office/drawing/2014/main" id="{321539D0-D7CA-A083-0E99-6E50927AB917}"/>
+              </a:ext>
+            </a:extLst>
+          </p:cNvPr>
+          <p:cNvSpPr>
+            <a:spLocks noGrp="1"/>
+          </p:cNvSpPr>
+          <p:nvPr>
+            <p:ph type="title"/>
+          </p:nvPr>
+        </p:nvSpPr>
+        <p:spPr/>
+        <p:txBody>
+          <a:bodyPr/>
+          <a:lstStyle/>
+          <a:p>
+            <a:r>
+              <a:rPr lang="de-DE" dirty="0" err="1"/>
+              <a:t>Nested</a:t>
+            </a:r>
+            <a:r>
+              <a:rPr lang="de-DE" dirty="0"/>
+              <a:t> Cross-Validation</a:t>
+            </a:r>
+          </a:p>
+        </p:txBody>
+      </p:sp>
+      <p:sp>
+        <p:nvSpPr>
+          <p:cNvPr id="3" name="Inhaltsplatzhalter 2">
+            <a:extLst>
+              <a:ext uri="{FF2B5EF4-FFF2-40B4-BE49-F238E27FC236}">
+                <a16:creationId xmlns:a16="http://schemas.microsoft.com/office/drawing/2014/main" id="{EBB5F476-08D3-EA5A-3327-C6FA9616EC18}"/>
+              </a:ext>
+            </a:extLst>
+          </p:cNvPr>
+          <p:cNvSpPr>
+            <a:spLocks noGrp="1"/>
+          </p:cNvSpPr>
+          <p:nvPr>
+            <p:ph idx="1"/>
+          </p:nvPr>
+        </p:nvSpPr>
+        <p:spPr/>
+        <p:txBody>
+          <a:bodyPr/>
+          <a:lstStyle/>
+          <a:p>
+            <a:endParaRPr lang="de-DE"/>
+          </a:p>
+        </p:txBody>
+      </p:sp>
+      <p:sp>
+        <p:nvSpPr>
+          <p:cNvPr id="4" name="Foliennummernplatzhalter 3">
+            <a:extLst>
+              <a:ext uri="{FF2B5EF4-FFF2-40B4-BE49-F238E27FC236}">
+                <a16:creationId xmlns:a16="http://schemas.microsoft.com/office/drawing/2014/main" id="{B83C44E1-9BD4-3F4F-BD01-67AB09FD4EC7}"/>
+              </a:ext>
+            </a:extLst>
+          </p:cNvPr>
+          <p:cNvSpPr>
+            <a:spLocks noGrp="1"/>
+          </p:cNvSpPr>
+          <p:nvPr>
+            <p:ph type="sldNum" sz="quarter" idx="12"/>
+          </p:nvPr>
+        </p:nvSpPr>
+        <p:spPr/>
+        <p:txBody>
+          <a:bodyPr/>
+          <a:lstStyle/>
+          <a:p>
+            <a:fld id="{08C366F5-AFAD-49CB-854A-9D9E238FCA13}" type="slidenum">
+              <a:rPr lang="en-GB" smtClean="0"/>
+              <a:t>14</a:t>
+            </a:fld>
+            <a:endParaRPr lang="en-GB"/>
+          </a:p>
+        </p:txBody>
+      </p:sp>
+    </p:spTree>
+    <p:extLst>
+      <p:ext uri="{BB962C8B-B14F-4D97-AF65-F5344CB8AC3E}">
+        <p14:creationId xmlns:p14="http://schemas.microsoft.com/office/powerpoint/2010/main" val="725974763"/>
+      </p:ext>
+    </p:extLst>
+  </p:cSld>
+  <p:clrMapOvr>
+    <a:masterClrMapping/>
+  </p:clrMapOvr>
+</p:sld>
+</file>
+
 <file path=ppt/slides/slide15.xml><?xml version="1.0" encoding="utf-8"?>
 <p:sld xmlns:a="http://schemas.openxmlformats.org/drawingml/2006/main" xmlns:r="http://schemas.openxmlformats.org/officeDocument/2006/relationships" xmlns:p="http://schemas.openxmlformats.org/presentationml/2006/main">
   <p:cSld>
@@ -4708,10 +4703,10 @@
       </p:grpSpPr>
       <p:sp>
         <p:nvSpPr>
-          <p:cNvPr id="2" name="Titel 1">
-            <a:extLst>
-              <a:ext uri="{FF2B5EF4-FFF2-40B4-BE49-F238E27FC236}">
-                <a16:creationId xmlns:a16="http://schemas.microsoft.com/office/drawing/2014/main" id="{321539D0-D7CA-A083-0E99-6E50927AB917}"/>
+          <p:cNvPr id="2" name="Title 1">
+            <a:extLst>
+              <a:ext uri="{FF2B5EF4-FFF2-40B4-BE49-F238E27FC236}">
+                <a16:creationId xmlns:a16="http://schemas.microsoft.com/office/drawing/2014/main" id="{21415F10-CF24-B798-1344-DCF9E363C05D}"/>
               </a:ext>
             </a:extLst>
           </p:cNvPr>
@@ -4728,22 +4723,18 @@
           <a:lstStyle/>
           <a:p>
             <a:r>
-              <a:rPr lang="de-DE" dirty="0" err="1"/>
-              <a:t>Nested</a:t>
-            </a:r>
-            <a:r>
-              <a:rPr lang="de-DE" dirty="0"/>
-              <a:t> Cross-Validation</a:t>
-            </a:r>
-          </a:p>
-        </p:txBody>
-      </p:sp>
-      <p:sp>
-        <p:nvSpPr>
-          <p:cNvPr id="3" name="Inhaltsplatzhalter 2">
-            <a:extLst>
-              <a:ext uri="{FF2B5EF4-FFF2-40B4-BE49-F238E27FC236}">
-                <a16:creationId xmlns:a16="http://schemas.microsoft.com/office/drawing/2014/main" id="{EBB5F476-08D3-EA5A-3327-C6FA9616EC18}"/>
+              <a:rPr lang="en-DE" dirty="0"/>
+              <a:t>Black-Box Models</a:t>
+            </a:r>
+          </a:p>
+        </p:txBody>
+      </p:sp>
+      <p:sp>
+        <p:nvSpPr>
+          <p:cNvPr id="3" name="Content Placeholder 2">
+            <a:extLst>
+              <a:ext uri="{FF2B5EF4-FFF2-40B4-BE49-F238E27FC236}">
+                <a16:creationId xmlns:a16="http://schemas.microsoft.com/office/drawing/2014/main" id="{455FDA38-027C-BDF2-FF70-B542E9092FBE}"/>
               </a:ext>
             </a:extLst>
           </p:cNvPr>
@@ -4756,19 +4747,127 @@
         </p:nvSpPr>
         <p:spPr/>
         <p:txBody>
-          <a:bodyPr/>
-          <a:lstStyle/>
-          <a:p>
-            <a:endParaRPr lang="de-DE"/>
-          </a:p>
-        </p:txBody>
-      </p:sp>
-      <p:sp>
-        <p:nvSpPr>
-          <p:cNvPr id="4" name="Foliennummernplatzhalter 3">
-            <a:extLst>
-              <a:ext uri="{FF2B5EF4-FFF2-40B4-BE49-F238E27FC236}">
-                <a16:creationId xmlns:a16="http://schemas.microsoft.com/office/drawing/2014/main" id="{B83C44E1-9BD4-3F4F-BD01-67AB09FD4EC7}"/>
+          <a:bodyPr>
+            <a:normAutofit/>
+          </a:bodyPr>
+          <a:lstStyle/>
+          <a:p>
+            <a:pPr marL="0" indent="0">
+              <a:buNone/>
+            </a:pPr>
+            <a:r>
+              <a:rPr lang="en-GB" dirty="0"/>
+              <a:t>T</a:t>
+            </a:r>
+            <a:r>
+              <a:rPr lang="en-DE" dirty="0"/>
+              <a:t>o build trust in AI systems, individual predictions/actions need to be fully transparent, i.e., explainable.</a:t>
+            </a:r>
+            <a:endParaRPr lang="en-GB" dirty="0"/>
+          </a:p>
+          <a:p>
+            <a:pPr marL="0" indent="0">
+              <a:buNone/>
+            </a:pPr>
+            <a:r>
+              <a:rPr lang="en-GB" sz="2800" dirty="0"/>
+              <a:t>(do not confuse </a:t>
+            </a:r>
+            <a:r>
+              <a:rPr lang="en-GB" sz="2800" dirty="0" err="1"/>
+              <a:t>explainability</a:t>
+            </a:r>
+            <a:r>
+              <a:rPr lang="en-GB" sz="2800" dirty="0"/>
+              <a:t> with causality though)</a:t>
+            </a:r>
+            <a:endParaRPr lang="en-DE" dirty="0"/>
+          </a:p>
+          <a:p>
+            <a:pPr marL="0" indent="0">
+              <a:buNone/>
+            </a:pPr>
+            <a:endParaRPr lang="en-DE" dirty="0"/>
+          </a:p>
+          <a:p>
+            <a:pPr marL="0" indent="0">
+              <a:buNone/>
+            </a:pPr>
+            <a:r>
+              <a:rPr lang="en-DE" dirty="0"/>
+              <a:t>Unfortunately, complex models like deep learning methods are difficult to interpret.</a:t>
+            </a:r>
+          </a:p>
+          <a:p>
+            <a:pPr marL="0" indent="0">
+              <a:buNone/>
+            </a:pPr>
+            <a:r>
+              <a:rPr lang="en-GB" dirty="0">
+                <a:sym typeface="Wingdings" pitchFamily="2" charset="2"/>
+              </a:rPr>
+              <a:t> n</a:t>
+            </a:r>
+            <a:r>
+              <a:rPr lang="en-DE" dirty="0">
+                <a:sym typeface="Wingdings" pitchFamily="2" charset="2"/>
+              </a:rPr>
+              <a:t>eed for model-agnostic methods to explain black-box models</a:t>
+            </a:r>
+          </a:p>
+          <a:p>
+            <a:pPr marL="0" indent="0">
+              <a:buNone/>
+            </a:pPr>
+            <a:r>
+              <a:rPr lang="en-GB" dirty="0"/>
+              <a:t>e</a:t>
+            </a:r>
+            <a:r>
+              <a:rPr lang="en-DE" dirty="0"/>
+              <a:t>xamples: local surrogates (</a:t>
+            </a:r>
+            <a:r>
+              <a:rPr lang="en-GB" dirty="0">
+                <a:hlinkClick r:id="rId2"/>
+              </a:rPr>
+              <a:t>LIME</a:t>
+            </a:r>
+            <a:r>
+              <a:rPr lang="en-DE" dirty="0"/>
+              <a:t>), Shapley values (</a:t>
+            </a:r>
+            <a:r>
+              <a:rPr lang="en-DE" dirty="0">
+                <a:hlinkClick r:id="rId3"/>
+              </a:rPr>
+              <a:t>SHAP</a:t>
+            </a:r>
+            <a:r>
+              <a:rPr lang="en-DE" dirty="0"/>
+              <a:t>)</a:t>
+            </a:r>
+          </a:p>
+          <a:p>
+            <a:pPr marL="0" indent="0">
+              <a:buNone/>
+            </a:pPr>
+            <a:r>
+              <a:rPr lang="en-DE" dirty="0">
+                <a:hlinkClick r:id="rId4"/>
+              </a:rPr>
+              <a:t>overview</a:t>
+            </a:r>
+            <a:endParaRPr lang="en-DE" dirty="0"/>
+          </a:p>
+        </p:txBody>
+      </p:sp>
+      <p:sp>
+        <p:nvSpPr>
+          <p:cNvPr id="4" name="Slide Number Placeholder 3">
+            <a:extLst>
+              <a:ext uri="{FF2B5EF4-FFF2-40B4-BE49-F238E27FC236}">
+                <a16:creationId xmlns:a16="http://schemas.microsoft.com/office/drawing/2014/main" id="{E55D36A3-331F-0FB9-177B-14774E79DFD4}"/>
               </a:ext>
             </a:extLst>
           </p:cNvPr>
@@ -4784,18 +4883,18 @@
           <a:bodyPr/>
           <a:lstStyle/>
           <a:p>
-            <a:fld id="{08C366F5-AFAD-49CB-854A-9D9E238FCA13}" type="slidenum">
-              <a:rPr lang="en-GB" smtClean="0"/>
+            <a:fld id="{290AF890-0265-4349-BF13-E30F01A2AA85}" type="slidenum">
+              <a:rPr lang="en-DE" smtClean="0"/>
               <a:t>15</a:t>
             </a:fld>
-            <a:endParaRPr lang="en-GB"/>
+            <a:endParaRPr lang="en-DE"/>
           </a:p>
         </p:txBody>
       </p:sp>
     </p:spTree>
     <p:extLst>
       <p:ext uri="{BB962C8B-B14F-4D97-AF65-F5344CB8AC3E}">
-        <p14:creationId xmlns:p14="http://schemas.microsoft.com/office/powerpoint/2010/main" val="725974763"/>
+        <p14:creationId xmlns:p14="http://schemas.microsoft.com/office/powerpoint/2010/main" val="205709024"/>
       </p:ext>
     </p:extLst>
   </p:cSld>
@@ -4824,10 +4923,10 @@
       </p:grpSpPr>
       <p:sp>
         <p:nvSpPr>
-          <p:cNvPr id="2" name="Title 1">
-            <a:extLst>
-              <a:ext uri="{FF2B5EF4-FFF2-40B4-BE49-F238E27FC236}">
-                <a16:creationId xmlns:a16="http://schemas.microsoft.com/office/drawing/2014/main" id="{21415F10-CF24-B798-1344-DCF9E363C05D}"/>
+          <p:cNvPr id="2" name="Titel 1">
+            <a:extLst>
+              <a:ext uri="{FF2B5EF4-FFF2-40B4-BE49-F238E27FC236}">
+                <a16:creationId xmlns:a16="http://schemas.microsoft.com/office/drawing/2014/main" id="{EEA2EC02-7369-A23B-1151-CA1A9D85F3F3}"/>
               </a:ext>
             </a:extLst>
           </p:cNvPr>
@@ -4844,18 +4943,31 @@
           <a:lstStyle/>
           <a:p>
             <a:r>
-              <a:rPr lang="en-DE" dirty="0"/>
-              <a:t>Black-Box Models</a:t>
-            </a:r>
-          </a:p>
-        </p:txBody>
-      </p:sp>
-      <p:sp>
-        <p:nvSpPr>
-          <p:cNvPr id="3" name="Content Placeholder 2">
-            <a:extLst>
-              <a:ext uri="{FF2B5EF4-FFF2-40B4-BE49-F238E27FC236}">
-                <a16:creationId xmlns:a16="http://schemas.microsoft.com/office/drawing/2014/main" id="{455FDA38-027C-BDF2-FF70-B542E9092FBE}"/>
+              <a:rPr lang="de-DE" dirty="0"/>
+              <a:t>Feature </a:t>
+            </a:r>
+            <a:r>
+              <a:rPr lang="de-DE" dirty="0" err="1"/>
+              <a:t>Importance</a:t>
+            </a:r>
+            <a:r>
+              <a:rPr lang="de-DE" dirty="0"/>
+              <a:t> </a:t>
+            </a:r>
+            <a:r>
+              <a:rPr lang="de-DE" dirty="0" err="1"/>
+              <a:t>Concepts</a:t>
+            </a:r>
+            <a:endParaRPr lang="de-DE" dirty="0"/>
+          </a:p>
+        </p:txBody>
+      </p:sp>
+      <p:sp>
+        <p:nvSpPr>
+          <p:cNvPr id="3" name="Inhaltsplatzhalter 2">
+            <a:extLst>
+              <a:ext uri="{FF2B5EF4-FFF2-40B4-BE49-F238E27FC236}">
+                <a16:creationId xmlns:a16="http://schemas.microsoft.com/office/drawing/2014/main" id="{AB31F79B-2E2E-D375-1697-3C02F474DC61}"/>
               </a:ext>
             </a:extLst>
           </p:cNvPr>
@@ -4868,127 +4980,19 @@
         </p:nvSpPr>
         <p:spPr/>
         <p:txBody>
-          <a:bodyPr>
-            <a:normAutofit/>
-          </a:bodyPr>
-          <a:lstStyle/>
-          <a:p>
-            <a:pPr marL="0" indent="0">
-              <a:buNone/>
-            </a:pPr>
-            <a:r>
-              <a:rPr lang="en-GB" dirty="0"/>
-              <a:t>T</a:t>
-            </a:r>
-            <a:r>
-              <a:rPr lang="en-DE" dirty="0"/>
-              <a:t>o build trust in AI systems, individual predictions/actions need to be fully transparent, i.e., explainable.</a:t>
-            </a:r>
-            <a:endParaRPr lang="en-GB" dirty="0"/>
-          </a:p>
-          <a:p>
-            <a:pPr marL="0" indent="0">
-              <a:buNone/>
-            </a:pPr>
-            <a:r>
-              <a:rPr lang="en-GB" sz="2800" dirty="0"/>
-              <a:t>(do not confuse </a:t>
-            </a:r>
-            <a:r>
-              <a:rPr lang="en-GB" sz="2800" dirty="0" err="1"/>
-              <a:t>explainability</a:t>
-            </a:r>
-            <a:r>
-              <a:rPr lang="en-GB" sz="2800" dirty="0"/>
-              <a:t> with causality though)</a:t>
-            </a:r>
-            <a:endParaRPr lang="en-DE" dirty="0"/>
-          </a:p>
-          <a:p>
-            <a:pPr marL="0" indent="0">
-              <a:buNone/>
-            </a:pPr>
-            <a:endParaRPr lang="en-DE" dirty="0"/>
-          </a:p>
-          <a:p>
-            <a:pPr marL="0" indent="0">
-              <a:buNone/>
-            </a:pPr>
-            <a:r>
-              <a:rPr lang="en-DE" dirty="0"/>
-              <a:t>Unfortunately, complex models like deep learning methods are difficult to interpret.</a:t>
-            </a:r>
-          </a:p>
-          <a:p>
-            <a:pPr marL="0" indent="0">
-              <a:buNone/>
-            </a:pPr>
-            <a:r>
-              <a:rPr lang="en-GB" dirty="0">
-                <a:sym typeface="Wingdings" pitchFamily="2" charset="2"/>
-              </a:rPr>
-              <a:t> n</a:t>
-            </a:r>
-            <a:r>
-              <a:rPr lang="en-DE" dirty="0">
-                <a:sym typeface="Wingdings" pitchFamily="2" charset="2"/>
-              </a:rPr>
-              <a:t>eed for model-agnostic methods to explain black-box models</a:t>
-            </a:r>
-          </a:p>
-          <a:p>
-            <a:pPr marL="0" indent="0">
-              <a:buNone/>
-            </a:pPr>
-            <a:r>
-              <a:rPr lang="en-GB" dirty="0"/>
-              <a:t>e</a:t>
-            </a:r>
-            <a:r>
-              <a:rPr lang="en-DE" dirty="0"/>
-              <a:t>xamples: local surrogates (</a:t>
-            </a:r>
-            <a:r>
-              <a:rPr lang="en-GB" dirty="0">
-                <a:hlinkClick r:id="rId2"/>
-              </a:rPr>
-              <a:t>LIME</a:t>
-            </a:r>
-            <a:r>
-              <a:rPr lang="en-DE" dirty="0"/>
-              <a:t>), Shapley values (</a:t>
-            </a:r>
-            <a:r>
-              <a:rPr lang="en-DE" dirty="0">
-                <a:hlinkClick r:id="rId3"/>
-              </a:rPr>
-              <a:t>SHAP</a:t>
-            </a:r>
-            <a:r>
-              <a:rPr lang="en-DE" dirty="0"/>
-              <a:t>)</a:t>
-            </a:r>
-          </a:p>
-          <a:p>
-            <a:pPr marL="0" indent="0">
-              <a:buNone/>
-            </a:pPr>
-            <a:r>
-              <a:rPr lang="en-DE" dirty="0">
-                <a:hlinkClick r:id="rId4"/>
-              </a:rPr>
-              <a:t>overview</a:t>
-            </a:r>
-            <a:endParaRPr lang="en-DE" dirty="0"/>
-          </a:p>
-        </p:txBody>
-      </p:sp>
-      <p:sp>
-        <p:nvSpPr>
-          <p:cNvPr id="4" name="Slide Number Placeholder 3">
-            <a:extLst>
-              <a:ext uri="{FF2B5EF4-FFF2-40B4-BE49-F238E27FC236}">
-                <a16:creationId xmlns:a16="http://schemas.microsoft.com/office/drawing/2014/main" id="{E55D36A3-331F-0FB9-177B-14774E79DFD4}"/>
+          <a:bodyPr/>
+          <a:lstStyle/>
+          <a:p>
+            <a:endParaRPr lang="de-DE"/>
+          </a:p>
+        </p:txBody>
+      </p:sp>
+      <p:sp>
+        <p:nvSpPr>
+          <p:cNvPr id="4" name="Foliennummernplatzhalter 3">
+            <a:extLst>
+              <a:ext uri="{FF2B5EF4-FFF2-40B4-BE49-F238E27FC236}">
+                <a16:creationId xmlns:a16="http://schemas.microsoft.com/office/drawing/2014/main" id="{21BD6576-EA1B-4580-1AEA-9941C9ED6E23}"/>
               </a:ext>
             </a:extLst>
           </p:cNvPr>
@@ -5004,18 +5008,18 @@
           <a:bodyPr/>
           <a:lstStyle/>
           <a:p>
-            <a:fld id="{290AF890-0265-4349-BF13-E30F01A2AA85}" type="slidenum">
-              <a:rPr lang="en-DE" smtClean="0"/>
+            <a:fld id="{08C366F5-AFAD-49CB-854A-9D9E238FCA13}" type="slidenum">
+              <a:rPr lang="en-GB" smtClean="0"/>
               <a:t>16</a:t>
             </a:fld>
-            <a:endParaRPr lang="en-DE"/>
+            <a:endParaRPr lang="en-GB"/>
           </a:p>
         </p:txBody>
       </p:sp>
     </p:spTree>
     <p:extLst>
       <p:ext uri="{BB962C8B-B14F-4D97-AF65-F5344CB8AC3E}">
-        <p14:creationId xmlns:p14="http://schemas.microsoft.com/office/powerpoint/2010/main" val="205709024"/>
+        <p14:creationId xmlns:p14="http://schemas.microsoft.com/office/powerpoint/2010/main" val="394388186"/>
       </p:ext>
     </p:extLst>
   </p:cSld>
@@ -5047,7 +5051,7 @@
           <p:cNvPr id="2" name="Titel 1">
             <a:extLst>
               <a:ext uri="{FF2B5EF4-FFF2-40B4-BE49-F238E27FC236}">
-                <a16:creationId xmlns:a16="http://schemas.microsoft.com/office/drawing/2014/main" id="{EEA2EC02-7369-A23B-1151-CA1A9D85F3F3}"/>
+                <a16:creationId xmlns:a16="http://schemas.microsoft.com/office/drawing/2014/main" id="{5595687C-3D76-45C0-405C-128B90739BA0}"/>
               </a:ext>
             </a:extLst>
           </p:cNvPr>
@@ -5065,20 +5069,20 @@
           <a:p>
             <a:r>
               <a:rPr lang="de-DE" dirty="0"/>
-              <a:t>Feature </a:t>
+              <a:t>Model-</a:t>
+            </a:r>
+            <a:r>
+              <a:rPr lang="de-DE" dirty="0" err="1"/>
+              <a:t>Specific</a:t>
+            </a:r>
+            <a:r>
+              <a:rPr lang="de-DE" dirty="0"/>
+              <a:t> </a:t>
             </a:r>
             <a:r>
               <a:rPr lang="de-DE" dirty="0" err="1"/>
               <a:t>Importance</a:t>
             </a:r>
-            <a:r>
-              <a:rPr lang="de-DE" dirty="0"/>
-              <a:t> </a:t>
-            </a:r>
-            <a:r>
-              <a:rPr lang="de-DE" dirty="0" err="1"/>
-              <a:t>Concepts</a:t>
-            </a:r>
             <a:endParaRPr lang="de-DE" dirty="0"/>
           </a:p>
         </p:txBody>
@@ -5088,7 +5092,7 @@
           <p:cNvPr id="3" name="Inhaltsplatzhalter 2">
             <a:extLst>
               <a:ext uri="{FF2B5EF4-FFF2-40B4-BE49-F238E27FC236}">
-                <a16:creationId xmlns:a16="http://schemas.microsoft.com/office/drawing/2014/main" id="{AB31F79B-2E2E-D375-1697-3C02F474DC61}"/>
+                <a16:creationId xmlns:a16="http://schemas.microsoft.com/office/drawing/2014/main" id="{57ACC007-E966-C8DC-8020-739D15E8A848}"/>
               </a:ext>
             </a:extLst>
           </p:cNvPr>
@@ -5113,7 +5117,7 @@
           <p:cNvPr id="4" name="Foliennummernplatzhalter 3">
             <a:extLst>
               <a:ext uri="{FF2B5EF4-FFF2-40B4-BE49-F238E27FC236}">
-                <a16:creationId xmlns:a16="http://schemas.microsoft.com/office/drawing/2014/main" id="{21BD6576-EA1B-4580-1AEA-9941C9ED6E23}"/>
+                <a16:creationId xmlns:a16="http://schemas.microsoft.com/office/drawing/2014/main" id="{90FEA500-EB45-413A-5886-C05A459D9590}"/>
               </a:ext>
             </a:extLst>
           </p:cNvPr>
@@ -5140,7 +5144,7 @@
     </p:spTree>
     <p:extLst>
       <p:ext uri="{BB962C8B-B14F-4D97-AF65-F5344CB8AC3E}">
-        <p14:creationId xmlns:p14="http://schemas.microsoft.com/office/powerpoint/2010/main" val="394388186"/>
+        <p14:creationId xmlns:p14="http://schemas.microsoft.com/office/powerpoint/2010/main" val="1875124591"/>
       </p:ext>
     </p:extLst>
   </p:cSld>
@@ -5172,7 +5176,7 @@
           <p:cNvPr id="2" name="Titel 1">
             <a:extLst>
               <a:ext uri="{FF2B5EF4-FFF2-40B4-BE49-F238E27FC236}">
-                <a16:creationId xmlns:a16="http://schemas.microsoft.com/office/drawing/2014/main" id="{5595687C-3D76-45C0-405C-128B90739BA0}"/>
+                <a16:creationId xmlns:a16="http://schemas.microsoft.com/office/drawing/2014/main" id="{9A954931-0074-968B-0202-B8819C365CEF}"/>
               </a:ext>
             </a:extLst>
           </p:cNvPr>
@@ -5194,7 +5198,7 @@
             </a:r>
             <a:r>
               <a:rPr lang="de-DE" dirty="0" err="1"/>
-              <a:t>Specific</a:t>
+              <a:t>Agnostic</a:t>
             </a:r>
             <a:r>
               <a:rPr lang="de-DE" dirty="0"/>
@@ -5202,7 +5206,7 @@
             </a:r>
             <a:r>
               <a:rPr lang="de-DE" dirty="0" err="1"/>
-              <a:t>Importance</a:t>
+              <a:t>Explainability</a:t>
             </a:r>
             <a:endParaRPr lang="de-DE" dirty="0"/>
           </a:p>
@@ -5213,7 +5217,7 @@
           <p:cNvPr id="3" name="Inhaltsplatzhalter 2">
             <a:extLst>
               <a:ext uri="{FF2B5EF4-FFF2-40B4-BE49-F238E27FC236}">
-                <a16:creationId xmlns:a16="http://schemas.microsoft.com/office/drawing/2014/main" id="{57ACC007-E966-C8DC-8020-739D15E8A848}"/>
+                <a16:creationId xmlns:a16="http://schemas.microsoft.com/office/drawing/2014/main" id="{9BCB5DF1-2981-0D12-9EED-56F5740597A7}"/>
               </a:ext>
             </a:extLst>
           </p:cNvPr>
@@ -5238,7 +5242,7 @@
           <p:cNvPr id="4" name="Foliennummernplatzhalter 3">
             <a:extLst>
               <a:ext uri="{FF2B5EF4-FFF2-40B4-BE49-F238E27FC236}">
-                <a16:creationId xmlns:a16="http://schemas.microsoft.com/office/drawing/2014/main" id="{90FEA500-EB45-413A-5886-C05A459D9590}"/>
+                <a16:creationId xmlns:a16="http://schemas.microsoft.com/office/drawing/2014/main" id="{F7503E83-F57E-257D-4E6A-26E3EC944F12}"/>
               </a:ext>
             </a:extLst>
           </p:cNvPr>
@@ -5265,7 +5269,7 @@
     </p:spTree>
     <p:extLst>
       <p:ext uri="{BB962C8B-B14F-4D97-AF65-F5344CB8AC3E}">
-        <p14:creationId xmlns:p14="http://schemas.microsoft.com/office/powerpoint/2010/main" val="1875124591"/>
+        <p14:creationId xmlns:p14="http://schemas.microsoft.com/office/powerpoint/2010/main" val="2746679437"/>
       </p:ext>
     </p:extLst>
   </p:cSld>
@@ -5297,7 +5301,7 @@
           <p:cNvPr id="2" name="Titel 1">
             <a:extLst>
               <a:ext uri="{FF2B5EF4-FFF2-40B4-BE49-F238E27FC236}">
-                <a16:creationId xmlns:a16="http://schemas.microsoft.com/office/drawing/2014/main" id="{9A954931-0074-968B-0202-B8819C365CEF}"/>
+                <a16:creationId xmlns:a16="http://schemas.microsoft.com/office/drawing/2014/main" id="{F6843E4B-7E71-2104-D4DE-DC5C793791C9}"/>
               </a:ext>
             </a:extLst>
           </p:cNvPr>
@@ -5315,21 +5319,8 @@
           <a:p>
             <a:r>
               <a:rPr lang="de-DE" dirty="0"/>
-              <a:t>Model-</a:t>
-            </a:r>
-            <a:r>
-              <a:rPr lang="de-DE" dirty="0" err="1"/>
-              <a:t>Agnostic</a:t>
-            </a:r>
-            <a:r>
-              <a:rPr lang="de-DE" dirty="0"/>
-              <a:t> </a:t>
-            </a:r>
-            <a:r>
-              <a:rPr lang="de-DE" dirty="0" err="1"/>
-              <a:t>Explainability</a:t>
-            </a:r>
-            <a:endParaRPr lang="de-DE" dirty="0"/>
+              <a:t>SHAP Values</a:t>
+            </a:r>
           </a:p>
         </p:txBody>
       </p:sp>
@@ -5338,7 +5329,7 @@
           <p:cNvPr id="3" name="Inhaltsplatzhalter 2">
             <a:extLst>
               <a:ext uri="{FF2B5EF4-FFF2-40B4-BE49-F238E27FC236}">
-                <a16:creationId xmlns:a16="http://schemas.microsoft.com/office/drawing/2014/main" id="{9BCB5DF1-2981-0D12-9EED-56F5740597A7}"/>
+                <a16:creationId xmlns:a16="http://schemas.microsoft.com/office/drawing/2014/main" id="{F06D45B7-29AE-432E-6394-F1B22942AED8}"/>
               </a:ext>
             </a:extLst>
           </p:cNvPr>
@@ -5363,7 +5354,7 @@
           <p:cNvPr id="4" name="Foliennummernplatzhalter 3">
             <a:extLst>
               <a:ext uri="{FF2B5EF4-FFF2-40B4-BE49-F238E27FC236}">
-                <a16:creationId xmlns:a16="http://schemas.microsoft.com/office/drawing/2014/main" id="{F7503E83-F57E-257D-4E6A-26E3EC944F12}"/>
+                <a16:creationId xmlns:a16="http://schemas.microsoft.com/office/drawing/2014/main" id="{016DBBC4-8F62-F70D-BD00-F3E97C83AEC5}"/>
               </a:ext>
             </a:extLst>
           </p:cNvPr>
@@ -5390,7 +5381,7 @@
     </p:spTree>
     <p:extLst>
       <p:ext uri="{BB962C8B-B14F-4D97-AF65-F5344CB8AC3E}">
-        <p14:creationId xmlns:p14="http://schemas.microsoft.com/office/powerpoint/2010/main" val="2746679437"/>
+        <p14:creationId xmlns:p14="http://schemas.microsoft.com/office/powerpoint/2010/main" val="761598268"/>
       </p:ext>
     </p:extLst>
   </p:cSld>
@@ -5419,10 +5410,10 @@
       </p:grpSpPr>
       <p:sp>
         <p:nvSpPr>
-          <p:cNvPr id="4" name="Title 3">
-            <a:extLst>
-              <a:ext uri="{FF2B5EF4-FFF2-40B4-BE49-F238E27FC236}">
-                <a16:creationId xmlns:a16="http://schemas.microsoft.com/office/drawing/2014/main" id="{080AD447-446B-E09E-6F4A-522C1DBB462E}"/>
+          <p:cNvPr id="6" name="Titel 5">
+            <a:extLst>
+              <a:ext uri="{FF2B5EF4-FFF2-40B4-BE49-F238E27FC236}">
+                <a16:creationId xmlns:a16="http://schemas.microsoft.com/office/drawing/2014/main" id="{E92B2E04-27B7-8A9A-6143-C8831F834080}"/>
               </a:ext>
             </a:extLst>
           </p:cNvPr>
@@ -5438,241 +5429,111 @@
           <a:bodyPr/>
           <a:lstStyle/>
           <a:p>
-            <a:r>
-              <a:rPr lang="en-GB" dirty="0"/>
-              <a:t>Course Schedule</a:t>
-            </a:r>
-          </a:p>
-        </p:txBody>
-      </p:sp>
-      <p:sp>
-        <p:nvSpPr>
-          <p:cNvPr id="6" name="Inhaltsplatzhalter 5">
-            <a:extLst>
-              <a:ext uri="{FF2B5EF4-FFF2-40B4-BE49-F238E27FC236}">
-                <a16:creationId xmlns:a16="http://schemas.microsoft.com/office/drawing/2014/main" id="{CF502483-E45D-7D7D-D169-ACA4F8327D26}"/>
-              </a:ext>
-            </a:extLst>
-          </p:cNvPr>
-          <p:cNvSpPr>
-            <a:spLocks noGrp="1"/>
-          </p:cNvSpPr>
-          <p:nvPr>
-            <p:ph sz="half" idx="1"/>
-          </p:nvPr>
-        </p:nvSpPr>
-        <p:spPr/>
-        <p:txBody>
-          <a:bodyPr>
-            <a:normAutofit lnSpcReduction="10000"/>
-          </a:bodyPr>
-          <a:lstStyle/>
-          <a:p>
-            <a:pPr marL="514350" indent="-514350">
-              <a:buFont typeface="+mj-lt"/>
-              <a:buAutoNum type="arabicPeriod"/>
-            </a:pPr>
-            <a:r>
-              <a:rPr lang="de-DE" dirty="0" err="1"/>
-              <a:t>Exploratory</a:t>
-            </a:r>
-            <a:r>
-              <a:rPr lang="de-DE" dirty="0"/>
-              <a:t> Data Analysis</a:t>
-            </a:r>
-          </a:p>
-          <a:p>
-            <a:pPr marL="514350" indent="-514350">
-              <a:buFont typeface="+mj-lt"/>
-              <a:buAutoNum type="arabicPeriod"/>
-            </a:pPr>
-            <a:endParaRPr lang="de-DE" dirty="0"/>
-          </a:p>
-          <a:p>
-            <a:pPr marL="514350" indent="-514350">
-              <a:buFont typeface="+mj-lt"/>
-              <a:buAutoNum type="arabicPeriod"/>
-            </a:pPr>
-            <a:r>
-              <a:rPr lang="de-DE" dirty="0"/>
-              <a:t>Clustering</a:t>
-            </a:r>
-          </a:p>
-          <a:p>
-            <a:pPr marL="514350" indent="-514350">
-              <a:buFont typeface="+mj-lt"/>
-              <a:buAutoNum type="arabicPeriod"/>
-            </a:pPr>
-            <a:endParaRPr lang="de-DE" dirty="0"/>
-          </a:p>
-          <a:p>
-            <a:pPr marL="514350" indent="-514350">
-              <a:buFont typeface="+mj-lt"/>
-              <a:buAutoNum type="arabicPeriod"/>
-            </a:pPr>
-            <a:r>
-              <a:rPr lang="de-DE" dirty="0" err="1"/>
-              <a:t>Probabilistic</a:t>
-            </a:r>
-            <a:r>
-              <a:rPr lang="de-DE" dirty="0"/>
-              <a:t> Models</a:t>
-            </a:r>
-          </a:p>
-          <a:p>
-            <a:pPr marL="514350" indent="-514350">
-              <a:buFont typeface="+mj-lt"/>
-              <a:buAutoNum type="arabicPeriod"/>
-            </a:pPr>
-            <a:endParaRPr lang="de-DE" dirty="0"/>
-          </a:p>
-          <a:p>
-            <a:pPr marL="514350" indent="-514350">
-              <a:buFont typeface="+mj-lt"/>
-              <a:buAutoNum type="arabicPeriod"/>
-            </a:pPr>
-            <a:r>
-              <a:rPr lang="de-DE" dirty="0"/>
-              <a:t>Statistical </a:t>
-            </a:r>
-            <a:r>
-              <a:rPr lang="de-DE" dirty="0" err="1"/>
-              <a:t>Inference</a:t>
-            </a:r>
-            <a:endParaRPr lang="de-DE" dirty="0"/>
-          </a:p>
-          <a:p>
-            <a:pPr marL="514350" indent="-514350">
-              <a:buFont typeface="+mj-lt"/>
-              <a:buAutoNum type="arabicPeriod"/>
-            </a:pPr>
-            <a:endParaRPr lang="de-DE" dirty="0"/>
-          </a:p>
-          <a:p>
-            <a:pPr marL="514350" indent="-514350">
-              <a:buFont typeface="+mj-lt"/>
-              <a:buAutoNum type="arabicPeriod"/>
-            </a:pPr>
-            <a:r>
-              <a:rPr lang="de-DE" dirty="0" err="1"/>
-              <a:t>Machine</a:t>
-            </a:r>
-            <a:r>
-              <a:rPr lang="de-DE" dirty="0"/>
-              <a:t> Learning</a:t>
-            </a:r>
-          </a:p>
-        </p:txBody>
-      </p:sp>
-      <p:sp>
-        <p:nvSpPr>
-          <p:cNvPr id="7" name="Inhaltsplatzhalter 6">
-            <a:extLst>
-              <a:ext uri="{FF2B5EF4-FFF2-40B4-BE49-F238E27FC236}">
-                <a16:creationId xmlns:a16="http://schemas.microsoft.com/office/drawing/2014/main" id="{B671907E-FFFA-73EF-8E7D-4AB4EBDD957B}"/>
-              </a:ext>
-            </a:extLst>
-          </p:cNvPr>
-          <p:cNvSpPr>
-            <a:spLocks noGrp="1"/>
-          </p:cNvSpPr>
-          <p:nvPr>
-            <p:ph sz="half" idx="2"/>
-          </p:nvPr>
-        </p:nvSpPr>
-        <p:spPr/>
-        <p:txBody>
-          <a:bodyPr>
-            <a:normAutofit lnSpcReduction="10000"/>
-          </a:bodyPr>
-          <a:lstStyle/>
-          <a:p>
-            <a:pPr marL="514350" indent="-514350">
-              <a:buFont typeface="+mj-lt"/>
-              <a:buAutoNum type="arabicPeriod" startAt="6"/>
-            </a:pPr>
-            <a:r>
-              <a:rPr lang="de-DE" dirty="0"/>
-              <a:t>Feature Engineering</a:t>
-            </a:r>
-          </a:p>
-          <a:p>
-            <a:pPr marL="514350" indent="-514350">
-              <a:buFont typeface="+mj-lt"/>
-              <a:buAutoNum type="arabicPeriod" startAt="6"/>
-            </a:pPr>
-            <a:endParaRPr lang="de-DE" dirty="0"/>
-          </a:p>
-          <a:p>
-            <a:pPr marL="514350" indent="-514350">
-              <a:buFont typeface="+mj-lt"/>
-              <a:buAutoNum type="arabicPeriod" startAt="6"/>
-            </a:pPr>
             <a:r>
               <a:rPr lang="de-DE" dirty="0"/>
               <a:t>Model Evaluation</a:t>
             </a:r>
           </a:p>
-          <a:p>
-            <a:pPr marL="514350" indent="-514350">
-              <a:buFont typeface="+mj-lt"/>
-              <a:buAutoNum type="arabicPeriod" startAt="6"/>
-            </a:pPr>
+        </p:txBody>
+      </p:sp>
+      <p:sp>
+        <p:nvSpPr>
+          <p:cNvPr id="7" name="Inhaltsplatzhalter 6">
+            <a:extLst>
+              <a:ext uri="{FF2B5EF4-FFF2-40B4-BE49-F238E27FC236}">
+                <a16:creationId xmlns:a16="http://schemas.microsoft.com/office/drawing/2014/main" id="{16CBE6C5-FF71-FE69-AF96-EB26512AF61F}"/>
+              </a:ext>
+            </a:extLst>
+          </p:cNvPr>
+          <p:cNvSpPr>
+            <a:spLocks noGrp="1"/>
+          </p:cNvSpPr>
+          <p:nvPr>
+            <p:ph idx="1"/>
+          </p:nvPr>
+        </p:nvSpPr>
+        <p:spPr/>
+        <p:txBody>
+          <a:bodyPr/>
+          <a:lstStyle/>
+          <a:p>
+            <a:r>
+              <a:rPr lang="de-DE" dirty="0" err="1"/>
+              <a:t>accuracy</a:t>
+            </a:r>
+            <a:r>
+              <a:rPr lang="de-DE" dirty="0"/>
+              <a:t>, ROC-</a:t>
+            </a:r>
+            <a:r>
+              <a:rPr lang="de-DE" dirty="0" err="1"/>
+              <a:t>curve</a:t>
+            </a:r>
+            <a:r>
+              <a:rPr lang="de-DE" dirty="0"/>
+              <a:t>, F1</a:t>
+            </a:r>
+          </a:p>
+          <a:p>
+            <a:r>
+              <a:rPr lang="de-DE" dirty="0"/>
+              <a:t>MSE, MAE</a:t>
+            </a:r>
+          </a:p>
+          <a:p>
+            <a:r>
+              <a:rPr lang="de-DE" dirty="0" err="1"/>
+              <a:t>cross</a:t>
+            </a:r>
+            <a:r>
+              <a:rPr lang="de-DE" dirty="0"/>
+              <a:t>-validation</a:t>
+            </a:r>
+          </a:p>
+          <a:p>
+            <a:r>
+              <a:rPr lang="de-DE" dirty="0"/>
+              <a:t>feature </a:t>
+            </a:r>
+            <a:r>
+              <a:rPr lang="de-DE" dirty="0" err="1"/>
+              <a:t>importance</a:t>
+            </a:r>
             <a:endParaRPr lang="de-DE" dirty="0"/>
           </a:p>
           <a:p>
-            <a:pPr marL="514350" indent="-514350">
-              <a:buFont typeface="+mj-lt"/>
-              <a:buAutoNum type="arabicPeriod" startAt="6"/>
-            </a:pPr>
+            <a:r>
+              <a:rPr lang="de-DE" dirty="0" err="1"/>
+              <a:t>explainability</a:t>
+            </a:r>
             <a:r>
               <a:rPr lang="de-DE" dirty="0"/>
-              <a:t>Deep Learning</a:t>
-            </a:r>
-          </a:p>
-          <a:p>
-            <a:pPr marL="514350" indent="-514350">
-              <a:buFont typeface="+mj-lt"/>
-              <a:buAutoNum type="arabicPeriod" startAt="6"/>
-            </a:pPr>
+              <a:t>, SHAP, LIME</a:t>
+            </a:r>
+          </a:p>
+          <a:p>
+            <a:r>
+              <a:rPr lang="de-DE" dirty="0" err="1"/>
+              <a:t>hypothesis</a:t>
+            </a:r>
+            <a:r>
+              <a:rPr lang="de-DE" dirty="0"/>
+              <a:t> </a:t>
+            </a:r>
+            <a:r>
+              <a:rPr lang="de-DE" dirty="0" err="1"/>
+              <a:t>testing</a:t>
+            </a:r>
             <a:endParaRPr lang="de-DE" dirty="0"/>
           </a:p>
-          <a:p>
-            <a:pPr marL="514350" indent="-514350">
-              <a:buFont typeface="+mj-lt"/>
-              <a:buAutoNum type="arabicPeriod" startAt="6"/>
-            </a:pPr>
-            <a:r>
-              <a:rPr lang="de-DE" dirty="0"/>
-              <a:t>Time Series</a:t>
-            </a:r>
-          </a:p>
-          <a:p>
-            <a:pPr marL="514350" indent="-514350">
-              <a:buFont typeface="+mj-lt"/>
-              <a:buAutoNum type="arabicPeriod" startAt="6"/>
-            </a:pPr>
-            <a:endParaRPr lang="de-DE" dirty="0"/>
-          </a:p>
-          <a:p>
-            <a:pPr marL="514350" indent="-514350">
-              <a:buFont typeface="+mj-lt"/>
-              <a:buAutoNum type="arabicPeriod" startAt="6"/>
-            </a:pPr>
-            <a:r>
-              <a:rPr lang="de-DE" dirty="0" err="1"/>
-              <a:t>Causality</a:t>
-            </a:r>
-            <a:endParaRPr lang="de-DE" dirty="0"/>
-          </a:p>
-        </p:txBody>
-      </p:sp>
-      <p:sp>
-        <p:nvSpPr>
-          <p:cNvPr id="3" name="Slide Number Placeholder 2">
-            <a:extLst>
-              <a:ext uri="{FF2B5EF4-FFF2-40B4-BE49-F238E27FC236}">
-                <a16:creationId xmlns:a16="http://schemas.microsoft.com/office/drawing/2014/main" id="{A0664D44-83AC-6A7A-17E0-C1AE2ED18FF5}"/>
+        </p:txBody>
+      </p:sp>
+      <p:sp>
+        <p:nvSpPr>
+          <p:cNvPr id="5" name="Foliennummernplatzhalter 4">
+            <a:extLst>
+              <a:ext uri="{FF2B5EF4-FFF2-40B4-BE49-F238E27FC236}">
+                <a16:creationId xmlns:a16="http://schemas.microsoft.com/office/drawing/2014/main" id="{422405FE-CC14-5A9E-E6BC-374EBECB4E84}"/>
               </a:ext>
             </a:extLst>
           </p:cNvPr>
@@ -5692,14 +5553,14 @@
               <a:rPr lang="en-GB" smtClean="0"/>
               <a:t>2</a:t>
             </a:fld>
-            <a:endParaRPr lang="en-GB" dirty="0"/>
+            <a:endParaRPr lang="en-GB"/>
           </a:p>
         </p:txBody>
       </p:sp>
     </p:spTree>
     <p:extLst>
       <p:ext uri="{BB962C8B-B14F-4D97-AF65-F5344CB8AC3E}">
-        <p14:creationId xmlns:p14="http://schemas.microsoft.com/office/powerpoint/2010/main" val="310336692"/>
+        <p14:creationId xmlns:p14="http://schemas.microsoft.com/office/powerpoint/2010/main" val="3204133960"/>
       </p:ext>
     </p:extLst>
   </p:cSld>
@@ -5731,7 +5592,7 @@
           <p:cNvPr id="2" name="Titel 1">
             <a:extLst>
               <a:ext uri="{FF2B5EF4-FFF2-40B4-BE49-F238E27FC236}">
-                <a16:creationId xmlns:a16="http://schemas.microsoft.com/office/drawing/2014/main" id="{F6843E4B-7E71-2104-D4DE-DC5C793791C9}"/>
+                <a16:creationId xmlns:a16="http://schemas.microsoft.com/office/drawing/2014/main" id="{7FD9F2F3-7D06-9C50-F62E-390ABF38A3E4}"/>
               </a:ext>
             </a:extLst>
           </p:cNvPr>
@@ -5749,7 +5610,7 @@
           <a:p>
             <a:r>
               <a:rPr lang="de-DE" dirty="0"/>
-              <a:t>SHAP Values</a:t>
+              <a:t>LIME</a:t>
             </a:r>
           </a:p>
         </p:txBody>
@@ -5759,7 +5620,7 @@
           <p:cNvPr id="3" name="Inhaltsplatzhalter 2">
             <a:extLst>
               <a:ext uri="{FF2B5EF4-FFF2-40B4-BE49-F238E27FC236}">
-                <a16:creationId xmlns:a16="http://schemas.microsoft.com/office/drawing/2014/main" id="{F06D45B7-29AE-432E-6394-F1B22942AED8}"/>
+                <a16:creationId xmlns:a16="http://schemas.microsoft.com/office/drawing/2014/main" id="{F6F0507C-EE63-C14B-A96E-8F8C408B3708}"/>
               </a:ext>
             </a:extLst>
           </p:cNvPr>
@@ -5784,7 +5645,7 @@
           <p:cNvPr id="4" name="Foliennummernplatzhalter 3">
             <a:extLst>
               <a:ext uri="{FF2B5EF4-FFF2-40B4-BE49-F238E27FC236}">
-                <a16:creationId xmlns:a16="http://schemas.microsoft.com/office/drawing/2014/main" id="{016DBBC4-8F62-F70D-BD00-F3E97C83AEC5}"/>
+                <a16:creationId xmlns:a16="http://schemas.microsoft.com/office/drawing/2014/main" id="{8FDA568B-A2BE-4961-6F31-A0E7D6D2D4C7}"/>
               </a:ext>
             </a:extLst>
           </p:cNvPr>
@@ -5811,7 +5672,7 @@
     </p:spTree>
     <p:extLst>
       <p:ext uri="{BB962C8B-B14F-4D97-AF65-F5344CB8AC3E}">
-        <p14:creationId xmlns:p14="http://schemas.microsoft.com/office/powerpoint/2010/main" val="761598268"/>
+        <p14:creationId xmlns:p14="http://schemas.microsoft.com/office/powerpoint/2010/main" val="2671766254"/>
       </p:ext>
     </p:extLst>
   </p:cSld>
@@ -5843,7 +5704,7 @@
           <p:cNvPr id="2" name="Titel 1">
             <a:extLst>
               <a:ext uri="{FF2B5EF4-FFF2-40B4-BE49-F238E27FC236}">
-                <a16:creationId xmlns:a16="http://schemas.microsoft.com/office/drawing/2014/main" id="{7FD9F2F3-7D06-9C50-F62E-390ABF38A3E4}"/>
+                <a16:creationId xmlns:a16="http://schemas.microsoft.com/office/drawing/2014/main" id="{ED3F7E35-5378-F602-0537-CF82941E6B11}"/>
               </a:ext>
             </a:extLst>
           </p:cNvPr>
@@ -5860,9 +5721,18 @@
           <a:lstStyle/>
           <a:p>
             <a:r>
+              <a:rPr lang="de-DE" dirty="0" err="1"/>
+              <a:t>Interpreting</a:t>
+            </a:r>
+            <a:r>
               <a:rPr lang="de-DE" dirty="0"/>
-              <a:t>LIME</a:t>
-            </a:r>
+              <a:t> </a:t>
+            </a:r>
+            <a:r>
+              <a:rPr lang="de-DE" dirty="0" err="1"/>
+              <a:t>Explanations</a:t>
+            </a:r>
+            <a:endParaRPr lang="de-DE" dirty="0"/>
           </a:p>
         </p:txBody>
       </p:sp>
@@ -5871,7 +5741,7 @@
           <p:cNvPr id="3" name="Inhaltsplatzhalter 2">
             <a:extLst>
               <a:ext uri="{FF2B5EF4-FFF2-40B4-BE49-F238E27FC236}">
-                <a16:creationId xmlns:a16="http://schemas.microsoft.com/office/drawing/2014/main" id="{F6F0507C-EE63-C14B-A96E-8F8C408B3708}"/>
+                <a16:creationId xmlns:a16="http://schemas.microsoft.com/office/drawing/2014/main" id="{8504B4EF-FBB3-4531-6E08-A747A1F7D9B7}"/>
               </a:ext>
             </a:extLst>
           </p:cNvPr>
@@ -5896,7 +5766,7 @@
           <p:cNvPr id="4" name="Foliennummernplatzhalter 3">
             <a:extLst>
               <a:ext uri="{FF2B5EF4-FFF2-40B4-BE49-F238E27FC236}">
-                <a16:creationId xmlns:a16="http://schemas.microsoft.com/office/drawing/2014/main" id="{8FDA568B-A2BE-4961-6F31-A0E7D6D2D4C7}"/>
+                <a16:creationId xmlns:a16="http://schemas.microsoft.com/office/drawing/2014/main" id="{5E53D23A-D3BE-FB2D-ADBF-4F6F0560AAC5}"/>
               </a:ext>
             </a:extLst>
           </p:cNvPr>
@@ -5915,127 +5785,6 @@
             <a:fld id="{08C366F5-AFAD-49CB-854A-9D9E238FCA13}" type="slidenum">
               <a:rPr lang="en-GB" smtClean="0"/>
               <a:t>21</a:t>
-            </a:fld>
-            <a:endParaRPr lang="en-GB"/>
-          </a:p>
-        </p:txBody>
-      </p:sp>
-    </p:spTree>
-    <p:extLst>
-      <p:ext uri="{BB962C8B-B14F-4D97-AF65-F5344CB8AC3E}">
-        <p14:creationId xmlns:p14="http://schemas.microsoft.com/office/powerpoint/2010/main" val="2671766254"/>
-      </p:ext>
-    </p:extLst>
-  </p:cSld>
-  <p:clrMapOvr>
-    <a:masterClrMapping/>
-  </p:clrMapOvr>
-</p:sld>
-</file>
-
-<file path=ppt/slides/slide22.xml><?xml version="1.0" encoding="utf-8"?>
-<p:sld xmlns:a="http://schemas.openxmlformats.org/drawingml/2006/main" xmlns:r="http://schemas.openxmlformats.org/officeDocument/2006/relationships" xmlns:p="http://schemas.openxmlformats.org/presentationml/2006/main">
-  <p:cSld>
-    <p:spTree>
-      <p:nvGrpSpPr>
-        <p:cNvPr id="1" name=""/>
-        <p:cNvGrpSpPr/>
-        <p:nvPr/>
-      </p:nvGrpSpPr>
-      <p:grpSpPr>
-        <a:xfrm>
-          <a:off x="0" y="0"/>
-          <a:ext cx="0" cy="0"/>
-          <a:chOff x="0" y="0"/>
-          <a:chExt cx="0" cy="0"/>
-        </a:xfrm>
-      </p:grpSpPr>
-      <p:sp>
-        <p:nvSpPr>
-          <p:cNvPr id="2" name="Titel 1">
-            <a:extLst>
-              <a:ext uri="{FF2B5EF4-FFF2-40B4-BE49-F238E27FC236}">
-                <a16:creationId xmlns:a16="http://schemas.microsoft.com/office/drawing/2014/main" id="{ED3F7E35-5378-F602-0537-CF82941E6B11}"/>
-              </a:ext>
-            </a:extLst>
-          </p:cNvPr>
-          <p:cNvSpPr>
-            <a:spLocks noGrp="1"/>
-          </p:cNvSpPr>
-          <p:nvPr>
-            <p:ph type="title"/>
-          </p:nvPr>
-        </p:nvSpPr>
-        <p:spPr/>
-        <p:txBody>
-          <a:bodyPr/>
-          <a:lstStyle/>
-          <a:p>
-            <a:r>
-              <a:rPr lang="de-DE" dirty="0" err="1"/>
-              <a:t>Interpreting</a:t>
-            </a:r>
-            <a:r>
-              <a:rPr lang="de-DE" dirty="0"/>
-              <a:t> </a:t>
-            </a:r>
-            <a:r>
-              <a:rPr lang="de-DE" dirty="0" err="1"/>
-              <a:t>Explanations</a:t>
-            </a:r>
-            <a:endParaRPr lang="de-DE" dirty="0"/>
-          </a:p>
-        </p:txBody>
-      </p:sp>
-      <p:sp>
-        <p:nvSpPr>
-          <p:cNvPr id="3" name="Inhaltsplatzhalter 2">
-            <a:extLst>
-              <a:ext uri="{FF2B5EF4-FFF2-40B4-BE49-F238E27FC236}">
-                <a16:creationId xmlns:a16="http://schemas.microsoft.com/office/drawing/2014/main" id="{8504B4EF-FBB3-4531-6E08-A747A1F7D9B7}"/>
-              </a:ext>
-            </a:extLst>
-          </p:cNvPr>
-          <p:cNvSpPr>
-            <a:spLocks noGrp="1"/>
-          </p:cNvSpPr>
-          <p:nvPr>
-            <p:ph idx="1"/>
-          </p:nvPr>
-        </p:nvSpPr>
-        <p:spPr/>
-        <p:txBody>
-          <a:bodyPr/>
-          <a:lstStyle/>
-          <a:p>
-            <a:endParaRPr lang="de-DE"/>
-          </a:p>
-        </p:txBody>
-      </p:sp>
-      <p:sp>
-        <p:nvSpPr>
-          <p:cNvPr id="4" name="Foliennummernplatzhalter 3">
-            <a:extLst>
-              <a:ext uri="{FF2B5EF4-FFF2-40B4-BE49-F238E27FC236}">
-                <a16:creationId xmlns:a16="http://schemas.microsoft.com/office/drawing/2014/main" id="{5E53D23A-D3BE-FB2D-ADBF-4F6F0560AAC5}"/>
-              </a:ext>
-            </a:extLst>
-          </p:cNvPr>
-          <p:cNvSpPr>
-            <a:spLocks noGrp="1"/>
-          </p:cNvSpPr>
-          <p:nvPr>
-            <p:ph type="sldNum" sz="quarter" idx="12"/>
-          </p:nvPr>
-        </p:nvSpPr>
-        <p:spPr/>
-        <p:txBody>
-          <a:bodyPr/>
-          <a:lstStyle/>
-          <a:p>
-            <a:fld id="{08C366F5-AFAD-49CB-854A-9D9E238FCA13}" type="slidenum">
-              <a:rPr lang="en-GB" smtClean="0"/>
-              <a:t>22</a:t>
             </a:fld>
             <a:endParaRPr lang="en-GB"/>
           </a:p>
@@ -6073,10 +5822,10 @@
       </p:grpSpPr>
       <p:sp>
         <p:nvSpPr>
-          <p:cNvPr id="6" name="Titel 5">
-            <a:extLst>
-              <a:ext uri="{FF2B5EF4-FFF2-40B4-BE49-F238E27FC236}">
-                <a16:creationId xmlns:a16="http://schemas.microsoft.com/office/drawing/2014/main" id="{E92B2E04-27B7-8A9A-6143-C8831F834080}"/>
+          <p:cNvPr id="2" name="Title 1">
+            <a:extLst>
+              <a:ext uri="{FF2B5EF4-FFF2-40B4-BE49-F238E27FC236}">
+                <a16:creationId xmlns:a16="http://schemas.microsoft.com/office/drawing/2014/main" id="{FAF00118-42C4-0F41-5612-17227D0CB322}"/>
               </a:ext>
             </a:extLst>
           </p:cNvPr>
@@ -6094,17 +5843,18 @@
           <a:p>
             <a:r>
               <a:rPr lang="de-DE" dirty="0"/>
-              <a:t>Model Evaluation</a:t>
-            </a:r>
-          </a:p>
-        </p:txBody>
-      </p:sp>
-      <p:sp>
-        <p:nvSpPr>
-          <p:cNvPr id="7" name="Inhaltsplatzhalter 6">
-            <a:extLst>
-              <a:ext uri="{FF2B5EF4-FFF2-40B4-BE49-F238E27FC236}">
-                <a16:creationId xmlns:a16="http://schemas.microsoft.com/office/drawing/2014/main" id="{16CBE6C5-FF71-FE69-AF96-EB26512AF61F}"/>
+              <a:t>Evaluation Scenarios </a:t>
+            </a:r>
+            <a:endParaRPr lang="en-DE" dirty="0"/>
+          </a:p>
+        </p:txBody>
+      </p:sp>
+      <p:sp>
+        <p:nvSpPr>
+          <p:cNvPr id="18" name="Inhaltsplatzhalter 17">
+            <a:extLst>
+              <a:ext uri="{FF2B5EF4-FFF2-40B4-BE49-F238E27FC236}">
+                <a16:creationId xmlns:a16="http://schemas.microsoft.com/office/drawing/2014/main" id="{6E20920F-B47E-760E-5843-5D1830A3AE87}"/>
               </a:ext>
             </a:extLst>
           </p:cNvPr>
@@ -6120,68 +5870,93 @@
           <a:bodyPr/>
           <a:lstStyle/>
           <a:p>
+            <a:pPr marL="514350" indent="-514350">
+              <a:buFont typeface="+mj-lt"/>
+              <a:buAutoNum type="arabicPeriod"/>
+            </a:pPr>
+            <a:r>
+              <a:rPr lang="en-GB" dirty="0"/>
+              <a:t>loss function in training: proxy for later test accuracy</a:t>
+            </a:r>
+          </a:p>
+          <a:p>
+            <a:pPr marL="514350" indent="-514350">
+              <a:buFont typeface="+mj-lt"/>
+              <a:buAutoNum type="arabicPeriod"/>
+            </a:pPr>
+            <a:endParaRPr lang="de-DE" dirty="0"/>
+          </a:p>
+          <a:p>
+            <a:pPr marL="514350" indent="-514350">
+              <a:buFont typeface="+mj-lt"/>
+              <a:buAutoNum type="arabicPeriod"/>
+            </a:pPr>
             <a:r>
               <a:rPr lang="de-DE" dirty="0" err="1"/>
-              <a:t>accuracy</a:t>
+              <a:t>model</a:t>
             </a:r>
             <a:r>
               <a:rPr lang="de-DE" dirty="0"/>
-              <a:t>, ROC-</a:t>
+              <a:t> </a:t>
             </a:r>
             <a:r>
               <a:rPr lang="de-DE" dirty="0" err="1"/>
-              <a:t>curve</a:t>
+              <a:t>validation</a:t>
             </a:r>
             <a:r>
               <a:rPr lang="de-DE" dirty="0"/>
-              <a:t>, F1</a:t>
-            </a:r>
-          </a:p>
-          <a:p>
+              <a:t>: </a:t>
+            </a:r>
+            <a:r>
+              <a:rPr lang="en-GB" dirty="0"/>
+              <a:t>decide on acceptance of model changes by means of accuracy measure </a:t>
+            </a:r>
+            <a:r>
+              <a:rPr lang="en-GB" dirty="0">
+                <a:sym typeface="Wingdings" pitchFamily="2" charset="2"/>
+              </a:rPr>
+              <a:t></a:t>
+            </a:r>
+            <a:r>
+              <a:rPr lang="en-GB" dirty="0"/>
+              <a:t> improved model vs baseline (current best)</a:t>
+            </a:r>
+            <a:endParaRPr lang="de-DE" dirty="0"/>
+          </a:p>
+          <a:p>
+            <a:pPr marL="514350" indent="-514350">
+              <a:buFont typeface="+mj-lt"/>
+              <a:buAutoNum type="arabicPeriod"/>
+            </a:pPr>
+            <a:endParaRPr lang="de-DE" dirty="0"/>
+          </a:p>
+          <a:p>
+            <a:pPr marL="514350" indent="-514350">
+              <a:buFont typeface="+mj-lt"/>
+              <a:buAutoNum type="arabicPeriod"/>
+            </a:pPr>
+            <a:r>
+              <a:rPr lang="de-DE" dirty="0" err="1"/>
+              <a:t>test</a:t>
+            </a:r>
             <a:r>
               <a:rPr lang="de-DE" dirty="0"/>
-              <a:t>MSE, MAE</a:t>
-            </a:r>
-          </a:p>
-          <a:p>
-            <a:r>
-              <a:rPr lang="de-DE" dirty="0" err="1"/>
-              <a:t>cross</a:t>
-            </a:r>
-            <a:r>
-              <a:rPr lang="de-DE" dirty="0"/>
-              <a:t>-validation</a:t>
-            </a:r>
-          </a:p>
-          <a:p>
-            <a:r>
-              <a:rPr lang="de-DE" dirty="0"/>
-              <a:t>feature </a:t>
-            </a:r>
-            <a:r>
-              <a:rPr lang="de-DE" dirty="0" err="1"/>
-              <a:t>importance</a:t>
-            </a:r>
-            <a:endParaRPr lang="de-DE" dirty="0"/>
-          </a:p>
-          <a:p>
-            <a:r>
-              <a:rPr lang="de-DE" dirty="0" err="1"/>
-              <a:t>explainability</a:t>
-            </a:r>
-            <a:r>
-              <a:rPr lang="de-DE" dirty="0"/>
-              <a:t>, SHAP, LIME</a:t>
-            </a:r>
-          </a:p>
-        </p:txBody>
-      </p:sp>
-      <p:sp>
-        <p:nvSpPr>
-          <p:cNvPr id="5" name="Foliennummernplatzhalter 4">
-            <a:extLst>
-              <a:ext uri="{FF2B5EF4-FFF2-40B4-BE49-F238E27FC236}">
-                <a16:creationId xmlns:a16="http://schemas.microsoft.com/office/drawing/2014/main" id="{422405FE-CC14-5A9E-E6BC-374EBECB4E84}"/>
+              <a:t> </a:t>
+            </a:r>
+            <a:r>
+              <a:rPr lang="en-GB" dirty="0"/>
+              <a:t>(i.e., out-of-sample) accuracy of predictions: the final goal</a:t>
+            </a:r>
+            <a:endParaRPr lang="en-GB" b="1" dirty="0"/>
+          </a:p>
+        </p:txBody>
+      </p:sp>
+      <p:sp>
+        <p:nvSpPr>
+          <p:cNvPr id="4" name="Slide Number Placeholder 3">
+            <a:extLst>
+              <a:ext uri="{FF2B5EF4-FFF2-40B4-BE49-F238E27FC236}">
+                <a16:creationId xmlns:a16="http://schemas.microsoft.com/office/drawing/2014/main" id="{64ED337D-9FEE-AC0F-54C9-AE8B1187FB21}"/>
               </a:ext>
             </a:extLst>
           </p:cNvPr>
@@ -6197,18 +5972,18 @@
           <a:bodyPr/>
           <a:lstStyle/>
           <a:p>
-            <a:fld id="{08C366F5-AFAD-49CB-854A-9D9E238FCA13}" type="slidenum">
-              <a:rPr lang="en-GB" smtClean="0"/>
+            <a:fld id="{ADDEFC8A-584C-5E41-A633-418C2FB73F75}" type="slidenum">
+              <a:rPr lang="en-DE" smtClean="0"/>
               <a:t>3</a:t>
             </a:fld>
-            <a:endParaRPr lang="en-GB"/>
+            <a:endParaRPr lang="en-DE"/>
           </a:p>
         </p:txBody>
       </p:sp>
     </p:spTree>
     <p:extLst>
       <p:ext uri="{BB962C8B-B14F-4D97-AF65-F5344CB8AC3E}">
-        <p14:creationId xmlns:p14="http://schemas.microsoft.com/office/powerpoint/2010/main" val="3204133960"/>
+        <p14:creationId xmlns:p14="http://schemas.microsoft.com/office/powerpoint/2010/main" val="1198576018"/>
       </p:ext>
     </p:extLst>
   </p:cSld>
@@ -6237,10 +6012,10 @@
       </p:grpSpPr>
       <p:sp>
         <p:nvSpPr>
-          <p:cNvPr id="2" name="Title 1">
-            <a:extLst>
-              <a:ext uri="{FF2B5EF4-FFF2-40B4-BE49-F238E27FC236}">
-                <a16:creationId xmlns:a16="http://schemas.microsoft.com/office/drawing/2014/main" id="{FAF00118-42C4-0F41-5612-17227D0CB322}"/>
+          <p:cNvPr id="2" name="Titel 1">
+            <a:extLst>
+              <a:ext uri="{FF2B5EF4-FFF2-40B4-BE49-F238E27FC236}">
+                <a16:creationId xmlns:a16="http://schemas.microsoft.com/office/drawing/2014/main" id="{D4A0CD86-1FBA-63C4-0B98-0D566F71A50B}"/>
               </a:ext>
             </a:extLst>
           </p:cNvPr>
@@ -6258,57 +6033,11 @@
           <a:p>
             <a:r>
               <a:rPr lang="de-DE" dirty="0"/>
-              <a:t>Evaluation Scenarios </a:t>
-            </a:r>
-            <a:endParaRPr lang="en-DE" dirty="0"/>
-          </a:p>
-        </p:txBody>
-      </p:sp>
-      <p:sp>
-        <p:nvSpPr>
-          <p:cNvPr id="18" name="Inhaltsplatzhalter 17">
-            <a:extLst>
-              <a:ext uri="{FF2B5EF4-FFF2-40B4-BE49-F238E27FC236}">
-                <a16:creationId xmlns:a16="http://schemas.microsoft.com/office/drawing/2014/main" id="{6E20920F-B47E-760E-5843-5D1830A3AE87}"/>
-              </a:ext>
-            </a:extLst>
-          </p:cNvPr>
-          <p:cNvSpPr>
-            <a:spLocks noGrp="1"/>
-          </p:cNvSpPr>
-          <p:nvPr>
-            <p:ph idx="1"/>
-          </p:nvPr>
-        </p:nvSpPr>
-        <p:spPr/>
-        <p:txBody>
-          <a:bodyPr/>
-          <a:lstStyle/>
-          <a:p>
-            <a:pPr marL="514350" indent="-514350">
-              <a:buFont typeface="+mj-lt"/>
-              <a:buAutoNum type="arabicPeriod"/>
-            </a:pPr>
-            <a:r>
-              <a:rPr lang="en-GB" dirty="0"/>
-              <a:t>loss function in training: proxy for later test accuracy</a:t>
-            </a:r>
-          </a:p>
-          <a:p>
-            <a:pPr marL="514350" indent="-514350">
-              <a:buFont typeface="+mj-lt"/>
-              <a:buAutoNum type="arabicPeriod"/>
-            </a:pPr>
-            <a:endParaRPr lang="de-DE" dirty="0"/>
-          </a:p>
-          <a:p>
-            <a:pPr marL="514350" indent="-514350">
-              <a:buFont typeface="+mj-lt"/>
-              <a:buAutoNum type="arabicPeriod"/>
-            </a:pPr>
+              <a:t>Classification </a:t>
+            </a:r>
             <a:r>
               <a:rPr lang="de-DE" dirty="0" err="1"/>
-              <a:t>model</a:t>
+              <a:t>Metrics</a:t>
             </a:r>
             <a:r>
               <a:rPr lang="de-DE" dirty="0"/>
@@ -6316,62 +6045,43 @@
             </a:r>
             <a:r>
               <a:rPr lang="de-DE" dirty="0" err="1"/>
-              <a:t>validation</a:t>
-            </a:r>
-            <a:r>
-              <a:rPr lang="de-DE" dirty="0"/>
-              <a:t>: </a:t>
-            </a:r>
-            <a:r>
-              <a:rPr lang="en-GB" dirty="0"/>
-              <a:t>decide on acceptance of model changes by means of accuracy measure </a:t>
-            </a:r>
-            <a:r>
-              <a:rPr lang="en-GB" dirty="0">
-                <a:sym typeface="Wingdings" pitchFamily="2" charset="2"/>
-              </a:rPr>
-              <a:t></a:t>
-            </a:r>
-            <a:r>
-              <a:rPr lang="en-GB" dirty="0"/>
-              <a:t> improved model vs baseline (current best)</a:t>
+              <a:t>Overview</a:t>
             </a:r>
             <a:endParaRPr lang="de-DE" dirty="0"/>
           </a:p>
-          <a:p>
-            <a:pPr marL="514350" indent="-514350">
-              <a:buFont typeface="+mj-lt"/>
-              <a:buAutoNum type="arabicPeriod"/>
-            </a:pPr>
-            <a:endParaRPr lang="de-DE" dirty="0"/>
-          </a:p>
-          <a:p>
-            <a:pPr marL="514350" indent="-514350">
-              <a:buFont typeface="+mj-lt"/>
-              <a:buAutoNum type="arabicPeriod"/>
-            </a:pPr>
-            <a:r>
-              <a:rPr lang="de-DE" dirty="0" err="1"/>
-              <a:t>test</a:t>
-            </a:r>
-            <a:r>
-              <a:rPr lang="de-DE" dirty="0"/>
-              <a:t> </a:t>
-            </a:r>
-            <a:r>
-              <a:rPr lang="en-GB" dirty="0"/>
-              <a:t>(i.e., out-of-sample) accuracy of predictions: the final goal</a:t>
-            </a:r>
-            <a:endParaRPr lang="en-GB" b="1" dirty="0"/>
-          </a:p>
-        </p:txBody>
-      </p:sp>
-      <p:sp>
-        <p:nvSpPr>
-          <p:cNvPr id="4" name="Slide Number Placeholder 3">
-            <a:extLst>
-              <a:ext uri="{FF2B5EF4-FFF2-40B4-BE49-F238E27FC236}">
-                <a16:creationId xmlns:a16="http://schemas.microsoft.com/office/drawing/2014/main" id="{64ED337D-9FEE-AC0F-54C9-AE8B1187FB21}"/>
+        </p:txBody>
+      </p:sp>
+      <p:sp>
+        <p:nvSpPr>
+          <p:cNvPr id="5" name="Inhaltsplatzhalter 4">
+            <a:extLst>
+              <a:ext uri="{FF2B5EF4-FFF2-40B4-BE49-F238E27FC236}">
+                <a16:creationId xmlns:a16="http://schemas.microsoft.com/office/drawing/2014/main" id="{A8059522-DA13-61AB-9D10-9CFA80A00AD6}"/>
+              </a:ext>
+            </a:extLst>
+          </p:cNvPr>
+          <p:cNvSpPr>
+            <a:spLocks noGrp="1"/>
+          </p:cNvSpPr>
+          <p:nvPr>
+            <p:ph idx="1"/>
+          </p:nvPr>
+        </p:nvSpPr>
+        <p:spPr/>
+        <p:txBody>
+          <a:bodyPr/>
+          <a:lstStyle/>
+          <a:p>
+            <a:endParaRPr lang="de-DE"/>
+          </a:p>
+        </p:txBody>
+      </p:sp>
+      <p:sp>
+        <p:nvSpPr>
+          <p:cNvPr id="4" name="Foliennummernplatzhalter 3">
+            <a:extLst>
+              <a:ext uri="{FF2B5EF4-FFF2-40B4-BE49-F238E27FC236}">
+                <a16:creationId xmlns:a16="http://schemas.microsoft.com/office/drawing/2014/main" id="{68DA5B15-496B-C1D4-91C0-FE7F2D5342C4}"/>
               </a:ext>
             </a:extLst>
           </p:cNvPr>
@@ -6387,18 +6097,18 @@
           <a:bodyPr/>
           <a:lstStyle/>
           <a:p>
-            <a:fld id="{ADDEFC8A-584C-5E41-A633-418C2FB73F75}" type="slidenum">
-              <a:rPr lang="en-DE" smtClean="0"/>
+            <a:fld id="{08C366F5-AFAD-49CB-854A-9D9E238FCA13}" type="slidenum">
+              <a:rPr lang="en-GB" smtClean="0"/>
               <a:t>4</a:t>
             </a:fld>
-            <a:endParaRPr lang="en-DE"/>
+            <a:endParaRPr lang="en-GB"/>
           </a:p>
         </p:txBody>
       </p:sp>
     </p:spTree>
     <p:extLst>
       <p:ext uri="{BB962C8B-B14F-4D97-AF65-F5344CB8AC3E}">
-        <p14:creationId xmlns:p14="http://schemas.microsoft.com/office/powerpoint/2010/main" val="1198576018"/>
+        <p14:creationId xmlns:p14="http://schemas.microsoft.com/office/powerpoint/2010/main" val="2993718870"/>
       </p:ext>
     </p:extLst>
   </p:cSld>
@@ -6430,7 +6140,7 @@
           <p:cNvPr id="2" name="Titel 1">
             <a:extLst>
               <a:ext uri="{FF2B5EF4-FFF2-40B4-BE49-F238E27FC236}">
-                <a16:creationId xmlns:a16="http://schemas.microsoft.com/office/drawing/2014/main" id="{D4A0CD86-1FBA-63C4-0B98-0D566F71A50B}"/>
+                <a16:creationId xmlns:a16="http://schemas.microsoft.com/office/drawing/2014/main" id="{58EAC883-915A-D579-C4E3-3D97B44E8BFD}"/>
               </a:ext>
             </a:extLst>
           </p:cNvPr>
@@ -6447,12 +6157,16 @@
           <a:lstStyle/>
           <a:p>
             <a:r>
+              <a:rPr lang="de-DE" dirty="0" err="1"/>
+              <a:t>Accuracy</a:t>
+            </a:r>
+            <a:r>
               <a:rPr lang="de-DE" dirty="0"/>
-              <a:t>Classification </a:t>
+              <a:t> and </a:t>
             </a:r>
             <a:r>
               <a:rPr lang="de-DE" dirty="0" err="1"/>
-              <a:t>Metrics</a:t>
+              <a:t>Its</a:t>
             </a:r>
             <a:r>
               <a:rPr lang="de-DE" dirty="0"/>
@@ -6460,7 +6174,7 @@
             </a:r>
             <a:r>
               <a:rPr lang="de-DE" dirty="0" err="1"/>
-              <a:t>Overview</a:t>
+              <a:t>Limitations</a:t>
             </a:r>
             <a:endParaRPr lang="de-DE" dirty="0"/>
           </a:p>
@@ -6468,10 +6182,10 @@
       </p:sp>
       <p:sp>
         <p:nvSpPr>
-          <p:cNvPr id="5" name="Inhaltsplatzhalter 4">
-            <a:extLst>
-              <a:ext uri="{FF2B5EF4-FFF2-40B4-BE49-F238E27FC236}">
-                <a16:creationId xmlns:a16="http://schemas.microsoft.com/office/drawing/2014/main" id="{A8059522-DA13-61AB-9D10-9CFA80A00AD6}"/>
+          <p:cNvPr id="3" name="Inhaltsplatzhalter 2">
+            <a:extLst>
+              <a:ext uri="{FF2B5EF4-FFF2-40B4-BE49-F238E27FC236}">
+                <a16:creationId xmlns:a16="http://schemas.microsoft.com/office/drawing/2014/main" id="{04689AF4-BA0A-86FC-F129-38F6861EC04E}"/>
               </a:ext>
             </a:extLst>
           </p:cNvPr>
@@ -6496,7 +6210,7 @@
           <p:cNvPr id="4" name="Foliennummernplatzhalter 3">
             <a:extLst>
               <a:ext uri="{FF2B5EF4-FFF2-40B4-BE49-F238E27FC236}">
-                <a16:creationId xmlns:a16="http://schemas.microsoft.com/office/drawing/2014/main" id="{68DA5B15-496B-C1D4-91C0-FE7F2D5342C4}"/>
+                <a16:creationId xmlns:a16="http://schemas.microsoft.com/office/drawing/2014/main" id="{297100D6-F5D1-C95D-3778-6C8461E645BB}"/>
               </a:ext>
             </a:extLst>
           </p:cNvPr>
@@ -6523,7 +6237,7 @@
     </p:spTree>
     <p:extLst>
       <p:ext uri="{BB962C8B-B14F-4D97-AF65-F5344CB8AC3E}">
-        <p14:creationId xmlns:p14="http://schemas.microsoft.com/office/powerpoint/2010/main" val="2993718870"/>
+        <p14:creationId xmlns:p14="http://schemas.microsoft.com/office/powerpoint/2010/main" val="1606896380"/>
       </p:ext>
     </p:extLst>
   </p:cSld>
@@ -6555,7 +6269,7 @@
           <p:cNvPr id="2" name="Titel 1">
             <a:extLst>
               <a:ext uri="{FF2B5EF4-FFF2-40B4-BE49-F238E27FC236}">
-                <a16:creationId xmlns:a16="http://schemas.microsoft.com/office/drawing/2014/main" id="{58EAC883-915A-D579-C4E3-3D97B44E8BFD}"/>
+                <a16:creationId xmlns:a16="http://schemas.microsoft.com/office/drawing/2014/main" id="{363DE613-A82F-6152-DB77-0D8A6EA8B8F1}"/>
               </a:ext>
             </a:extLst>
           </p:cNvPr>
@@ -6572,26 +6286,9 @@
           <a:lstStyle/>
           <a:p>
             <a:r>
-              <a:rPr lang="de-DE" dirty="0" err="1"/>
-              <a:t>Accuracy</a:t>
-            </a:r>
-            <a:r>
               <a:rPr lang="de-DE" dirty="0"/>
-              <a:t> and </a:t>
-            </a:r>
-            <a:r>
-              <a:rPr lang="de-DE" dirty="0" err="1"/>
-              <a:t>Its</a:t>
-            </a:r>
-            <a:r>
-              <a:rPr lang="de-DE" dirty="0"/>
-              <a:t> </a:t>
-            </a:r>
-            <a:r>
-              <a:rPr lang="de-DE" dirty="0" err="1"/>
-              <a:t>Limitations</a:t>
-            </a:r>
-            <a:endParaRPr lang="de-DE" dirty="0"/>
+              <a:t>Precision, Recall, and F1 Score</a:t>
+            </a:r>
           </a:p>
         </p:txBody>
       </p:sp>
@@ -6600,7 +6297,7 @@
           <p:cNvPr id="3" name="Inhaltsplatzhalter 2">
             <a:extLst>
               <a:ext uri="{FF2B5EF4-FFF2-40B4-BE49-F238E27FC236}">
-                <a16:creationId xmlns:a16="http://schemas.microsoft.com/office/drawing/2014/main" id="{04689AF4-BA0A-86FC-F129-38F6861EC04E}"/>
+                <a16:creationId xmlns:a16="http://schemas.microsoft.com/office/drawing/2014/main" id="{5C50BBB8-62AC-61C3-F060-DEEDDD029649}"/>
               </a:ext>
             </a:extLst>
           </p:cNvPr>
@@ -6625,7 +6322,7 @@
           <p:cNvPr id="4" name="Foliennummernplatzhalter 3">
             <a:extLst>
               <a:ext uri="{FF2B5EF4-FFF2-40B4-BE49-F238E27FC236}">
-                <a16:creationId xmlns:a16="http://schemas.microsoft.com/office/drawing/2014/main" id="{297100D6-F5D1-C95D-3778-6C8461E645BB}"/>
+                <a16:creationId xmlns:a16="http://schemas.microsoft.com/office/drawing/2014/main" id="{268CC8B6-0789-F2A8-0979-F7382262E3E3}"/>
               </a:ext>
             </a:extLst>
           </p:cNvPr>
@@ -6652,7 +6349,7 @@
     </p:spTree>
     <p:extLst>
       <p:ext uri="{BB962C8B-B14F-4D97-AF65-F5344CB8AC3E}">
-        <p14:creationId xmlns:p14="http://schemas.microsoft.com/office/powerpoint/2010/main" val="1606896380"/>
+        <p14:creationId xmlns:p14="http://schemas.microsoft.com/office/powerpoint/2010/main" val="886707088"/>
       </p:ext>
     </p:extLst>
   </p:cSld>
@@ -6684,118 +6381,6 @@
           <p:cNvPr id="2" name="Titel 1">
             <a:extLst>
               <a:ext uri="{FF2B5EF4-FFF2-40B4-BE49-F238E27FC236}">
-                <a16:creationId xmlns:a16="http://schemas.microsoft.com/office/drawing/2014/main" id="{363DE613-A82F-6152-DB77-0D8A6EA8B8F1}"/>
-              </a:ext>
-            </a:extLst>
-          </p:cNvPr>
-          <p:cNvSpPr>
-            <a:spLocks noGrp="1"/>
-          </p:cNvSpPr>
-          <p:nvPr>
-            <p:ph type="title"/>
-          </p:nvPr>
-        </p:nvSpPr>
-        <p:spPr/>
-        <p:txBody>
-          <a:bodyPr/>
-          <a:lstStyle/>
-          <a:p>
-            <a:r>
-              <a:rPr lang="de-DE" dirty="0"/>
-              <a:t>Precision, Recall, and F1 Score</a:t>
-            </a:r>
-          </a:p>
-        </p:txBody>
-      </p:sp>
-      <p:sp>
-        <p:nvSpPr>
-          <p:cNvPr id="3" name="Inhaltsplatzhalter 2">
-            <a:extLst>
-              <a:ext uri="{FF2B5EF4-FFF2-40B4-BE49-F238E27FC236}">
-                <a16:creationId xmlns:a16="http://schemas.microsoft.com/office/drawing/2014/main" id="{5C50BBB8-62AC-61C3-F060-DEEDDD029649}"/>
-              </a:ext>
-            </a:extLst>
-          </p:cNvPr>
-          <p:cNvSpPr>
-            <a:spLocks noGrp="1"/>
-          </p:cNvSpPr>
-          <p:nvPr>
-            <p:ph idx="1"/>
-          </p:nvPr>
-        </p:nvSpPr>
-        <p:spPr/>
-        <p:txBody>
-          <a:bodyPr/>
-          <a:lstStyle/>
-          <a:p>
-            <a:endParaRPr lang="de-DE"/>
-          </a:p>
-        </p:txBody>
-      </p:sp>
-      <p:sp>
-        <p:nvSpPr>
-          <p:cNvPr id="4" name="Foliennummernplatzhalter 3">
-            <a:extLst>
-              <a:ext uri="{FF2B5EF4-FFF2-40B4-BE49-F238E27FC236}">
-                <a16:creationId xmlns:a16="http://schemas.microsoft.com/office/drawing/2014/main" id="{268CC8B6-0789-F2A8-0979-F7382262E3E3}"/>
-              </a:ext>
-            </a:extLst>
-          </p:cNvPr>
-          <p:cNvSpPr>
-            <a:spLocks noGrp="1"/>
-          </p:cNvSpPr>
-          <p:nvPr>
-            <p:ph type="sldNum" sz="quarter" idx="12"/>
-          </p:nvPr>
-        </p:nvSpPr>
-        <p:spPr/>
-        <p:txBody>
-          <a:bodyPr/>
-          <a:lstStyle/>
-          <a:p>
-            <a:fld id="{08C366F5-AFAD-49CB-854A-9D9E238FCA13}" type="slidenum">
-              <a:rPr lang="en-GB" smtClean="0"/>
-              <a:t>7</a:t>
-            </a:fld>
-            <a:endParaRPr lang="en-GB"/>
-          </a:p>
-        </p:txBody>
-      </p:sp>
-    </p:spTree>
-    <p:extLst>
-      <p:ext uri="{BB962C8B-B14F-4D97-AF65-F5344CB8AC3E}">
-        <p14:creationId xmlns:p14="http://schemas.microsoft.com/office/powerpoint/2010/main" val="886707088"/>
-      </p:ext>
-    </p:extLst>
-  </p:cSld>
-  <p:clrMapOvr>
-    <a:masterClrMapping/>
-  </p:clrMapOvr>
-</p:sld>
-</file>
-
-<file path=ppt/slides/slide8.xml><?xml version="1.0" encoding="utf-8"?>
-<p:sld xmlns:a="http://schemas.openxmlformats.org/drawingml/2006/main" xmlns:r="http://schemas.openxmlformats.org/officeDocument/2006/relationships" xmlns:p="http://schemas.openxmlformats.org/presentationml/2006/main">
-  <p:cSld>
-    <p:spTree>
-      <p:nvGrpSpPr>
-        <p:cNvPr id="1" name=""/>
-        <p:cNvGrpSpPr/>
-        <p:nvPr/>
-      </p:nvGrpSpPr>
-      <p:grpSpPr>
-        <a:xfrm>
-          <a:off x="0" y="0"/>
-          <a:ext cx="0" cy="0"/>
-          <a:chOff x="0" y="0"/>
-          <a:chExt cx="0" cy="0"/>
-        </a:xfrm>
-      </p:grpSpPr>
-      <p:sp>
-        <p:nvSpPr>
-          <p:cNvPr id="2" name="Titel 1">
-            <a:extLst>
-              <a:ext uri="{FF2B5EF4-FFF2-40B4-BE49-F238E27FC236}">
                 <a16:creationId xmlns:a16="http://schemas.microsoft.com/office/drawing/2014/main" id="{1C7B5534-C0BC-0BE0-63F7-F36673972A9A}"/>
               </a:ext>
             </a:extLst>
@@ -6883,7 +6468,7 @@
           <a:p>
             <a:fld id="{08C366F5-AFAD-49CB-854A-9D9E238FCA13}" type="slidenum">
               <a:rPr lang="en-GB" smtClean="0"/>
-              <a:t>8</a:t>
+              <a:t>7</a:t>
             </a:fld>
             <a:endParaRPr lang="en-GB"/>
           </a:p>
@@ -6938,6 +6523,214 @@
 </p:sld>
 </file>
 
+<file path=ppt/slides/slide8.xml><?xml version="1.0" encoding="utf-8"?>
+<p:sld xmlns:a="http://schemas.openxmlformats.org/drawingml/2006/main" xmlns:r="http://schemas.openxmlformats.org/officeDocument/2006/relationships" xmlns:p="http://schemas.openxmlformats.org/presentationml/2006/main">
+  <p:cSld>
+    <p:spTree>
+      <p:nvGrpSpPr>
+        <p:cNvPr id="1" name=""/>
+        <p:cNvGrpSpPr/>
+        <p:nvPr/>
+      </p:nvGrpSpPr>
+      <p:grpSpPr>
+        <a:xfrm>
+          <a:off x="0" y="0"/>
+          <a:ext cx="0" cy="0"/>
+          <a:chOff x="0" y="0"/>
+          <a:chExt cx="0" cy="0"/>
+        </a:xfrm>
+      </p:grpSpPr>
+      <p:sp>
+        <p:nvSpPr>
+          <p:cNvPr id="2" name="Titel 1">
+            <a:extLst>
+              <a:ext uri="{FF2B5EF4-FFF2-40B4-BE49-F238E27FC236}">
+                <a16:creationId xmlns:a16="http://schemas.microsoft.com/office/drawing/2014/main" id="{6201F250-668E-1F2D-259B-F5E2D23A0301}"/>
+              </a:ext>
+            </a:extLst>
+          </p:cNvPr>
+          <p:cNvSpPr>
+            <a:spLocks noGrp="1"/>
+          </p:cNvSpPr>
+          <p:nvPr>
+            <p:ph type="title"/>
+          </p:nvPr>
+        </p:nvSpPr>
+        <p:spPr/>
+        <p:txBody>
+          <a:bodyPr/>
+          <a:lstStyle/>
+          <a:p>
+            <a:r>
+              <a:rPr lang="de-DE" dirty="0"/>
+              <a:t>Regression </a:t>
+            </a:r>
+            <a:r>
+              <a:rPr lang="de-DE" dirty="0" err="1"/>
+              <a:t>Metrics</a:t>
+            </a:r>
+            <a:r>
+              <a:rPr lang="de-DE" dirty="0"/>
+              <a:t> </a:t>
+            </a:r>
+            <a:r>
+              <a:rPr lang="de-DE" dirty="0" err="1"/>
+              <a:t>Overview</a:t>
+            </a:r>
+            <a:endParaRPr lang="de-DE" dirty="0"/>
+          </a:p>
+        </p:txBody>
+      </p:sp>
+      <p:sp>
+        <p:nvSpPr>
+          <p:cNvPr id="3" name="Inhaltsplatzhalter 2">
+            <a:extLst>
+              <a:ext uri="{FF2B5EF4-FFF2-40B4-BE49-F238E27FC236}">
+                <a16:creationId xmlns:a16="http://schemas.microsoft.com/office/drawing/2014/main" id="{BEF3B1EE-D2A0-998F-FFA3-80C2A5645CED}"/>
+              </a:ext>
+            </a:extLst>
+          </p:cNvPr>
+          <p:cNvSpPr>
+            <a:spLocks noGrp="1"/>
+          </p:cNvSpPr>
+          <p:nvPr>
+            <p:ph idx="1"/>
+          </p:nvPr>
+        </p:nvSpPr>
+        <p:spPr/>
+        <p:txBody>
+          <a:bodyPr/>
+          <a:lstStyle/>
+          <a:p>
+            <a:pPr marL="52387" indent="0">
+              <a:buNone/>
+              <a:tabLst>
+                <a:tab pos="227013" algn="l"/>
+              </a:tabLst>
+            </a:pPr>
+            <a:r>
+              <a:rPr lang="en-US" dirty="0"/>
+              <a:t>p</a:t>
+            </a:r>
+            <a:r>
+              <a:rPr lang="en-DE"/>
+              <a:t>oint estimate:</a:t>
+            </a:r>
+            <a:endParaRPr lang="de-DE" dirty="0"/>
+          </a:p>
+          <a:p>
+            <a:pPr marL="509587" indent="-457200">
+              <a:tabLst>
+                <a:tab pos="227013" algn="l"/>
+              </a:tabLst>
+            </a:pPr>
+            <a:r>
+              <a:rPr lang="en-GB" dirty="0"/>
+              <a:t>a</a:t>
+            </a:r>
+            <a:r>
+              <a:rPr lang="en-DE"/>
+              <a:t>bsolute </a:t>
+            </a:r>
+            <a:r>
+              <a:rPr lang="de-DE" dirty="0" err="1"/>
+              <a:t>metrics</a:t>
+            </a:r>
+            <a:r>
+              <a:rPr lang="de-DE" dirty="0"/>
+              <a:t>: </a:t>
+            </a:r>
+            <a:r>
+              <a:rPr lang="en-DE"/>
+              <a:t>MAD, MSE, …</a:t>
+            </a:r>
+            <a:endParaRPr lang="de-DE" dirty="0"/>
+          </a:p>
+          <a:p>
+            <a:pPr marL="509587" indent="-457200">
+              <a:tabLst>
+                <a:tab pos="227013" algn="l"/>
+              </a:tabLst>
+            </a:pPr>
+            <a:r>
+              <a:rPr lang="en-DE"/>
+              <a:t>relative metrics</a:t>
+            </a:r>
+            <a:r>
+              <a:rPr lang="de-DE" dirty="0"/>
+              <a:t>: </a:t>
+            </a:r>
+            <a:r>
+              <a:rPr lang="en-DE"/>
+              <a:t>MAPE, …</a:t>
+            </a:r>
+          </a:p>
+          <a:p>
+            <a:pPr marL="60325" indent="0">
+              <a:buNone/>
+            </a:pPr>
+            <a:endParaRPr lang="en-GB" dirty="0"/>
+          </a:p>
+          <a:p>
+            <a:pPr marL="60325" indent="0">
+              <a:buNone/>
+            </a:pPr>
+            <a:r>
+              <a:rPr lang="en-GB" dirty="0"/>
+              <a:t>full probability distribution: </a:t>
+            </a:r>
+            <a:r>
+              <a:rPr lang="en-GB" dirty="0">
+                <a:hlinkClick r:id="rId2"/>
+              </a:rPr>
+              <a:t>a bit tricky</a:t>
+            </a:r>
+            <a:endParaRPr lang="en-DE"/>
+          </a:p>
+        </p:txBody>
+      </p:sp>
+      <p:sp>
+        <p:nvSpPr>
+          <p:cNvPr id="4" name="Foliennummernplatzhalter 3">
+            <a:extLst>
+              <a:ext uri="{FF2B5EF4-FFF2-40B4-BE49-F238E27FC236}">
+                <a16:creationId xmlns:a16="http://schemas.microsoft.com/office/drawing/2014/main" id="{0F8D7B7A-6D3D-D991-E71F-4A80F9194242}"/>
+              </a:ext>
+            </a:extLst>
+          </p:cNvPr>
+          <p:cNvSpPr>
+            <a:spLocks noGrp="1"/>
+          </p:cNvSpPr>
+          <p:nvPr>
+            <p:ph type="sldNum" sz="quarter" idx="12"/>
+          </p:nvPr>
+        </p:nvSpPr>
+        <p:spPr/>
+        <p:txBody>
+          <a:bodyPr/>
+          <a:lstStyle/>
+          <a:p>
+            <a:fld id="{08C366F5-AFAD-49CB-854A-9D9E238FCA13}" type="slidenum">
+              <a:rPr lang="en-GB" smtClean="0"/>
+              <a:t>8</a:t>
+            </a:fld>
+            <a:endParaRPr lang="en-GB"/>
+          </a:p>
+        </p:txBody>
+      </p:sp>
+    </p:spTree>
+    <p:extLst>
+      <p:ext uri="{BB962C8B-B14F-4D97-AF65-F5344CB8AC3E}">
+        <p14:creationId xmlns:p14="http://schemas.microsoft.com/office/powerpoint/2010/main" val="2963045572"/>
+      </p:ext>
+    </p:extLst>
+  </p:cSld>
+  <p:clrMapOvr>
+    <a:masterClrMapping/>
+  </p:clrMapOvr>
+</p:sld>
+</file>
+
 <file path=ppt/slides/slide9.xml><?xml version="1.0" encoding="utf-8"?>
 <p:sld xmlns:a="http://schemas.openxmlformats.org/drawingml/2006/main" xmlns:r="http://schemas.openxmlformats.org/officeDocument/2006/relationships" xmlns:p="http://schemas.openxmlformats.org/presentationml/2006/main">
   <p:cSld>
@@ -6960,7 +6753,7 @@
           <p:cNvPr id="2" name="Titel 1">
             <a:extLst>
               <a:ext uri="{FF2B5EF4-FFF2-40B4-BE49-F238E27FC236}">
-                <a16:creationId xmlns:a16="http://schemas.microsoft.com/office/drawing/2014/main" id="{6201F250-668E-1F2D-259B-F5E2D23A0301}"/>
+                <a16:creationId xmlns:a16="http://schemas.microsoft.com/office/drawing/2014/main" id="{F7D48AAE-28AC-8C0A-807E-EECDA41513C2}"/>
               </a:ext>
             </a:extLst>
           </p:cNvPr>
@@ -6978,21 +6771,16 @@
           <a:p>
             <a:r>
               <a:rPr lang="de-DE" dirty="0"/>
-              <a:t>Regression </a:t>
+              <a:t>Mean </a:t>
             </a:r>
             <a:r>
               <a:rPr lang="de-DE" dirty="0" err="1"/>
-              <a:t>Metrics</a:t>
+              <a:t>Squared</a:t>
             </a:r>
             <a:r>
               <a:rPr lang="de-DE" dirty="0"/>
-              <a:t> </a:t>
-            </a:r>
-            <a:r>
-              <a:rPr lang="de-DE" dirty="0" err="1"/>
-              <a:t>Overview</a:t>
-            </a:r>
-            <a:endParaRPr lang="de-DE" dirty="0"/>
+              <a:t> Error (MSE)</a:t>
+            </a:r>
           </a:p>
         </p:txBody>
       </p:sp>
@@ -7001,7 +6789,7 @@
           <p:cNvPr id="3" name="Inhaltsplatzhalter 2">
             <a:extLst>
               <a:ext uri="{FF2B5EF4-FFF2-40B4-BE49-F238E27FC236}">
-                <a16:creationId xmlns:a16="http://schemas.microsoft.com/office/drawing/2014/main" id="{BEF3B1EE-D2A0-998F-FFA3-80C2A5645CED}"/>
+                <a16:creationId xmlns:a16="http://schemas.microsoft.com/office/drawing/2014/main" id="{591121AB-A03C-208B-AADC-CE8997A83DD7}"/>
               </a:ext>
             </a:extLst>
           </p:cNvPr>
@@ -7017,90 +6805,7 @@
           <a:bodyPr/>
           <a:lstStyle/>
           <a:p>
-            <a:pPr marL="52387" indent="0">
-              <a:buNone/>
-              <a:tabLst>
-                <a:tab pos="227013" algn="l"/>
-              </a:tabLst>
-            </a:pPr>
-            <a:r>
-              <a:rPr lang="en-US" dirty="0"/>
-              <a:t>p</a:t>
-            </a:r>
-            <a:r>
-              <a:rPr lang="en-DE"/>
-              <a:t>oint estimate:</a:t>
-            </a:r>
-            <a:endParaRPr lang="de-DE" dirty="0"/>
-          </a:p>
-          <a:p>
-            <a:pPr marL="509587" indent="-457200">
-              <a:tabLst>
-                <a:tab pos="227013" algn="l"/>
-              </a:tabLst>
-            </a:pPr>
-            <a:r>
-              <a:rPr lang="en-GB" dirty="0"/>
-              <a:t>a</a:t>
-            </a:r>
-            <a:r>
-              <a:rPr lang="en-DE"/>
-              <a:t>bsolute </a:t>
-            </a:r>
-            <a:r>
-              <a:rPr lang="de-DE" dirty="0" err="1"/>
-              <a:t>metrics</a:t>
-            </a:r>
-            <a:r>
-              <a:rPr lang="de-DE" dirty="0"/>
-              <a:t>: </a:t>
-            </a:r>
-            <a:r>
-              <a:rPr lang="en-DE"/>
-              <a:t>MAD, MSE, …</a:t>
-            </a:r>
-            <a:endParaRPr lang="de-DE" dirty="0"/>
-          </a:p>
-          <a:p>
-            <a:pPr marL="509587" indent="-457200">
-              <a:tabLst>
-                <a:tab pos="227013" algn="l"/>
-              </a:tabLst>
-            </a:pPr>
-            <a:r>
-              <a:rPr lang="en-DE"/>
-              <a:t>relative metrics</a:t>
-            </a:r>
-            <a:r>
-              <a:rPr lang="de-DE" dirty="0"/>
-              <a:t>: </a:t>
-            </a:r>
-            <a:r>
-              <a:rPr lang="en-DE"/>
-              <a:t>MAPE, …</a:t>
-            </a:r>
-          </a:p>
-          <a:p>
-            <a:pPr marL="60325" indent="0">
-              <a:buNone/>
-            </a:pPr>
-            <a:endParaRPr lang="en-GB" dirty="0"/>
-          </a:p>
-          <a:p>
-            <a:pPr marL="60325" indent="0">
-              <a:buNone/>
-            </a:pPr>
-            <a:r>
-              <a:rPr lang="en-GB" dirty="0"/>
-              <a:t>full probability distribution: </a:t>
-            </a:r>
-            <a:r>
-              <a:rPr lang="en-GB" dirty="0">
-                <a:hlinkClick r:id="rId2"/>
-              </a:rPr>
-              <a:t>a bit tricky</a:t>
-            </a:r>
-            <a:endParaRPr lang="en-DE"/>
+            <a:endParaRPr lang="de-DE"/>
           </a:p>
         </p:txBody>
       </p:sp>
@@ -7109,7 +6814,7 @@
           <p:cNvPr id="4" name="Foliennummernplatzhalter 3">
             <a:extLst>
               <a:ext uri="{FF2B5EF4-FFF2-40B4-BE49-F238E27FC236}">
-                <a16:creationId xmlns:a16="http://schemas.microsoft.com/office/drawing/2014/main" id="{0F8D7B7A-6D3D-D991-E71F-4A80F9194242}"/>
+                <a16:creationId xmlns:a16="http://schemas.microsoft.com/office/drawing/2014/main" id="{B782E0FE-E0D6-E071-273A-26AAA32FE885}"/>
               </a:ext>
             </a:extLst>
           </p:cNvPr>
@@ -7136,7 +6841,7 @@
     </p:spTree>
     <p:extLst>
       <p:ext uri="{BB962C8B-B14F-4D97-AF65-F5344CB8AC3E}">
-        <p14:creationId xmlns:p14="http://schemas.microsoft.com/office/powerpoint/2010/main" val="2963045572"/>
+        <p14:creationId xmlns:p14="http://schemas.microsoft.com/office/powerpoint/2010/main" val="23702569"/>
       </p:ext>
     </p:extLst>
   </p:cSld>

--- a/slides/7_model_evaluation.pptx
+++ b/slides/7_model_evaluation.pptx
@@ -5,7 +5,7 @@
     <p:sldMasterId id="2147483648" r:id="rId1"/>
   </p:sldMasterIdLst>
   <p:notesMasterIdLst>
-    <p:notesMasterId r:id="rId23"/>
+    <p:notesMasterId r:id="rId19"/>
   </p:notesMasterIdLst>
   <p:sldIdLst>
     <p:sldId id="256" r:id="rId2"/>
@@ -18,17 +18,13 @@
     <p:sldId id="272" r:id="rId9"/>
     <p:sldId id="273" r:id="rId10"/>
     <p:sldId id="274" r:id="rId11"/>
-    <p:sldId id="300" r:id="rId12"/>
-    <p:sldId id="275" r:id="rId13"/>
-    <p:sldId id="276" r:id="rId14"/>
-    <p:sldId id="277" r:id="rId15"/>
-    <p:sldId id="290" r:id="rId16"/>
-    <p:sldId id="278" r:id="rId17"/>
-    <p:sldId id="279" r:id="rId18"/>
-    <p:sldId id="280" r:id="rId19"/>
-    <p:sldId id="281" r:id="rId20"/>
-    <p:sldId id="282" r:id="rId21"/>
-    <p:sldId id="283" r:id="rId22"/>
+    <p:sldId id="290" r:id="rId12"/>
+    <p:sldId id="278" r:id="rId13"/>
+    <p:sldId id="279" r:id="rId14"/>
+    <p:sldId id="280" r:id="rId15"/>
+    <p:sldId id="281" r:id="rId16"/>
+    <p:sldId id="282" r:id="rId17"/>
+    <p:sldId id="283" r:id="rId18"/>
   </p:sldIdLst>
   <p:sldSz cx="12192000" cy="6858000"/>
   <p:notesSz cx="6858000" cy="9144000"/>
@@ -4203,10 +4199,10 @@
       </p:grpSpPr>
       <p:sp>
         <p:nvSpPr>
-          <p:cNvPr id="2" name="Titel 1">
-            <a:extLst>
-              <a:ext uri="{FF2B5EF4-FFF2-40B4-BE49-F238E27FC236}">
-                <a16:creationId xmlns:a16="http://schemas.microsoft.com/office/drawing/2014/main" id="{C70FE7FD-E55A-75A1-2BCC-34FEE8D88300}"/>
+          <p:cNvPr id="2" name="Title 1">
+            <a:extLst>
+              <a:ext uri="{FF2B5EF4-FFF2-40B4-BE49-F238E27FC236}">
+                <a16:creationId xmlns:a16="http://schemas.microsoft.com/office/drawing/2014/main" id="{21415F10-CF24-B798-1344-DCF9E363C05D}"/>
               </a:ext>
             </a:extLst>
           </p:cNvPr>
@@ -4222,16 +4218,19 @@
           <a:bodyPr/>
           <a:lstStyle/>
           <a:p>
-            <a:endParaRPr lang="de-DE"/>
-          </a:p>
-        </p:txBody>
-      </p:sp>
-      <p:sp>
-        <p:nvSpPr>
-          <p:cNvPr id="3" name="Inhaltsplatzhalter 2">
-            <a:extLst>
-              <a:ext uri="{FF2B5EF4-FFF2-40B4-BE49-F238E27FC236}">
-                <a16:creationId xmlns:a16="http://schemas.microsoft.com/office/drawing/2014/main" id="{EFF99967-6236-3DFB-504F-D1CEAF7D6BCA}"/>
+            <a:r>
+              <a:rPr lang="en-DE" dirty="0"/>
+              <a:t>Black-Box Models</a:t>
+            </a:r>
+          </a:p>
+        </p:txBody>
+      </p:sp>
+      <p:sp>
+        <p:nvSpPr>
+          <p:cNvPr id="3" name="Content Placeholder 2">
+            <a:extLst>
+              <a:ext uri="{FF2B5EF4-FFF2-40B4-BE49-F238E27FC236}">
+                <a16:creationId xmlns:a16="http://schemas.microsoft.com/office/drawing/2014/main" id="{455FDA38-027C-BDF2-FF70-B542E9092FBE}"/>
               </a:ext>
             </a:extLst>
           </p:cNvPr>
@@ -4244,19 +4243,127 @@
         </p:nvSpPr>
         <p:spPr/>
         <p:txBody>
-          <a:bodyPr/>
-          <a:lstStyle/>
-          <a:p>
-            <a:endParaRPr lang="de-DE"/>
-          </a:p>
-        </p:txBody>
-      </p:sp>
-      <p:sp>
-        <p:nvSpPr>
-          <p:cNvPr id="4" name="Foliennummernplatzhalter 3">
-            <a:extLst>
-              <a:ext uri="{FF2B5EF4-FFF2-40B4-BE49-F238E27FC236}">
-                <a16:creationId xmlns:a16="http://schemas.microsoft.com/office/drawing/2014/main" id="{BA1DC205-AE15-F214-3B3C-956A09269819}"/>
+          <a:bodyPr>
+            <a:normAutofit/>
+          </a:bodyPr>
+          <a:lstStyle/>
+          <a:p>
+            <a:pPr marL="0" indent="0">
+              <a:buNone/>
+            </a:pPr>
+            <a:r>
+              <a:rPr lang="en-GB" dirty="0"/>
+              <a:t>T</a:t>
+            </a:r>
+            <a:r>
+              <a:rPr lang="en-DE" dirty="0"/>
+              <a:t>o build trust in AI systems, individual predictions/actions need to be fully transparent, i.e., explainable.</a:t>
+            </a:r>
+            <a:endParaRPr lang="en-GB" dirty="0"/>
+          </a:p>
+          <a:p>
+            <a:pPr marL="0" indent="0">
+              <a:buNone/>
+            </a:pPr>
+            <a:r>
+              <a:rPr lang="en-GB" sz="2800" dirty="0"/>
+              <a:t>(do not confuse </a:t>
+            </a:r>
+            <a:r>
+              <a:rPr lang="en-GB" sz="2800" dirty="0" err="1"/>
+              <a:t>explainability</a:t>
+            </a:r>
+            <a:r>
+              <a:rPr lang="en-GB" sz="2800" dirty="0"/>
+              <a:t> with causality though)</a:t>
+            </a:r>
+            <a:endParaRPr lang="en-DE" dirty="0"/>
+          </a:p>
+          <a:p>
+            <a:pPr marL="0" indent="0">
+              <a:buNone/>
+            </a:pPr>
+            <a:endParaRPr lang="en-DE" dirty="0"/>
+          </a:p>
+          <a:p>
+            <a:pPr marL="0" indent="0">
+              <a:buNone/>
+            </a:pPr>
+            <a:r>
+              <a:rPr lang="en-DE" dirty="0"/>
+              <a:t>Unfortunately, complex models like deep learning methods are difficult to interpret.</a:t>
+            </a:r>
+          </a:p>
+          <a:p>
+            <a:pPr marL="0" indent="0">
+              <a:buNone/>
+            </a:pPr>
+            <a:r>
+              <a:rPr lang="en-GB" dirty="0">
+                <a:sym typeface="Wingdings" pitchFamily="2" charset="2"/>
+              </a:rPr>
+              <a:t> n</a:t>
+            </a:r>
+            <a:r>
+              <a:rPr lang="en-DE" dirty="0">
+                <a:sym typeface="Wingdings" pitchFamily="2" charset="2"/>
+              </a:rPr>
+              <a:t>eed for model-agnostic methods to explain black-box models</a:t>
+            </a:r>
+          </a:p>
+          <a:p>
+            <a:pPr marL="0" indent="0">
+              <a:buNone/>
+            </a:pPr>
+            <a:r>
+              <a:rPr lang="en-GB" dirty="0"/>
+              <a:t>e</a:t>
+            </a:r>
+            <a:r>
+              <a:rPr lang="en-DE" dirty="0"/>
+              <a:t>xamples: local surrogates (</a:t>
+            </a:r>
+            <a:r>
+              <a:rPr lang="en-GB" dirty="0">
+                <a:hlinkClick r:id="rId2"/>
+              </a:rPr>
+              <a:t>LIME</a:t>
+            </a:r>
+            <a:r>
+              <a:rPr lang="en-DE" dirty="0"/>
+              <a:t>), Shapley values (</a:t>
+            </a:r>
+            <a:r>
+              <a:rPr lang="en-DE" dirty="0">
+                <a:hlinkClick r:id="rId3"/>
+              </a:rPr>
+              <a:t>SHAP</a:t>
+            </a:r>
+            <a:r>
+              <a:rPr lang="en-DE" dirty="0"/>
+              <a:t>)</a:t>
+            </a:r>
+          </a:p>
+          <a:p>
+            <a:pPr marL="0" indent="0">
+              <a:buNone/>
+            </a:pPr>
+            <a:r>
+              <a:rPr lang="en-DE" dirty="0">
+                <a:hlinkClick r:id="rId4"/>
+              </a:rPr>
+              <a:t>overview</a:t>
+            </a:r>
+            <a:endParaRPr lang="en-DE" dirty="0"/>
+          </a:p>
+        </p:txBody>
+      </p:sp>
+      <p:sp>
+        <p:nvSpPr>
+          <p:cNvPr id="4" name="Slide Number Placeholder 3">
+            <a:extLst>
+              <a:ext uri="{FF2B5EF4-FFF2-40B4-BE49-F238E27FC236}">
+                <a16:creationId xmlns:a16="http://schemas.microsoft.com/office/drawing/2014/main" id="{E55D36A3-331F-0FB9-177B-14774E79DFD4}"/>
               </a:ext>
             </a:extLst>
           </p:cNvPr>
@@ -4272,18 +4379,18 @@
           <a:bodyPr/>
           <a:lstStyle/>
           <a:p>
-            <a:fld id="{08C366F5-AFAD-49CB-854A-9D9E238FCA13}" type="slidenum">
-              <a:rPr lang="en-GB" smtClean="0"/>
+            <a:fld id="{290AF890-0265-4349-BF13-E30F01A2AA85}" type="slidenum">
+              <a:rPr lang="en-DE" smtClean="0"/>
               <a:t>11</a:t>
             </a:fld>
-            <a:endParaRPr lang="en-GB"/>
+            <a:endParaRPr lang="en-DE"/>
           </a:p>
         </p:txBody>
       </p:sp>
     </p:spTree>
     <p:extLst>
       <p:ext uri="{BB962C8B-B14F-4D97-AF65-F5344CB8AC3E}">
-        <p14:creationId xmlns:p14="http://schemas.microsoft.com/office/powerpoint/2010/main" val="2263489863"/>
+        <p14:creationId xmlns:p14="http://schemas.microsoft.com/office/powerpoint/2010/main" val="205709024"/>
       </p:ext>
     </p:extLst>
   </p:cSld>
@@ -4315,7 +4422,7 @@
           <p:cNvPr id="2" name="Titel 1">
             <a:extLst>
               <a:ext uri="{FF2B5EF4-FFF2-40B4-BE49-F238E27FC236}">
-                <a16:creationId xmlns:a16="http://schemas.microsoft.com/office/drawing/2014/main" id="{152AC68C-8E51-D16D-9BB6-357B2A674BDF}"/>
+                <a16:creationId xmlns:a16="http://schemas.microsoft.com/office/drawing/2014/main" id="{EEA2EC02-7369-A23B-1151-CA1A9D85F3F3}"/>
               </a:ext>
             </a:extLst>
           </p:cNvPr>
@@ -4333,11 +4440,19 @@
           <a:p>
             <a:r>
               <a:rPr lang="de-DE" dirty="0"/>
-              <a:t>Cross-Validation </a:t>
+              <a:t>Feature </a:t>
             </a:r>
             <a:r>
               <a:rPr lang="de-DE" dirty="0" err="1"/>
-              <a:t>Strategies</a:t>
+              <a:t>Importance</a:t>
+            </a:r>
+            <a:r>
+              <a:rPr lang="de-DE" dirty="0"/>
+              <a:t> </a:t>
+            </a:r>
+            <a:r>
+              <a:rPr lang="de-DE" dirty="0" err="1"/>
+              <a:t>Concepts</a:t>
             </a:r>
             <a:endParaRPr lang="de-DE" dirty="0"/>
           </a:p>
@@ -4348,7 +4463,7 @@
           <p:cNvPr id="3" name="Inhaltsplatzhalter 2">
             <a:extLst>
               <a:ext uri="{FF2B5EF4-FFF2-40B4-BE49-F238E27FC236}">
-                <a16:creationId xmlns:a16="http://schemas.microsoft.com/office/drawing/2014/main" id="{749BBA53-25CB-44B1-3477-C0C8FFB229E0}"/>
+                <a16:creationId xmlns:a16="http://schemas.microsoft.com/office/drawing/2014/main" id="{AB31F79B-2E2E-D375-1697-3C02F474DC61}"/>
               </a:ext>
             </a:extLst>
           </p:cNvPr>
@@ -4364,10 +4479,7 @@
           <a:bodyPr/>
           <a:lstStyle/>
           <a:p>
-            <a:r>
-              <a:rPr lang="de-DE" dirty="0"/>
-              <a:t>…</a:t>
-            </a:r>
+            <a:endParaRPr lang="de-DE"/>
           </a:p>
         </p:txBody>
       </p:sp>
@@ -4376,7 +4488,7 @@
           <p:cNvPr id="4" name="Foliennummernplatzhalter 3">
             <a:extLst>
               <a:ext uri="{FF2B5EF4-FFF2-40B4-BE49-F238E27FC236}">
-                <a16:creationId xmlns:a16="http://schemas.microsoft.com/office/drawing/2014/main" id="{B3242BE3-F324-23F7-81F5-17D5548B8C41}"/>
+                <a16:creationId xmlns:a16="http://schemas.microsoft.com/office/drawing/2014/main" id="{21BD6576-EA1B-4580-1AEA-9941C9ED6E23}"/>
               </a:ext>
             </a:extLst>
           </p:cNvPr>
@@ -4403,7 +4515,7 @@
     </p:spTree>
     <p:extLst>
       <p:ext uri="{BB962C8B-B14F-4D97-AF65-F5344CB8AC3E}">
-        <p14:creationId xmlns:p14="http://schemas.microsoft.com/office/powerpoint/2010/main" val="2900337028"/>
+        <p14:creationId xmlns:p14="http://schemas.microsoft.com/office/powerpoint/2010/main" val="394388186"/>
       </p:ext>
     </p:extLst>
   </p:cSld>
@@ -4435,7 +4547,7 @@
           <p:cNvPr id="2" name="Titel 1">
             <a:extLst>
               <a:ext uri="{FF2B5EF4-FFF2-40B4-BE49-F238E27FC236}">
-                <a16:creationId xmlns:a16="http://schemas.microsoft.com/office/drawing/2014/main" id="{77FFF5D6-0FCB-1A64-D8A4-EF19A04AFB1B}"/>
+                <a16:creationId xmlns:a16="http://schemas.microsoft.com/office/drawing/2014/main" id="{5595687C-3D76-45C0-405C-128B90739BA0}"/>
               </a:ext>
             </a:extLst>
           </p:cNvPr>
@@ -4452,13 +4564,22 @@
           <a:lstStyle/>
           <a:p>
             <a:r>
+              <a:rPr lang="de-DE" dirty="0"/>
+              <a:t>Model-</a:t>
+            </a:r>
+            <a:r>
               <a:rPr lang="de-DE" dirty="0" err="1"/>
-              <a:t>k-Fold</a:t>
+              <a:t>Specific</a:t>
             </a:r>
             <a:r>
               <a:rPr lang="de-DE" dirty="0"/>
-              <a:t> Cross-Validation</a:t>
-            </a:r>
+              <a:t> </a:t>
+            </a:r>
+            <a:r>
+              <a:rPr lang="de-DE" dirty="0" err="1"/>
+              <a:t>Importance</a:t>
+            </a:r>
+            <a:endParaRPr lang="de-DE" dirty="0"/>
           </a:p>
         </p:txBody>
       </p:sp>
@@ -4467,7 +4588,7 @@
           <p:cNvPr id="3" name="Inhaltsplatzhalter 2">
             <a:extLst>
               <a:ext uri="{FF2B5EF4-FFF2-40B4-BE49-F238E27FC236}">
-                <a16:creationId xmlns:a16="http://schemas.microsoft.com/office/drawing/2014/main" id="{592C0B87-A83F-A198-A1CB-7CCC171420D3}"/>
+                <a16:creationId xmlns:a16="http://schemas.microsoft.com/office/drawing/2014/main" id="{57ACC007-E966-C8DC-8020-739D15E8A848}"/>
               </a:ext>
             </a:extLst>
           </p:cNvPr>
@@ -4483,10 +4604,7 @@
           <a:bodyPr/>
           <a:lstStyle/>
           <a:p>
-            <a:r>
-              <a:rPr lang="de-DE" dirty="0"/>
-              <a:t>…</a:t>
-            </a:r>
+            <a:endParaRPr lang="de-DE"/>
           </a:p>
         </p:txBody>
       </p:sp>
@@ -4495,7 +4613,7 @@
           <p:cNvPr id="4" name="Foliennummernplatzhalter 3">
             <a:extLst>
               <a:ext uri="{FF2B5EF4-FFF2-40B4-BE49-F238E27FC236}">
-                <a16:creationId xmlns:a16="http://schemas.microsoft.com/office/drawing/2014/main" id="{04F83C66-D41C-833C-B12E-291DA9CF43B4}"/>
+                <a16:creationId xmlns:a16="http://schemas.microsoft.com/office/drawing/2014/main" id="{90FEA500-EB45-413A-5886-C05A459D9590}"/>
               </a:ext>
             </a:extLst>
           </p:cNvPr>
@@ -4519,46 +4637,10 @@
           </a:p>
         </p:txBody>
       </p:sp>
-      <p:pic>
-        <p:nvPicPr>
-          <p:cNvPr id="5" name="Picture 4">
-            <a:extLst>
-              <a:ext uri="{FF2B5EF4-FFF2-40B4-BE49-F238E27FC236}">
-                <a16:creationId xmlns:a16="http://schemas.microsoft.com/office/drawing/2014/main" id="{024854C2-4076-8109-F166-E6AE965E1001}"/>
-              </a:ext>
-            </a:extLst>
-          </p:cNvPr>
-          <p:cNvPicPr>
-            <a:picLocks noChangeAspect="1"/>
-          </p:cNvPicPr>
-          <p:nvPr/>
-        </p:nvPicPr>
-        <p:blipFill>
-          <a:blip r:embed="rId2">
-            <a:extLst>
-              <a:ext uri="{28A0092B-C50C-407E-A947-70E740481C1C}">
-                <a14:useLocalDpi xmlns:a14="http://schemas.microsoft.com/office/drawing/2010/main" val="0"/>
-              </a:ext>
-            </a:extLst>
-          </a:blip>
-          <a:stretch>
-            <a:fillRect/>
-          </a:stretch>
-        </p:blipFill>
-        <p:spPr>
-          <a:xfrm>
-            <a:off x="393261" y="3404485"/>
-            <a:ext cx="11405478" cy="2772478"/>
-          </a:xfrm>
-          <a:prstGeom prst="rect">
-            <a:avLst/>
-          </a:prstGeom>
-        </p:spPr>
-      </p:pic>
     </p:spTree>
     <p:extLst>
       <p:ext uri="{BB962C8B-B14F-4D97-AF65-F5344CB8AC3E}">
-        <p14:creationId xmlns:p14="http://schemas.microsoft.com/office/powerpoint/2010/main" val="1284975876"/>
+        <p14:creationId xmlns:p14="http://schemas.microsoft.com/office/powerpoint/2010/main" val="1875124591"/>
       </p:ext>
     </p:extLst>
   </p:cSld>
@@ -4590,7 +4672,7 @@
           <p:cNvPr id="2" name="Titel 1">
             <a:extLst>
               <a:ext uri="{FF2B5EF4-FFF2-40B4-BE49-F238E27FC236}">
-                <a16:creationId xmlns:a16="http://schemas.microsoft.com/office/drawing/2014/main" id="{321539D0-D7CA-A083-0E99-6E50927AB917}"/>
+                <a16:creationId xmlns:a16="http://schemas.microsoft.com/office/drawing/2014/main" id="{9A954931-0074-968B-0202-B8819C365CEF}"/>
               </a:ext>
             </a:extLst>
           </p:cNvPr>
@@ -4607,13 +4689,22 @@
           <a:lstStyle/>
           <a:p>
             <a:r>
+              <a:rPr lang="de-DE" dirty="0"/>
+              <a:t>Model-</a:t>
+            </a:r>
+            <a:r>
               <a:rPr lang="de-DE" dirty="0" err="1"/>
-              <a:t>Nested</a:t>
+              <a:t>Agnostic</a:t>
             </a:r>
             <a:r>
               <a:rPr lang="de-DE" dirty="0"/>
-              <a:t> Cross-Validation</a:t>
-            </a:r>
+              <a:t> </a:t>
+            </a:r>
+            <a:r>
+              <a:rPr lang="de-DE" dirty="0" err="1"/>
+              <a:t>Explainability</a:t>
+            </a:r>
+            <a:endParaRPr lang="de-DE" dirty="0"/>
           </a:p>
         </p:txBody>
       </p:sp>
@@ -4622,7 +4713,7 @@
           <p:cNvPr id="3" name="Inhaltsplatzhalter 2">
             <a:extLst>
               <a:ext uri="{FF2B5EF4-FFF2-40B4-BE49-F238E27FC236}">
-                <a16:creationId xmlns:a16="http://schemas.microsoft.com/office/drawing/2014/main" id="{EBB5F476-08D3-EA5A-3327-C6FA9616EC18}"/>
+                <a16:creationId xmlns:a16="http://schemas.microsoft.com/office/drawing/2014/main" id="{9BCB5DF1-2981-0D12-9EED-56F5740597A7}"/>
               </a:ext>
             </a:extLst>
           </p:cNvPr>
@@ -4647,7 +4738,7 @@
           <p:cNvPr id="4" name="Foliennummernplatzhalter 3">
             <a:extLst>
               <a:ext uri="{FF2B5EF4-FFF2-40B4-BE49-F238E27FC236}">
-                <a16:creationId xmlns:a16="http://schemas.microsoft.com/office/drawing/2014/main" id="{B83C44E1-9BD4-3F4F-BD01-67AB09FD4EC7}"/>
+                <a16:creationId xmlns:a16="http://schemas.microsoft.com/office/drawing/2014/main" id="{F7503E83-F57E-257D-4E6A-26E3EC944F12}"/>
               </a:ext>
             </a:extLst>
           </p:cNvPr>
@@ -4674,7 +4765,7 @@
     </p:spTree>
     <p:extLst>
       <p:ext uri="{BB962C8B-B14F-4D97-AF65-F5344CB8AC3E}">
-        <p14:creationId xmlns:p14="http://schemas.microsoft.com/office/powerpoint/2010/main" val="725974763"/>
+        <p14:creationId xmlns:p14="http://schemas.microsoft.com/office/powerpoint/2010/main" val="2746679437"/>
       </p:ext>
     </p:extLst>
   </p:cSld>
@@ -4703,10 +4794,10 @@
       </p:grpSpPr>
       <p:sp>
         <p:nvSpPr>
-          <p:cNvPr id="2" name="Title 1">
-            <a:extLst>
-              <a:ext uri="{FF2B5EF4-FFF2-40B4-BE49-F238E27FC236}">
-                <a16:creationId xmlns:a16="http://schemas.microsoft.com/office/drawing/2014/main" id="{21415F10-CF24-B798-1344-DCF9E363C05D}"/>
+          <p:cNvPr id="2" name="Titel 1">
+            <a:extLst>
+              <a:ext uri="{FF2B5EF4-FFF2-40B4-BE49-F238E27FC236}">
+                <a16:creationId xmlns:a16="http://schemas.microsoft.com/office/drawing/2014/main" id="{F6843E4B-7E71-2104-D4DE-DC5C793791C9}"/>
               </a:ext>
             </a:extLst>
           </p:cNvPr>
@@ -4723,18 +4814,18 @@
           <a:lstStyle/>
           <a:p>
             <a:r>
-              <a:rPr lang="en-DE" dirty="0"/>
-              <a:t>Black-Box Models</a:t>
-            </a:r>
-          </a:p>
-        </p:txBody>
-      </p:sp>
-      <p:sp>
-        <p:nvSpPr>
-          <p:cNvPr id="3" name="Content Placeholder 2">
-            <a:extLst>
-              <a:ext uri="{FF2B5EF4-FFF2-40B4-BE49-F238E27FC236}">
-                <a16:creationId xmlns:a16="http://schemas.microsoft.com/office/drawing/2014/main" id="{455FDA38-027C-BDF2-FF70-B542E9092FBE}"/>
+              <a:rPr lang="de-DE" dirty="0"/>
+              <a:t>SHAP Values</a:t>
+            </a:r>
+          </a:p>
+        </p:txBody>
+      </p:sp>
+      <p:sp>
+        <p:nvSpPr>
+          <p:cNvPr id="3" name="Inhaltsplatzhalter 2">
+            <a:extLst>
+              <a:ext uri="{FF2B5EF4-FFF2-40B4-BE49-F238E27FC236}">
+                <a16:creationId xmlns:a16="http://schemas.microsoft.com/office/drawing/2014/main" id="{F06D45B7-29AE-432E-6394-F1B22942AED8}"/>
               </a:ext>
             </a:extLst>
           </p:cNvPr>
@@ -4747,127 +4838,19 @@
         </p:nvSpPr>
         <p:spPr/>
         <p:txBody>
-          <a:bodyPr>
-            <a:normAutofit/>
-          </a:bodyPr>
-          <a:lstStyle/>
-          <a:p>
-            <a:pPr marL="0" indent="0">
-              <a:buNone/>
-            </a:pPr>
-            <a:r>
-              <a:rPr lang="en-GB" dirty="0"/>
-              <a:t>T</a:t>
-            </a:r>
-            <a:r>
-              <a:rPr lang="en-DE" dirty="0"/>
-              <a:t>o build trust in AI systems, individual predictions/actions need to be fully transparent, i.e., explainable.</a:t>
-            </a:r>
-            <a:endParaRPr lang="en-GB" dirty="0"/>
-          </a:p>
-          <a:p>
-            <a:pPr marL="0" indent="0">
-              <a:buNone/>
-            </a:pPr>
-            <a:r>
-              <a:rPr lang="en-GB" sz="2800" dirty="0"/>
-              <a:t>(do not confuse </a:t>
-            </a:r>
-            <a:r>
-              <a:rPr lang="en-GB" sz="2800" dirty="0" err="1"/>
-              <a:t>explainability</a:t>
-            </a:r>
-            <a:r>
-              <a:rPr lang="en-GB" sz="2800" dirty="0"/>
-              <a:t> with causality though)</a:t>
-            </a:r>
-            <a:endParaRPr lang="en-DE" dirty="0"/>
-          </a:p>
-          <a:p>
-            <a:pPr marL="0" indent="0">
-              <a:buNone/>
-            </a:pPr>
-            <a:endParaRPr lang="en-DE" dirty="0"/>
-          </a:p>
-          <a:p>
-            <a:pPr marL="0" indent="0">
-              <a:buNone/>
-            </a:pPr>
-            <a:r>
-              <a:rPr lang="en-DE" dirty="0"/>
-              <a:t>Unfortunately, complex models like deep learning methods are difficult to interpret.</a:t>
-            </a:r>
-          </a:p>
-          <a:p>
-            <a:pPr marL="0" indent="0">
-              <a:buNone/>
-            </a:pPr>
-            <a:r>
-              <a:rPr lang="en-GB" dirty="0">
-                <a:sym typeface="Wingdings" pitchFamily="2" charset="2"/>
-              </a:rPr>
-              <a:t> n</a:t>
-            </a:r>
-            <a:r>
-              <a:rPr lang="en-DE" dirty="0">
-                <a:sym typeface="Wingdings" pitchFamily="2" charset="2"/>
-              </a:rPr>
-              <a:t>eed for model-agnostic methods to explain black-box models</a:t>
-            </a:r>
-          </a:p>
-          <a:p>
-            <a:pPr marL="0" indent="0">
-              <a:buNone/>
-            </a:pPr>
-            <a:r>
-              <a:rPr lang="en-GB" dirty="0"/>
-              <a:t>e</a:t>
-            </a:r>
-            <a:r>
-              <a:rPr lang="en-DE" dirty="0"/>
-              <a:t>xamples: local surrogates (</a:t>
-            </a:r>
-            <a:r>
-              <a:rPr lang="en-GB" dirty="0">
-                <a:hlinkClick r:id="rId2"/>
-              </a:rPr>
-              <a:t>LIME</a:t>
-            </a:r>
-            <a:r>
-              <a:rPr lang="en-DE" dirty="0"/>
-              <a:t>), Shapley values (</a:t>
-            </a:r>
-            <a:r>
-              <a:rPr lang="en-DE" dirty="0">
-                <a:hlinkClick r:id="rId3"/>
-              </a:rPr>
-              <a:t>SHAP</a:t>
-            </a:r>
-            <a:r>
-              <a:rPr lang="en-DE" dirty="0"/>
-              <a:t>)</a:t>
-            </a:r>
-          </a:p>
-          <a:p>
-            <a:pPr marL="0" indent="0">
-              <a:buNone/>
-            </a:pPr>
-            <a:r>
-              <a:rPr lang="en-DE" dirty="0">
-                <a:hlinkClick r:id="rId4"/>
-              </a:rPr>
-              <a:t>overview</a:t>
-            </a:r>
-            <a:endParaRPr lang="en-DE" dirty="0"/>
-          </a:p>
-        </p:txBody>
-      </p:sp>
-      <p:sp>
-        <p:nvSpPr>
-          <p:cNvPr id="4" name="Slide Number Placeholder 3">
-            <a:extLst>
-              <a:ext uri="{FF2B5EF4-FFF2-40B4-BE49-F238E27FC236}">
-                <a16:creationId xmlns:a16="http://schemas.microsoft.com/office/drawing/2014/main" id="{E55D36A3-331F-0FB9-177B-14774E79DFD4}"/>
+          <a:bodyPr/>
+          <a:lstStyle/>
+          <a:p>
+            <a:endParaRPr lang="de-DE"/>
+          </a:p>
+        </p:txBody>
+      </p:sp>
+      <p:sp>
+        <p:nvSpPr>
+          <p:cNvPr id="4" name="Foliennummernplatzhalter 3">
+            <a:extLst>
+              <a:ext uri="{FF2B5EF4-FFF2-40B4-BE49-F238E27FC236}">
+                <a16:creationId xmlns:a16="http://schemas.microsoft.com/office/drawing/2014/main" id="{016DBBC4-8F62-F70D-BD00-F3E97C83AEC5}"/>
               </a:ext>
             </a:extLst>
           </p:cNvPr>
@@ -4883,18 +4866,18 @@
           <a:bodyPr/>
           <a:lstStyle/>
           <a:p>
-            <a:fld id="{290AF890-0265-4349-BF13-E30F01A2AA85}" type="slidenum">
-              <a:rPr lang="en-DE" smtClean="0"/>
+            <a:fld id="{08C366F5-AFAD-49CB-854A-9D9E238FCA13}" type="slidenum">
+              <a:rPr lang="en-GB" smtClean="0"/>
               <a:t>15</a:t>
             </a:fld>
-            <a:endParaRPr lang="en-DE"/>
+            <a:endParaRPr lang="en-GB"/>
           </a:p>
         </p:txBody>
       </p:sp>
     </p:spTree>
     <p:extLst>
       <p:ext uri="{BB962C8B-B14F-4D97-AF65-F5344CB8AC3E}">
-        <p14:creationId xmlns:p14="http://schemas.microsoft.com/office/powerpoint/2010/main" val="205709024"/>
+        <p14:creationId xmlns:p14="http://schemas.microsoft.com/office/powerpoint/2010/main" val="761598268"/>
       </p:ext>
     </p:extLst>
   </p:cSld>
@@ -4926,7 +4909,7 @@
           <p:cNvPr id="2" name="Titel 1">
             <a:extLst>
               <a:ext uri="{FF2B5EF4-FFF2-40B4-BE49-F238E27FC236}">
-                <a16:creationId xmlns:a16="http://schemas.microsoft.com/office/drawing/2014/main" id="{EEA2EC02-7369-A23B-1151-CA1A9D85F3F3}"/>
+                <a16:creationId xmlns:a16="http://schemas.microsoft.com/office/drawing/2014/main" id="{7FD9F2F3-7D06-9C50-F62E-390ABF38A3E4}"/>
               </a:ext>
             </a:extLst>
           </p:cNvPr>
@@ -4944,21 +4927,8 @@
           <a:p>
             <a:r>
               <a:rPr lang="de-DE" dirty="0"/>
-              <a:t>Feature </a:t>
-            </a:r>
-            <a:r>
-              <a:rPr lang="de-DE" dirty="0" err="1"/>
-              <a:t>Importance</a:t>
-            </a:r>
-            <a:r>
-              <a:rPr lang="de-DE" dirty="0"/>
-              <a:t> </a:t>
-            </a:r>
-            <a:r>
-              <a:rPr lang="de-DE" dirty="0" err="1"/>
-              <a:t>Concepts</a:t>
-            </a:r>
-            <a:endParaRPr lang="de-DE" dirty="0"/>
+              <a:t>LIME</a:t>
+            </a:r>
           </a:p>
         </p:txBody>
       </p:sp>
@@ -4967,7 +4937,7 @@
           <p:cNvPr id="3" name="Inhaltsplatzhalter 2">
             <a:extLst>
               <a:ext uri="{FF2B5EF4-FFF2-40B4-BE49-F238E27FC236}">
-                <a16:creationId xmlns:a16="http://schemas.microsoft.com/office/drawing/2014/main" id="{AB31F79B-2E2E-D375-1697-3C02F474DC61}"/>
+                <a16:creationId xmlns:a16="http://schemas.microsoft.com/office/drawing/2014/main" id="{F6F0507C-EE63-C14B-A96E-8F8C408B3708}"/>
               </a:ext>
             </a:extLst>
           </p:cNvPr>
@@ -4992,7 +4962,7 @@
           <p:cNvPr id="4" name="Foliennummernplatzhalter 3">
             <a:extLst>
               <a:ext uri="{FF2B5EF4-FFF2-40B4-BE49-F238E27FC236}">
-                <a16:creationId xmlns:a16="http://schemas.microsoft.com/office/drawing/2014/main" id="{21BD6576-EA1B-4580-1AEA-9941C9ED6E23}"/>
+                <a16:creationId xmlns:a16="http://schemas.microsoft.com/office/drawing/2014/main" id="{8FDA568B-A2BE-4961-6F31-A0E7D6D2D4C7}"/>
               </a:ext>
             </a:extLst>
           </p:cNvPr>
@@ -5019,7 +4989,7 @@
     </p:spTree>
     <p:extLst>
       <p:ext uri="{BB962C8B-B14F-4D97-AF65-F5344CB8AC3E}">
-        <p14:creationId xmlns:p14="http://schemas.microsoft.com/office/powerpoint/2010/main" val="394388186"/>
+        <p14:creationId xmlns:p14="http://schemas.microsoft.com/office/powerpoint/2010/main" val="2671766254"/>
       </p:ext>
     </p:extLst>
   </p:cSld>
@@ -5051,7 +5021,7 @@
           <p:cNvPr id="2" name="Titel 1">
             <a:extLst>
               <a:ext uri="{FF2B5EF4-FFF2-40B4-BE49-F238E27FC236}">
-                <a16:creationId xmlns:a16="http://schemas.microsoft.com/office/drawing/2014/main" id="{5595687C-3D76-45C0-405C-128B90739BA0}"/>
+                <a16:creationId xmlns:a16="http://schemas.microsoft.com/office/drawing/2014/main" id="{ED3F7E35-5378-F602-0537-CF82941E6B11}"/>
               </a:ext>
             </a:extLst>
           </p:cNvPr>
@@ -5068,12 +5038,8 @@
           <a:lstStyle/>
           <a:p>
             <a:r>
-              <a:rPr lang="de-DE" dirty="0"/>
-              <a:t>Model-</a:t>
-            </a:r>
-            <a:r>
               <a:rPr lang="de-DE" dirty="0" err="1"/>
-              <a:t>Specific</a:t>
+              <a:t>Interpreting</a:t>
             </a:r>
             <a:r>
               <a:rPr lang="de-DE" dirty="0"/>
@@ -5081,7 +5047,7 @@
             </a:r>
             <a:r>
               <a:rPr lang="de-DE" dirty="0" err="1"/>
-              <a:t>Importance</a:t>
+              <a:t>Explanations</a:t>
             </a:r>
             <a:endParaRPr lang="de-DE" dirty="0"/>
           </a:p>
@@ -5092,7 +5058,7 @@
           <p:cNvPr id="3" name="Inhaltsplatzhalter 2">
             <a:extLst>
               <a:ext uri="{FF2B5EF4-FFF2-40B4-BE49-F238E27FC236}">
-                <a16:creationId xmlns:a16="http://schemas.microsoft.com/office/drawing/2014/main" id="{57ACC007-E966-C8DC-8020-739D15E8A848}"/>
+                <a16:creationId xmlns:a16="http://schemas.microsoft.com/office/drawing/2014/main" id="{8504B4EF-FBB3-4531-6E08-A747A1F7D9B7}"/>
               </a:ext>
             </a:extLst>
           </p:cNvPr>
@@ -5117,7 +5083,7 @@
           <p:cNvPr id="4" name="Foliennummernplatzhalter 3">
             <a:extLst>
               <a:ext uri="{FF2B5EF4-FFF2-40B4-BE49-F238E27FC236}">
-                <a16:creationId xmlns:a16="http://schemas.microsoft.com/office/drawing/2014/main" id="{90FEA500-EB45-413A-5886-C05A459D9590}"/>
+                <a16:creationId xmlns:a16="http://schemas.microsoft.com/office/drawing/2014/main" id="{5E53D23A-D3BE-FB2D-ADBF-4F6F0560AAC5}"/>
               </a:ext>
             </a:extLst>
           </p:cNvPr>
@@ -5144,244 +5110,7 @@
     </p:spTree>
     <p:extLst>
       <p:ext uri="{BB962C8B-B14F-4D97-AF65-F5344CB8AC3E}">
-        <p14:creationId xmlns:p14="http://schemas.microsoft.com/office/powerpoint/2010/main" val="1875124591"/>
-      </p:ext>
-    </p:extLst>
-  </p:cSld>
-  <p:clrMapOvr>
-    <a:masterClrMapping/>
-  </p:clrMapOvr>
-</p:sld>
-</file>
-
-<file path=ppt/slides/slide18.xml><?xml version="1.0" encoding="utf-8"?>
-<p:sld xmlns:a="http://schemas.openxmlformats.org/drawingml/2006/main" xmlns:r="http://schemas.openxmlformats.org/officeDocument/2006/relationships" xmlns:p="http://schemas.openxmlformats.org/presentationml/2006/main">
-  <p:cSld>
-    <p:spTree>
-      <p:nvGrpSpPr>
-        <p:cNvPr id="1" name=""/>
-        <p:cNvGrpSpPr/>
-        <p:nvPr/>
-      </p:nvGrpSpPr>
-      <p:grpSpPr>
-        <a:xfrm>
-          <a:off x="0" y="0"/>
-          <a:ext cx="0" cy="0"/>
-          <a:chOff x="0" y="0"/>
-          <a:chExt cx="0" cy="0"/>
-        </a:xfrm>
-      </p:grpSpPr>
-      <p:sp>
-        <p:nvSpPr>
-          <p:cNvPr id="2" name="Titel 1">
-            <a:extLst>
-              <a:ext uri="{FF2B5EF4-FFF2-40B4-BE49-F238E27FC236}">
-                <a16:creationId xmlns:a16="http://schemas.microsoft.com/office/drawing/2014/main" id="{9A954931-0074-968B-0202-B8819C365CEF}"/>
-              </a:ext>
-            </a:extLst>
-          </p:cNvPr>
-          <p:cNvSpPr>
-            <a:spLocks noGrp="1"/>
-          </p:cNvSpPr>
-          <p:nvPr>
-            <p:ph type="title"/>
-          </p:nvPr>
-        </p:nvSpPr>
-        <p:spPr/>
-        <p:txBody>
-          <a:bodyPr/>
-          <a:lstStyle/>
-          <a:p>
-            <a:r>
-              <a:rPr lang="de-DE" dirty="0"/>
-              <a:t>Model-</a:t>
-            </a:r>
-            <a:r>
-              <a:rPr lang="de-DE" dirty="0" err="1"/>
-              <a:t>Agnostic</a:t>
-            </a:r>
-            <a:r>
-              <a:rPr lang="de-DE" dirty="0"/>
-              <a:t> </a:t>
-            </a:r>
-            <a:r>
-              <a:rPr lang="de-DE" dirty="0" err="1"/>
-              <a:t>Explainability</a:t>
-            </a:r>
-            <a:endParaRPr lang="de-DE" dirty="0"/>
-          </a:p>
-        </p:txBody>
-      </p:sp>
-      <p:sp>
-        <p:nvSpPr>
-          <p:cNvPr id="3" name="Inhaltsplatzhalter 2">
-            <a:extLst>
-              <a:ext uri="{FF2B5EF4-FFF2-40B4-BE49-F238E27FC236}">
-                <a16:creationId xmlns:a16="http://schemas.microsoft.com/office/drawing/2014/main" id="{9BCB5DF1-2981-0D12-9EED-56F5740597A7}"/>
-              </a:ext>
-            </a:extLst>
-          </p:cNvPr>
-          <p:cNvSpPr>
-            <a:spLocks noGrp="1"/>
-          </p:cNvSpPr>
-          <p:nvPr>
-            <p:ph idx="1"/>
-          </p:nvPr>
-        </p:nvSpPr>
-        <p:spPr/>
-        <p:txBody>
-          <a:bodyPr/>
-          <a:lstStyle/>
-          <a:p>
-            <a:endParaRPr lang="de-DE"/>
-          </a:p>
-        </p:txBody>
-      </p:sp>
-      <p:sp>
-        <p:nvSpPr>
-          <p:cNvPr id="4" name="Foliennummernplatzhalter 3">
-            <a:extLst>
-              <a:ext uri="{FF2B5EF4-FFF2-40B4-BE49-F238E27FC236}">
-                <a16:creationId xmlns:a16="http://schemas.microsoft.com/office/drawing/2014/main" id="{F7503E83-F57E-257D-4E6A-26E3EC944F12}"/>
-              </a:ext>
-            </a:extLst>
-          </p:cNvPr>
-          <p:cNvSpPr>
-            <a:spLocks noGrp="1"/>
-          </p:cNvSpPr>
-          <p:nvPr>
-            <p:ph type="sldNum" sz="quarter" idx="12"/>
-          </p:nvPr>
-        </p:nvSpPr>
-        <p:spPr/>
-        <p:txBody>
-          <a:bodyPr/>
-          <a:lstStyle/>
-          <a:p>
-            <a:fld id="{08C366F5-AFAD-49CB-854A-9D9E238FCA13}" type="slidenum">
-              <a:rPr lang="en-GB" smtClean="0"/>
-              <a:t>18</a:t>
-            </a:fld>
-            <a:endParaRPr lang="en-GB"/>
-          </a:p>
-        </p:txBody>
-      </p:sp>
-    </p:spTree>
-    <p:extLst>
-      <p:ext uri="{BB962C8B-B14F-4D97-AF65-F5344CB8AC3E}">
-        <p14:creationId xmlns:p14="http://schemas.microsoft.com/office/powerpoint/2010/main" val="2746679437"/>
-      </p:ext>
-    </p:extLst>
-  </p:cSld>
-  <p:clrMapOvr>
-    <a:masterClrMapping/>
-  </p:clrMapOvr>
-</p:sld>
-</file>
-
-<file path=ppt/slides/slide19.xml><?xml version="1.0" encoding="utf-8"?>
-<p:sld xmlns:a="http://schemas.openxmlformats.org/drawingml/2006/main" xmlns:r="http://schemas.openxmlformats.org/officeDocument/2006/relationships" xmlns:p="http://schemas.openxmlformats.org/presentationml/2006/main">
-  <p:cSld>
-    <p:spTree>
-      <p:nvGrpSpPr>
-        <p:cNvPr id="1" name=""/>
-        <p:cNvGrpSpPr/>
-        <p:nvPr/>
-      </p:nvGrpSpPr>
-      <p:grpSpPr>
-        <a:xfrm>
-          <a:off x="0" y="0"/>
-          <a:ext cx="0" cy="0"/>
-          <a:chOff x="0" y="0"/>
-          <a:chExt cx="0" cy="0"/>
-        </a:xfrm>
-      </p:grpSpPr>
-      <p:sp>
-        <p:nvSpPr>
-          <p:cNvPr id="2" name="Titel 1">
-            <a:extLst>
-              <a:ext uri="{FF2B5EF4-FFF2-40B4-BE49-F238E27FC236}">
-                <a16:creationId xmlns:a16="http://schemas.microsoft.com/office/drawing/2014/main" id="{F6843E4B-7E71-2104-D4DE-DC5C793791C9}"/>
-              </a:ext>
-            </a:extLst>
-          </p:cNvPr>
-          <p:cNvSpPr>
-            <a:spLocks noGrp="1"/>
-          </p:cNvSpPr>
-          <p:nvPr>
-            <p:ph type="title"/>
-          </p:nvPr>
-        </p:nvSpPr>
-        <p:spPr/>
-        <p:txBody>
-          <a:bodyPr/>
-          <a:lstStyle/>
-          <a:p>
-            <a:r>
-              <a:rPr lang="de-DE" dirty="0"/>
-              <a:t>SHAP Values</a:t>
-            </a:r>
-          </a:p>
-        </p:txBody>
-      </p:sp>
-      <p:sp>
-        <p:nvSpPr>
-          <p:cNvPr id="3" name="Inhaltsplatzhalter 2">
-            <a:extLst>
-              <a:ext uri="{FF2B5EF4-FFF2-40B4-BE49-F238E27FC236}">
-                <a16:creationId xmlns:a16="http://schemas.microsoft.com/office/drawing/2014/main" id="{F06D45B7-29AE-432E-6394-F1B22942AED8}"/>
-              </a:ext>
-            </a:extLst>
-          </p:cNvPr>
-          <p:cNvSpPr>
-            <a:spLocks noGrp="1"/>
-          </p:cNvSpPr>
-          <p:nvPr>
-            <p:ph idx="1"/>
-          </p:nvPr>
-        </p:nvSpPr>
-        <p:spPr/>
-        <p:txBody>
-          <a:bodyPr/>
-          <a:lstStyle/>
-          <a:p>
-            <a:endParaRPr lang="de-DE"/>
-          </a:p>
-        </p:txBody>
-      </p:sp>
-      <p:sp>
-        <p:nvSpPr>
-          <p:cNvPr id="4" name="Foliennummernplatzhalter 3">
-            <a:extLst>
-              <a:ext uri="{FF2B5EF4-FFF2-40B4-BE49-F238E27FC236}">
-                <a16:creationId xmlns:a16="http://schemas.microsoft.com/office/drawing/2014/main" id="{016DBBC4-8F62-F70D-BD00-F3E97C83AEC5}"/>
-              </a:ext>
-            </a:extLst>
-          </p:cNvPr>
-          <p:cNvSpPr>
-            <a:spLocks noGrp="1"/>
-          </p:cNvSpPr>
-          <p:nvPr>
-            <p:ph type="sldNum" sz="quarter" idx="12"/>
-          </p:nvPr>
-        </p:nvSpPr>
-        <p:spPr/>
-        <p:txBody>
-          <a:bodyPr/>
-          <a:lstStyle/>
-          <a:p>
-            <a:fld id="{08C366F5-AFAD-49CB-854A-9D9E238FCA13}" type="slidenum">
-              <a:rPr lang="en-GB" smtClean="0"/>
-              <a:t>19</a:t>
-            </a:fld>
-            <a:endParaRPr lang="en-GB"/>
-          </a:p>
-        </p:txBody>
-      </p:sp>
-    </p:spTree>
-    <p:extLst>
-      <p:ext uri="{BB962C8B-B14F-4D97-AF65-F5344CB8AC3E}">
-        <p14:creationId xmlns:p14="http://schemas.microsoft.com/office/powerpoint/2010/main" val="761598268"/>
+        <p14:creationId xmlns:p14="http://schemas.microsoft.com/office/powerpoint/2010/main" val="1867132667"/>
       </p:ext>
     </p:extLst>
   </p:cSld>
@@ -5482,16 +5211,6 @@
           </a:p>
           <a:p>
             <a:r>
-              <a:rPr lang="de-DE" dirty="0" err="1"/>
-              <a:t>cross</a:t>
-            </a:r>
-            <a:r>
-              <a:rPr lang="de-DE" dirty="0"/>
-              <a:t>-validation</a:t>
-            </a:r>
-          </a:p>
-          <a:p>
-            <a:r>
               <a:rPr lang="de-DE" dirty="0"/>
               <a:t>feature </a:t>
             </a:r>
@@ -5561,239 +5280,6 @@
     <p:extLst>
       <p:ext uri="{BB962C8B-B14F-4D97-AF65-F5344CB8AC3E}">
         <p14:creationId xmlns:p14="http://schemas.microsoft.com/office/powerpoint/2010/main" val="3204133960"/>
-      </p:ext>
-    </p:extLst>
-  </p:cSld>
-  <p:clrMapOvr>
-    <a:masterClrMapping/>
-  </p:clrMapOvr>
-</p:sld>
-</file>
-
-<file path=ppt/slides/slide20.xml><?xml version="1.0" encoding="utf-8"?>
-<p:sld xmlns:a="http://schemas.openxmlformats.org/drawingml/2006/main" xmlns:r="http://schemas.openxmlformats.org/officeDocument/2006/relationships" xmlns:p="http://schemas.openxmlformats.org/presentationml/2006/main">
-  <p:cSld>
-    <p:spTree>
-      <p:nvGrpSpPr>
-        <p:cNvPr id="1" name=""/>
-        <p:cNvGrpSpPr/>
-        <p:nvPr/>
-      </p:nvGrpSpPr>
-      <p:grpSpPr>
-        <a:xfrm>
-          <a:off x="0" y="0"/>
-          <a:ext cx="0" cy="0"/>
-          <a:chOff x="0" y="0"/>
-          <a:chExt cx="0" cy="0"/>
-        </a:xfrm>
-      </p:grpSpPr>
-      <p:sp>
-        <p:nvSpPr>
-          <p:cNvPr id="2" name="Titel 1">
-            <a:extLst>
-              <a:ext uri="{FF2B5EF4-FFF2-40B4-BE49-F238E27FC236}">
-                <a16:creationId xmlns:a16="http://schemas.microsoft.com/office/drawing/2014/main" id="{7FD9F2F3-7D06-9C50-F62E-390ABF38A3E4}"/>
-              </a:ext>
-            </a:extLst>
-          </p:cNvPr>
-          <p:cNvSpPr>
-            <a:spLocks noGrp="1"/>
-          </p:cNvSpPr>
-          <p:nvPr>
-            <p:ph type="title"/>
-          </p:nvPr>
-        </p:nvSpPr>
-        <p:spPr/>
-        <p:txBody>
-          <a:bodyPr/>
-          <a:lstStyle/>
-          <a:p>
-            <a:r>
-              <a:rPr lang="de-DE" dirty="0"/>
-              <a:t>LIME</a:t>
-            </a:r>
-          </a:p>
-        </p:txBody>
-      </p:sp>
-      <p:sp>
-        <p:nvSpPr>
-          <p:cNvPr id="3" name="Inhaltsplatzhalter 2">
-            <a:extLst>
-              <a:ext uri="{FF2B5EF4-FFF2-40B4-BE49-F238E27FC236}">
-                <a16:creationId xmlns:a16="http://schemas.microsoft.com/office/drawing/2014/main" id="{F6F0507C-EE63-C14B-A96E-8F8C408B3708}"/>
-              </a:ext>
-            </a:extLst>
-          </p:cNvPr>
-          <p:cNvSpPr>
-            <a:spLocks noGrp="1"/>
-          </p:cNvSpPr>
-          <p:nvPr>
-            <p:ph idx="1"/>
-          </p:nvPr>
-        </p:nvSpPr>
-        <p:spPr/>
-        <p:txBody>
-          <a:bodyPr/>
-          <a:lstStyle/>
-          <a:p>
-            <a:endParaRPr lang="de-DE"/>
-          </a:p>
-        </p:txBody>
-      </p:sp>
-      <p:sp>
-        <p:nvSpPr>
-          <p:cNvPr id="4" name="Foliennummernplatzhalter 3">
-            <a:extLst>
-              <a:ext uri="{FF2B5EF4-FFF2-40B4-BE49-F238E27FC236}">
-                <a16:creationId xmlns:a16="http://schemas.microsoft.com/office/drawing/2014/main" id="{8FDA568B-A2BE-4961-6F31-A0E7D6D2D4C7}"/>
-              </a:ext>
-            </a:extLst>
-          </p:cNvPr>
-          <p:cNvSpPr>
-            <a:spLocks noGrp="1"/>
-          </p:cNvSpPr>
-          <p:nvPr>
-            <p:ph type="sldNum" sz="quarter" idx="12"/>
-          </p:nvPr>
-        </p:nvSpPr>
-        <p:spPr/>
-        <p:txBody>
-          <a:bodyPr/>
-          <a:lstStyle/>
-          <a:p>
-            <a:fld id="{08C366F5-AFAD-49CB-854A-9D9E238FCA13}" type="slidenum">
-              <a:rPr lang="en-GB" smtClean="0"/>
-              <a:t>20</a:t>
-            </a:fld>
-            <a:endParaRPr lang="en-GB"/>
-          </a:p>
-        </p:txBody>
-      </p:sp>
-    </p:spTree>
-    <p:extLst>
-      <p:ext uri="{BB962C8B-B14F-4D97-AF65-F5344CB8AC3E}">
-        <p14:creationId xmlns:p14="http://schemas.microsoft.com/office/powerpoint/2010/main" val="2671766254"/>
-      </p:ext>
-    </p:extLst>
-  </p:cSld>
-  <p:clrMapOvr>
-    <a:masterClrMapping/>
-  </p:clrMapOvr>
-</p:sld>
-</file>
-
-<file path=ppt/slides/slide21.xml><?xml version="1.0" encoding="utf-8"?>
-<p:sld xmlns:a="http://schemas.openxmlformats.org/drawingml/2006/main" xmlns:r="http://schemas.openxmlformats.org/officeDocument/2006/relationships" xmlns:p="http://schemas.openxmlformats.org/presentationml/2006/main">
-  <p:cSld>
-    <p:spTree>
-      <p:nvGrpSpPr>
-        <p:cNvPr id="1" name=""/>
-        <p:cNvGrpSpPr/>
-        <p:nvPr/>
-      </p:nvGrpSpPr>
-      <p:grpSpPr>
-        <a:xfrm>
-          <a:off x="0" y="0"/>
-          <a:ext cx="0" cy="0"/>
-          <a:chOff x="0" y="0"/>
-          <a:chExt cx="0" cy="0"/>
-        </a:xfrm>
-      </p:grpSpPr>
-      <p:sp>
-        <p:nvSpPr>
-          <p:cNvPr id="2" name="Titel 1">
-            <a:extLst>
-              <a:ext uri="{FF2B5EF4-FFF2-40B4-BE49-F238E27FC236}">
-                <a16:creationId xmlns:a16="http://schemas.microsoft.com/office/drawing/2014/main" id="{ED3F7E35-5378-F602-0537-CF82941E6B11}"/>
-              </a:ext>
-            </a:extLst>
-          </p:cNvPr>
-          <p:cNvSpPr>
-            <a:spLocks noGrp="1"/>
-          </p:cNvSpPr>
-          <p:nvPr>
-            <p:ph type="title"/>
-          </p:nvPr>
-        </p:nvSpPr>
-        <p:spPr/>
-        <p:txBody>
-          <a:bodyPr/>
-          <a:lstStyle/>
-          <a:p>
-            <a:r>
-              <a:rPr lang="de-DE" dirty="0" err="1"/>
-              <a:t>Interpreting</a:t>
-            </a:r>
-            <a:r>
-              <a:rPr lang="de-DE" dirty="0"/>
-              <a:t> </a:t>
-            </a:r>
-            <a:r>
-              <a:rPr lang="de-DE" dirty="0" err="1"/>
-              <a:t>Explanations</a:t>
-            </a:r>
-            <a:endParaRPr lang="de-DE" dirty="0"/>
-          </a:p>
-        </p:txBody>
-      </p:sp>
-      <p:sp>
-        <p:nvSpPr>
-          <p:cNvPr id="3" name="Inhaltsplatzhalter 2">
-            <a:extLst>
-              <a:ext uri="{FF2B5EF4-FFF2-40B4-BE49-F238E27FC236}">
-                <a16:creationId xmlns:a16="http://schemas.microsoft.com/office/drawing/2014/main" id="{8504B4EF-FBB3-4531-6E08-A747A1F7D9B7}"/>
-              </a:ext>
-            </a:extLst>
-          </p:cNvPr>
-          <p:cNvSpPr>
-            <a:spLocks noGrp="1"/>
-          </p:cNvSpPr>
-          <p:nvPr>
-            <p:ph idx="1"/>
-          </p:nvPr>
-        </p:nvSpPr>
-        <p:spPr/>
-        <p:txBody>
-          <a:bodyPr/>
-          <a:lstStyle/>
-          <a:p>
-            <a:endParaRPr lang="de-DE"/>
-          </a:p>
-        </p:txBody>
-      </p:sp>
-      <p:sp>
-        <p:nvSpPr>
-          <p:cNvPr id="4" name="Foliennummernplatzhalter 3">
-            <a:extLst>
-              <a:ext uri="{FF2B5EF4-FFF2-40B4-BE49-F238E27FC236}">
-                <a16:creationId xmlns:a16="http://schemas.microsoft.com/office/drawing/2014/main" id="{5E53D23A-D3BE-FB2D-ADBF-4F6F0560AAC5}"/>
-              </a:ext>
-            </a:extLst>
-          </p:cNvPr>
-          <p:cNvSpPr>
-            <a:spLocks noGrp="1"/>
-          </p:cNvSpPr>
-          <p:nvPr>
-            <p:ph type="sldNum" sz="quarter" idx="12"/>
-          </p:nvPr>
-        </p:nvSpPr>
-        <p:spPr/>
-        <p:txBody>
-          <a:bodyPr/>
-          <a:lstStyle/>
-          <a:p>
-            <a:fld id="{08C366F5-AFAD-49CB-854A-9D9E238FCA13}" type="slidenum">
-              <a:rPr lang="en-GB" smtClean="0"/>
-              <a:t>21</a:t>
-            </a:fld>
-            <a:endParaRPr lang="en-GB"/>
-          </a:p>
-        </p:txBody>
-      </p:sp>
-    </p:spTree>
-    <p:extLst>
-      <p:ext uri="{BB962C8B-B14F-4D97-AF65-F5344CB8AC3E}">
-        <p14:creationId xmlns:p14="http://schemas.microsoft.com/office/powerpoint/2010/main" val="1867132667"/>
       </p:ext>
     </p:extLst>
   </p:cSld>

--- a/slides/7_model_evaluation.pptx
+++ b/slides/7_model_evaluation.pptx
@@ -5,7 +5,7 @@
     <p:sldMasterId id="2147483648" r:id="rId1"/>
   </p:sldMasterIdLst>
   <p:notesMasterIdLst>
-    <p:notesMasterId r:id="rId36"/>
+    <p:notesMasterId r:id="rId37"/>
   </p:notesMasterIdLst>
   <p:sldIdLst>
     <p:sldId id="256" r:id="rId2"/>
@@ -41,7 +41,8 @@
     <p:sldId id="324" r:id="rId32"/>
     <p:sldId id="282" r:id="rId33"/>
     <p:sldId id="281" r:id="rId34"/>
-    <p:sldId id="327" r:id="rId35"/>
+    <p:sldId id="664" r:id="rId35"/>
+    <p:sldId id="327" r:id="rId36"/>
   </p:sldIdLst>
   <p:sldSz cx="12192000" cy="6858000"/>
   <p:notesSz cx="6858000" cy="9144000"/>
@@ -512,7 +513,7 @@
           <a:p>
             <a:fld id="{506E0FD1-891F-4B1E-916D-E9B585160BB8}" type="datetimeFigureOut">
               <a:rPr lang="en-GB" smtClean="0"/>
-              <a:t>24/04/2026</a:t>
+              <a:t>25/04/2026</a:t>
             </a:fld>
             <a:endParaRPr lang="en-GB"/>
           </a:p>
@@ -929,7 +930,7 @@
           <a:p>
             <a:fld id="{D68C3F22-27B2-44E3-9C5F-D08126455F6F}" type="datetime1">
               <a:rPr lang="en-GB" smtClean="0"/>
-              <a:t>24/04/2026</a:t>
+              <a:t>25/04/2026</a:t>
             </a:fld>
             <a:endParaRPr lang="en-GB"/>
           </a:p>
@@ -1129,7 +1130,7 @@
           <a:p>
             <a:fld id="{1CD03846-7BF6-4FB6-A921-FF3379ADBD4C}" type="datetime1">
               <a:rPr lang="en-GB" smtClean="0"/>
-              <a:t>24/04/2026</a:t>
+              <a:t>25/04/2026</a:t>
             </a:fld>
             <a:endParaRPr lang="en-GB"/>
           </a:p>
@@ -1339,7 +1340,7 @@
           <a:p>
             <a:fld id="{99E1B91A-3FD0-4144-9C84-63E9688ED2FE}" type="datetime1">
               <a:rPr lang="en-GB" smtClean="0"/>
-              <a:t>24/04/2026</a:t>
+              <a:t>25/04/2026</a:t>
             </a:fld>
             <a:endParaRPr lang="en-GB"/>
           </a:p>
@@ -1539,7 +1540,7 @@
           <a:p>
             <a:fld id="{5295ED7B-FEAD-4734-819F-93EF4B0EA908}" type="datetime1">
               <a:rPr lang="en-GB" smtClean="0"/>
-              <a:t>24/04/2026</a:t>
+              <a:t>25/04/2026</a:t>
             </a:fld>
             <a:endParaRPr lang="en-GB"/>
           </a:p>
@@ -1815,7 +1816,7 @@
           <a:p>
             <a:fld id="{D2D5D4B4-C926-4B45-8815-1ED8911179A2}" type="datetime1">
               <a:rPr lang="en-GB" smtClean="0"/>
-              <a:t>24/04/2026</a:t>
+              <a:t>25/04/2026</a:t>
             </a:fld>
             <a:endParaRPr lang="en-GB"/>
           </a:p>
@@ -2083,7 +2084,7 @@
           <a:p>
             <a:fld id="{B4C5210A-0E37-4935-93AF-69F21A5F712F}" type="datetime1">
               <a:rPr lang="en-GB" smtClean="0"/>
-              <a:t>24/04/2026</a:t>
+              <a:t>25/04/2026</a:t>
             </a:fld>
             <a:endParaRPr lang="en-GB"/>
           </a:p>
@@ -2498,7 +2499,7 @@
           <a:p>
             <a:fld id="{3D3A6B2F-436C-4691-80E8-9C890E000E9D}" type="datetime1">
               <a:rPr lang="en-GB" smtClean="0"/>
-              <a:t>24/04/2026</a:t>
+              <a:t>25/04/2026</a:t>
             </a:fld>
             <a:endParaRPr lang="en-GB"/>
           </a:p>
@@ -2640,7 +2641,7 @@
           <a:p>
             <a:fld id="{84385F4C-D74B-496F-8D21-97E3549C783B}" type="datetime1">
               <a:rPr lang="en-GB" smtClean="0"/>
-              <a:t>24/04/2026</a:t>
+              <a:t>25/04/2026</a:t>
             </a:fld>
             <a:endParaRPr lang="en-GB"/>
           </a:p>
@@ -2753,7 +2754,7 @@
           <a:p>
             <a:fld id="{0CBDCB32-C241-4703-A832-4EB47BD54E83}" type="datetime1">
               <a:rPr lang="en-GB" smtClean="0"/>
-              <a:t>24/04/2026</a:t>
+              <a:t>25/04/2026</a:t>
             </a:fld>
             <a:endParaRPr lang="en-GB"/>
           </a:p>
@@ -3066,7 +3067,7 @@
           <a:p>
             <a:fld id="{85C150FF-BE95-4D25-A16A-E368A81CBF24}" type="datetime1">
               <a:rPr lang="en-GB" smtClean="0"/>
-              <a:t>24/04/2026</a:t>
+              <a:t>25/04/2026</a:t>
             </a:fld>
             <a:endParaRPr lang="en-GB"/>
           </a:p>
@@ -3355,7 +3356,7 @@
           <a:p>
             <a:fld id="{F3C5DB4B-B349-43C9-A424-BADA723AD9F1}" type="datetime1">
               <a:rPr lang="en-GB" smtClean="0"/>
-              <a:t>24/04/2026</a:t>
+              <a:t>25/04/2026</a:t>
             </a:fld>
             <a:endParaRPr lang="en-GB"/>
           </a:p>
@@ -3598,7 +3599,7 @@
           <a:p>
             <a:fld id="{12632426-0A0C-405F-A3D0-2D11AA44702A}" type="datetime1">
               <a:rPr lang="en-GB" smtClean="0"/>
-              <a:t>24/04/2026</a:t>
+              <a:t>25/04/2026</a:t>
             </a:fld>
             <a:endParaRPr lang="en-GB"/>
           </a:p>
@@ -4102,8 +4103,8 @@
           <a:chExt cx="0" cy="0"/>
         </a:xfrm>
       </p:grpSpPr>
-      <mc:AlternateContent xmlns:mc="http://schemas.openxmlformats.org/markup-compatibility/2006">
-        <mc:Choice xmlns:a14="http://schemas.microsoft.com/office/drawing/2010/main" Requires="a14">
+      <mc:AlternateContent xmlns:mc="http://schemas.openxmlformats.org/markup-compatibility/2006" xmlns:a14="http://schemas.microsoft.com/office/drawing/2010/main">
+        <mc:Choice Requires="a14">
           <p:sp>
             <p:nvSpPr>
               <p:cNvPr id="2" name="Titel 1">
@@ -4152,7 +4153,7 @@
             </p:txBody>
           </p:sp>
         </mc:Choice>
-        <mc:Fallback>
+        <mc:Fallback xmlns="">
           <p:sp>
             <p:nvSpPr>
               <p:cNvPr id="2" name="Titel 1">
@@ -4192,8 +4193,8 @@
           </p:sp>
         </mc:Fallback>
       </mc:AlternateContent>
-      <mc:AlternateContent xmlns:mc="http://schemas.openxmlformats.org/markup-compatibility/2006">
-        <mc:Choice xmlns:a14="http://schemas.microsoft.com/office/drawing/2010/main" Requires="a14">
+      <mc:AlternateContent xmlns:mc="http://schemas.openxmlformats.org/markup-compatibility/2006" xmlns:a14="http://schemas.microsoft.com/office/drawing/2010/main">
+        <mc:Choice Requires="a14">
           <p:sp>
             <p:nvSpPr>
               <p:cNvPr id="3" name="Inhaltsplatzhalter 2">
@@ -4355,6 +4356,7 @@
                     </m:oMath>
                   </m:oMathPara>
                 </a14:m>
+                <a:endParaRPr lang="de-DE" dirty="0"/>
               </a:p>
               <a:p>
                 <a:pPr marL="0" indent="0">
@@ -4479,7 +4481,7 @@
             </p:txBody>
           </p:sp>
         </mc:Choice>
-        <mc:Fallback>
+        <mc:Fallback xmlns="">
           <p:sp>
             <p:nvSpPr>
               <p:cNvPr id="3" name="Inhaltsplatzhalter 2">
@@ -4610,8 +4612,8 @@
           </a:p>
         </p:txBody>
       </p:sp>
-      <mc:AlternateContent xmlns:mc="http://schemas.openxmlformats.org/markup-compatibility/2006">
-        <mc:Choice xmlns:a14="http://schemas.microsoft.com/office/drawing/2010/main" Requires="a14">
+      <mc:AlternateContent xmlns:mc="http://schemas.openxmlformats.org/markup-compatibility/2006" xmlns:a14="http://schemas.microsoft.com/office/drawing/2010/main">
+        <mc:Choice Requires="a14">
           <p:sp>
             <p:nvSpPr>
               <p:cNvPr id="3" name="Inhaltsplatzhalter 2">
@@ -4777,6 +4779,7 @@
                     </m:oMath>
                   </m:oMathPara>
                 </a14:m>
+                <a:endParaRPr lang="de-DE" dirty="0"/>
               </a:p>
               <a:p>
                 <a:pPr marL="0" indent="0">
@@ -4868,7 +4871,7 @@
             </p:txBody>
           </p:sp>
         </mc:Choice>
-        <mc:Fallback>
+        <mc:Fallback xmlns="">
           <p:sp>
             <p:nvSpPr>
               <p:cNvPr id="3" name="Inhaltsplatzhalter 2">
@@ -4967,8 +4970,8 @@
           <a:chExt cx="0" cy="0"/>
         </a:xfrm>
       </p:grpSpPr>
-      <mc:AlternateContent xmlns:mc="http://schemas.openxmlformats.org/markup-compatibility/2006">
-        <mc:Choice xmlns:a14="http://schemas.microsoft.com/office/drawing/2010/main" Requires="a14">
+      <mc:AlternateContent xmlns:mc="http://schemas.openxmlformats.org/markup-compatibility/2006" xmlns:a14="http://schemas.microsoft.com/office/drawing/2010/main">
+        <mc:Choice Requires="a14">
           <p:sp>
             <p:nvSpPr>
               <p:cNvPr id="2" name="Titel 1">
@@ -5016,7 +5019,7 @@
             </p:txBody>
           </p:sp>
         </mc:Choice>
-        <mc:Fallback>
+        <mc:Fallback xmlns="">
           <p:sp>
             <p:nvSpPr>
               <p:cNvPr id="2" name="Titel 1">
@@ -5343,8 +5346,8 @@
           <a:chExt cx="0" cy="0"/>
         </a:xfrm>
       </p:grpSpPr>
-      <mc:AlternateContent xmlns:mc="http://schemas.openxmlformats.org/markup-compatibility/2006">
-        <mc:Choice xmlns:a14="http://schemas.microsoft.com/office/drawing/2010/main" Requires="a14">
+      <mc:AlternateContent xmlns:mc="http://schemas.openxmlformats.org/markup-compatibility/2006" xmlns:a14="http://schemas.microsoft.com/office/drawing/2010/main">
+        <mc:Choice Requires="a14">
           <p:sp>
             <p:nvSpPr>
               <p:cNvPr id="2" name="Titel 1">
@@ -5395,7 +5398,7 @@
             </p:txBody>
           </p:sp>
         </mc:Choice>
-        <mc:Fallback>
+        <mc:Fallback xmlns="">
           <p:sp>
             <p:nvSpPr>
               <p:cNvPr id="2" name="Titel 1">
@@ -6754,8 +6757,8 @@
           </a:p>
         </p:txBody>
       </p:sp>
-      <mc:AlternateContent xmlns:mc="http://schemas.openxmlformats.org/markup-compatibility/2006">
-        <mc:Choice xmlns:a14="http://schemas.microsoft.com/office/drawing/2010/main" Requires="a14">
+      <mc:AlternateContent xmlns:mc="http://schemas.openxmlformats.org/markup-compatibility/2006" xmlns:a14="http://schemas.microsoft.com/office/drawing/2010/main">
+        <mc:Choice Requires="a14">
           <p:sp>
             <p:nvSpPr>
               <p:cNvPr id="3" name="Inhaltsplatzhalter 2">
@@ -7045,7 +7048,7 @@
             </p:txBody>
           </p:sp>
         </mc:Choice>
-        <mc:Fallback>
+        <mc:Fallback xmlns="">
           <p:sp>
             <p:nvSpPr>
               <p:cNvPr id="3" name="Inhaltsplatzhalter 2">
@@ -7144,8 +7147,8 @@
           <a:chExt cx="0" cy="0"/>
         </a:xfrm>
       </p:grpSpPr>
-      <mc:AlternateContent xmlns:mc="http://schemas.openxmlformats.org/markup-compatibility/2006">
-        <mc:Choice xmlns:a14="http://schemas.microsoft.com/office/drawing/2010/main" Requires="a14">
+      <mc:AlternateContent xmlns:mc="http://schemas.openxmlformats.org/markup-compatibility/2006" xmlns:a14="http://schemas.microsoft.com/office/drawing/2010/main">
+        <mc:Choice Requires="a14">
           <p:sp>
             <p:nvSpPr>
               <p:cNvPr id="2" name="Titel 1">
@@ -7200,7 +7203,7 @@
             </p:txBody>
           </p:sp>
         </mc:Choice>
-        <mc:Fallback>
+        <mc:Fallback xmlns="">
           <p:sp>
             <p:nvSpPr>
               <p:cNvPr id="2" name="Titel 1">
@@ -7240,8 +7243,8 @@
           </p:sp>
         </mc:Fallback>
       </mc:AlternateContent>
-      <mc:AlternateContent xmlns:mc="http://schemas.openxmlformats.org/markup-compatibility/2006">
-        <mc:Choice xmlns:a14="http://schemas.microsoft.com/office/drawing/2010/main" Requires="a14">
+      <mc:AlternateContent xmlns:mc="http://schemas.openxmlformats.org/markup-compatibility/2006" xmlns:a14="http://schemas.microsoft.com/office/drawing/2010/main">
+        <mc:Choice Requires="a14">
           <p:sp>
             <p:nvSpPr>
               <p:cNvPr id="3" name="Inhaltsplatzhalter 2">
@@ -7576,7 +7579,7 @@
             </p:txBody>
           </p:sp>
         </mc:Choice>
-        <mc:Fallback>
+        <mc:Fallback xmlns="">
           <p:sp>
             <p:nvSpPr>
               <p:cNvPr id="3" name="Inhaltsplatzhalter 2">
@@ -7675,8 +7678,8 @@
           <a:chExt cx="0" cy="0"/>
         </a:xfrm>
       </p:grpSpPr>
-      <mc:AlternateContent xmlns:mc="http://schemas.openxmlformats.org/markup-compatibility/2006">
-        <mc:Choice xmlns:a14="http://schemas.microsoft.com/office/drawing/2010/main" Requires="a14">
+      <mc:AlternateContent xmlns:mc="http://schemas.openxmlformats.org/markup-compatibility/2006" xmlns:a14="http://schemas.microsoft.com/office/drawing/2010/main">
+        <mc:Choice Requires="a14">
           <p:sp>
             <p:nvSpPr>
               <p:cNvPr id="2" name="Titel 1">
@@ -7723,7 +7726,7 @@
             </p:txBody>
           </p:sp>
         </mc:Choice>
-        <mc:Fallback>
+        <mc:Fallback xmlns="">
           <p:sp>
             <p:nvSpPr>
               <p:cNvPr id="2" name="Titel 1">
@@ -7763,8 +7766,8 @@
           </p:sp>
         </mc:Fallback>
       </mc:AlternateContent>
-      <mc:AlternateContent xmlns:mc="http://schemas.openxmlformats.org/markup-compatibility/2006">
-        <mc:Choice xmlns:a14="http://schemas.microsoft.com/office/drawing/2010/main" Requires="a14">
+      <mc:AlternateContent xmlns:mc="http://schemas.openxmlformats.org/markup-compatibility/2006" xmlns:a14="http://schemas.microsoft.com/office/drawing/2010/main">
+        <mc:Choice Requires="a14">
           <p:sp>
             <p:nvSpPr>
               <p:cNvPr id="3" name="Inhaltsplatzhalter 2">
@@ -8124,7 +8127,7 @@
             </p:txBody>
           </p:sp>
         </mc:Choice>
-        <mc:Fallback>
+        <mc:Fallback xmlns="">
           <p:sp>
             <p:nvSpPr>
               <p:cNvPr id="3" name="Inhaltsplatzhalter 2">
@@ -8440,8 +8443,8 @@
           <a:chExt cx="0" cy="0"/>
         </a:xfrm>
       </p:grpSpPr>
-      <mc:AlternateContent xmlns:mc="http://schemas.openxmlformats.org/markup-compatibility/2006">
-        <mc:Choice xmlns:a14="http://schemas.microsoft.com/office/drawing/2010/main" Requires="a14">
+      <mc:AlternateContent xmlns:mc="http://schemas.openxmlformats.org/markup-compatibility/2006" xmlns:a14="http://schemas.microsoft.com/office/drawing/2010/main">
+        <mc:Choice Requires="a14">
           <p:sp>
             <p:nvSpPr>
               <p:cNvPr id="2" name="Titel 1">
@@ -8488,7 +8491,7 @@
             </p:txBody>
           </p:sp>
         </mc:Choice>
-        <mc:Fallback>
+        <mc:Fallback xmlns="">
           <p:sp>
             <p:nvSpPr>
               <p:cNvPr id="2" name="Titel 1">
@@ -8528,8 +8531,8 @@
           </p:sp>
         </mc:Fallback>
       </mc:AlternateContent>
-      <mc:AlternateContent xmlns:mc="http://schemas.openxmlformats.org/markup-compatibility/2006">
-        <mc:Choice xmlns:a14="http://schemas.microsoft.com/office/drawing/2010/main" Requires="a14">
+      <mc:AlternateContent xmlns:mc="http://schemas.openxmlformats.org/markup-compatibility/2006" xmlns:a14="http://schemas.microsoft.com/office/drawing/2010/main">
+        <mc:Choice Requires="a14">
           <p:sp>
             <p:nvSpPr>
               <p:cNvPr id="3" name="Inhaltsplatzhalter 2">
@@ -8880,7 +8883,7 @@
             </p:txBody>
           </p:sp>
         </mc:Choice>
-        <mc:Fallback>
+        <mc:Fallback xmlns="">
           <p:sp>
             <p:nvSpPr>
               <p:cNvPr id="3" name="Inhaltsplatzhalter 2">
@@ -8949,8 +8952,8 @@
           </a:p>
         </p:txBody>
       </p:sp>
-      <mc:AlternateContent xmlns:mc="http://schemas.openxmlformats.org/markup-compatibility/2006">
-        <mc:Choice xmlns:a14="http://schemas.microsoft.com/office/drawing/2010/main" Requires="a14">
+      <mc:AlternateContent xmlns:mc="http://schemas.openxmlformats.org/markup-compatibility/2006" xmlns:a14="http://schemas.microsoft.com/office/drawing/2010/main">
+        <mc:Choice Requires="a14">
           <p:sp>
             <p:nvSpPr>
               <p:cNvPr id="5" name="Textfeld 4">
@@ -9010,7 +9013,7 @@
             </p:txBody>
           </p:sp>
         </mc:Choice>
-        <mc:Fallback>
+        <mc:Fallback xmlns="">
           <p:sp>
             <p:nvSpPr>
               <p:cNvPr id="5" name="Textfeld 4">
@@ -9085,8 +9088,8 @@
           <a:chExt cx="0" cy="0"/>
         </a:xfrm>
       </p:grpSpPr>
-      <mc:AlternateContent xmlns:mc="http://schemas.openxmlformats.org/markup-compatibility/2006">
-        <mc:Choice xmlns:a14="http://schemas.microsoft.com/office/drawing/2010/main" Requires="a14">
+      <mc:AlternateContent xmlns:mc="http://schemas.openxmlformats.org/markup-compatibility/2006" xmlns:a14="http://schemas.microsoft.com/office/drawing/2010/main">
+        <mc:Choice Requires="a14">
           <p:sp>
             <p:nvSpPr>
               <p:cNvPr id="2" name="Titel 1">
@@ -9160,7 +9163,7 @@
             </p:txBody>
           </p:sp>
         </mc:Choice>
-        <mc:Fallback>
+        <mc:Fallback xmlns="">
           <p:sp>
             <p:nvSpPr>
               <p:cNvPr id="2" name="Titel 1">
@@ -9200,8 +9203,8 @@
           </p:sp>
         </mc:Fallback>
       </mc:AlternateContent>
-      <mc:AlternateContent xmlns:mc="http://schemas.openxmlformats.org/markup-compatibility/2006">
-        <mc:Choice xmlns:a14="http://schemas.microsoft.com/office/drawing/2010/main" Requires="a14">
+      <mc:AlternateContent xmlns:mc="http://schemas.openxmlformats.org/markup-compatibility/2006" xmlns:a14="http://schemas.microsoft.com/office/drawing/2010/main">
+        <mc:Choice Requires="a14">
           <p:sp>
             <p:nvSpPr>
               <p:cNvPr id="3" name="Inhaltsplatzhalter 2">
@@ -9536,7 +9539,7 @@
             </p:txBody>
           </p:sp>
         </mc:Choice>
-        <mc:Fallback>
+        <mc:Fallback xmlns="">
           <p:sp>
             <p:nvSpPr>
               <p:cNvPr id="3" name="Inhaltsplatzhalter 2">
@@ -9635,8 +9638,8 @@
           <a:chExt cx="0" cy="0"/>
         </a:xfrm>
       </p:grpSpPr>
-      <mc:AlternateContent xmlns:mc="http://schemas.openxmlformats.org/markup-compatibility/2006">
-        <mc:Choice xmlns:a14="http://schemas.microsoft.com/office/drawing/2010/main" Requires="a14">
+      <mc:AlternateContent xmlns:mc="http://schemas.openxmlformats.org/markup-compatibility/2006" xmlns:a14="http://schemas.microsoft.com/office/drawing/2010/main">
+        <mc:Choice Requires="a14">
           <p:sp>
             <p:nvSpPr>
               <p:cNvPr id="2" name="Titel 1">
@@ -9701,7 +9704,7 @@
             </p:txBody>
           </p:sp>
         </mc:Choice>
-        <mc:Fallback>
+        <mc:Fallback xmlns="">
           <p:sp>
             <p:nvSpPr>
               <p:cNvPr id="2" name="Titel 1">
@@ -9741,8 +9744,8 @@
           </p:sp>
         </mc:Fallback>
       </mc:AlternateContent>
-      <mc:AlternateContent xmlns:mc="http://schemas.openxmlformats.org/markup-compatibility/2006">
-        <mc:Choice xmlns:a14="http://schemas.microsoft.com/office/drawing/2010/main" Requires="a14">
+      <mc:AlternateContent xmlns:mc="http://schemas.openxmlformats.org/markup-compatibility/2006" xmlns:a14="http://schemas.microsoft.com/office/drawing/2010/main">
+        <mc:Choice Requires="a14">
           <p:sp>
             <p:nvSpPr>
               <p:cNvPr id="3" name="Inhaltsplatzhalter 2">
@@ -9854,7 +9857,7 @@
                       <m:sSup>
                         <m:sSupPr>
                           <m:ctrlPr>
-                            <a:rPr lang="de-DE" smtClean="0">
+                            <a:rPr lang="de-DE" i="1" smtClean="0">
                               <a:latin typeface="Cambria Math" panose="02040503050406030204" pitchFamily="18" charset="0"/>
                             </a:rPr>
                           </m:ctrlPr>
@@ -10329,7 +10332,7 @@
             </p:txBody>
           </p:sp>
         </mc:Choice>
-        <mc:Fallback>
+        <mc:Fallback xmlns="">
           <p:sp>
             <p:nvSpPr>
               <p:cNvPr id="3" name="Inhaltsplatzhalter 2">
@@ -10428,8 +10431,8 @@
           <a:chExt cx="0" cy="0"/>
         </a:xfrm>
       </p:grpSpPr>
-      <mc:AlternateContent xmlns:mc="http://schemas.openxmlformats.org/markup-compatibility/2006">
-        <mc:Choice xmlns:a14="http://schemas.microsoft.com/office/drawing/2010/main" Requires="a14">
+      <mc:AlternateContent xmlns:mc="http://schemas.openxmlformats.org/markup-compatibility/2006" xmlns:a14="http://schemas.microsoft.com/office/drawing/2010/main">
+        <mc:Choice Requires="a14">
           <p:sp>
             <p:nvSpPr>
               <p:cNvPr id="2" name="Titel 1">
@@ -10484,7 +10487,7 @@
             </p:txBody>
           </p:sp>
         </mc:Choice>
-        <mc:Fallback>
+        <mc:Fallback xmlns="">
           <p:sp>
             <p:nvSpPr>
               <p:cNvPr id="2" name="Titel 1">
@@ -10524,8 +10527,8 @@
           </p:sp>
         </mc:Fallback>
       </mc:AlternateContent>
-      <mc:AlternateContent xmlns:mc="http://schemas.openxmlformats.org/markup-compatibility/2006">
-        <mc:Choice xmlns:a14="http://schemas.microsoft.com/office/drawing/2010/main" Requires="a14">
+      <mc:AlternateContent xmlns:mc="http://schemas.openxmlformats.org/markup-compatibility/2006" xmlns:a14="http://schemas.microsoft.com/office/drawing/2010/main">
+        <mc:Choice Requires="a14">
           <p:sp>
             <p:nvSpPr>
               <p:cNvPr id="3" name="Inhaltsplatzhalter 2">
@@ -10854,7 +10857,6 @@
                 </a:r>
               </a:p>
               <a:p>
-                <a:pPr/>
                 <a:r>
                   <a:rPr lang="de-DE" dirty="0" err="1"/>
                   <a:t>undefined</a:t>
@@ -10923,7 +10925,7 @@
             </p:txBody>
           </p:sp>
         </mc:Choice>
-        <mc:Fallback>
+        <mc:Fallback xmlns="">
           <p:sp>
             <p:nvSpPr>
               <p:cNvPr id="3" name="Inhaltsplatzhalter 2">
@@ -11067,8 +11069,8 @@
           </a:p>
         </p:txBody>
       </p:sp>
-      <mc:AlternateContent xmlns:mc="http://schemas.openxmlformats.org/markup-compatibility/2006">
-        <mc:Choice xmlns:a14="http://schemas.microsoft.com/office/drawing/2010/main" Requires="a14">
+      <mc:AlternateContent xmlns:mc="http://schemas.openxmlformats.org/markup-compatibility/2006" xmlns:a14="http://schemas.microsoft.com/office/drawing/2010/main">
+        <mc:Choice Requires="a14">
           <p:sp>
             <p:nvSpPr>
               <p:cNvPr id="3" name="Inhaltsplatzhalter 2">
@@ -11294,7 +11296,7 @@
             </p:txBody>
           </p:sp>
         </mc:Choice>
-        <mc:Fallback>
+        <mc:Fallback xmlns="">
           <p:sp>
             <p:nvSpPr>
               <p:cNvPr id="3" name="Inhaltsplatzhalter 2">
@@ -11363,8 +11365,8 @@
           </a:p>
         </p:txBody>
       </p:sp>
-      <mc:AlternateContent xmlns:mc="http://schemas.openxmlformats.org/markup-compatibility/2006">
-        <mc:Choice xmlns:a14="http://schemas.microsoft.com/office/drawing/2010/main" Requires="a14">
+      <mc:AlternateContent xmlns:mc="http://schemas.openxmlformats.org/markup-compatibility/2006" xmlns:a14="http://schemas.microsoft.com/office/drawing/2010/main">
+        <mc:Choice Requires="a14">
           <p:sp>
             <p:nvSpPr>
               <p:cNvPr id="5" name="Textfeld 4">
@@ -11446,7 +11448,7 @@
             </p:txBody>
           </p:sp>
         </mc:Choice>
-        <mc:Fallback>
+        <mc:Fallback xmlns="">
           <p:sp>
             <p:nvSpPr>
               <p:cNvPr id="5" name="Textfeld 4">
@@ -11491,8 +11493,8 @@
           </p:sp>
         </mc:Fallback>
       </mc:AlternateContent>
-      <mc:AlternateContent xmlns:mc="http://schemas.openxmlformats.org/markup-compatibility/2006">
-        <mc:Choice xmlns:a14="http://schemas.microsoft.com/office/drawing/2010/main" Requires="a14">
+      <mc:AlternateContent xmlns:mc="http://schemas.openxmlformats.org/markup-compatibility/2006" xmlns:a14="http://schemas.microsoft.com/office/drawing/2010/main">
+        <mc:Choice Requires="a14">
           <p:sp>
             <p:nvSpPr>
               <p:cNvPr id="6" name="Textfeld 5">
@@ -11582,7 +11584,7 @@
             </p:txBody>
           </p:sp>
         </mc:Choice>
-        <mc:Fallback>
+        <mc:Fallback xmlns="">
           <p:sp>
             <p:nvSpPr>
               <p:cNvPr id="6" name="Textfeld 5">
@@ -14204,10 +14206,15 @@
                 <p:ph idx="1"/>
               </p:nvPr>
             </p:nvSpPr>
-            <p:spPr/>
+            <p:spPr>
+              <a:xfrm>
+                <a:off x="838200" y="1825625"/>
+                <a:ext cx="6396613" cy="4351338"/>
+              </a:xfrm>
+            </p:spPr>
             <p:txBody>
               <a:bodyPr>
-                <a:normAutofit fontScale="92500" lnSpcReduction="20000"/>
+                <a:normAutofit fontScale="77500" lnSpcReduction="20000"/>
               </a:bodyPr>
               <a:lstStyle/>
               <a:p>
@@ -14583,10 +14590,14 @@
               </p:nvPr>
             </p:nvSpPr>
             <p:spPr>
+              <a:xfrm>
+                <a:off x="838200" y="1825625"/>
+                <a:ext cx="6396613" cy="4351338"/>
+              </a:xfrm>
               <a:blipFill>
                 <a:blip r:embed="rId2"/>
                 <a:stretch>
-                  <a:fillRect l="-1086" t="-3488"/>
+                  <a:fillRect l="-1190" t="-2616"/>
                 </a:stretch>
               </a:blipFill>
             </p:spPr>
@@ -14634,6 +14645,36 @@
           </a:p>
         </p:txBody>
       </p:sp>
+      <p:pic>
+        <p:nvPicPr>
+          <p:cNvPr id="5" name="Grafik 4">
+            <a:extLst>
+              <a:ext uri="{FF2B5EF4-FFF2-40B4-BE49-F238E27FC236}">
+                <a16:creationId xmlns:a16="http://schemas.microsoft.com/office/drawing/2014/main" id="{32C81FAC-0E05-A074-D6B8-617252253CDE}"/>
+              </a:ext>
+            </a:extLst>
+          </p:cNvPr>
+          <p:cNvPicPr>
+            <a:picLocks noChangeAspect="1"/>
+          </p:cNvPicPr>
+          <p:nvPr/>
+        </p:nvPicPr>
+        <p:blipFill>
+          <a:blip r:embed="rId3"/>
+          <a:stretch>
+            <a:fillRect/>
+          </a:stretch>
+        </p:blipFill>
+        <p:spPr>
+          <a:xfrm>
+            <a:off x="7314364" y="2002955"/>
+            <a:ext cx="4877636" cy="3638872"/>
+          </a:xfrm>
+          <a:prstGeom prst="rect">
+            <a:avLst/>
+          </a:prstGeom>
+        </p:spPr>
+      </p:pic>
     </p:spTree>
     <p:extLst>
       <p:ext uri="{BB962C8B-B14F-4D97-AF65-F5344CB8AC3E}">
@@ -15788,7 +15829,12 @@
             <p:ph idx="1"/>
           </p:nvPr>
         </p:nvSpPr>
-        <p:spPr/>
+        <p:spPr>
+          <a:xfrm>
+            <a:off x="838200" y="1825625"/>
+            <a:ext cx="6898532" cy="4351338"/>
+          </a:xfrm>
+        </p:spPr>
         <p:txBody>
           <a:bodyPr>
             <a:normAutofit/>
@@ -16024,6 +16070,132 @@
           </a:p>
         </p:txBody>
       </p:sp>
+      <p:pic>
+        <p:nvPicPr>
+          <p:cNvPr id="5" name="Grafik 4">
+            <a:extLst>
+              <a:ext uri="{FF2B5EF4-FFF2-40B4-BE49-F238E27FC236}">
+                <a16:creationId xmlns:a16="http://schemas.microsoft.com/office/drawing/2014/main" id="{D5E91A85-C4A1-0324-B6C9-5C2ECB26E707}"/>
+              </a:ext>
+            </a:extLst>
+          </p:cNvPr>
+          <p:cNvPicPr>
+            <a:picLocks noChangeAspect="1"/>
+          </p:cNvPicPr>
+          <p:nvPr/>
+        </p:nvPicPr>
+        <p:blipFill>
+          <a:blip r:embed="rId2"/>
+          <a:stretch>
+            <a:fillRect/>
+          </a:stretch>
+        </p:blipFill>
+        <p:spPr>
+          <a:xfrm>
+            <a:off x="7736732" y="1870075"/>
+            <a:ext cx="4455268" cy="3323771"/>
+          </a:xfrm>
+          <a:prstGeom prst="rect">
+            <a:avLst/>
+          </a:prstGeom>
+        </p:spPr>
+      </p:pic>
+      <p:sp>
+        <p:nvSpPr>
+          <p:cNvPr id="7" name="Textfeld 6">
+            <a:extLst>
+              <a:ext uri="{FF2B5EF4-FFF2-40B4-BE49-F238E27FC236}">
+                <a16:creationId xmlns:a16="http://schemas.microsoft.com/office/drawing/2014/main" id="{F5FA8E57-2FE6-125F-8192-B6476B159FEC}"/>
+              </a:ext>
+            </a:extLst>
+          </p:cNvPr>
+          <p:cNvSpPr txBox="1"/>
+          <p:nvPr/>
+        </p:nvSpPr>
+        <p:spPr>
+          <a:xfrm>
+            <a:off x="9036817" y="5373233"/>
+            <a:ext cx="3155183" cy="461665"/>
+          </a:xfrm>
+          <a:prstGeom prst="rect">
+            <a:avLst/>
+          </a:prstGeom>
+          <a:noFill/>
+        </p:spPr>
+        <p:txBody>
+          <a:bodyPr wrap="square">
+            <a:spAutoFit/>
+          </a:bodyPr>
+          <a:lstStyle/>
+          <a:p>
+            <a:pPr>
+              <a:buNone/>
+            </a:pPr>
+            <a:r>
+              <a:rPr lang="de-DE" sz="2400" dirty="0" err="1"/>
+              <a:t>discretization</a:t>
+            </a:r>
+            <a:r>
+              <a:rPr lang="de-DE" sz="2400" dirty="0"/>
+              <a:t> </a:t>
+            </a:r>
+            <a:r>
+              <a:rPr lang="de-DE" sz="2400" dirty="0" err="1"/>
+              <a:t>into</a:t>
+            </a:r>
+            <a:r>
+              <a:rPr lang="de-DE" sz="2400" dirty="0"/>
+              <a:t> </a:t>
+            </a:r>
+            <a:r>
+              <a:rPr lang="de-DE" sz="2400" dirty="0" err="1"/>
+              <a:t>bins</a:t>
+            </a:r>
+            <a:endParaRPr lang="de-DE" sz="2400" dirty="0"/>
+          </a:p>
+        </p:txBody>
+      </p:sp>
+      <p:cxnSp>
+        <p:nvCxnSpPr>
+          <p:cNvPr id="9" name="Gerade Verbindung mit Pfeil 8">
+            <a:extLst>
+              <a:ext uri="{FF2B5EF4-FFF2-40B4-BE49-F238E27FC236}">
+                <a16:creationId xmlns:a16="http://schemas.microsoft.com/office/drawing/2014/main" id="{ED285E06-B5AA-24A1-B0E6-AAE8389835EB}"/>
+              </a:ext>
+            </a:extLst>
+          </p:cNvPr>
+          <p:cNvCxnSpPr>
+            <a:stCxn id="7" idx="1"/>
+          </p:cNvCxnSpPr>
+          <p:nvPr/>
+        </p:nvCxnSpPr>
+        <p:spPr>
+          <a:xfrm flipH="1" flipV="1">
+            <a:off x="8752114" y="4833257"/>
+            <a:ext cx="284703" cy="770809"/>
+          </a:xfrm>
+          <a:prstGeom prst="straightConnector1">
+            <a:avLst/>
+          </a:prstGeom>
+          <a:ln>
+            <a:tailEnd type="triangle"/>
+          </a:ln>
+        </p:spPr>
+        <p:style>
+          <a:lnRef idx="2">
+            <a:schemeClr val="accent1"/>
+          </a:lnRef>
+          <a:fillRef idx="0">
+            <a:schemeClr val="accent1"/>
+          </a:fillRef>
+          <a:effectRef idx="1">
+            <a:schemeClr val="accent1"/>
+          </a:effectRef>
+          <a:fontRef idx="minor">
+            <a:schemeClr val="tx1"/>
+          </a:fontRef>
+        </p:style>
+      </p:cxnSp>
     </p:spTree>
     <p:extLst>
       <p:ext uri="{BB962C8B-B14F-4D97-AF65-F5344CB8AC3E}">
@@ -16114,10 +16286,15 @@
             <p:ph idx="1"/>
           </p:nvPr>
         </p:nvSpPr>
-        <p:spPr/>
+        <p:spPr>
+          <a:xfrm>
+            <a:off x="838200" y="1690688"/>
+            <a:ext cx="10515600" cy="3162667"/>
+          </a:xfrm>
+        </p:spPr>
         <p:txBody>
           <a:bodyPr>
-            <a:normAutofit fontScale="92500" lnSpcReduction="20000"/>
+            <a:normAutofit fontScale="85000" lnSpcReduction="20000"/>
           </a:bodyPr>
           <a:lstStyle/>
           <a:p>
@@ -16218,10 +16395,8 @@
             </a:r>
             <a:r>
               <a:rPr lang="de-DE" dirty="0"/>
-              <a:t>:</a:t>
-            </a:r>
-          </a:p>
-          <a:p>
+              <a:t>: </a:t>
+            </a:r>
             <a:r>
               <a:rPr lang="de-DE" dirty="0" err="1"/>
               <a:t>contribution</a:t>
@@ -16236,10 +16411,8 @@
             </a:r>
             <a:r>
               <a:rPr lang="de-DE" dirty="0"/>
-              <a:t> per feature</a:t>
-            </a:r>
-          </a:p>
-          <a:p>
+              <a:t> per feature, </a:t>
+            </a:r>
             <a:r>
               <a:rPr lang="de-DE" dirty="0" err="1"/>
               <a:t>sum</a:t>
@@ -16455,6 +16628,36 @@
           </a:p>
         </p:txBody>
       </p:sp>
+      <p:pic>
+        <p:nvPicPr>
+          <p:cNvPr id="5" name="Grafik 4">
+            <a:extLst>
+              <a:ext uri="{FF2B5EF4-FFF2-40B4-BE49-F238E27FC236}">
+                <a16:creationId xmlns:a16="http://schemas.microsoft.com/office/drawing/2014/main" id="{4E8699BF-ECC2-0E8F-6EC6-530813F67A8E}"/>
+              </a:ext>
+            </a:extLst>
+          </p:cNvPr>
+          <p:cNvPicPr>
+            <a:picLocks noChangeAspect="1"/>
+          </p:cNvPicPr>
+          <p:nvPr/>
+        </p:nvPicPr>
+        <p:blipFill>
+          <a:blip r:embed="rId2"/>
+          <a:stretch>
+            <a:fillRect/>
+          </a:stretch>
+        </p:blipFill>
+        <p:spPr>
+          <a:xfrm>
+            <a:off x="1488412" y="4853355"/>
+            <a:ext cx="9215175" cy="2124772"/>
+          </a:xfrm>
+          <a:prstGeom prst="rect">
+            <a:avLst/>
+          </a:prstGeom>
+        </p:spPr>
+      </p:pic>
     </p:spTree>
     <p:extLst>
       <p:ext uri="{BB962C8B-B14F-4D97-AF65-F5344CB8AC3E}">
@@ -16469,6 +16672,186 @@
 </file>
 
 <file path=ppt/slides/slide34.xml><?xml version="1.0" encoding="utf-8"?>
+<p:sld xmlns:a="http://schemas.openxmlformats.org/drawingml/2006/main" xmlns:r="http://schemas.openxmlformats.org/officeDocument/2006/relationships" xmlns:p="http://schemas.openxmlformats.org/presentationml/2006/main">
+  <p:cSld>
+    <p:spTree>
+      <p:nvGrpSpPr>
+        <p:cNvPr id="1" name=""/>
+        <p:cNvGrpSpPr/>
+        <p:nvPr/>
+      </p:nvGrpSpPr>
+      <p:grpSpPr>
+        <a:xfrm>
+          <a:off x="0" y="0"/>
+          <a:ext cx="0" cy="0"/>
+          <a:chOff x="0" y="0"/>
+          <a:chExt cx="0" cy="0"/>
+        </a:xfrm>
+      </p:grpSpPr>
+      <p:sp>
+        <p:nvSpPr>
+          <p:cNvPr id="5" name="Titel 4">
+            <a:extLst>
+              <a:ext uri="{FF2B5EF4-FFF2-40B4-BE49-F238E27FC236}">
+                <a16:creationId xmlns:a16="http://schemas.microsoft.com/office/drawing/2014/main" id="{930F40DE-0323-3D7E-4D2B-3B8ED381CD04}"/>
+              </a:ext>
+            </a:extLst>
+          </p:cNvPr>
+          <p:cNvSpPr>
+            <a:spLocks noGrp="1"/>
+          </p:cNvSpPr>
+          <p:nvPr>
+            <p:ph type="title"/>
+          </p:nvPr>
+        </p:nvSpPr>
+        <p:spPr/>
+        <p:txBody>
+          <a:bodyPr/>
+          <a:lstStyle/>
+          <a:p>
+            <a:r>
+              <a:rPr lang="de-DE" dirty="0"/>
+              <a:t>Global SHAP Explanation</a:t>
+            </a:r>
+          </a:p>
+        </p:txBody>
+      </p:sp>
+      <p:sp>
+        <p:nvSpPr>
+          <p:cNvPr id="4" name="Foliennummernplatzhalter 3">
+            <a:extLst>
+              <a:ext uri="{FF2B5EF4-FFF2-40B4-BE49-F238E27FC236}">
+                <a16:creationId xmlns:a16="http://schemas.microsoft.com/office/drawing/2014/main" id="{32C44D65-016E-B997-B58D-6CEB3F4D6146}"/>
+              </a:ext>
+            </a:extLst>
+          </p:cNvPr>
+          <p:cNvSpPr>
+            <a:spLocks noGrp="1"/>
+          </p:cNvSpPr>
+          <p:nvPr>
+            <p:ph type="sldNum" sz="quarter" idx="12"/>
+          </p:nvPr>
+        </p:nvSpPr>
+        <p:spPr/>
+        <p:txBody>
+          <a:bodyPr/>
+          <a:lstStyle/>
+          <a:p>
+            <a:fld id="{08C366F5-AFAD-49CB-854A-9D9E238FCA13}" type="slidenum">
+              <a:rPr lang="en-GB" smtClean="0"/>
+              <a:t>34</a:t>
+            </a:fld>
+            <a:endParaRPr lang="en-GB"/>
+          </a:p>
+        </p:txBody>
+      </p:sp>
+      <p:pic>
+        <p:nvPicPr>
+          <p:cNvPr id="6" name="Grafik 5">
+            <a:extLst>
+              <a:ext uri="{FF2B5EF4-FFF2-40B4-BE49-F238E27FC236}">
+                <a16:creationId xmlns:a16="http://schemas.microsoft.com/office/drawing/2014/main" id="{0AB1392C-AA49-CB1A-B78D-DF2EB23C8C85}"/>
+              </a:ext>
+            </a:extLst>
+          </p:cNvPr>
+          <p:cNvPicPr>
+            <a:picLocks noChangeAspect="1"/>
+          </p:cNvPicPr>
+          <p:nvPr/>
+        </p:nvPicPr>
+        <p:blipFill>
+          <a:blip r:embed="rId2"/>
+          <a:stretch>
+            <a:fillRect/>
+          </a:stretch>
+        </p:blipFill>
+        <p:spPr>
+          <a:xfrm>
+            <a:off x="1927279" y="2084144"/>
+            <a:ext cx="8337441" cy="4773856"/>
+          </a:xfrm>
+          <a:prstGeom prst="rect">
+            <a:avLst/>
+          </a:prstGeom>
+        </p:spPr>
+      </p:pic>
+      <p:sp>
+        <p:nvSpPr>
+          <p:cNvPr id="8" name="Textfeld 7">
+            <a:extLst>
+              <a:ext uri="{FF2B5EF4-FFF2-40B4-BE49-F238E27FC236}">
+                <a16:creationId xmlns:a16="http://schemas.microsoft.com/office/drawing/2014/main" id="{8ECADB20-0A60-6F6A-FA8A-F6D9E284F3E8}"/>
+              </a:ext>
+            </a:extLst>
+          </p:cNvPr>
+          <p:cNvSpPr txBox="1"/>
+          <p:nvPr/>
+        </p:nvSpPr>
+        <p:spPr>
+          <a:xfrm>
+            <a:off x="838199" y="1591701"/>
+            <a:ext cx="5257800" cy="492443"/>
+          </a:xfrm>
+          <a:prstGeom prst="rect">
+            <a:avLst/>
+          </a:prstGeom>
+          <a:noFill/>
+        </p:spPr>
+        <p:txBody>
+          <a:bodyPr wrap="square">
+            <a:spAutoFit/>
+          </a:bodyPr>
+          <a:lstStyle/>
+          <a:p>
+            <a:pPr>
+              <a:buNone/>
+            </a:pPr>
+            <a:r>
+              <a:rPr lang="de-DE" sz="2600" dirty="0" err="1"/>
+              <a:t>aggregation</a:t>
+            </a:r>
+            <a:r>
+              <a:rPr lang="de-DE" sz="2600" dirty="0"/>
+              <a:t> </a:t>
+            </a:r>
+            <a:r>
+              <a:rPr lang="de-DE" sz="2600" dirty="0" err="1"/>
+              <a:t>of</a:t>
+            </a:r>
+            <a:r>
+              <a:rPr lang="de-DE" sz="2600" dirty="0"/>
+              <a:t> </a:t>
+            </a:r>
+            <a:r>
+              <a:rPr lang="de-DE" sz="2600" dirty="0" err="1"/>
+              <a:t>local</a:t>
+            </a:r>
+            <a:r>
+              <a:rPr lang="de-DE" sz="2600" dirty="0"/>
+              <a:t> SHAP </a:t>
+            </a:r>
+            <a:r>
+              <a:rPr lang="de-DE" sz="2600" dirty="0" err="1"/>
+              <a:t>values</a:t>
+            </a:r>
+            <a:endParaRPr lang="de-DE" sz="2600" dirty="0"/>
+          </a:p>
+        </p:txBody>
+      </p:sp>
+    </p:spTree>
+    <p:extLst>
+      <p:ext uri="{BB962C8B-B14F-4D97-AF65-F5344CB8AC3E}">
+        <p14:creationId xmlns:p14="http://schemas.microsoft.com/office/powerpoint/2010/main" val="608247287"/>
+      </p:ext>
+    </p:extLst>
+  </p:cSld>
+  <p:clrMapOvr>
+    <a:masterClrMapping/>
+  </p:clrMapOvr>
+</p:sld>
+</file>
+
+<file path=ppt/slides/slide35.xml><?xml version="1.0" encoding="utf-8"?>
 <p:sld xmlns:a="http://schemas.openxmlformats.org/drawingml/2006/main" xmlns:r="http://schemas.openxmlformats.org/officeDocument/2006/relationships" xmlns:p="http://schemas.openxmlformats.org/presentationml/2006/main">
   <p:cSld>
     <p:spTree>
@@ -16737,7 +17120,7 @@
           <a:p>
             <a:fld id="{08C366F5-AFAD-49CB-854A-9D9E238FCA13}" type="slidenum">
               <a:rPr lang="en-GB" smtClean="0"/>
-              <a:t>34</a:t>
+              <a:t>35</a:t>
             </a:fld>
             <a:endParaRPr lang="en-GB"/>
           </a:p>
@@ -18129,8 +18512,8 @@
           </a:p>
         </p:txBody>
       </p:sp>
-      <mc:AlternateContent xmlns:mc="http://schemas.openxmlformats.org/markup-compatibility/2006">
-        <mc:Choice xmlns:a14="http://schemas.microsoft.com/office/drawing/2010/main" Requires="a14">
+      <mc:AlternateContent xmlns:mc="http://schemas.openxmlformats.org/markup-compatibility/2006" xmlns:a14="http://schemas.microsoft.com/office/drawing/2010/main">
+        <mc:Choice Requires="a14">
           <p:sp>
             <p:nvSpPr>
               <p:cNvPr id="3" name="Inhaltsplatzhalter 2">
@@ -18326,6 +18709,7 @@
                     </m:oMath>
                   </m:oMathPara>
                 </a14:m>
+                <a:endParaRPr lang="de-DE" dirty="0"/>
               </a:p>
               <a:p>
                 <a:endParaRPr lang="de-DE" dirty="0"/>
@@ -18374,7 +18758,7 @@
             </p:txBody>
           </p:sp>
         </mc:Choice>
-        <mc:Fallback>
+        <mc:Fallback xmlns="">
           <p:sp>
             <p:nvSpPr>
               <p:cNvPr id="3" name="Inhaltsplatzhalter 2">
@@ -18501,8 +18885,8 @@
           </a:p>
         </p:txBody>
       </p:sp>
-      <mc:AlternateContent xmlns:mc="http://schemas.openxmlformats.org/markup-compatibility/2006">
-        <mc:Choice xmlns:a14="http://schemas.microsoft.com/office/drawing/2010/main" Requires="a14">
+      <mc:AlternateContent xmlns:mc="http://schemas.openxmlformats.org/markup-compatibility/2006" xmlns:a14="http://schemas.microsoft.com/office/drawing/2010/main">
+        <mc:Choice Requires="a14">
           <p:sp>
             <p:nvSpPr>
               <p:cNvPr id="3" name="Inhaltsplatzhalter 2">
@@ -18669,6 +19053,7 @@
                     </m:oMath>
                   </m:oMathPara>
                 </a14:m>
+                <a:endParaRPr lang="de-DE" dirty="0"/>
               </a:p>
               <a:p>
                 <a:endParaRPr lang="de-DE" dirty="0"/>
@@ -18738,7 +19123,7 @@
             </p:txBody>
           </p:sp>
         </mc:Choice>
-        <mc:Fallback>
+        <mc:Fallback xmlns="">
           <p:sp>
             <p:nvSpPr>
               <p:cNvPr id="3" name="Inhaltsplatzhalter 2">
@@ -18873,8 +19258,8 @@
           </a:p>
         </p:txBody>
       </p:sp>
-      <mc:AlternateContent xmlns:mc="http://schemas.openxmlformats.org/markup-compatibility/2006">
-        <mc:Choice xmlns:a14="http://schemas.microsoft.com/office/drawing/2010/main" Requires="a14">
+      <mc:AlternateContent xmlns:mc="http://schemas.openxmlformats.org/markup-compatibility/2006" xmlns:a14="http://schemas.microsoft.com/office/drawing/2010/main">
+        <mc:Choice Requires="a14">
           <p:sp>
             <p:nvSpPr>
               <p:cNvPr id="3" name="Inhaltsplatzhalter 2">
@@ -19041,6 +19426,7 @@
                     </m:oMath>
                   </m:oMathPara>
                 </a14:m>
+                <a:endParaRPr lang="de-DE" dirty="0"/>
               </a:p>
               <a:p>
                 <a:pPr marL="0" indent="0">
@@ -19113,7 +19499,7 @@
             </p:txBody>
           </p:sp>
         </mc:Choice>
-        <mc:Fallback>
+        <mc:Fallback xmlns="">
           <p:sp>
             <p:nvSpPr>
               <p:cNvPr id="3" name="Inhaltsplatzhalter 2">

--- a/slides/7_model_evaluation.pptx
+++ b/slides/7_model_evaluation.pptx
@@ -5,7 +5,7 @@
     <p:sldMasterId id="2147483648" r:id="rId1"/>
   </p:sldMasterIdLst>
   <p:notesMasterIdLst>
-    <p:notesMasterId r:id="rId37"/>
+    <p:notesMasterId r:id="rId38"/>
   </p:notesMasterIdLst>
   <p:sldIdLst>
     <p:sldId id="256" r:id="rId2"/>
@@ -19,30 +19,31 @@
     <p:sldId id="303" r:id="rId10"/>
     <p:sldId id="270" r:id="rId11"/>
     <p:sldId id="304" r:id="rId12"/>
-    <p:sldId id="305" r:id="rId13"/>
-    <p:sldId id="306" r:id="rId14"/>
-    <p:sldId id="307" r:id="rId15"/>
-    <p:sldId id="308" r:id="rId16"/>
-    <p:sldId id="309" r:id="rId17"/>
-    <p:sldId id="310" r:id="rId18"/>
-    <p:sldId id="273" r:id="rId19"/>
-    <p:sldId id="311" r:id="rId20"/>
-    <p:sldId id="274" r:id="rId21"/>
-    <p:sldId id="312" r:id="rId22"/>
-    <p:sldId id="313" r:id="rId23"/>
-    <p:sldId id="315" r:id="rId24"/>
-    <p:sldId id="316" r:id="rId25"/>
-    <p:sldId id="272" r:id="rId26"/>
-    <p:sldId id="663" r:id="rId27"/>
-    <p:sldId id="615" r:id="rId28"/>
-    <p:sldId id="317" r:id="rId29"/>
-    <p:sldId id="279" r:id="rId30"/>
-    <p:sldId id="280" r:id="rId31"/>
-    <p:sldId id="324" r:id="rId32"/>
-    <p:sldId id="282" r:id="rId33"/>
-    <p:sldId id="281" r:id="rId34"/>
-    <p:sldId id="664" r:id="rId35"/>
-    <p:sldId id="327" r:id="rId36"/>
+    <p:sldId id="665" r:id="rId13"/>
+    <p:sldId id="305" r:id="rId14"/>
+    <p:sldId id="306" r:id="rId15"/>
+    <p:sldId id="307" r:id="rId16"/>
+    <p:sldId id="308" r:id="rId17"/>
+    <p:sldId id="309" r:id="rId18"/>
+    <p:sldId id="310" r:id="rId19"/>
+    <p:sldId id="273" r:id="rId20"/>
+    <p:sldId id="311" r:id="rId21"/>
+    <p:sldId id="274" r:id="rId22"/>
+    <p:sldId id="312" r:id="rId23"/>
+    <p:sldId id="313" r:id="rId24"/>
+    <p:sldId id="315" r:id="rId25"/>
+    <p:sldId id="316" r:id="rId26"/>
+    <p:sldId id="272" r:id="rId27"/>
+    <p:sldId id="663" r:id="rId28"/>
+    <p:sldId id="615" r:id="rId29"/>
+    <p:sldId id="317" r:id="rId30"/>
+    <p:sldId id="279" r:id="rId31"/>
+    <p:sldId id="280" r:id="rId32"/>
+    <p:sldId id="324" r:id="rId33"/>
+    <p:sldId id="282" r:id="rId34"/>
+    <p:sldId id="281" r:id="rId35"/>
+    <p:sldId id="664" r:id="rId36"/>
+    <p:sldId id="327" r:id="rId37"/>
   </p:sldIdLst>
   <p:sldSz cx="12192000" cy="6858000"/>
   <p:notesSz cx="6858000" cy="9144000"/>
@@ -513,7 +514,7 @@
           <a:p>
             <a:fld id="{506E0FD1-891F-4B1E-916D-E9B585160BB8}" type="datetimeFigureOut">
               <a:rPr lang="en-GB" smtClean="0"/>
-              <a:t>25/04/2026</a:t>
+              <a:t>01/05/2026</a:t>
             </a:fld>
             <a:endParaRPr lang="en-GB"/>
           </a:p>
@@ -930,7 +931,7 @@
           <a:p>
             <a:fld id="{D68C3F22-27B2-44E3-9C5F-D08126455F6F}" type="datetime1">
               <a:rPr lang="en-GB" smtClean="0"/>
-              <a:t>25/04/2026</a:t>
+              <a:t>01/05/2026</a:t>
             </a:fld>
             <a:endParaRPr lang="en-GB"/>
           </a:p>
@@ -1130,7 +1131,7 @@
           <a:p>
             <a:fld id="{1CD03846-7BF6-4FB6-A921-FF3379ADBD4C}" type="datetime1">
               <a:rPr lang="en-GB" smtClean="0"/>
-              <a:t>25/04/2026</a:t>
+              <a:t>01/05/2026</a:t>
             </a:fld>
             <a:endParaRPr lang="en-GB"/>
           </a:p>
@@ -1340,7 +1341,7 @@
           <a:p>
             <a:fld id="{99E1B91A-3FD0-4144-9C84-63E9688ED2FE}" type="datetime1">
               <a:rPr lang="en-GB" smtClean="0"/>
-              <a:t>25/04/2026</a:t>
+              <a:t>01/05/2026</a:t>
             </a:fld>
             <a:endParaRPr lang="en-GB"/>
           </a:p>
@@ -1540,7 +1541,7 @@
           <a:p>
             <a:fld id="{5295ED7B-FEAD-4734-819F-93EF4B0EA908}" type="datetime1">
               <a:rPr lang="en-GB" smtClean="0"/>
-              <a:t>25/04/2026</a:t>
+              <a:t>01/05/2026</a:t>
             </a:fld>
             <a:endParaRPr lang="en-GB"/>
           </a:p>
@@ -1816,7 +1817,7 @@
           <a:p>
             <a:fld id="{D2D5D4B4-C926-4B45-8815-1ED8911179A2}" type="datetime1">
               <a:rPr lang="en-GB" smtClean="0"/>
-              <a:t>25/04/2026</a:t>
+              <a:t>01/05/2026</a:t>
             </a:fld>
             <a:endParaRPr lang="en-GB"/>
           </a:p>
@@ -2084,7 +2085,7 @@
           <a:p>
             <a:fld id="{B4C5210A-0E37-4935-93AF-69F21A5F712F}" type="datetime1">
               <a:rPr lang="en-GB" smtClean="0"/>
-              <a:t>25/04/2026</a:t>
+              <a:t>01/05/2026</a:t>
             </a:fld>
             <a:endParaRPr lang="en-GB"/>
           </a:p>
@@ -2499,7 +2500,7 @@
           <a:p>
             <a:fld id="{3D3A6B2F-436C-4691-80E8-9C890E000E9D}" type="datetime1">
               <a:rPr lang="en-GB" smtClean="0"/>
-              <a:t>25/04/2026</a:t>
+              <a:t>01/05/2026</a:t>
             </a:fld>
             <a:endParaRPr lang="en-GB"/>
           </a:p>
@@ -2641,7 +2642,7 @@
           <a:p>
             <a:fld id="{84385F4C-D74B-496F-8D21-97E3549C783B}" type="datetime1">
               <a:rPr lang="en-GB" smtClean="0"/>
-              <a:t>25/04/2026</a:t>
+              <a:t>01/05/2026</a:t>
             </a:fld>
             <a:endParaRPr lang="en-GB"/>
           </a:p>
@@ -2754,7 +2755,7 @@
           <a:p>
             <a:fld id="{0CBDCB32-C241-4703-A832-4EB47BD54E83}" type="datetime1">
               <a:rPr lang="en-GB" smtClean="0"/>
-              <a:t>25/04/2026</a:t>
+              <a:t>01/05/2026</a:t>
             </a:fld>
             <a:endParaRPr lang="en-GB"/>
           </a:p>
@@ -3067,7 +3068,7 @@
           <a:p>
             <a:fld id="{85C150FF-BE95-4D25-A16A-E368A81CBF24}" type="datetime1">
               <a:rPr lang="en-GB" smtClean="0"/>
-              <a:t>25/04/2026</a:t>
+              <a:t>01/05/2026</a:t>
             </a:fld>
             <a:endParaRPr lang="en-GB"/>
           </a:p>
@@ -3356,7 +3357,7 @@
           <a:p>
             <a:fld id="{F3C5DB4B-B349-43C9-A424-BADA723AD9F1}" type="datetime1">
               <a:rPr lang="en-GB" smtClean="0"/>
-              <a:t>25/04/2026</a:t>
+              <a:t>01/05/2026</a:t>
             </a:fld>
             <a:endParaRPr lang="en-GB"/>
           </a:p>
@@ -3599,7 +3600,7 @@
           <a:p>
             <a:fld id="{12632426-0A0C-405F-A3D0-2D11AA44702A}" type="datetime1">
               <a:rPr lang="en-GB" smtClean="0"/>
-              <a:t>25/04/2026</a:t>
+              <a:t>01/05/2026</a:t>
             </a:fld>
             <a:endParaRPr lang="en-GB"/>
           </a:p>
@@ -4970,6 +4971,1089 @@
           <a:chExt cx="0" cy="0"/>
         </a:xfrm>
       </p:grpSpPr>
+      <p:sp>
+        <p:nvSpPr>
+          <p:cNvPr id="2" name="Titel 1">
+            <a:extLst>
+              <a:ext uri="{FF2B5EF4-FFF2-40B4-BE49-F238E27FC236}">
+                <a16:creationId xmlns:a16="http://schemas.microsoft.com/office/drawing/2014/main" id="{B26AD085-5FCF-688A-47F5-E4028AA4056C}"/>
+              </a:ext>
+            </a:extLst>
+          </p:cNvPr>
+          <p:cNvSpPr>
+            <a:spLocks noGrp="1"/>
+          </p:cNvSpPr>
+          <p:nvPr>
+            <p:ph type="title"/>
+          </p:nvPr>
+        </p:nvSpPr>
+        <p:spPr/>
+        <p:txBody>
+          <a:bodyPr>
+            <a:normAutofit/>
+          </a:bodyPr>
+          <a:lstStyle/>
+          <a:p>
+            <a:r>
+              <a:rPr lang="de-DE" dirty="0" err="1"/>
+              <a:t>Example</a:t>
+            </a:r>
+            <a:r>
+              <a:rPr lang="de-DE" dirty="0"/>
+              <a:t>: Spam Classification</a:t>
+            </a:r>
+          </a:p>
+        </p:txBody>
+      </p:sp>
+      <mc:AlternateContent xmlns:mc="http://schemas.openxmlformats.org/markup-compatibility/2006">
+        <mc:Choice xmlns:a14="http://schemas.microsoft.com/office/drawing/2010/main" Requires="a14">
+          <p:sp>
+            <p:nvSpPr>
+              <p:cNvPr id="3" name="Inhaltsplatzhalter 2">
+                <a:extLst>
+                  <a:ext uri="{FF2B5EF4-FFF2-40B4-BE49-F238E27FC236}">
+                    <a16:creationId xmlns:a16="http://schemas.microsoft.com/office/drawing/2014/main" id="{20DE4715-F235-B8B8-A094-A4D768145B71}"/>
+                  </a:ext>
+                </a:extLst>
+              </p:cNvPr>
+              <p:cNvSpPr>
+                <a:spLocks noGrp="1"/>
+              </p:cNvSpPr>
+              <p:nvPr>
+                <p:ph idx="1"/>
+              </p:nvPr>
+            </p:nvSpPr>
+            <p:spPr>
+              <a:xfrm>
+                <a:off x="838200" y="1557495"/>
+                <a:ext cx="10515600" cy="5163980"/>
+              </a:xfrm>
+            </p:spPr>
+            <p:txBody>
+              <a:bodyPr>
+                <a:normAutofit fontScale="70000" lnSpcReduction="20000"/>
+              </a:bodyPr>
+              <a:lstStyle/>
+              <a:p>
+                <a:pPr marL="0" indent="0">
+                  <a:buNone/>
+                </a:pPr>
+                <a:r>
+                  <a:rPr lang="de-DE" dirty="0"/>
+                  <a:t>s</a:t>
+                </a:r>
+                <a:r>
+                  <a:rPr lang="de-DE" dirty="0" err="1"/>
+                  <a:t>cenario</a:t>
+                </a:r>
+                <a:r>
+                  <a:rPr lang="de-DE" dirty="0"/>
+                  <a:t>:</a:t>
+                </a:r>
+              </a:p>
+              <a:p>
+                <a:r>
+                  <a:rPr lang="de-DE" dirty="0" err="1"/>
+                  <a:t>classify</a:t>
+                </a:r>
+                <a:r>
+                  <a:rPr lang="de-DE" dirty="0"/>
+                  <a:t> </a:t>
+                </a:r>
+                <a:r>
+                  <a:rPr lang="de-DE" dirty="0" err="1"/>
+                  <a:t>emails</a:t>
+                </a:r>
+                <a:r>
+                  <a:rPr lang="de-DE" dirty="0"/>
+                  <a:t> </a:t>
+                </a:r>
+                <a:r>
+                  <a:rPr lang="de-DE" dirty="0" err="1"/>
+                  <a:t>as</a:t>
+                </a:r>
+                <a:r>
+                  <a:rPr lang="de-DE" dirty="0"/>
+                  <a:t> Spam (positive) </a:t>
+                </a:r>
+                <a:r>
+                  <a:rPr lang="de-DE" dirty="0" err="1"/>
+                  <a:t>or</a:t>
+                </a:r>
+                <a:r>
+                  <a:rPr lang="de-DE" dirty="0"/>
+                  <a:t> Not Spam (negative)</a:t>
+                </a:r>
+              </a:p>
+              <a:p>
+                <a:r>
+                  <a:rPr lang="de-DE" dirty="0" err="1"/>
+                  <a:t>test</a:t>
+                </a:r>
+                <a:r>
+                  <a:rPr lang="de-DE" dirty="0"/>
+                  <a:t> </a:t>
+                </a:r>
+                <a:r>
+                  <a:rPr lang="de-DE" dirty="0" err="1"/>
+                  <a:t>set</a:t>
+                </a:r>
+                <a:r>
+                  <a:rPr lang="de-DE" dirty="0"/>
+                  <a:t>: </a:t>
+                </a:r>
+                <a:r>
+                  <a:rPr lang="de-DE" dirty="0">
+                    <a:latin typeface="Cambria Math" panose="02040503050406030204" pitchFamily="18" charset="0"/>
+                    <a:ea typeface="Cambria Math" panose="02040503050406030204" pitchFamily="18" charset="0"/>
+                  </a:rPr>
+                  <a:t>100</a:t>
+                </a:r>
+                <a:r>
+                  <a:rPr lang="de-DE" dirty="0"/>
+                  <a:t> </a:t>
+                </a:r>
+                <a:r>
+                  <a:rPr lang="de-DE" dirty="0" err="1"/>
+                  <a:t>emails</a:t>
+                </a:r>
+                <a:endParaRPr lang="de-DE" dirty="0"/>
+              </a:p>
+              <a:p>
+                <a:pPr marL="0" indent="0">
+                  <a:buNone/>
+                </a:pPr>
+                <a:endParaRPr lang="de-DE" dirty="0"/>
+              </a:p>
+              <a:p>
+                <a:pPr marL="0" indent="0">
+                  <a:buNone/>
+                </a:pPr>
+                <a:r>
+                  <a:rPr lang="de-DE" dirty="0" err="1"/>
+                  <a:t>evaluation</a:t>
+                </a:r>
+                <a:r>
+                  <a:rPr lang="de-DE" dirty="0"/>
+                  <a:t> </a:t>
+                </a:r>
+                <a:r>
+                  <a:rPr lang="de-DE" dirty="0" err="1"/>
+                  <a:t>metrics</a:t>
+                </a:r>
+                <a:r>
+                  <a:rPr lang="de-DE" dirty="0"/>
+                  <a:t>:</a:t>
+                </a:r>
+              </a:p>
+              <a:p>
+                <a:r>
+                  <a:rPr lang="de-DE" dirty="0" err="1"/>
+                  <a:t>accuracy</a:t>
+                </a:r>
+                <a:r>
+                  <a:rPr lang="de-DE" dirty="0"/>
+                  <a:t> (</a:t>
+                </a:r>
+                <a:r>
+                  <a:rPr lang="de-DE" dirty="0" err="1"/>
+                  <a:t>percentage</a:t>
+                </a:r>
+                <a:r>
+                  <a:rPr lang="de-DE" dirty="0"/>
+                  <a:t> </a:t>
+                </a:r>
+                <a:r>
+                  <a:rPr lang="de-DE" dirty="0" err="1"/>
+                  <a:t>of</a:t>
+                </a:r>
+                <a:r>
+                  <a:rPr lang="de-DE" dirty="0"/>
+                  <a:t> </a:t>
+                </a:r>
+                <a:r>
+                  <a:rPr lang="de-DE" dirty="0" err="1"/>
+                  <a:t>correct</a:t>
+                </a:r>
+                <a:r>
+                  <a:rPr lang="de-DE" dirty="0"/>
+                  <a:t> </a:t>
+                </a:r>
+                <a:r>
+                  <a:rPr lang="de-DE" dirty="0" err="1"/>
+                  <a:t>predictions</a:t>
+                </a:r>
+                <a:r>
+                  <a:rPr lang="de-DE" dirty="0"/>
+                  <a:t>): </a:t>
+                </a:r>
+                <a14:m>
+                  <m:oMath xmlns:m="http://schemas.openxmlformats.org/officeDocument/2006/math">
+                    <m:f>
+                      <m:fPr>
+                        <m:ctrlPr>
+                          <a:rPr lang="de-DE" i="1">
+                            <a:latin typeface="Cambria Math" panose="02040503050406030204" pitchFamily="18" charset="0"/>
+                          </a:rPr>
+                        </m:ctrlPr>
+                      </m:fPr>
+                      <m:num>
+                        <m:r>
+                          <a:rPr lang="de-DE" i="1">
+                            <a:latin typeface="Cambria Math" panose="02040503050406030204" pitchFamily="18" charset="0"/>
+                          </a:rPr>
+                          <m:t>40</m:t>
+                        </m:r>
+                        <m:r>
+                          <a:rPr lang="de-DE" b="0" i="1" smtClean="0">
+                            <a:latin typeface="Cambria Math" panose="02040503050406030204" pitchFamily="18" charset="0"/>
+                          </a:rPr>
+                          <m:t>+45</m:t>
+                        </m:r>
+                      </m:num>
+                      <m:den>
+                        <m:r>
+                          <a:rPr lang="de-DE" b="0" i="1" smtClean="0">
+                            <a:latin typeface="Cambria Math" panose="02040503050406030204" pitchFamily="18" charset="0"/>
+                          </a:rPr>
+                          <m:t>100</m:t>
+                        </m:r>
+                      </m:den>
+                    </m:f>
+                    <m:r>
+                      <a:rPr lang="de-DE" i="1">
+                        <a:latin typeface="Cambria Math" panose="02040503050406030204" pitchFamily="18" charset="0"/>
+                      </a:rPr>
+                      <m:t>=0.8</m:t>
+                    </m:r>
+                    <m:r>
+                      <a:rPr lang="de-DE" b="0" i="1" smtClean="0">
+                        <a:latin typeface="Cambria Math" panose="02040503050406030204" pitchFamily="18" charset="0"/>
+                      </a:rPr>
+                      <m:t>5</m:t>
+                    </m:r>
+                  </m:oMath>
+                </a14:m>
+                <a:endParaRPr lang="de-DE" dirty="0"/>
+              </a:p>
+              <a:p>
+                <a:r>
+                  <a:rPr lang="de-DE" dirty="0" err="1"/>
+                  <a:t>precision</a:t>
+                </a:r>
+                <a:r>
+                  <a:rPr lang="de-DE" dirty="0"/>
+                  <a:t> (</a:t>
+                </a:r>
+                <a:r>
+                  <a:rPr lang="de-DE" dirty="0" err="1"/>
+                  <a:t>percentage</a:t>
+                </a:r>
+                <a:r>
+                  <a:rPr lang="de-DE" dirty="0"/>
+                  <a:t> </a:t>
+                </a:r>
+                <a:r>
+                  <a:rPr lang="de-DE" dirty="0" err="1"/>
+                  <a:t>of</a:t>
+                </a:r>
+                <a:r>
+                  <a:rPr lang="de-DE" dirty="0"/>
+                  <a:t> </a:t>
+                </a:r>
+                <a:r>
+                  <a:rPr lang="de-DE" dirty="0" err="1"/>
+                  <a:t>correct</a:t>
+                </a:r>
+                <a:r>
+                  <a:rPr lang="de-DE" dirty="0"/>
+                  <a:t> </a:t>
+                </a:r>
+                <a:r>
+                  <a:rPr lang="de-DE" dirty="0" err="1"/>
+                  <a:t>spam</a:t>
+                </a:r>
+                <a:r>
+                  <a:rPr lang="de-DE" dirty="0"/>
+                  <a:t> </a:t>
+                </a:r>
+                <a:r>
+                  <a:rPr lang="de-DE" dirty="0" err="1"/>
+                  <a:t>predictions</a:t>
+                </a:r>
+                <a:r>
+                  <a:rPr lang="de-DE" dirty="0"/>
+                  <a:t>): </a:t>
+                </a:r>
+                <a14:m>
+                  <m:oMath xmlns:m="http://schemas.openxmlformats.org/officeDocument/2006/math">
+                    <m:f>
+                      <m:fPr>
+                        <m:ctrlPr>
+                          <a:rPr lang="de-DE" i="1">
+                            <a:latin typeface="Cambria Math" panose="02040503050406030204" pitchFamily="18" charset="0"/>
+                          </a:rPr>
+                        </m:ctrlPr>
+                      </m:fPr>
+                      <m:num>
+                        <m:r>
+                          <a:rPr lang="de-DE" i="1">
+                            <a:latin typeface="Cambria Math" panose="02040503050406030204" pitchFamily="18" charset="0"/>
+                          </a:rPr>
+                          <m:t>40</m:t>
+                        </m:r>
+                      </m:num>
+                      <m:den>
+                        <m:r>
+                          <a:rPr lang="de-DE" i="1">
+                            <a:latin typeface="Cambria Math" panose="02040503050406030204" pitchFamily="18" charset="0"/>
+                          </a:rPr>
+                          <m:t>40+</m:t>
+                        </m:r>
+                        <m:r>
+                          <a:rPr lang="de-DE" b="0" i="1" smtClean="0">
+                            <a:latin typeface="Cambria Math" panose="02040503050406030204" pitchFamily="18" charset="0"/>
+                          </a:rPr>
+                          <m:t>5</m:t>
+                        </m:r>
+                      </m:den>
+                    </m:f>
+                    <m:r>
+                      <a:rPr lang="de-DE" i="1">
+                        <a:latin typeface="Cambria Math" panose="02040503050406030204" pitchFamily="18" charset="0"/>
+                      </a:rPr>
+                      <m:t>=0.8</m:t>
+                    </m:r>
+                    <m:r>
+                      <a:rPr lang="de-DE" b="0" i="1" smtClean="0">
+                        <a:latin typeface="Cambria Math" panose="02040503050406030204" pitchFamily="18" charset="0"/>
+                      </a:rPr>
+                      <m:t>9</m:t>
+                    </m:r>
+                  </m:oMath>
+                </a14:m>
+                <a:endParaRPr lang="de-DE" dirty="0"/>
+              </a:p>
+              <a:p>
+                <a:r>
+                  <a:rPr lang="de-DE" dirty="0" err="1"/>
+                  <a:t>recall</a:t>
+                </a:r>
+                <a:r>
+                  <a:rPr lang="de-DE" dirty="0"/>
+                  <a:t> (</a:t>
+                </a:r>
+                <a:r>
+                  <a:rPr lang="de-DE" dirty="0" err="1"/>
+                  <a:t>percentage</a:t>
+                </a:r>
+                <a:r>
+                  <a:rPr lang="de-DE" dirty="0"/>
+                  <a:t> </a:t>
+                </a:r>
+                <a:r>
+                  <a:rPr lang="de-DE" dirty="0" err="1"/>
+                  <a:t>of</a:t>
+                </a:r>
+                <a:r>
+                  <a:rPr lang="de-DE" dirty="0"/>
+                  <a:t> </a:t>
+                </a:r>
+                <a:r>
+                  <a:rPr lang="de-DE" dirty="0" err="1"/>
+                  <a:t>detected</a:t>
+                </a:r>
+                <a:r>
+                  <a:rPr lang="de-DE" dirty="0"/>
+                  <a:t> </a:t>
+                </a:r>
+                <a:r>
+                  <a:rPr lang="de-DE" dirty="0" err="1"/>
+                  <a:t>spams</a:t>
+                </a:r>
+                <a:r>
+                  <a:rPr lang="de-DE" dirty="0"/>
+                  <a:t>): </a:t>
+                </a:r>
+                <a14:m>
+                  <m:oMath xmlns:m="http://schemas.openxmlformats.org/officeDocument/2006/math">
+                    <m:f>
+                      <m:fPr>
+                        <m:ctrlPr>
+                          <a:rPr lang="de-DE" i="1" smtClean="0">
+                            <a:latin typeface="Cambria Math" panose="02040503050406030204" pitchFamily="18" charset="0"/>
+                          </a:rPr>
+                        </m:ctrlPr>
+                      </m:fPr>
+                      <m:num>
+                        <m:r>
+                          <a:rPr lang="de-DE" b="0" i="1" smtClean="0">
+                            <a:latin typeface="Cambria Math" panose="02040503050406030204" pitchFamily="18" charset="0"/>
+                          </a:rPr>
+                          <m:t>40</m:t>
+                        </m:r>
+                      </m:num>
+                      <m:den>
+                        <m:r>
+                          <a:rPr lang="de-DE" b="0" i="1" smtClean="0">
+                            <a:latin typeface="Cambria Math" panose="02040503050406030204" pitchFamily="18" charset="0"/>
+                          </a:rPr>
+                          <m:t>40+10</m:t>
+                        </m:r>
+                      </m:den>
+                    </m:f>
+                    <m:r>
+                      <a:rPr lang="de-DE" b="0" i="1" smtClean="0">
+                        <a:latin typeface="Cambria Math" panose="02040503050406030204" pitchFamily="18" charset="0"/>
+                      </a:rPr>
+                      <m:t>=0.80</m:t>
+                    </m:r>
+                  </m:oMath>
+                </a14:m>
+                <a:endParaRPr lang="de-DE" dirty="0"/>
+              </a:p>
+              <a:p>
+                <a14:m>
+                  <m:oMath xmlns:m="http://schemas.openxmlformats.org/officeDocument/2006/math">
+                    <m:r>
+                      <m:rPr>
+                        <m:sty m:val="p"/>
+                      </m:rPr>
+                      <a:rPr lang="de-DE" dirty="0">
+                        <a:latin typeface="Cambria Math" panose="02040503050406030204" pitchFamily="18" charset="0"/>
+                      </a:rPr>
+                      <m:t>F</m:t>
+                    </m:r>
+                    <m:r>
+                      <a:rPr lang="de-DE" dirty="0">
+                        <a:latin typeface="Cambria Math" panose="02040503050406030204" pitchFamily="18" charset="0"/>
+                      </a:rPr>
+                      <m:t>1</m:t>
+                    </m:r>
+                  </m:oMath>
+                </a14:m>
+                <a:r>
+                  <a:rPr lang="de-DE" dirty="0"/>
+                  <a:t> score (</a:t>
+                </a:r>
+                <a:r>
+                  <a:rPr lang="de-DE" dirty="0" err="1"/>
+                  <a:t>combination</a:t>
+                </a:r>
+                <a:r>
+                  <a:rPr lang="de-DE" dirty="0"/>
+                  <a:t> </a:t>
+                </a:r>
+                <a:r>
+                  <a:rPr lang="de-DE" dirty="0" err="1"/>
+                  <a:t>of</a:t>
+                </a:r>
+                <a:r>
+                  <a:rPr lang="de-DE" dirty="0"/>
+                  <a:t> </a:t>
+                </a:r>
+                <a:r>
+                  <a:rPr lang="de-DE" dirty="0" err="1"/>
+                  <a:t>precision</a:t>
+                </a:r>
+                <a:r>
+                  <a:rPr lang="de-DE" dirty="0"/>
+                  <a:t> and </a:t>
+                </a:r>
+                <a:r>
+                  <a:rPr lang="de-DE" dirty="0" err="1"/>
+                  <a:t>recall</a:t>
+                </a:r>
+                <a:r>
+                  <a:rPr lang="de-DE" dirty="0"/>
+                  <a:t>): </a:t>
+                </a:r>
+                <a14:m>
+                  <m:oMath xmlns:m="http://schemas.openxmlformats.org/officeDocument/2006/math">
+                    <m:r>
+                      <a:rPr lang="de-DE" b="0" i="1" smtClean="0">
+                        <a:latin typeface="Cambria Math" panose="02040503050406030204" pitchFamily="18" charset="0"/>
+                      </a:rPr>
+                      <m:t>2</m:t>
+                    </m:r>
+                    <m:r>
+                      <a:rPr lang="de-DE" b="0" i="1" smtClean="0">
+                        <a:latin typeface="Cambria Math" panose="02040503050406030204" pitchFamily="18" charset="0"/>
+                        <a:ea typeface="Cambria Math" panose="02040503050406030204" pitchFamily="18" charset="0"/>
+                      </a:rPr>
+                      <m:t>∙</m:t>
+                    </m:r>
+                    <m:f>
+                      <m:fPr>
+                        <m:ctrlPr>
+                          <a:rPr lang="de-DE" b="0" i="1" smtClean="0">
+                            <a:latin typeface="Cambria Math" panose="02040503050406030204" pitchFamily="18" charset="0"/>
+                            <a:ea typeface="Cambria Math" panose="02040503050406030204" pitchFamily="18" charset="0"/>
+                          </a:rPr>
+                        </m:ctrlPr>
+                      </m:fPr>
+                      <m:num>
+                        <m:r>
+                          <m:rPr>
+                            <m:sty m:val="p"/>
+                          </m:rPr>
+                          <a:rPr lang="de-DE" b="0" i="0" smtClean="0">
+                            <a:latin typeface="Cambria Math" panose="02040503050406030204" pitchFamily="18" charset="0"/>
+                            <a:ea typeface="Cambria Math" panose="02040503050406030204" pitchFamily="18" charset="0"/>
+                          </a:rPr>
+                          <m:t>precision</m:t>
+                        </m:r>
+                        <m:r>
+                          <a:rPr lang="de-DE" b="0" i="1" smtClean="0">
+                            <a:latin typeface="Cambria Math" panose="02040503050406030204" pitchFamily="18" charset="0"/>
+                            <a:ea typeface="Cambria Math" panose="02040503050406030204" pitchFamily="18" charset="0"/>
+                          </a:rPr>
+                          <m:t> ∙</m:t>
+                        </m:r>
+                        <m:r>
+                          <m:rPr>
+                            <m:sty m:val="p"/>
+                          </m:rPr>
+                          <a:rPr lang="de-DE" b="0" i="0" smtClean="0">
+                            <a:latin typeface="Cambria Math" panose="02040503050406030204" pitchFamily="18" charset="0"/>
+                            <a:ea typeface="Cambria Math" panose="02040503050406030204" pitchFamily="18" charset="0"/>
+                          </a:rPr>
+                          <m:t>recall</m:t>
+                        </m:r>
+                      </m:num>
+                      <m:den>
+                        <m:r>
+                          <m:rPr>
+                            <m:sty m:val="p"/>
+                          </m:rPr>
+                          <a:rPr lang="de-DE" b="0" i="0" smtClean="0">
+                            <a:latin typeface="Cambria Math" panose="02040503050406030204" pitchFamily="18" charset="0"/>
+                            <a:ea typeface="Cambria Math" panose="02040503050406030204" pitchFamily="18" charset="0"/>
+                          </a:rPr>
+                          <m:t>precision</m:t>
+                        </m:r>
+                        <m:r>
+                          <a:rPr lang="de-DE" b="0" i="1" smtClean="0">
+                            <a:latin typeface="Cambria Math" panose="02040503050406030204" pitchFamily="18" charset="0"/>
+                            <a:ea typeface="Cambria Math" panose="02040503050406030204" pitchFamily="18" charset="0"/>
+                          </a:rPr>
+                          <m:t>+</m:t>
+                        </m:r>
+                        <m:r>
+                          <m:rPr>
+                            <m:sty m:val="p"/>
+                          </m:rPr>
+                          <a:rPr lang="de-DE" b="0" i="0" smtClean="0">
+                            <a:latin typeface="Cambria Math" panose="02040503050406030204" pitchFamily="18" charset="0"/>
+                            <a:ea typeface="Cambria Math" panose="02040503050406030204" pitchFamily="18" charset="0"/>
+                          </a:rPr>
+                          <m:t>recall</m:t>
+                        </m:r>
+                      </m:den>
+                    </m:f>
+                    <m:r>
+                      <a:rPr lang="de-DE" b="0" i="1" smtClean="0">
+                        <a:latin typeface="Cambria Math" panose="02040503050406030204" pitchFamily="18" charset="0"/>
+                        <a:ea typeface="Cambria Math" panose="02040503050406030204" pitchFamily="18" charset="0"/>
+                      </a:rPr>
+                      <m:t>=0.84</m:t>
+                    </m:r>
+                  </m:oMath>
+                </a14:m>
+                <a:endParaRPr lang="de-DE" dirty="0">
+                  <a:latin typeface="Cambria Math" panose="02040503050406030204" pitchFamily="18" charset="0"/>
+                  <a:ea typeface="Cambria Math" panose="02040503050406030204" pitchFamily="18" charset="0"/>
+                </a:endParaRPr>
+              </a:p>
+              <a:p>
+                <a:pPr marL="0" indent="0">
+                  <a:buNone/>
+                </a:pPr>
+                <a:endParaRPr lang="de-DE" dirty="0"/>
+              </a:p>
+              <a:p>
+                <a:pPr marL="0" indent="0">
+                  <a:buNone/>
+                </a:pPr>
+                <a:r>
+                  <a:rPr lang="de-DE" dirty="0" err="1"/>
+                  <a:t>interpretation</a:t>
+                </a:r>
+                <a:r>
+                  <a:rPr lang="de-DE" dirty="0"/>
+                  <a:t>:</a:t>
+                </a:r>
+              </a:p>
+              <a:p>
+                <a:r>
+                  <a:rPr lang="de-DE" dirty="0"/>
+                  <a:t>high </a:t>
+                </a:r>
+                <a:r>
+                  <a:rPr lang="de-DE" dirty="0" err="1"/>
+                  <a:t>precision</a:t>
+                </a:r>
+                <a:r>
+                  <a:rPr lang="de-DE" dirty="0"/>
+                  <a:t> </a:t>
+                </a:r>
+                <a:r>
+                  <a:rPr lang="de-DE" dirty="0">
+                    <a:sym typeface="Wingdings" pitchFamily="2" charset="2"/>
+                  </a:rPr>
+                  <a:t> </a:t>
+                </a:r>
+                <a:r>
+                  <a:rPr lang="de-DE" dirty="0" err="1"/>
+                  <a:t>few</a:t>
+                </a:r>
+                <a:r>
+                  <a:rPr lang="de-DE" dirty="0"/>
+                  <a:t> </a:t>
+                </a:r>
+                <a:r>
+                  <a:rPr lang="de-DE" dirty="0" err="1"/>
+                  <a:t>false</a:t>
+                </a:r>
+                <a:r>
+                  <a:rPr lang="de-DE" dirty="0"/>
+                  <a:t> </a:t>
+                </a:r>
+                <a:r>
+                  <a:rPr lang="de-DE" dirty="0" err="1"/>
+                  <a:t>alarms</a:t>
+                </a:r>
+                <a:endParaRPr lang="de-DE" dirty="0"/>
+              </a:p>
+              <a:p>
+                <a:r>
+                  <a:rPr lang="de-DE" dirty="0" err="1"/>
+                  <a:t>low</a:t>
+                </a:r>
+                <a:r>
+                  <a:rPr lang="de-DE" dirty="0"/>
+                  <a:t> </a:t>
+                </a:r>
+                <a:r>
+                  <a:rPr lang="de-DE" dirty="0" err="1"/>
+                  <a:t>recall</a:t>
+                </a:r>
+                <a:r>
+                  <a:rPr lang="de-DE" dirty="0"/>
+                  <a:t> </a:t>
+                </a:r>
+                <a:r>
+                  <a:rPr lang="de-DE" dirty="0">
+                    <a:sym typeface="Wingdings" pitchFamily="2" charset="2"/>
+                  </a:rPr>
+                  <a:t> </a:t>
+                </a:r>
+                <a:r>
+                  <a:rPr lang="de-DE" dirty="0" err="1"/>
+                  <a:t>some</a:t>
+                </a:r>
+                <a:r>
+                  <a:rPr lang="de-DE" dirty="0"/>
+                  <a:t> </a:t>
+                </a:r>
+                <a:r>
+                  <a:rPr lang="de-DE" dirty="0" err="1"/>
+                  <a:t>spam</a:t>
+                </a:r>
+                <a:r>
+                  <a:rPr lang="de-DE" dirty="0"/>
+                  <a:t> </a:t>
+                </a:r>
+                <a:r>
+                  <a:rPr lang="de-DE" dirty="0" err="1"/>
+                  <a:t>missed</a:t>
+                </a:r>
+                <a:endParaRPr lang="de-DE" dirty="0"/>
+              </a:p>
+              <a:p>
+                <a:r>
+                  <a:rPr lang="de-DE" dirty="0" err="1"/>
+                  <a:t>accuracy</a:t>
+                </a:r>
+                <a:r>
+                  <a:rPr lang="de-DE" dirty="0"/>
+                  <a:t> </a:t>
+                </a:r>
+                <a:r>
+                  <a:rPr lang="de-DE" dirty="0" err="1"/>
+                  <a:t>alone</a:t>
+                </a:r>
+                <a:r>
+                  <a:rPr lang="de-DE" dirty="0"/>
+                  <a:t> </a:t>
+                </a:r>
+                <a:r>
+                  <a:rPr lang="de-DE" dirty="0" err="1"/>
+                  <a:t>is</a:t>
+                </a:r>
+                <a:r>
+                  <a:rPr lang="de-DE" dirty="0"/>
+                  <a:t> not </a:t>
+                </a:r>
+                <a:r>
+                  <a:rPr lang="de-DE" dirty="0" err="1"/>
+                  <a:t>sufficient</a:t>
+                </a:r>
+                <a:endParaRPr lang="de-DE" dirty="0"/>
+              </a:p>
+            </p:txBody>
+          </p:sp>
+        </mc:Choice>
+        <mc:Fallback>
+          <p:sp>
+            <p:nvSpPr>
+              <p:cNvPr id="3" name="Inhaltsplatzhalter 2">
+                <a:extLst>
+                  <a:ext uri="{FF2B5EF4-FFF2-40B4-BE49-F238E27FC236}">
+                    <a16:creationId xmlns:a16="http://schemas.microsoft.com/office/drawing/2014/main" id="{20DE4715-F235-B8B8-A094-A4D768145B71}"/>
+                  </a:ext>
+                </a:extLst>
+              </p:cNvPr>
+              <p:cNvSpPr>
+                <a:spLocks noGrp="1" noRot="1" noChangeAspect="1" noMove="1" noResize="1" noEditPoints="1" noAdjustHandles="1" noChangeArrowheads="1" noChangeShapeType="1" noTextEdit="1"/>
+              </p:cNvSpPr>
+              <p:nvPr>
+                <p:ph idx="1"/>
+              </p:nvPr>
+            </p:nvSpPr>
+            <p:spPr>
+              <a:xfrm>
+                <a:off x="838200" y="1557495"/>
+                <a:ext cx="10515600" cy="5163980"/>
+              </a:xfrm>
+              <a:blipFill>
+                <a:blip r:embed="rId2"/>
+                <a:stretch>
+                  <a:fillRect l="-724" t="-1716" b="-1716"/>
+                </a:stretch>
+              </a:blipFill>
+            </p:spPr>
+            <p:txBody>
+              <a:bodyPr/>
+              <a:lstStyle/>
+              <a:p>
+                <a:r>
+                  <a:rPr lang="de-DE">
+                    <a:noFill/>
+                  </a:rPr>
+                  <a:t> </a:t>
+                </a:r>
+              </a:p>
+            </p:txBody>
+          </p:sp>
+        </mc:Fallback>
+      </mc:AlternateContent>
+      <p:sp>
+        <p:nvSpPr>
+          <p:cNvPr id="4" name="Foliennummernplatzhalter 3">
+            <a:extLst>
+              <a:ext uri="{FF2B5EF4-FFF2-40B4-BE49-F238E27FC236}">
+                <a16:creationId xmlns:a16="http://schemas.microsoft.com/office/drawing/2014/main" id="{63E1D535-66EF-858E-7AB1-91BD6B374F9E}"/>
+              </a:ext>
+            </a:extLst>
+          </p:cNvPr>
+          <p:cNvSpPr>
+            <a:spLocks noGrp="1"/>
+          </p:cNvSpPr>
+          <p:nvPr>
+            <p:ph type="sldNum" sz="quarter" idx="12"/>
+          </p:nvPr>
+        </p:nvSpPr>
+        <p:spPr/>
+        <p:txBody>
+          <a:bodyPr/>
+          <a:lstStyle/>
+          <a:p>
+            <a:fld id="{08C366F5-AFAD-49CB-854A-9D9E238FCA13}" type="slidenum">
+              <a:rPr lang="en-GB" smtClean="0"/>
+              <a:t>12</a:t>
+            </a:fld>
+            <a:endParaRPr lang="en-GB"/>
+          </a:p>
+        </p:txBody>
+      </p:sp>
+      <p:sp>
+        <p:nvSpPr>
+          <p:cNvPr id="8" name="Textfeld 7">
+            <a:extLst>
+              <a:ext uri="{FF2B5EF4-FFF2-40B4-BE49-F238E27FC236}">
+                <a16:creationId xmlns:a16="http://schemas.microsoft.com/office/drawing/2014/main" id="{515EF327-519C-B87E-953D-52CF437E5131}"/>
+              </a:ext>
+            </a:extLst>
+          </p:cNvPr>
+          <p:cNvSpPr txBox="1"/>
+          <p:nvPr/>
+        </p:nvSpPr>
+        <p:spPr>
+          <a:xfrm>
+            <a:off x="8984313" y="1406769"/>
+            <a:ext cx="1917063" cy="369332"/>
+          </a:xfrm>
+          <a:prstGeom prst="rect">
+            <a:avLst/>
+          </a:prstGeom>
+          <a:noFill/>
+        </p:spPr>
+        <p:txBody>
+          <a:bodyPr wrap="none" rtlCol="0">
+            <a:spAutoFit/>
+          </a:bodyPr>
+          <a:lstStyle/>
+          <a:p>
+            <a:r>
+              <a:rPr lang="de-DE" dirty="0" err="1"/>
+              <a:t>confusion</a:t>
+            </a:r>
+            <a:r>
+              <a:rPr lang="de-DE" dirty="0"/>
+              <a:t> </a:t>
+            </a:r>
+            <a:r>
+              <a:rPr lang="de-DE" dirty="0" err="1"/>
+              <a:t>matrix</a:t>
+            </a:r>
+            <a:r>
+              <a:rPr lang="de-DE" dirty="0"/>
+              <a:t>:</a:t>
+            </a:r>
+          </a:p>
+        </p:txBody>
+      </p:sp>
+      <p:graphicFrame>
+        <p:nvGraphicFramePr>
+          <p:cNvPr id="9" name="Tabelle 8">
+            <a:extLst>
+              <a:ext uri="{FF2B5EF4-FFF2-40B4-BE49-F238E27FC236}">
+                <a16:creationId xmlns:a16="http://schemas.microsoft.com/office/drawing/2014/main" id="{16A6955F-D5F4-5B0B-E851-C4085B9C1220}"/>
+              </a:ext>
+            </a:extLst>
+          </p:cNvPr>
+          <p:cNvGraphicFramePr>
+            <a:graphicFrameLocks noGrp="1"/>
+          </p:cNvGraphicFramePr>
+          <p:nvPr>
+            <p:extLst>
+              <p:ext uri="{D42A27DB-BD31-4B8C-83A1-F6EECF244321}">
+                <p14:modId xmlns:p14="http://schemas.microsoft.com/office/powerpoint/2010/main" val="4122700367"/>
+              </p:ext>
+            </p:extLst>
+          </p:nvPr>
+        </p:nvGraphicFramePr>
+        <p:xfrm>
+          <a:off x="8078875" y="1776101"/>
+          <a:ext cx="3727940" cy="1290320"/>
+        </p:xfrm>
+        <a:graphic>
+          <a:graphicData uri="http://schemas.openxmlformats.org/drawingml/2006/table">
+            <a:tbl>
+              <a:tblPr firstRow="1" bandRow="1">
+                <a:tableStyleId>{5C22544A-7EE6-4342-B048-85BDC9FD1C3A}</a:tableStyleId>
+              </a:tblPr>
+              <a:tblGrid>
+                <a:gridCol w="1657978">
+                  <a:extLst>
+                    <a:ext uri="{9D8B030D-6E8A-4147-A177-3AD203B41FA5}">
+                      <a16:colId xmlns:a16="http://schemas.microsoft.com/office/drawing/2014/main" val="3191300630"/>
+                    </a:ext>
+                  </a:extLst>
+                </a:gridCol>
+                <a:gridCol w="1014883">
+                  <a:extLst>
+                    <a:ext uri="{9D8B030D-6E8A-4147-A177-3AD203B41FA5}">
+                      <a16:colId xmlns:a16="http://schemas.microsoft.com/office/drawing/2014/main" val="3988278271"/>
+                    </a:ext>
+                  </a:extLst>
+                </a:gridCol>
+                <a:gridCol w="1055079">
+                  <a:extLst>
+                    <a:ext uri="{9D8B030D-6E8A-4147-A177-3AD203B41FA5}">
+                      <a16:colId xmlns:a16="http://schemas.microsoft.com/office/drawing/2014/main" val="3769724225"/>
+                    </a:ext>
+                  </a:extLst>
+                </a:gridCol>
+              </a:tblGrid>
+              <a:tr h="370840">
+                <a:tc>
+                  <a:txBody>
+                    <a:bodyPr/>
+                    <a:lstStyle/>
+                    <a:p>
+                      <a:endParaRPr lang="de-DE" sz="1500" dirty="0"/>
+                    </a:p>
+                  </a:txBody>
+                  <a:tcPr/>
+                </a:tc>
+                <a:tc>
+                  <a:txBody>
+                    <a:bodyPr/>
+                    <a:lstStyle/>
+                    <a:p>
+                      <a:r>
+                        <a:rPr lang="de-DE" sz="1500" b="0" dirty="0" err="1"/>
+                        <a:t>Predicted</a:t>
+                      </a:r>
+                      <a:r>
+                        <a:rPr lang="de-DE" sz="1500" b="0" dirty="0"/>
+                        <a:t> Spam</a:t>
+                      </a:r>
+                    </a:p>
+                  </a:txBody>
+                  <a:tcPr/>
+                </a:tc>
+                <a:tc>
+                  <a:txBody>
+                    <a:bodyPr/>
+                    <a:lstStyle/>
+                    <a:p>
+                      <a:r>
+                        <a:rPr lang="de-DE" sz="1500" b="0" dirty="0" err="1"/>
+                        <a:t>Predicted</a:t>
+                      </a:r>
+                      <a:r>
+                        <a:rPr lang="de-DE" sz="1500" b="0" dirty="0"/>
+                        <a:t> Not Spam</a:t>
+                      </a:r>
+                    </a:p>
+                  </a:txBody>
+                  <a:tcPr/>
+                </a:tc>
+                <a:extLst>
+                  <a:ext uri="{0D108BD9-81ED-4DB2-BD59-A6C34878D82A}">
+                    <a16:rowId xmlns:a16="http://schemas.microsoft.com/office/drawing/2014/main" val="3546746069"/>
+                  </a:ext>
+                </a:extLst>
+              </a:tr>
+              <a:tr h="370840">
+                <a:tc>
+                  <a:txBody>
+                    <a:bodyPr/>
+                    <a:lstStyle/>
+                    <a:p>
+                      <a:r>
+                        <a:rPr lang="de-DE" sz="1500" dirty="0"/>
+                        <a:t>Actual Spam</a:t>
+                      </a:r>
+                    </a:p>
+                  </a:txBody>
+                  <a:tcPr/>
+                </a:tc>
+                <a:tc>
+                  <a:txBody>
+                    <a:bodyPr/>
+                    <a:lstStyle/>
+                    <a:p>
+                      <a:r>
+                        <a:rPr lang="de-DE" sz="1500" dirty="0"/>
+                        <a:t>40 (TP)</a:t>
+                      </a:r>
+                    </a:p>
+                  </a:txBody>
+                  <a:tcPr/>
+                </a:tc>
+                <a:tc>
+                  <a:txBody>
+                    <a:bodyPr/>
+                    <a:lstStyle/>
+                    <a:p>
+                      <a:r>
+                        <a:rPr lang="de-DE" sz="1500" dirty="0"/>
+                        <a:t>10 (FN)</a:t>
+                      </a:r>
+                    </a:p>
+                  </a:txBody>
+                  <a:tcPr/>
+                </a:tc>
+                <a:extLst>
+                  <a:ext uri="{0D108BD9-81ED-4DB2-BD59-A6C34878D82A}">
+                    <a16:rowId xmlns:a16="http://schemas.microsoft.com/office/drawing/2014/main" val="4217061617"/>
+                  </a:ext>
+                </a:extLst>
+              </a:tr>
+              <a:tr h="370840">
+                <a:tc>
+                  <a:txBody>
+                    <a:bodyPr/>
+                    <a:lstStyle/>
+                    <a:p>
+                      <a:r>
+                        <a:rPr lang="de-DE" sz="1500" dirty="0"/>
+                        <a:t>Actual Not Spam</a:t>
+                      </a:r>
+                    </a:p>
+                  </a:txBody>
+                  <a:tcPr/>
+                </a:tc>
+                <a:tc>
+                  <a:txBody>
+                    <a:bodyPr/>
+                    <a:lstStyle/>
+                    <a:p>
+                      <a:r>
+                        <a:rPr lang="de-DE" sz="1500" dirty="0"/>
+                        <a:t>5 (FP)</a:t>
+                      </a:r>
+                    </a:p>
+                  </a:txBody>
+                  <a:tcPr/>
+                </a:tc>
+                <a:tc>
+                  <a:txBody>
+                    <a:bodyPr/>
+                    <a:lstStyle/>
+                    <a:p>
+                      <a:r>
+                        <a:rPr lang="de-DE" sz="1500" dirty="0"/>
+                        <a:t>45 (TN)</a:t>
+                      </a:r>
+                    </a:p>
+                  </a:txBody>
+                  <a:tcPr/>
+                </a:tc>
+                <a:extLst>
+                  <a:ext uri="{0D108BD9-81ED-4DB2-BD59-A6C34878D82A}">
+                    <a16:rowId xmlns:a16="http://schemas.microsoft.com/office/drawing/2014/main" val="1419384299"/>
+                  </a:ext>
+                </a:extLst>
+              </a:tr>
+            </a:tbl>
+          </a:graphicData>
+        </a:graphic>
+      </p:graphicFrame>
+    </p:spTree>
+    <p:extLst>
+      <p:ext uri="{BB962C8B-B14F-4D97-AF65-F5344CB8AC3E}">
+        <p14:creationId xmlns:p14="http://schemas.microsoft.com/office/powerpoint/2010/main" val="2656868723"/>
+      </p:ext>
+    </p:extLst>
+  </p:cSld>
+  <p:clrMapOvr>
+    <a:masterClrMapping/>
+  </p:clrMapOvr>
+</p:sld>
+</file>
+
+<file path=ppt/slides/slide13.xml><?xml version="1.0" encoding="utf-8"?>
+<p:sld xmlns:a="http://schemas.openxmlformats.org/drawingml/2006/main" xmlns:r="http://schemas.openxmlformats.org/officeDocument/2006/relationships" xmlns:p="http://schemas.openxmlformats.org/presentationml/2006/main">
+  <p:cSld>
+    <p:spTree>
+      <p:nvGrpSpPr>
+        <p:cNvPr id="1" name=""/>
+        <p:cNvGrpSpPr/>
+        <p:nvPr/>
+      </p:nvGrpSpPr>
+      <p:grpSpPr>
+        <a:xfrm>
+          <a:off x="0" y="0"/>
+          <a:ext cx="0" cy="0"/>
+          <a:chOff x="0" y="0"/>
+          <a:chExt cx="0" cy="0"/>
+        </a:xfrm>
+      </p:grpSpPr>
       <mc:AlternateContent xmlns:mc="http://schemas.openxmlformats.org/markup-compatibility/2006" xmlns:a14="http://schemas.microsoft.com/office/drawing/2010/main">
         <mc:Choice Requires="a14">
           <p:sp>
@@ -5274,7 +6358,7 @@
           <a:p>
             <a:fld id="{08C366F5-AFAD-49CB-854A-9D9E238FCA13}" type="slidenum">
               <a:rPr lang="en-GB" smtClean="0"/>
-              <a:t>12</a:t>
+              <a:t>13</a:t>
             </a:fld>
             <a:endParaRPr lang="en-GB"/>
           </a:p>
@@ -5329,7 +6413,7 @@
 </p:sld>
 </file>
 
-<file path=ppt/slides/slide13.xml><?xml version="1.0" encoding="utf-8"?>
+<file path=ppt/slides/slide14.xml><?xml version="1.0" encoding="utf-8"?>
 <p:sld xmlns:a="http://schemas.openxmlformats.org/drawingml/2006/main" xmlns:r="http://schemas.openxmlformats.org/officeDocument/2006/relationships" xmlns:p="http://schemas.openxmlformats.org/presentationml/2006/main">
   <p:cSld>
     <p:spTree>
@@ -5626,7 +6710,7 @@
           <a:p>
             <a:fld id="{08C366F5-AFAD-49CB-854A-9D9E238FCA13}" type="slidenum">
               <a:rPr lang="en-GB" smtClean="0"/>
-              <a:t>13</a:t>
+              <a:t>14</a:t>
             </a:fld>
             <a:endParaRPr lang="en-GB"/>
           </a:p>
@@ -5645,7 +6729,7 @@
 </p:sld>
 </file>
 
-<file path=ppt/slides/slide14.xml><?xml version="1.0" encoding="utf-8"?>
+<file path=ppt/slides/slide15.xml><?xml version="1.0" encoding="utf-8"?>
 <p:sld xmlns:a="http://schemas.openxmlformats.org/drawingml/2006/main" xmlns:r="http://schemas.openxmlformats.org/officeDocument/2006/relationships" xmlns:p="http://schemas.openxmlformats.org/presentationml/2006/main">
   <p:cSld>
     <p:spTree>
@@ -5879,7 +6963,7 @@
           <a:p>
             <a:fld id="{08C366F5-AFAD-49CB-854A-9D9E238FCA13}" type="slidenum">
               <a:rPr lang="en-GB" smtClean="0"/>
-              <a:t>14</a:t>
+              <a:t>15</a:t>
             </a:fld>
             <a:endParaRPr lang="en-GB"/>
           </a:p>
@@ -5898,7 +6982,7 @@
 </p:sld>
 </file>
 
-<file path=ppt/slides/slide15.xml><?xml version="1.0" encoding="utf-8"?>
+<file path=ppt/slides/slide16.xml><?xml version="1.0" encoding="utf-8"?>
 <p:sld xmlns:a="http://schemas.openxmlformats.org/drawingml/2006/main" xmlns:r="http://schemas.openxmlformats.org/officeDocument/2006/relationships" xmlns:p="http://schemas.openxmlformats.org/presentationml/2006/main">
   <p:cSld>
     <p:spTree>
@@ -6265,7 +7349,7 @@
           <a:p>
             <a:fld id="{08C366F5-AFAD-49CB-854A-9D9E238FCA13}" type="slidenum">
               <a:rPr lang="en-GB" smtClean="0"/>
-              <a:t>15</a:t>
+              <a:t>16</a:t>
             </a:fld>
             <a:endParaRPr lang="en-GB"/>
           </a:p>
@@ -6284,7 +7368,7 @@
 </p:sld>
 </file>
 
-<file path=ppt/slides/slide16.xml><?xml version="1.0" encoding="utf-8"?>
+<file path=ppt/slides/slide17.xml><?xml version="1.0" encoding="utf-8"?>
 <p:sld xmlns:a="http://schemas.openxmlformats.org/drawingml/2006/main" xmlns:r="http://schemas.openxmlformats.org/officeDocument/2006/relationships" xmlns:p="http://schemas.openxmlformats.org/presentationml/2006/main">
   <p:cSld>
     <p:spTree>
@@ -6693,7 +7777,7 @@
           <a:p>
             <a:fld id="{08C366F5-AFAD-49CB-854A-9D9E238FCA13}" type="slidenum">
               <a:rPr lang="en-GB" smtClean="0"/>
-              <a:t>16</a:t>
+              <a:t>17</a:t>
             </a:fld>
             <a:endParaRPr lang="en-GB"/>
           </a:p>
@@ -6712,7 +7796,7 @@
 </p:sld>
 </file>
 
-<file path=ppt/slides/slide17.xml><?xml version="1.0" encoding="utf-8"?>
+<file path=ppt/slides/slide18.xml><?xml version="1.0" encoding="utf-8"?>
 <p:sld xmlns:a="http://schemas.openxmlformats.org/drawingml/2006/main" xmlns:r="http://schemas.openxmlformats.org/officeDocument/2006/relationships" xmlns:p="http://schemas.openxmlformats.org/presentationml/2006/main">
   <p:cSld>
     <p:spTree>
@@ -7111,7 +8195,7 @@
           <a:p>
             <a:fld id="{08C366F5-AFAD-49CB-854A-9D9E238FCA13}" type="slidenum">
               <a:rPr lang="en-GB" smtClean="0"/>
-              <a:t>17</a:t>
+              <a:t>18</a:t>
             </a:fld>
             <a:endParaRPr lang="en-GB"/>
           </a:p>
@@ -7130,7 +8214,7 @@
 </p:sld>
 </file>
 
-<file path=ppt/slides/slide18.xml><?xml version="1.0" encoding="utf-8"?>
+<file path=ppt/slides/slide19.xml><?xml version="1.0" encoding="utf-8"?>
 <p:sld xmlns:a="http://schemas.openxmlformats.org/drawingml/2006/main" xmlns:r="http://schemas.openxmlformats.org/officeDocument/2006/relationships" xmlns:p="http://schemas.openxmlformats.org/presentationml/2006/main">
   <p:cSld>
     <p:spTree>
@@ -7642,7 +8726,7 @@
           <a:p>
             <a:fld id="{08C366F5-AFAD-49CB-854A-9D9E238FCA13}" type="slidenum">
               <a:rPr lang="en-GB" smtClean="0"/>
-              <a:t>18</a:t>
+              <a:t>19</a:t>
             </a:fld>
             <a:endParaRPr lang="en-GB"/>
           </a:p>
@@ -7661,7 +8745,224 @@
 </p:sld>
 </file>
 
-<file path=ppt/slides/slide19.xml><?xml version="1.0" encoding="utf-8"?>
+<file path=ppt/slides/slide2.xml><?xml version="1.0" encoding="utf-8"?>
+<p:sld xmlns:a="http://schemas.openxmlformats.org/drawingml/2006/main" xmlns:r="http://schemas.openxmlformats.org/officeDocument/2006/relationships" xmlns:p="http://schemas.openxmlformats.org/presentationml/2006/main">
+  <p:cSld>
+    <p:spTree>
+      <p:nvGrpSpPr>
+        <p:cNvPr id="1" name=""/>
+        <p:cNvGrpSpPr/>
+        <p:nvPr/>
+      </p:nvGrpSpPr>
+      <p:grpSpPr>
+        <a:xfrm>
+          <a:off x="0" y="0"/>
+          <a:ext cx="0" cy="0"/>
+          <a:chOff x="0" y="0"/>
+          <a:chExt cx="0" cy="0"/>
+        </a:xfrm>
+      </p:grpSpPr>
+      <p:sp>
+        <p:nvSpPr>
+          <p:cNvPr id="6" name="Titel 5">
+            <a:extLst>
+              <a:ext uri="{FF2B5EF4-FFF2-40B4-BE49-F238E27FC236}">
+                <a16:creationId xmlns:a16="http://schemas.microsoft.com/office/drawing/2014/main" id="{E92B2E04-27B7-8A9A-6143-C8831F834080}"/>
+              </a:ext>
+            </a:extLst>
+          </p:cNvPr>
+          <p:cNvSpPr>
+            <a:spLocks noGrp="1"/>
+          </p:cNvSpPr>
+          <p:nvPr>
+            <p:ph type="title"/>
+          </p:nvPr>
+        </p:nvSpPr>
+        <p:spPr/>
+        <p:txBody>
+          <a:bodyPr/>
+          <a:lstStyle/>
+          <a:p>
+            <a:r>
+              <a:rPr lang="de-DE" dirty="0"/>
+              <a:t>Model Evaluation</a:t>
+            </a:r>
+          </a:p>
+        </p:txBody>
+      </p:sp>
+      <p:sp>
+        <p:nvSpPr>
+          <p:cNvPr id="7" name="Inhaltsplatzhalter 6">
+            <a:extLst>
+              <a:ext uri="{FF2B5EF4-FFF2-40B4-BE49-F238E27FC236}">
+                <a16:creationId xmlns:a16="http://schemas.microsoft.com/office/drawing/2014/main" id="{16CBE6C5-FF71-FE69-AF96-EB26512AF61F}"/>
+              </a:ext>
+            </a:extLst>
+          </p:cNvPr>
+          <p:cNvSpPr>
+            <a:spLocks noGrp="1"/>
+          </p:cNvSpPr>
+          <p:nvPr>
+            <p:ph idx="1"/>
+          </p:nvPr>
+        </p:nvSpPr>
+        <p:spPr/>
+        <p:txBody>
+          <a:bodyPr>
+            <a:normAutofit lnSpcReduction="10000"/>
+          </a:bodyPr>
+          <a:lstStyle/>
+          <a:p>
+            <a:r>
+              <a:rPr lang="de-DE" dirty="0" err="1"/>
+              <a:t>classification</a:t>
+            </a:r>
+            <a:r>
+              <a:rPr lang="de-DE" dirty="0"/>
+              <a:t> </a:t>
+            </a:r>
+            <a:r>
+              <a:rPr lang="de-DE" dirty="0" err="1"/>
+              <a:t>metrics</a:t>
+            </a:r>
+            <a:endParaRPr lang="de-DE" dirty="0"/>
+          </a:p>
+          <a:p>
+            <a:pPr marL="0" indent="0">
+              <a:buNone/>
+            </a:pPr>
+            <a:endParaRPr lang="de-DE" dirty="0"/>
+          </a:p>
+          <a:p>
+            <a:r>
+              <a:rPr lang="de-DE" dirty="0" err="1"/>
+              <a:t>regression</a:t>
+            </a:r>
+            <a:r>
+              <a:rPr lang="de-DE" dirty="0"/>
+              <a:t> </a:t>
+            </a:r>
+            <a:r>
+              <a:rPr lang="de-DE" dirty="0" err="1"/>
+              <a:t>metrics</a:t>
+            </a:r>
+            <a:endParaRPr lang="de-DE" dirty="0"/>
+          </a:p>
+          <a:p>
+            <a:pPr marL="0" indent="0">
+              <a:buNone/>
+            </a:pPr>
+            <a:endParaRPr lang="de-DE" dirty="0"/>
+          </a:p>
+          <a:p>
+            <a:r>
+              <a:rPr lang="de-DE" dirty="0"/>
+              <a:t>feature </a:t>
+            </a:r>
+            <a:r>
+              <a:rPr lang="de-DE" dirty="0" err="1"/>
+              <a:t>importance</a:t>
+            </a:r>
+            <a:endParaRPr lang="de-DE" dirty="0"/>
+          </a:p>
+          <a:p>
+            <a:pPr marL="0" indent="0">
+              <a:buNone/>
+            </a:pPr>
+            <a:endParaRPr lang="de-DE" dirty="0"/>
+          </a:p>
+          <a:p>
+            <a:r>
+              <a:rPr lang="de-DE" dirty="0" err="1"/>
+              <a:t>local</a:t>
+            </a:r>
+            <a:r>
+              <a:rPr lang="de-DE" dirty="0"/>
+              <a:t> </a:t>
+            </a:r>
+            <a:r>
+              <a:rPr lang="de-DE" dirty="0" err="1"/>
+              <a:t>explainability</a:t>
+            </a:r>
+            <a:endParaRPr lang="de-DE" dirty="0"/>
+          </a:p>
+          <a:p>
+            <a:pPr marL="0" indent="0">
+              <a:buNone/>
+            </a:pPr>
+            <a:endParaRPr lang="de-DE" dirty="0"/>
+          </a:p>
+          <a:p>
+            <a:r>
+              <a:rPr lang="de-DE" dirty="0" err="1"/>
+              <a:t>hypothesis</a:t>
+            </a:r>
+            <a:r>
+              <a:rPr lang="de-DE" dirty="0"/>
+              <a:t> </a:t>
+            </a:r>
+            <a:r>
+              <a:rPr lang="de-DE" dirty="0" err="1"/>
+              <a:t>testing</a:t>
+            </a:r>
+            <a:r>
+              <a:rPr lang="de-DE" dirty="0"/>
+              <a:t> (separate </a:t>
+            </a:r>
+            <a:r>
+              <a:rPr lang="de-DE" dirty="0" err="1"/>
+              <a:t>slide</a:t>
+            </a:r>
+            <a:r>
+              <a:rPr lang="de-DE" dirty="0"/>
+              <a:t> deck)</a:t>
+            </a:r>
+          </a:p>
+        </p:txBody>
+      </p:sp>
+      <p:sp>
+        <p:nvSpPr>
+          <p:cNvPr id="5" name="Foliennummernplatzhalter 4">
+            <a:extLst>
+              <a:ext uri="{FF2B5EF4-FFF2-40B4-BE49-F238E27FC236}">
+                <a16:creationId xmlns:a16="http://schemas.microsoft.com/office/drawing/2014/main" id="{422405FE-CC14-5A9E-E6BC-374EBECB4E84}"/>
+              </a:ext>
+            </a:extLst>
+          </p:cNvPr>
+          <p:cNvSpPr>
+            <a:spLocks noGrp="1"/>
+          </p:cNvSpPr>
+          <p:nvPr>
+            <p:ph type="sldNum" sz="quarter" idx="12"/>
+          </p:nvPr>
+        </p:nvSpPr>
+        <p:spPr/>
+        <p:txBody>
+          <a:bodyPr/>
+          <a:lstStyle/>
+          <a:p>
+            <a:fld id="{08C366F5-AFAD-49CB-854A-9D9E238FCA13}" type="slidenum">
+              <a:rPr lang="en-GB" smtClean="0"/>
+              <a:t>2</a:t>
+            </a:fld>
+            <a:endParaRPr lang="en-GB"/>
+          </a:p>
+        </p:txBody>
+      </p:sp>
+    </p:spTree>
+    <p:extLst>
+      <p:ext uri="{BB962C8B-B14F-4D97-AF65-F5344CB8AC3E}">
+        <p14:creationId xmlns:p14="http://schemas.microsoft.com/office/powerpoint/2010/main" val="3204133960"/>
+      </p:ext>
+    </p:extLst>
+  </p:cSld>
+  <p:clrMapOvr>
+    <a:masterClrMapping/>
+  </p:clrMapOvr>
+</p:sld>
+</file>
+
+<file path=ppt/slides/slide20.xml><?xml version="1.0" encoding="utf-8"?>
 <p:sld xmlns:a="http://schemas.openxmlformats.org/drawingml/2006/main" xmlns:r="http://schemas.openxmlformats.org/officeDocument/2006/relationships" xmlns:p="http://schemas.openxmlformats.org/presentationml/2006/main">
   <p:cSld>
     <p:spTree>
@@ -8190,7 +9491,7 @@
           <a:p>
             <a:fld id="{08C366F5-AFAD-49CB-854A-9D9E238FCA13}" type="slidenum">
               <a:rPr lang="en-GB" smtClean="0"/>
-              <a:t>19</a:t>
+              <a:t>20</a:t>
             </a:fld>
             <a:endParaRPr lang="en-GB"/>
           </a:p>
@@ -8209,224 +9510,7 @@
 </p:sld>
 </file>
 
-<file path=ppt/slides/slide2.xml><?xml version="1.0" encoding="utf-8"?>
-<p:sld xmlns:a="http://schemas.openxmlformats.org/drawingml/2006/main" xmlns:r="http://schemas.openxmlformats.org/officeDocument/2006/relationships" xmlns:p="http://schemas.openxmlformats.org/presentationml/2006/main">
-  <p:cSld>
-    <p:spTree>
-      <p:nvGrpSpPr>
-        <p:cNvPr id="1" name=""/>
-        <p:cNvGrpSpPr/>
-        <p:nvPr/>
-      </p:nvGrpSpPr>
-      <p:grpSpPr>
-        <a:xfrm>
-          <a:off x="0" y="0"/>
-          <a:ext cx="0" cy="0"/>
-          <a:chOff x="0" y="0"/>
-          <a:chExt cx="0" cy="0"/>
-        </a:xfrm>
-      </p:grpSpPr>
-      <p:sp>
-        <p:nvSpPr>
-          <p:cNvPr id="6" name="Titel 5">
-            <a:extLst>
-              <a:ext uri="{FF2B5EF4-FFF2-40B4-BE49-F238E27FC236}">
-                <a16:creationId xmlns:a16="http://schemas.microsoft.com/office/drawing/2014/main" id="{E92B2E04-27B7-8A9A-6143-C8831F834080}"/>
-              </a:ext>
-            </a:extLst>
-          </p:cNvPr>
-          <p:cNvSpPr>
-            <a:spLocks noGrp="1"/>
-          </p:cNvSpPr>
-          <p:nvPr>
-            <p:ph type="title"/>
-          </p:nvPr>
-        </p:nvSpPr>
-        <p:spPr/>
-        <p:txBody>
-          <a:bodyPr/>
-          <a:lstStyle/>
-          <a:p>
-            <a:r>
-              <a:rPr lang="de-DE" dirty="0"/>
-              <a:t>Model Evaluation</a:t>
-            </a:r>
-          </a:p>
-        </p:txBody>
-      </p:sp>
-      <p:sp>
-        <p:nvSpPr>
-          <p:cNvPr id="7" name="Inhaltsplatzhalter 6">
-            <a:extLst>
-              <a:ext uri="{FF2B5EF4-FFF2-40B4-BE49-F238E27FC236}">
-                <a16:creationId xmlns:a16="http://schemas.microsoft.com/office/drawing/2014/main" id="{16CBE6C5-FF71-FE69-AF96-EB26512AF61F}"/>
-              </a:ext>
-            </a:extLst>
-          </p:cNvPr>
-          <p:cNvSpPr>
-            <a:spLocks noGrp="1"/>
-          </p:cNvSpPr>
-          <p:nvPr>
-            <p:ph idx="1"/>
-          </p:nvPr>
-        </p:nvSpPr>
-        <p:spPr/>
-        <p:txBody>
-          <a:bodyPr>
-            <a:normAutofit lnSpcReduction="10000"/>
-          </a:bodyPr>
-          <a:lstStyle/>
-          <a:p>
-            <a:r>
-              <a:rPr lang="de-DE" dirty="0" err="1"/>
-              <a:t>classification</a:t>
-            </a:r>
-            <a:r>
-              <a:rPr lang="de-DE" dirty="0"/>
-              <a:t> </a:t>
-            </a:r>
-            <a:r>
-              <a:rPr lang="de-DE" dirty="0" err="1"/>
-              <a:t>metrics</a:t>
-            </a:r>
-            <a:endParaRPr lang="de-DE" dirty="0"/>
-          </a:p>
-          <a:p>
-            <a:pPr marL="0" indent="0">
-              <a:buNone/>
-            </a:pPr>
-            <a:endParaRPr lang="de-DE" dirty="0"/>
-          </a:p>
-          <a:p>
-            <a:r>
-              <a:rPr lang="de-DE" dirty="0" err="1"/>
-              <a:t>regression</a:t>
-            </a:r>
-            <a:r>
-              <a:rPr lang="de-DE" dirty="0"/>
-              <a:t> </a:t>
-            </a:r>
-            <a:r>
-              <a:rPr lang="de-DE" dirty="0" err="1"/>
-              <a:t>metrics</a:t>
-            </a:r>
-            <a:endParaRPr lang="de-DE" dirty="0"/>
-          </a:p>
-          <a:p>
-            <a:pPr marL="0" indent="0">
-              <a:buNone/>
-            </a:pPr>
-            <a:endParaRPr lang="de-DE" dirty="0"/>
-          </a:p>
-          <a:p>
-            <a:r>
-              <a:rPr lang="de-DE" dirty="0"/>
-              <a:t>feature </a:t>
-            </a:r>
-            <a:r>
-              <a:rPr lang="de-DE" dirty="0" err="1"/>
-              <a:t>importance</a:t>
-            </a:r>
-            <a:endParaRPr lang="de-DE" dirty="0"/>
-          </a:p>
-          <a:p>
-            <a:pPr marL="0" indent="0">
-              <a:buNone/>
-            </a:pPr>
-            <a:endParaRPr lang="de-DE" dirty="0"/>
-          </a:p>
-          <a:p>
-            <a:r>
-              <a:rPr lang="de-DE" dirty="0" err="1"/>
-              <a:t>local</a:t>
-            </a:r>
-            <a:r>
-              <a:rPr lang="de-DE" dirty="0"/>
-              <a:t> </a:t>
-            </a:r>
-            <a:r>
-              <a:rPr lang="de-DE" dirty="0" err="1"/>
-              <a:t>explainability</a:t>
-            </a:r>
-            <a:endParaRPr lang="de-DE" dirty="0"/>
-          </a:p>
-          <a:p>
-            <a:pPr marL="0" indent="0">
-              <a:buNone/>
-            </a:pPr>
-            <a:endParaRPr lang="de-DE" dirty="0"/>
-          </a:p>
-          <a:p>
-            <a:r>
-              <a:rPr lang="de-DE" dirty="0" err="1"/>
-              <a:t>hypothesis</a:t>
-            </a:r>
-            <a:r>
-              <a:rPr lang="de-DE" dirty="0"/>
-              <a:t> </a:t>
-            </a:r>
-            <a:r>
-              <a:rPr lang="de-DE" dirty="0" err="1"/>
-              <a:t>testing</a:t>
-            </a:r>
-            <a:r>
-              <a:rPr lang="de-DE" dirty="0"/>
-              <a:t> (separate </a:t>
-            </a:r>
-            <a:r>
-              <a:rPr lang="de-DE" dirty="0" err="1"/>
-              <a:t>slide</a:t>
-            </a:r>
-            <a:r>
-              <a:rPr lang="de-DE" dirty="0"/>
-              <a:t> deck)</a:t>
-            </a:r>
-          </a:p>
-        </p:txBody>
-      </p:sp>
-      <p:sp>
-        <p:nvSpPr>
-          <p:cNvPr id="5" name="Foliennummernplatzhalter 4">
-            <a:extLst>
-              <a:ext uri="{FF2B5EF4-FFF2-40B4-BE49-F238E27FC236}">
-                <a16:creationId xmlns:a16="http://schemas.microsoft.com/office/drawing/2014/main" id="{422405FE-CC14-5A9E-E6BC-374EBECB4E84}"/>
-              </a:ext>
-            </a:extLst>
-          </p:cNvPr>
-          <p:cNvSpPr>
-            <a:spLocks noGrp="1"/>
-          </p:cNvSpPr>
-          <p:nvPr>
-            <p:ph type="sldNum" sz="quarter" idx="12"/>
-          </p:nvPr>
-        </p:nvSpPr>
-        <p:spPr/>
-        <p:txBody>
-          <a:bodyPr/>
-          <a:lstStyle/>
-          <a:p>
-            <a:fld id="{08C366F5-AFAD-49CB-854A-9D9E238FCA13}" type="slidenum">
-              <a:rPr lang="en-GB" smtClean="0"/>
-              <a:t>2</a:t>
-            </a:fld>
-            <a:endParaRPr lang="en-GB"/>
-          </a:p>
-        </p:txBody>
-      </p:sp>
-    </p:spTree>
-    <p:extLst>
-      <p:ext uri="{BB962C8B-B14F-4D97-AF65-F5344CB8AC3E}">
-        <p14:creationId xmlns:p14="http://schemas.microsoft.com/office/powerpoint/2010/main" val="3204133960"/>
-      </p:ext>
-    </p:extLst>
-  </p:cSld>
-  <p:clrMapOvr>
-    <a:masterClrMapping/>
-  </p:clrMapOvr>
-</p:sld>
-</file>
-
-<file path=ppt/slides/slide20.xml><?xml version="1.0" encoding="utf-8"?>
+<file path=ppt/slides/slide21.xml><?xml version="1.0" encoding="utf-8"?>
 <p:sld xmlns:a="http://schemas.openxmlformats.org/drawingml/2006/main" xmlns:r="http://schemas.openxmlformats.org/officeDocument/2006/relationships" xmlns:p="http://schemas.openxmlformats.org/presentationml/2006/main">
   <p:cSld>
     <p:spTree>
@@ -8946,7 +10030,7 @@
           <a:p>
             <a:fld id="{08C366F5-AFAD-49CB-854A-9D9E238FCA13}" type="slidenum">
               <a:rPr lang="en-GB" smtClean="0"/>
-              <a:t>20</a:t>
+              <a:t>21</a:t>
             </a:fld>
             <a:endParaRPr lang="en-GB"/>
           </a:p>
@@ -9071,7 +10155,7 @@
 </p:sld>
 </file>
 
-<file path=ppt/slides/slide21.xml><?xml version="1.0" encoding="utf-8"?>
+<file path=ppt/slides/slide22.xml><?xml version="1.0" encoding="utf-8"?>
 <p:sld xmlns:a="http://schemas.openxmlformats.org/drawingml/2006/main" xmlns:r="http://schemas.openxmlformats.org/officeDocument/2006/relationships" xmlns:p="http://schemas.openxmlformats.org/presentationml/2006/main">
   <p:cSld>
     <p:spTree>
@@ -9602,7 +10686,7 @@
           <a:p>
             <a:fld id="{08C366F5-AFAD-49CB-854A-9D9E238FCA13}" type="slidenum">
               <a:rPr lang="en-GB" smtClean="0"/>
-              <a:t>21</a:t>
+              <a:t>22</a:t>
             </a:fld>
             <a:endParaRPr lang="en-GB"/>
           </a:p>
@@ -9621,7 +10705,7 @@
 </p:sld>
 </file>
 
-<file path=ppt/slides/slide22.xml><?xml version="1.0" encoding="utf-8"?>
+<file path=ppt/slides/slide23.xml><?xml version="1.0" encoding="utf-8"?>
 <p:sld xmlns:a="http://schemas.openxmlformats.org/drawingml/2006/main" xmlns:r="http://schemas.openxmlformats.org/officeDocument/2006/relationships" xmlns:p="http://schemas.openxmlformats.org/presentationml/2006/main">
   <p:cSld>
     <p:spTree>
@@ -10395,7 +11479,7 @@
           <a:p>
             <a:fld id="{08C366F5-AFAD-49CB-854A-9D9E238FCA13}" type="slidenum">
               <a:rPr lang="en-GB" smtClean="0"/>
-              <a:t>22</a:t>
+              <a:t>23</a:t>
             </a:fld>
             <a:endParaRPr lang="en-GB"/>
           </a:p>
@@ -10414,7 +11498,7 @@
 </p:sld>
 </file>
 
-<file path=ppt/slides/slide23.xml><?xml version="1.0" encoding="utf-8"?>
+<file path=ppt/slides/slide24.xml><?xml version="1.0" encoding="utf-8"?>
 <p:sld xmlns:a="http://schemas.openxmlformats.org/drawingml/2006/main" xmlns:r="http://schemas.openxmlformats.org/officeDocument/2006/relationships" xmlns:p="http://schemas.openxmlformats.org/presentationml/2006/main">
   <p:cSld>
     <p:spTree>
@@ -10988,7 +12072,7 @@
           <a:p>
             <a:fld id="{08C366F5-AFAD-49CB-854A-9D9E238FCA13}" type="slidenum">
               <a:rPr lang="en-GB" smtClean="0"/>
-              <a:t>23</a:t>
+              <a:t>24</a:t>
             </a:fld>
             <a:endParaRPr lang="en-GB"/>
           </a:p>
@@ -11007,7 +12091,7 @@
 </p:sld>
 </file>
 
-<file path=ppt/slides/slide24.xml><?xml version="1.0" encoding="utf-8"?>
+<file path=ppt/slides/slide25.xml><?xml version="1.0" encoding="utf-8"?>
 <p:sld xmlns:a="http://schemas.openxmlformats.org/drawingml/2006/main" xmlns:r="http://schemas.openxmlformats.org/officeDocument/2006/relationships" xmlns:p="http://schemas.openxmlformats.org/presentationml/2006/main">
   <p:cSld>
     <p:spTree>
@@ -11359,7 +12443,7 @@
           <a:p>
             <a:fld id="{08C366F5-AFAD-49CB-854A-9D9E238FCA13}" type="slidenum">
               <a:rPr lang="en-GB" smtClean="0"/>
-              <a:t>24</a:t>
+              <a:t>25</a:t>
             </a:fld>
             <a:endParaRPr lang="en-GB"/>
           </a:p>
@@ -11730,7 +12814,7 @@
 </p:sld>
 </file>
 
-<file path=ppt/slides/slide25.xml><?xml version="1.0" encoding="utf-8"?>
+<file path=ppt/slides/slide26.xml><?xml version="1.0" encoding="utf-8"?>
 <p:sld xmlns:a="http://schemas.openxmlformats.org/drawingml/2006/main" xmlns:r="http://schemas.openxmlformats.org/officeDocument/2006/relationships" xmlns:p="http://schemas.openxmlformats.org/presentationml/2006/main">
   <p:cSld>
     <p:spTree>
@@ -11992,7 +13076,7 @@
           <a:p>
             <a:fld id="{08C366F5-AFAD-49CB-854A-9D9E238FCA13}" type="slidenum">
               <a:rPr lang="en-GB" smtClean="0"/>
-              <a:t>25</a:t>
+              <a:t>26</a:t>
             </a:fld>
             <a:endParaRPr lang="en-GB"/>
           </a:p>
@@ -12252,7 +13336,7 @@
 </p:sld>
 </file>
 
-<file path=ppt/slides/slide26.xml><?xml version="1.0" encoding="utf-8"?>
+<file path=ppt/slides/slide27.xml><?xml version="1.0" encoding="utf-8"?>
 <p:sld xmlns:a="http://schemas.openxmlformats.org/drawingml/2006/main" xmlns:r="http://schemas.openxmlformats.org/officeDocument/2006/relationships" xmlns:p="http://schemas.openxmlformats.org/presentationml/2006/main">
   <p:cSld>
     <p:spTree>
@@ -12323,7 +13407,7 @@
           <a:p>
             <a:fld id="{523A240F-EAFE-E84F-B44C-6D7A08E0E409}" type="slidenum">
               <a:rPr lang="en-US" smtClean="0"/>
-              <a:t>26</a:t>
+              <a:t>27</a:t>
             </a:fld>
             <a:endParaRPr lang="en-US" dirty="0"/>
           </a:p>
@@ -13051,7 +14135,7 @@
 </p:sld>
 </file>
 
-<file path=ppt/slides/slide27.xml><?xml version="1.0" encoding="utf-8"?>
+<file path=ppt/slides/slide28.xml><?xml version="1.0" encoding="utf-8"?>
 <p:sld xmlns:a="http://schemas.openxmlformats.org/drawingml/2006/main" xmlns:r="http://schemas.openxmlformats.org/officeDocument/2006/relationships" xmlns:p="http://schemas.openxmlformats.org/presentationml/2006/main">
   <p:cSld>
     <p:spTree>
@@ -13119,7 +14203,7 @@
           <a:p>
             <a:fld id="{523A240F-EAFE-E84F-B44C-6D7A08E0E409}" type="slidenum">
               <a:rPr lang="en-US" smtClean="0"/>
-              <a:t>27</a:t>
+              <a:t>28</a:t>
             </a:fld>
             <a:endParaRPr lang="en-US"/>
           </a:p>
@@ -13666,7 +14750,7 @@
 </p:sld>
 </file>
 
-<file path=ppt/slides/slide28.xml><?xml version="1.0" encoding="utf-8"?>
+<file path=ppt/slides/slide29.xml><?xml version="1.0" encoding="utf-8"?>
 <p:sld xmlns:a="http://schemas.openxmlformats.org/drawingml/2006/main" xmlns:r="http://schemas.openxmlformats.org/officeDocument/2006/relationships" xmlns:p="http://schemas.openxmlformats.org/presentationml/2006/main">
   <p:cSld>
     <p:spTree>
@@ -14111,7 +15195,7 @@
           <a:p>
             <a:fld id="{08C366F5-AFAD-49CB-854A-9D9E238FCA13}" type="slidenum">
               <a:rPr lang="en-GB" smtClean="0"/>
-              <a:t>28</a:t>
+              <a:t>29</a:t>
             </a:fld>
             <a:endParaRPr lang="en-GB"/>
           </a:p>
@@ -14121,564 +15205,6 @@
     <p:extLst>
       <p:ext uri="{BB962C8B-B14F-4D97-AF65-F5344CB8AC3E}">
         <p14:creationId xmlns:p14="http://schemas.microsoft.com/office/powerpoint/2010/main" val="3577265035"/>
-      </p:ext>
-    </p:extLst>
-  </p:cSld>
-  <p:clrMapOvr>
-    <a:masterClrMapping/>
-  </p:clrMapOvr>
-</p:sld>
-</file>
-
-<file path=ppt/slides/slide29.xml><?xml version="1.0" encoding="utf-8"?>
-<p:sld xmlns:a="http://schemas.openxmlformats.org/drawingml/2006/main" xmlns:r="http://schemas.openxmlformats.org/officeDocument/2006/relationships" xmlns:p="http://schemas.openxmlformats.org/presentationml/2006/main">
-  <p:cSld>
-    <p:spTree>
-      <p:nvGrpSpPr>
-        <p:cNvPr id="1" name=""/>
-        <p:cNvGrpSpPr/>
-        <p:nvPr/>
-      </p:nvGrpSpPr>
-      <p:grpSpPr>
-        <a:xfrm>
-          <a:off x="0" y="0"/>
-          <a:ext cx="0" cy="0"/>
-          <a:chOff x="0" y="0"/>
-          <a:chExt cx="0" cy="0"/>
-        </a:xfrm>
-      </p:grpSpPr>
-      <p:sp>
-        <p:nvSpPr>
-          <p:cNvPr id="2" name="Titel 1">
-            <a:extLst>
-              <a:ext uri="{FF2B5EF4-FFF2-40B4-BE49-F238E27FC236}">
-                <a16:creationId xmlns:a16="http://schemas.microsoft.com/office/drawing/2014/main" id="{5595687C-3D76-45C0-405C-128B90739BA0}"/>
-              </a:ext>
-            </a:extLst>
-          </p:cNvPr>
-          <p:cNvSpPr>
-            <a:spLocks noGrp="1"/>
-          </p:cNvSpPr>
-          <p:nvPr>
-            <p:ph type="title"/>
-          </p:nvPr>
-        </p:nvSpPr>
-        <p:spPr/>
-        <p:txBody>
-          <a:bodyPr/>
-          <a:lstStyle/>
-          <a:p>
-            <a:r>
-              <a:rPr lang="de-DE" dirty="0"/>
-              <a:t>Model-</a:t>
-            </a:r>
-            <a:r>
-              <a:rPr lang="de-DE" dirty="0" err="1"/>
-              <a:t>Specific</a:t>
-            </a:r>
-            <a:r>
-              <a:rPr lang="de-DE" dirty="0"/>
-              <a:t> </a:t>
-            </a:r>
-            <a:r>
-              <a:rPr lang="de-DE" dirty="0" err="1"/>
-              <a:t>Importance</a:t>
-            </a:r>
-            <a:endParaRPr lang="de-DE" dirty="0"/>
-          </a:p>
-        </p:txBody>
-      </p:sp>
-      <mc:AlternateContent xmlns:mc="http://schemas.openxmlformats.org/markup-compatibility/2006">
-        <mc:Choice xmlns:a14="http://schemas.microsoft.com/office/drawing/2010/main" Requires="a14">
-          <p:sp>
-            <p:nvSpPr>
-              <p:cNvPr id="3" name="Inhaltsplatzhalter 2">
-                <a:extLst>
-                  <a:ext uri="{FF2B5EF4-FFF2-40B4-BE49-F238E27FC236}">
-                    <a16:creationId xmlns:a16="http://schemas.microsoft.com/office/drawing/2014/main" id="{57ACC007-E966-C8DC-8020-739D15E8A848}"/>
-                  </a:ext>
-                </a:extLst>
-              </p:cNvPr>
-              <p:cNvSpPr>
-                <a:spLocks noGrp="1"/>
-              </p:cNvSpPr>
-              <p:nvPr>
-                <p:ph idx="1"/>
-              </p:nvPr>
-            </p:nvSpPr>
-            <p:spPr>
-              <a:xfrm>
-                <a:off x="838200" y="1825625"/>
-                <a:ext cx="6396613" cy="4351338"/>
-              </a:xfrm>
-            </p:spPr>
-            <p:txBody>
-              <a:bodyPr>
-                <a:normAutofit fontScale="77500" lnSpcReduction="20000"/>
-              </a:bodyPr>
-              <a:lstStyle/>
-              <a:p>
-                <a:pPr marL="0" indent="0">
-                  <a:buNone/>
-                </a:pPr>
-                <a:r>
-                  <a:rPr lang="de-DE" dirty="0"/>
-                  <a:t>linear </a:t>
-                </a:r>
-                <a:r>
-                  <a:rPr lang="de-DE" dirty="0" err="1"/>
-                  <a:t>model</a:t>
-                </a:r>
-                <a:r>
-                  <a:rPr lang="de-DE" dirty="0"/>
-                  <a:t> </a:t>
-                </a:r>
-                <a:r>
-                  <a:rPr lang="de-DE" dirty="0" err="1"/>
-                  <a:t>coefficients</a:t>
-                </a:r>
-                <a:endParaRPr lang="de-DE" dirty="0"/>
-              </a:p>
-              <a:p>
-                <a:r>
-                  <a:rPr lang="de-DE" dirty="0" err="1"/>
-                  <a:t>idea</a:t>
-                </a:r>
-                <a:r>
-                  <a:rPr lang="de-DE" dirty="0"/>
-                  <a:t>: </a:t>
-                </a:r>
-                <a:r>
-                  <a:rPr lang="de-DE" dirty="0" err="1"/>
-                  <a:t>importance</a:t>
-                </a:r>
-                <a:r>
-                  <a:rPr lang="de-DE" dirty="0"/>
-                  <a:t> = </a:t>
-                </a:r>
-                <a:r>
-                  <a:rPr lang="de-DE" dirty="0" err="1"/>
-                  <a:t>magnitude</a:t>
-                </a:r>
-                <a:r>
-                  <a:rPr lang="de-DE" dirty="0"/>
-                  <a:t> </a:t>
-                </a:r>
-                <a:r>
-                  <a:rPr lang="de-DE" dirty="0" err="1"/>
-                  <a:t>of</a:t>
-                </a:r>
-                <a:r>
-                  <a:rPr lang="de-DE" dirty="0"/>
-                  <a:t> </a:t>
-                </a:r>
-                <a:r>
-                  <a:rPr lang="de-DE" dirty="0" err="1"/>
-                  <a:t>coefficients</a:t>
-                </a:r>
-                <a:r>
-                  <a:rPr lang="de-DE" dirty="0"/>
-                  <a:t> (larger absolute </a:t>
-                </a:r>
-                <a:r>
-                  <a:rPr lang="de-DE" dirty="0" err="1"/>
-                  <a:t>value</a:t>
-                </a:r>
-                <a:r>
-                  <a:rPr lang="de-DE" dirty="0"/>
-                  <a:t> </a:t>
-                </a:r>
-                <a:r>
-                  <a:rPr lang="de-DE" dirty="0">
-                    <a:sym typeface="Wingdings" pitchFamily="2" charset="2"/>
-                  </a:rPr>
-                  <a:t></a:t>
-                </a:r>
-                <a:r>
-                  <a:rPr lang="de-DE" dirty="0"/>
-                  <a:t> </a:t>
-                </a:r>
-                <a:r>
-                  <a:rPr lang="de-DE" dirty="0" err="1"/>
-                  <a:t>stronger</a:t>
-                </a:r>
-                <a:r>
-                  <a:rPr lang="de-DE" dirty="0"/>
-                  <a:t> </a:t>
-                </a:r>
-                <a:r>
-                  <a:rPr lang="de-DE" dirty="0" err="1"/>
-                  <a:t>influence</a:t>
-                </a:r>
-                <a:r>
-                  <a:rPr lang="de-DE" dirty="0"/>
-                  <a:t>)</a:t>
-                </a:r>
-              </a:p>
-              <a:p>
-                <a:r>
-                  <a:rPr lang="de-DE" dirty="0" err="1"/>
-                  <a:t>important</a:t>
-                </a:r>
-                <a:r>
-                  <a:rPr lang="de-DE" dirty="0"/>
-                  <a:t>: </a:t>
-                </a:r>
-                <a:r>
-                  <a:rPr lang="de-DE" dirty="0" err="1"/>
-                  <a:t>features</a:t>
-                </a:r>
-                <a:r>
-                  <a:rPr lang="de-DE" dirty="0"/>
-                  <a:t> </a:t>
-                </a:r>
-                <a:r>
-                  <a:rPr lang="de-DE" dirty="0" err="1"/>
-                  <a:t>must</a:t>
-                </a:r>
-                <a:r>
-                  <a:rPr lang="de-DE" dirty="0"/>
-                  <a:t> </a:t>
-                </a:r>
-                <a:r>
-                  <a:rPr lang="de-DE" dirty="0" err="1"/>
-                  <a:t>be</a:t>
-                </a:r>
-                <a:r>
-                  <a:rPr lang="de-DE" dirty="0"/>
-                  <a:t> </a:t>
-                </a:r>
-                <a:r>
-                  <a:rPr lang="de-DE" dirty="0" err="1"/>
-                  <a:t>scaled</a:t>
-                </a:r>
-                <a:endParaRPr lang="de-DE" dirty="0"/>
-              </a:p>
-              <a:p>
-                <a:r>
-                  <a:rPr lang="de-DE" dirty="0" err="1"/>
-                  <a:t>only</a:t>
-                </a:r>
-                <a:r>
-                  <a:rPr lang="de-DE" dirty="0"/>
-                  <a:t> </a:t>
-                </a:r>
-                <a:r>
-                  <a:rPr lang="de-DE" dirty="0" err="1"/>
-                  <a:t>captures</a:t>
-                </a:r>
-                <a:r>
-                  <a:rPr lang="de-DE" dirty="0"/>
-                  <a:t> linear </a:t>
-                </a:r>
-                <a:r>
-                  <a:rPr lang="de-DE" dirty="0" err="1"/>
-                  <a:t>relationships</a:t>
-                </a:r>
-                <a:endParaRPr lang="de-DE" dirty="0"/>
-              </a:p>
-              <a:p>
-                <a:pPr marL="0" indent="0">
-                  <a:buNone/>
-                </a:pPr>
-                <a:endParaRPr lang="de-DE" dirty="0"/>
-              </a:p>
-              <a:p>
-                <a:pPr marL="0" indent="0">
-                  <a:buNone/>
-                </a:pPr>
-                <a:r>
-                  <a:rPr lang="de-DE" dirty="0" err="1"/>
-                  <a:t>tree-based</a:t>
-                </a:r>
-                <a:r>
-                  <a:rPr lang="de-DE" dirty="0"/>
-                  <a:t> feature </a:t>
-                </a:r>
-                <a:r>
-                  <a:rPr lang="de-DE" dirty="0" err="1"/>
-                  <a:t>importance</a:t>
-                </a:r>
-                <a:r>
-                  <a:rPr lang="de-DE" dirty="0"/>
-                  <a:t> (</a:t>
-                </a:r>
-                <a:r>
-                  <a:rPr lang="de-DE" dirty="0" err="1"/>
-                  <a:t>used</a:t>
-                </a:r>
-                <a:r>
-                  <a:rPr lang="de-DE" dirty="0"/>
-                  <a:t> in </a:t>
-                </a:r>
-                <a:r>
-                  <a:rPr lang="de-DE" dirty="0" err="1"/>
-                  <a:t>decision</a:t>
-                </a:r>
-                <a:r>
-                  <a:rPr lang="de-DE" dirty="0"/>
-                  <a:t> </a:t>
-                </a:r>
-                <a:r>
-                  <a:rPr lang="de-DE" dirty="0" err="1"/>
-                  <a:t>trees</a:t>
-                </a:r>
-                <a:r>
-                  <a:rPr lang="de-DE" dirty="0"/>
-                  <a:t>, </a:t>
-                </a:r>
-                <a:r>
-                  <a:rPr lang="de-DE" dirty="0" err="1"/>
-                  <a:t>random</a:t>
-                </a:r>
-                <a:r>
-                  <a:rPr lang="de-DE" dirty="0"/>
-                  <a:t> </a:t>
-                </a:r>
-                <a:r>
-                  <a:rPr lang="de-DE" dirty="0" err="1"/>
-                  <a:t>forests</a:t>
-                </a:r>
-                <a:r>
-                  <a:rPr lang="de-DE" dirty="0"/>
-                  <a:t>, </a:t>
-                </a:r>
-                <a:r>
-                  <a:rPr lang="de-DE" dirty="0" err="1"/>
-                  <a:t>gradient</a:t>
-                </a:r>
-                <a:r>
-                  <a:rPr lang="de-DE" dirty="0"/>
-                  <a:t> </a:t>
-                </a:r>
-                <a:r>
-                  <a:rPr lang="de-DE" dirty="0" err="1"/>
-                  <a:t>boosting</a:t>
-                </a:r>
-                <a:r>
-                  <a:rPr lang="de-DE" dirty="0"/>
-                  <a:t>)</a:t>
-                </a:r>
-              </a:p>
-              <a:p>
-                <a:r>
-                  <a:rPr lang="de-DE" dirty="0" err="1"/>
-                  <a:t>idea</a:t>
-                </a:r>
-                <a:r>
-                  <a:rPr lang="de-DE" dirty="0"/>
-                  <a:t>: </a:t>
-                </a:r>
-                <a:r>
-                  <a:rPr lang="de-DE" dirty="0" err="1"/>
-                  <a:t>importance</a:t>
-                </a:r>
-                <a:r>
-                  <a:rPr lang="de-DE" dirty="0"/>
-                  <a:t> </a:t>
-                </a:r>
-                <a:r>
-                  <a:rPr lang="de-DE" dirty="0" err="1"/>
-                  <a:t>based</a:t>
-                </a:r>
-                <a:r>
-                  <a:rPr lang="de-DE" dirty="0"/>
-                  <a:t> on </a:t>
-                </a:r>
-                <a:r>
-                  <a:rPr lang="de-DE" dirty="0" err="1"/>
-                  <a:t>reduction</a:t>
-                </a:r>
-                <a:r>
-                  <a:rPr lang="de-DE" dirty="0"/>
-                  <a:t> in </a:t>
-                </a:r>
-                <a:r>
-                  <a:rPr lang="de-DE" dirty="0" err="1"/>
-                  <a:t>impurity</a:t>
-                </a:r>
-                <a:r>
-                  <a:rPr lang="de-DE" dirty="0"/>
-                  <a:t> (e.g., Gini, </a:t>
-                </a:r>
-                <a14:m>
-                  <m:oMath xmlns:m="http://schemas.openxmlformats.org/officeDocument/2006/math">
-                    <m:r>
-                      <m:rPr>
-                        <m:sty m:val="p"/>
-                      </m:rPr>
-                      <a:rPr lang="de-DE" i="0" dirty="0" smtClean="0">
-                        <a:latin typeface="Cambria Math" panose="02040503050406030204" pitchFamily="18" charset="0"/>
-                      </a:rPr>
-                      <m:t>MSE</m:t>
-                    </m:r>
-                  </m:oMath>
-                </a14:m>
-                <a:r>
-                  <a:rPr lang="de-DE" dirty="0"/>
-                  <a:t>)</a:t>
-                </a:r>
-              </a:p>
-              <a:p>
-                <a:r>
-                  <a:rPr lang="de-DE" dirty="0" err="1"/>
-                  <a:t>captures</a:t>
-                </a:r>
-                <a:r>
-                  <a:rPr lang="de-DE" dirty="0"/>
-                  <a:t> non-linear </a:t>
-                </a:r>
-                <a:r>
-                  <a:rPr lang="de-DE" dirty="0" err="1"/>
-                  <a:t>relationships</a:t>
-                </a:r>
-                <a:endParaRPr lang="de-DE" dirty="0"/>
-              </a:p>
-              <a:p>
-                <a:r>
-                  <a:rPr lang="de-DE" dirty="0"/>
-                  <a:t>but </a:t>
-                </a:r>
-                <a:r>
-                  <a:rPr lang="de-DE" dirty="0" err="1"/>
-                  <a:t>can</a:t>
-                </a:r>
-                <a:r>
-                  <a:rPr lang="de-DE" dirty="0"/>
-                  <a:t> </a:t>
-                </a:r>
-                <a:r>
-                  <a:rPr lang="de-DE" dirty="0" err="1"/>
-                  <a:t>favor</a:t>
-                </a:r>
-                <a:r>
-                  <a:rPr lang="de-DE" dirty="0"/>
-                  <a:t> high-</a:t>
-                </a:r>
-                <a:r>
-                  <a:rPr lang="de-DE" dirty="0" err="1"/>
-                  <a:t>cardinality</a:t>
-                </a:r>
-                <a:r>
-                  <a:rPr lang="de-DE" dirty="0"/>
-                  <a:t> </a:t>
-                </a:r>
-                <a:r>
-                  <a:rPr lang="de-DE" dirty="0" err="1"/>
-                  <a:t>features</a:t>
-                </a:r>
-                <a:endParaRPr lang="de-DE" dirty="0"/>
-              </a:p>
-            </p:txBody>
-          </p:sp>
-        </mc:Choice>
-        <mc:Fallback>
-          <p:sp>
-            <p:nvSpPr>
-              <p:cNvPr id="3" name="Inhaltsplatzhalter 2">
-                <a:extLst>
-                  <a:ext uri="{FF2B5EF4-FFF2-40B4-BE49-F238E27FC236}">
-                    <a16:creationId xmlns:a16="http://schemas.microsoft.com/office/drawing/2014/main" id="{57ACC007-E966-C8DC-8020-739D15E8A848}"/>
-                  </a:ext>
-                </a:extLst>
-              </p:cNvPr>
-              <p:cNvSpPr>
-                <a:spLocks noGrp="1" noRot="1" noChangeAspect="1" noMove="1" noResize="1" noEditPoints="1" noAdjustHandles="1" noChangeArrowheads="1" noChangeShapeType="1" noTextEdit="1"/>
-              </p:cNvSpPr>
-              <p:nvPr>
-                <p:ph idx="1"/>
-              </p:nvPr>
-            </p:nvSpPr>
-            <p:spPr>
-              <a:xfrm>
-                <a:off x="838200" y="1825625"/>
-                <a:ext cx="6396613" cy="4351338"/>
-              </a:xfrm>
-              <a:blipFill>
-                <a:blip r:embed="rId2"/>
-                <a:stretch>
-                  <a:fillRect l="-1190" t="-2616"/>
-                </a:stretch>
-              </a:blipFill>
-            </p:spPr>
-            <p:txBody>
-              <a:bodyPr/>
-              <a:lstStyle/>
-              <a:p>
-                <a:r>
-                  <a:rPr lang="de-DE">
-                    <a:noFill/>
-                  </a:rPr>
-                  <a:t> </a:t>
-                </a:r>
-              </a:p>
-            </p:txBody>
-          </p:sp>
-        </mc:Fallback>
-      </mc:AlternateContent>
-      <p:sp>
-        <p:nvSpPr>
-          <p:cNvPr id="4" name="Foliennummernplatzhalter 3">
-            <a:extLst>
-              <a:ext uri="{FF2B5EF4-FFF2-40B4-BE49-F238E27FC236}">
-                <a16:creationId xmlns:a16="http://schemas.microsoft.com/office/drawing/2014/main" id="{90FEA500-EB45-413A-5886-C05A459D9590}"/>
-              </a:ext>
-            </a:extLst>
-          </p:cNvPr>
-          <p:cNvSpPr>
-            <a:spLocks noGrp="1"/>
-          </p:cNvSpPr>
-          <p:nvPr>
-            <p:ph type="sldNum" sz="quarter" idx="12"/>
-          </p:nvPr>
-        </p:nvSpPr>
-        <p:spPr/>
-        <p:txBody>
-          <a:bodyPr/>
-          <a:lstStyle/>
-          <a:p>
-            <a:fld id="{08C366F5-AFAD-49CB-854A-9D9E238FCA13}" type="slidenum">
-              <a:rPr lang="en-GB" smtClean="0"/>
-              <a:t>29</a:t>
-            </a:fld>
-            <a:endParaRPr lang="en-GB"/>
-          </a:p>
-        </p:txBody>
-      </p:sp>
-      <p:pic>
-        <p:nvPicPr>
-          <p:cNvPr id="5" name="Grafik 4">
-            <a:extLst>
-              <a:ext uri="{FF2B5EF4-FFF2-40B4-BE49-F238E27FC236}">
-                <a16:creationId xmlns:a16="http://schemas.microsoft.com/office/drawing/2014/main" id="{32C81FAC-0E05-A074-D6B8-617252253CDE}"/>
-              </a:ext>
-            </a:extLst>
-          </p:cNvPr>
-          <p:cNvPicPr>
-            <a:picLocks noChangeAspect="1"/>
-          </p:cNvPicPr>
-          <p:nvPr/>
-        </p:nvPicPr>
-        <p:blipFill>
-          <a:blip r:embed="rId3"/>
-          <a:stretch>
-            <a:fillRect/>
-          </a:stretch>
-        </p:blipFill>
-        <p:spPr>
-          <a:xfrm>
-            <a:off x="7314364" y="2002955"/>
-            <a:ext cx="4877636" cy="3638872"/>
-          </a:xfrm>
-          <a:prstGeom prst="rect">
-            <a:avLst/>
-          </a:prstGeom>
-        </p:spPr>
-      </p:pic>
-    </p:spTree>
-    <p:extLst>
-      <p:ext uri="{BB962C8B-B14F-4D97-AF65-F5344CB8AC3E}">
-        <p14:creationId xmlns:p14="http://schemas.microsoft.com/office/powerpoint/2010/main" val="1875124591"/>
       </p:ext>
     </p:extLst>
   </p:cSld>
@@ -14900,6 +15426,564 @@
           <p:cNvPr id="2" name="Titel 1">
             <a:extLst>
               <a:ext uri="{FF2B5EF4-FFF2-40B4-BE49-F238E27FC236}">
+                <a16:creationId xmlns:a16="http://schemas.microsoft.com/office/drawing/2014/main" id="{5595687C-3D76-45C0-405C-128B90739BA0}"/>
+              </a:ext>
+            </a:extLst>
+          </p:cNvPr>
+          <p:cNvSpPr>
+            <a:spLocks noGrp="1"/>
+          </p:cNvSpPr>
+          <p:nvPr>
+            <p:ph type="title"/>
+          </p:nvPr>
+        </p:nvSpPr>
+        <p:spPr/>
+        <p:txBody>
+          <a:bodyPr/>
+          <a:lstStyle/>
+          <a:p>
+            <a:r>
+              <a:rPr lang="de-DE" dirty="0"/>
+              <a:t>Model-</a:t>
+            </a:r>
+            <a:r>
+              <a:rPr lang="de-DE" dirty="0" err="1"/>
+              <a:t>Specific</a:t>
+            </a:r>
+            <a:r>
+              <a:rPr lang="de-DE" dirty="0"/>
+              <a:t> </a:t>
+            </a:r>
+            <a:r>
+              <a:rPr lang="de-DE" dirty="0" err="1"/>
+              <a:t>Importance</a:t>
+            </a:r>
+            <a:endParaRPr lang="de-DE" dirty="0"/>
+          </a:p>
+        </p:txBody>
+      </p:sp>
+      <mc:AlternateContent xmlns:mc="http://schemas.openxmlformats.org/markup-compatibility/2006" xmlns:a14="http://schemas.microsoft.com/office/drawing/2010/main">
+        <mc:Choice Requires="a14">
+          <p:sp>
+            <p:nvSpPr>
+              <p:cNvPr id="3" name="Inhaltsplatzhalter 2">
+                <a:extLst>
+                  <a:ext uri="{FF2B5EF4-FFF2-40B4-BE49-F238E27FC236}">
+                    <a16:creationId xmlns:a16="http://schemas.microsoft.com/office/drawing/2014/main" id="{57ACC007-E966-C8DC-8020-739D15E8A848}"/>
+                  </a:ext>
+                </a:extLst>
+              </p:cNvPr>
+              <p:cNvSpPr>
+                <a:spLocks noGrp="1"/>
+              </p:cNvSpPr>
+              <p:nvPr>
+                <p:ph idx="1"/>
+              </p:nvPr>
+            </p:nvSpPr>
+            <p:spPr>
+              <a:xfrm>
+                <a:off x="838200" y="1825625"/>
+                <a:ext cx="6396613" cy="4351338"/>
+              </a:xfrm>
+            </p:spPr>
+            <p:txBody>
+              <a:bodyPr>
+                <a:normAutofit fontScale="77500" lnSpcReduction="20000"/>
+              </a:bodyPr>
+              <a:lstStyle/>
+              <a:p>
+                <a:pPr marL="0" indent="0">
+                  <a:buNone/>
+                </a:pPr>
+                <a:r>
+                  <a:rPr lang="de-DE" dirty="0"/>
+                  <a:t>linear </a:t>
+                </a:r>
+                <a:r>
+                  <a:rPr lang="de-DE" dirty="0" err="1"/>
+                  <a:t>model</a:t>
+                </a:r>
+                <a:r>
+                  <a:rPr lang="de-DE" dirty="0"/>
+                  <a:t> </a:t>
+                </a:r>
+                <a:r>
+                  <a:rPr lang="de-DE" dirty="0" err="1"/>
+                  <a:t>coefficients</a:t>
+                </a:r>
+                <a:endParaRPr lang="de-DE" dirty="0"/>
+              </a:p>
+              <a:p>
+                <a:r>
+                  <a:rPr lang="de-DE" dirty="0" err="1"/>
+                  <a:t>idea</a:t>
+                </a:r>
+                <a:r>
+                  <a:rPr lang="de-DE" dirty="0"/>
+                  <a:t>: </a:t>
+                </a:r>
+                <a:r>
+                  <a:rPr lang="de-DE" dirty="0" err="1"/>
+                  <a:t>importance</a:t>
+                </a:r>
+                <a:r>
+                  <a:rPr lang="de-DE" dirty="0"/>
+                  <a:t> = </a:t>
+                </a:r>
+                <a:r>
+                  <a:rPr lang="de-DE" dirty="0" err="1"/>
+                  <a:t>magnitude</a:t>
+                </a:r>
+                <a:r>
+                  <a:rPr lang="de-DE" dirty="0"/>
+                  <a:t> </a:t>
+                </a:r>
+                <a:r>
+                  <a:rPr lang="de-DE" dirty="0" err="1"/>
+                  <a:t>of</a:t>
+                </a:r>
+                <a:r>
+                  <a:rPr lang="de-DE" dirty="0"/>
+                  <a:t> </a:t>
+                </a:r>
+                <a:r>
+                  <a:rPr lang="de-DE" dirty="0" err="1"/>
+                  <a:t>coefficients</a:t>
+                </a:r>
+                <a:r>
+                  <a:rPr lang="de-DE" dirty="0"/>
+                  <a:t> (larger absolute </a:t>
+                </a:r>
+                <a:r>
+                  <a:rPr lang="de-DE" dirty="0" err="1"/>
+                  <a:t>value</a:t>
+                </a:r>
+                <a:r>
+                  <a:rPr lang="de-DE" dirty="0"/>
+                  <a:t> </a:t>
+                </a:r>
+                <a:r>
+                  <a:rPr lang="de-DE" dirty="0">
+                    <a:sym typeface="Wingdings" pitchFamily="2" charset="2"/>
+                  </a:rPr>
+                  <a:t></a:t>
+                </a:r>
+                <a:r>
+                  <a:rPr lang="de-DE" dirty="0"/>
+                  <a:t> </a:t>
+                </a:r>
+                <a:r>
+                  <a:rPr lang="de-DE" dirty="0" err="1"/>
+                  <a:t>stronger</a:t>
+                </a:r>
+                <a:r>
+                  <a:rPr lang="de-DE" dirty="0"/>
+                  <a:t> </a:t>
+                </a:r>
+                <a:r>
+                  <a:rPr lang="de-DE" dirty="0" err="1"/>
+                  <a:t>influence</a:t>
+                </a:r>
+                <a:r>
+                  <a:rPr lang="de-DE" dirty="0"/>
+                  <a:t>)</a:t>
+                </a:r>
+              </a:p>
+              <a:p>
+                <a:r>
+                  <a:rPr lang="de-DE" dirty="0" err="1"/>
+                  <a:t>important</a:t>
+                </a:r>
+                <a:r>
+                  <a:rPr lang="de-DE" dirty="0"/>
+                  <a:t>: </a:t>
+                </a:r>
+                <a:r>
+                  <a:rPr lang="de-DE" dirty="0" err="1"/>
+                  <a:t>features</a:t>
+                </a:r>
+                <a:r>
+                  <a:rPr lang="de-DE" dirty="0"/>
+                  <a:t> </a:t>
+                </a:r>
+                <a:r>
+                  <a:rPr lang="de-DE" dirty="0" err="1"/>
+                  <a:t>must</a:t>
+                </a:r>
+                <a:r>
+                  <a:rPr lang="de-DE" dirty="0"/>
+                  <a:t> </a:t>
+                </a:r>
+                <a:r>
+                  <a:rPr lang="de-DE" dirty="0" err="1"/>
+                  <a:t>be</a:t>
+                </a:r>
+                <a:r>
+                  <a:rPr lang="de-DE" dirty="0"/>
+                  <a:t> </a:t>
+                </a:r>
+                <a:r>
+                  <a:rPr lang="de-DE" dirty="0" err="1"/>
+                  <a:t>scaled</a:t>
+                </a:r>
+                <a:endParaRPr lang="de-DE" dirty="0"/>
+              </a:p>
+              <a:p>
+                <a:r>
+                  <a:rPr lang="de-DE" dirty="0" err="1"/>
+                  <a:t>only</a:t>
+                </a:r>
+                <a:r>
+                  <a:rPr lang="de-DE" dirty="0"/>
+                  <a:t> </a:t>
+                </a:r>
+                <a:r>
+                  <a:rPr lang="de-DE" dirty="0" err="1"/>
+                  <a:t>captures</a:t>
+                </a:r>
+                <a:r>
+                  <a:rPr lang="de-DE" dirty="0"/>
+                  <a:t> linear </a:t>
+                </a:r>
+                <a:r>
+                  <a:rPr lang="de-DE" dirty="0" err="1"/>
+                  <a:t>relationships</a:t>
+                </a:r>
+                <a:endParaRPr lang="de-DE" dirty="0"/>
+              </a:p>
+              <a:p>
+                <a:pPr marL="0" indent="0">
+                  <a:buNone/>
+                </a:pPr>
+                <a:endParaRPr lang="de-DE" dirty="0"/>
+              </a:p>
+              <a:p>
+                <a:pPr marL="0" indent="0">
+                  <a:buNone/>
+                </a:pPr>
+                <a:r>
+                  <a:rPr lang="de-DE" dirty="0" err="1"/>
+                  <a:t>tree-based</a:t>
+                </a:r>
+                <a:r>
+                  <a:rPr lang="de-DE" dirty="0"/>
+                  <a:t> feature </a:t>
+                </a:r>
+                <a:r>
+                  <a:rPr lang="de-DE" dirty="0" err="1"/>
+                  <a:t>importance</a:t>
+                </a:r>
+                <a:r>
+                  <a:rPr lang="de-DE" dirty="0"/>
+                  <a:t> (</a:t>
+                </a:r>
+                <a:r>
+                  <a:rPr lang="de-DE" dirty="0" err="1"/>
+                  <a:t>used</a:t>
+                </a:r>
+                <a:r>
+                  <a:rPr lang="de-DE" dirty="0"/>
+                  <a:t> in </a:t>
+                </a:r>
+                <a:r>
+                  <a:rPr lang="de-DE" dirty="0" err="1"/>
+                  <a:t>decision</a:t>
+                </a:r>
+                <a:r>
+                  <a:rPr lang="de-DE" dirty="0"/>
+                  <a:t> </a:t>
+                </a:r>
+                <a:r>
+                  <a:rPr lang="de-DE" dirty="0" err="1"/>
+                  <a:t>trees</a:t>
+                </a:r>
+                <a:r>
+                  <a:rPr lang="de-DE" dirty="0"/>
+                  <a:t>, </a:t>
+                </a:r>
+                <a:r>
+                  <a:rPr lang="de-DE" dirty="0" err="1"/>
+                  <a:t>random</a:t>
+                </a:r>
+                <a:r>
+                  <a:rPr lang="de-DE" dirty="0"/>
+                  <a:t> </a:t>
+                </a:r>
+                <a:r>
+                  <a:rPr lang="de-DE" dirty="0" err="1"/>
+                  <a:t>forests</a:t>
+                </a:r>
+                <a:r>
+                  <a:rPr lang="de-DE" dirty="0"/>
+                  <a:t>, </a:t>
+                </a:r>
+                <a:r>
+                  <a:rPr lang="de-DE" dirty="0" err="1"/>
+                  <a:t>gradient</a:t>
+                </a:r>
+                <a:r>
+                  <a:rPr lang="de-DE" dirty="0"/>
+                  <a:t> </a:t>
+                </a:r>
+                <a:r>
+                  <a:rPr lang="de-DE" dirty="0" err="1"/>
+                  <a:t>boosting</a:t>
+                </a:r>
+                <a:r>
+                  <a:rPr lang="de-DE" dirty="0"/>
+                  <a:t>)</a:t>
+                </a:r>
+              </a:p>
+              <a:p>
+                <a:r>
+                  <a:rPr lang="de-DE" dirty="0" err="1"/>
+                  <a:t>idea</a:t>
+                </a:r>
+                <a:r>
+                  <a:rPr lang="de-DE" dirty="0"/>
+                  <a:t>: </a:t>
+                </a:r>
+                <a:r>
+                  <a:rPr lang="de-DE" dirty="0" err="1"/>
+                  <a:t>importance</a:t>
+                </a:r>
+                <a:r>
+                  <a:rPr lang="de-DE" dirty="0"/>
+                  <a:t> </a:t>
+                </a:r>
+                <a:r>
+                  <a:rPr lang="de-DE" dirty="0" err="1"/>
+                  <a:t>based</a:t>
+                </a:r>
+                <a:r>
+                  <a:rPr lang="de-DE" dirty="0"/>
+                  <a:t> on </a:t>
+                </a:r>
+                <a:r>
+                  <a:rPr lang="de-DE" dirty="0" err="1"/>
+                  <a:t>reduction</a:t>
+                </a:r>
+                <a:r>
+                  <a:rPr lang="de-DE" dirty="0"/>
+                  <a:t> in </a:t>
+                </a:r>
+                <a:r>
+                  <a:rPr lang="de-DE" dirty="0" err="1"/>
+                  <a:t>impurity</a:t>
+                </a:r>
+                <a:r>
+                  <a:rPr lang="de-DE" dirty="0"/>
+                  <a:t> (e.g., Gini, </a:t>
+                </a:r>
+                <a14:m>
+                  <m:oMath xmlns:m="http://schemas.openxmlformats.org/officeDocument/2006/math">
+                    <m:r>
+                      <m:rPr>
+                        <m:sty m:val="p"/>
+                      </m:rPr>
+                      <a:rPr lang="de-DE" i="0" dirty="0" smtClean="0">
+                        <a:latin typeface="Cambria Math" panose="02040503050406030204" pitchFamily="18" charset="0"/>
+                      </a:rPr>
+                      <m:t>MSE</m:t>
+                    </m:r>
+                  </m:oMath>
+                </a14:m>
+                <a:r>
+                  <a:rPr lang="de-DE" dirty="0"/>
+                  <a:t>)</a:t>
+                </a:r>
+              </a:p>
+              <a:p>
+                <a:r>
+                  <a:rPr lang="de-DE" dirty="0" err="1"/>
+                  <a:t>captures</a:t>
+                </a:r>
+                <a:r>
+                  <a:rPr lang="de-DE" dirty="0"/>
+                  <a:t> non-linear </a:t>
+                </a:r>
+                <a:r>
+                  <a:rPr lang="de-DE" dirty="0" err="1"/>
+                  <a:t>relationships</a:t>
+                </a:r>
+                <a:endParaRPr lang="de-DE" dirty="0"/>
+              </a:p>
+              <a:p>
+                <a:r>
+                  <a:rPr lang="de-DE" dirty="0"/>
+                  <a:t>but </a:t>
+                </a:r>
+                <a:r>
+                  <a:rPr lang="de-DE" dirty="0" err="1"/>
+                  <a:t>can</a:t>
+                </a:r>
+                <a:r>
+                  <a:rPr lang="de-DE" dirty="0"/>
+                  <a:t> </a:t>
+                </a:r>
+                <a:r>
+                  <a:rPr lang="de-DE" dirty="0" err="1"/>
+                  <a:t>favor</a:t>
+                </a:r>
+                <a:r>
+                  <a:rPr lang="de-DE" dirty="0"/>
+                  <a:t> high-</a:t>
+                </a:r>
+                <a:r>
+                  <a:rPr lang="de-DE" dirty="0" err="1"/>
+                  <a:t>cardinality</a:t>
+                </a:r>
+                <a:r>
+                  <a:rPr lang="de-DE" dirty="0"/>
+                  <a:t> </a:t>
+                </a:r>
+                <a:r>
+                  <a:rPr lang="de-DE" dirty="0" err="1"/>
+                  <a:t>features</a:t>
+                </a:r>
+                <a:endParaRPr lang="de-DE" dirty="0"/>
+              </a:p>
+            </p:txBody>
+          </p:sp>
+        </mc:Choice>
+        <mc:Fallback xmlns="">
+          <p:sp>
+            <p:nvSpPr>
+              <p:cNvPr id="3" name="Inhaltsplatzhalter 2">
+                <a:extLst>
+                  <a:ext uri="{FF2B5EF4-FFF2-40B4-BE49-F238E27FC236}">
+                    <a16:creationId xmlns:a16="http://schemas.microsoft.com/office/drawing/2014/main" id="{57ACC007-E966-C8DC-8020-739D15E8A848}"/>
+                  </a:ext>
+                </a:extLst>
+              </p:cNvPr>
+              <p:cNvSpPr>
+                <a:spLocks noGrp="1" noRot="1" noChangeAspect="1" noMove="1" noResize="1" noEditPoints="1" noAdjustHandles="1" noChangeArrowheads="1" noChangeShapeType="1" noTextEdit="1"/>
+              </p:cNvSpPr>
+              <p:nvPr>
+                <p:ph idx="1"/>
+              </p:nvPr>
+            </p:nvSpPr>
+            <p:spPr>
+              <a:xfrm>
+                <a:off x="838200" y="1825625"/>
+                <a:ext cx="6396613" cy="4351338"/>
+              </a:xfrm>
+              <a:blipFill>
+                <a:blip r:embed="rId2"/>
+                <a:stretch>
+                  <a:fillRect l="-1190" t="-2616"/>
+                </a:stretch>
+              </a:blipFill>
+            </p:spPr>
+            <p:txBody>
+              <a:bodyPr/>
+              <a:lstStyle/>
+              <a:p>
+                <a:r>
+                  <a:rPr lang="de-DE">
+                    <a:noFill/>
+                  </a:rPr>
+                  <a:t> </a:t>
+                </a:r>
+              </a:p>
+            </p:txBody>
+          </p:sp>
+        </mc:Fallback>
+      </mc:AlternateContent>
+      <p:sp>
+        <p:nvSpPr>
+          <p:cNvPr id="4" name="Foliennummernplatzhalter 3">
+            <a:extLst>
+              <a:ext uri="{FF2B5EF4-FFF2-40B4-BE49-F238E27FC236}">
+                <a16:creationId xmlns:a16="http://schemas.microsoft.com/office/drawing/2014/main" id="{90FEA500-EB45-413A-5886-C05A459D9590}"/>
+              </a:ext>
+            </a:extLst>
+          </p:cNvPr>
+          <p:cNvSpPr>
+            <a:spLocks noGrp="1"/>
+          </p:cNvSpPr>
+          <p:nvPr>
+            <p:ph type="sldNum" sz="quarter" idx="12"/>
+          </p:nvPr>
+        </p:nvSpPr>
+        <p:spPr/>
+        <p:txBody>
+          <a:bodyPr/>
+          <a:lstStyle/>
+          <a:p>
+            <a:fld id="{08C366F5-AFAD-49CB-854A-9D9E238FCA13}" type="slidenum">
+              <a:rPr lang="en-GB" smtClean="0"/>
+              <a:t>30</a:t>
+            </a:fld>
+            <a:endParaRPr lang="en-GB"/>
+          </a:p>
+        </p:txBody>
+      </p:sp>
+      <p:pic>
+        <p:nvPicPr>
+          <p:cNvPr id="5" name="Grafik 4">
+            <a:extLst>
+              <a:ext uri="{FF2B5EF4-FFF2-40B4-BE49-F238E27FC236}">
+                <a16:creationId xmlns:a16="http://schemas.microsoft.com/office/drawing/2014/main" id="{32C81FAC-0E05-A074-D6B8-617252253CDE}"/>
+              </a:ext>
+            </a:extLst>
+          </p:cNvPr>
+          <p:cNvPicPr>
+            <a:picLocks noChangeAspect="1"/>
+          </p:cNvPicPr>
+          <p:nvPr/>
+        </p:nvPicPr>
+        <p:blipFill>
+          <a:blip r:embed="rId3"/>
+          <a:stretch>
+            <a:fillRect/>
+          </a:stretch>
+        </p:blipFill>
+        <p:spPr>
+          <a:xfrm>
+            <a:off x="7314364" y="2002955"/>
+            <a:ext cx="4877636" cy="3638872"/>
+          </a:xfrm>
+          <a:prstGeom prst="rect">
+            <a:avLst/>
+          </a:prstGeom>
+        </p:spPr>
+      </p:pic>
+    </p:spTree>
+    <p:extLst>
+      <p:ext uri="{BB962C8B-B14F-4D97-AF65-F5344CB8AC3E}">
+        <p14:creationId xmlns:p14="http://schemas.microsoft.com/office/powerpoint/2010/main" val="1875124591"/>
+      </p:ext>
+    </p:extLst>
+  </p:cSld>
+  <p:clrMapOvr>
+    <a:masterClrMapping/>
+  </p:clrMapOvr>
+</p:sld>
+</file>
+
+<file path=ppt/slides/slide31.xml><?xml version="1.0" encoding="utf-8"?>
+<p:sld xmlns:a="http://schemas.openxmlformats.org/drawingml/2006/main" xmlns:r="http://schemas.openxmlformats.org/officeDocument/2006/relationships" xmlns:p="http://schemas.openxmlformats.org/presentationml/2006/main">
+  <p:cSld>
+    <p:spTree>
+      <p:nvGrpSpPr>
+        <p:cNvPr id="1" name=""/>
+        <p:cNvGrpSpPr/>
+        <p:nvPr/>
+      </p:nvGrpSpPr>
+      <p:grpSpPr>
+        <a:xfrm>
+          <a:off x="0" y="0"/>
+          <a:ext cx="0" cy="0"/>
+          <a:chOff x="0" y="0"/>
+          <a:chExt cx="0" cy="0"/>
+        </a:xfrm>
+      </p:grpSpPr>
+      <p:sp>
+        <p:nvSpPr>
+          <p:cNvPr id="2" name="Titel 1">
+            <a:extLst>
+              <a:ext uri="{FF2B5EF4-FFF2-40B4-BE49-F238E27FC236}">
                 <a16:creationId xmlns:a16="http://schemas.microsoft.com/office/drawing/2014/main" id="{9A954931-0074-968B-0202-B8819C365CEF}"/>
               </a:ext>
             </a:extLst>
@@ -15253,7 +16337,7 @@
           <a:p>
             <a:fld id="{08C366F5-AFAD-49CB-854A-9D9E238FCA13}" type="slidenum">
               <a:rPr lang="en-GB" smtClean="0"/>
-              <a:t>30</a:t>
+              <a:t>31</a:t>
             </a:fld>
             <a:endParaRPr lang="en-GB"/>
           </a:p>
@@ -15272,7 +16356,7 @@
 </p:sld>
 </file>
 
-<file path=ppt/slides/slide31.xml><?xml version="1.0" encoding="utf-8"?>
+<file path=ppt/slides/slide32.xml><?xml version="1.0" encoding="utf-8"?>
 <p:sld xmlns:a="http://schemas.openxmlformats.org/drawingml/2006/main" xmlns:r="http://schemas.openxmlformats.org/officeDocument/2006/relationships" xmlns:p="http://schemas.openxmlformats.org/presentationml/2006/main">
   <p:cSld>
     <p:spTree>
@@ -15635,7 +16719,7 @@
           <a:p>
             <a:fld id="{08C366F5-AFAD-49CB-854A-9D9E238FCA13}" type="slidenum">
               <a:rPr lang="en-GB" smtClean="0"/>
-              <a:t>31</a:t>
+              <a:t>32</a:t>
             </a:fld>
             <a:endParaRPr lang="en-GB"/>
           </a:p>
@@ -15734,7 +16818,7 @@
 </p:sld>
 </file>
 
-<file path=ppt/slides/slide32.xml><?xml version="1.0" encoding="utf-8"?>
+<file path=ppt/slides/slide33.xml><?xml version="1.0" encoding="utf-8"?>
 <p:sld xmlns:a="http://schemas.openxmlformats.org/drawingml/2006/main" xmlns:r="http://schemas.openxmlformats.org/officeDocument/2006/relationships" xmlns:p="http://schemas.openxmlformats.org/presentationml/2006/main">
   <p:cSld>
     <p:spTree>
@@ -16064,7 +17148,7 @@
           <a:p>
             <a:fld id="{08C366F5-AFAD-49CB-854A-9D9E238FCA13}" type="slidenum">
               <a:rPr lang="en-GB" smtClean="0"/>
-              <a:t>32</a:t>
+              <a:t>33</a:t>
             </a:fld>
             <a:endParaRPr lang="en-GB"/>
           </a:p>
@@ -16209,7 +17293,7 @@
 </p:sld>
 </file>
 
-<file path=ppt/slides/slide33.xml><?xml version="1.0" encoding="utf-8"?>
+<file path=ppt/slides/slide34.xml><?xml version="1.0" encoding="utf-8"?>
 <p:sld xmlns:a="http://schemas.openxmlformats.org/drawingml/2006/main" xmlns:r="http://schemas.openxmlformats.org/officeDocument/2006/relationships" xmlns:p="http://schemas.openxmlformats.org/presentationml/2006/main">
   <p:cSld>
     <p:spTree>
@@ -16622,7 +17706,7 @@
           <a:p>
             <a:fld id="{08C366F5-AFAD-49CB-854A-9D9E238FCA13}" type="slidenum">
               <a:rPr lang="en-GB" smtClean="0"/>
-              <a:t>33</a:t>
+              <a:t>34</a:t>
             </a:fld>
             <a:endParaRPr lang="en-GB"/>
           </a:p>
@@ -16671,7 +17755,7 @@
 </p:sld>
 </file>
 
-<file path=ppt/slides/slide34.xml><?xml version="1.0" encoding="utf-8"?>
+<file path=ppt/slides/slide35.xml><?xml version="1.0" encoding="utf-8"?>
 <p:sld xmlns:a="http://schemas.openxmlformats.org/drawingml/2006/main" xmlns:r="http://schemas.openxmlformats.org/officeDocument/2006/relationships" xmlns:p="http://schemas.openxmlformats.org/presentationml/2006/main">
   <p:cSld>
     <p:spTree>
@@ -16739,7 +17823,7 @@
           <a:p>
             <a:fld id="{08C366F5-AFAD-49CB-854A-9D9E238FCA13}" type="slidenum">
               <a:rPr lang="en-GB" smtClean="0"/>
-              <a:t>34</a:t>
+              <a:t>35</a:t>
             </a:fld>
             <a:endParaRPr lang="en-GB"/>
           </a:p>
@@ -16851,7 +17935,7 @@
 </p:sld>
 </file>
 
-<file path=ppt/slides/slide35.xml><?xml version="1.0" encoding="utf-8"?>
+<file path=ppt/slides/slide36.xml><?xml version="1.0" encoding="utf-8"?>
 <p:sld xmlns:a="http://schemas.openxmlformats.org/drawingml/2006/main" xmlns:r="http://schemas.openxmlformats.org/officeDocument/2006/relationships" xmlns:p="http://schemas.openxmlformats.org/presentationml/2006/main">
   <p:cSld>
     <p:spTree>
@@ -17120,7 +18204,7 @@
           <a:p>
             <a:fld id="{08C366F5-AFAD-49CB-854A-9D9E238FCA13}" type="slidenum">
               <a:rPr lang="en-GB" smtClean="0"/>
-              <a:t>35</a:t>
+              <a:t>36</a:t>
             </a:fld>
             <a:endParaRPr lang="en-GB"/>
           </a:p>

--- a/slides/7_model_evaluation.pptx
+++ b/slides/7_model_evaluation.pptx
@@ -514,7 +514,7 @@
           <a:p>
             <a:fld id="{506E0FD1-891F-4B1E-916D-E9B585160BB8}" type="datetimeFigureOut">
               <a:rPr lang="en-GB" smtClean="0"/>
-              <a:t>01/05/2026</a:t>
+              <a:t>04/05/2026</a:t>
             </a:fld>
             <a:endParaRPr lang="en-GB"/>
           </a:p>
@@ -931,7 +931,7 @@
           <a:p>
             <a:fld id="{D68C3F22-27B2-44E3-9C5F-D08126455F6F}" type="datetime1">
               <a:rPr lang="en-GB" smtClean="0"/>
-              <a:t>01/05/2026</a:t>
+              <a:t>04/05/2026</a:t>
             </a:fld>
             <a:endParaRPr lang="en-GB"/>
           </a:p>
@@ -1131,7 +1131,7 @@
           <a:p>
             <a:fld id="{1CD03846-7BF6-4FB6-A921-FF3379ADBD4C}" type="datetime1">
               <a:rPr lang="en-GB" smtClean="0"/>
-              <a:t>01/05/2026</a:t>
+              <a:t>04/05/2026</a:t>
             </a:fld>
             <a:endParaRPr lang="en-GB"/>
           </a:p>
@@ -1341,7 +1341,7 @@
           <a:p>
             <a:fld id="{99E1B91A-3FD0-4144-9C84-63E9688ED2FE}" type="datetime1">
               <a:rPr lang="en-GB" smtClean="0"/>
-              <a:t>01/05/2026</a:t>
+              <a:t>04/05/2026</a:t>
             </a:fld>
             <a:endParaRPr lang="en-GB"/>
           </a:p>
@@ -1541,7 +1541,7 @@
           <a:p>
             <a:fld id="{5295ED7B-FEAD-4734-819F-93EF4B0EA908}" type="datetime1">
               <a:rPr lang="en-GB" smtClean="0"/>
-              <a:t>01/05/2026</a:t>
+              <a:t>04/05/2026</a:t>
             </a:fld>
             <a:endParaRPr lang="en-GB"/>
           </a:p>
@@ -1817,7 +1817,7 @@
           <a:p>
             <a:fld id="{D2D5D4B4-C926-4B45-8815-1ED8911179A2}" type="datetime1">
               <a:rPr lang="en-GB" smtClean="0"/>
-              <a:t>01/05/2026</a:t>
+              <a:t>04/05/2026</a:t>
             </a:fld>
             <a:endParaRPr lang="en-GB"/>
           </a:p>
@@ -2085,7 +2085,7 @@
           <a:p>
             <a:fld id="{B4C5210A-0E37-4935-93AF-69F21A5F712F}" type="datetime1">
               <a:rPr lang="en-GB" smtClean="0"/>
-              <a:t>01/05/2026</a:t>
+              <a:t>04/05/2026</a:t>
             </a:fld>
             <a:endParaRPr lang="en-GB"/>
           </a:p>
@@ -2500,7 +2500,7 @@
           <a:p>
             <a:fld id="{3D3A6B2F-436C-4691-80E8-9C890E000E9D}" type="datetime1">
               <a:rPr lang="en-GB" smtClean="0"/>
-              <a:t>01/05/2026</a:t>
+              <a:t>04/05/2026</a:t>
             </a:fld>
             <a:endParaRPr lang="en-GB"/>
           </a:p>
@@ -2642,7 +2642,7 @@
           <a:p>
             <a:fld id="{84385F4C-D74B-496F-8D21-97E3549C783B}" type="datetime1">
               <a:rPr lang="en-GB" smtClean="0"/>
-              <a:t>01/05/2026</a:t>
+              <a:t>04/05/2026</a:t>
             </a:fld>
             <a:endParaRPr lang="en-GB"/>
           </a:p>
@@ -2755,7 +2755,7 @@
           <a:p>
             <a:fld id="{0CBDCB32-C241-4703-A832-4EB47BD54E83}" type="datetime1">
               <a:rPr lang="en-GB" smtClean="0"/>
-              <a:t>01/05/2026</a:t>
+              <a:t>04/05/2026</a:t>
             </a:fld>
             <a:endParaRPr lang="en-GB"/>
           </a:p>
@@ -3068,7 +3068,7 @@
           <a:p>
             <a:fld id="{85C150FF-BE95-4D25-A16A-E368A81CBF24}" type="datetime1">
               <a:rPr lang="en-GB" smtClean="0"/>
-              <a:t>01/05/2026</a:t>
+              <a:t>04/05/2026</a:t>
             </a:fld>
             <a:endParaRPr lang="en-GB"/>
           </a:p>
@@ -3357,7 +3357,7 @@
           <a:p>
             <a:fld id="{F3C5DB4B-B349-43C9-A424-BADA723AD9F1}" type="datetime1">
               <a:rPr lang="en-GB" smtClean="0"/>
-              <a:t>01/05/2026</a:t>
+              <a:t>04/05/2026</a:t>
             </a:fld>
             <a:endParaRPr lang="en-GB"/>
           </a:p>
@@ -3600,7 +3600,7 @@
           <a:p>
             <a:fld id="{12632426-0A0C-405F-A3D0-2D11AA44702A}" type="datetime1">
               <a:rPr lang="en-GB" smtClean="0"/>
-              <a:t>01/05/2026</a:t>
+              <a:t>04/05/2026</a:t>
             </a:fld>
             <a:endParaRPr lang="en-GB"/>
           </a:p>
@@ -5005,8 +5005,8 @@
           </a:p>
         </p:txBody>
       </p:sp>
-      <mc:AlternateContent xmlns:mc="http://schemas.openxmlformats.org/markup-compatibility/2006">
-        <mc:Choice xmlns:a14="http://schemas.microsoft.com/office/drawing/2010/main" Requires="a14">
+      <mc:AlternateContent xmlns:mc="http://schemas.openxmlformats.org/markup-compatibility/2006" xmlns:a14="http://schemas.microsoft.com/office/drawing/2010/main">
+        <mc:Choice Requires="a14">
           <p:sp>
             <p:nvSpPr>
               <p:cNvPr id="3" name="Inhaltsplatzhalter 2">
@@ -5704,7 +5704,7 @@
             </p:txBody>
           </p:sp>
         </mc:Choice>
-        <mc:Fallback>
+        <mc:Fallback xmlns="">
           <p:sp>
             <p:nvSpPr>
               <p:cNvPr id="3" name="Inhaltsplatzhalter 2">
@@ -6143,198 +6143,342 @@
           </p:sp>
         </mc:Fallback>
       </mc:AlternateContent>
-      <p:sp>
-        <p:nvSpPr>
-          <p:cNvPr id="3" name="Inhaltsplatzhalter 2">
-            <a:extLst>
-              <a:ext uri="{FF2B5EF4-FFF2-40B4-BE49-F238E27FC236}">
-                <a16:creationId xmlns:a16="http://schemas.microsoft.com/office/drawing/2014/main" id="{37AD4B36-A164-A513-CF0F-93BF14694857}"/>
-              </a:ext>
-            </a:extLst>
-          </p:cNvPr>
-          <p:cNvSpPr>
-            <a:spLocks noGrp="1"/>
-          </p:cNvSpPr>
-          <p:nvPr>
-            <p:ph idx="1"/>
-          </p:nvPr>
-        </p:nvSpPr>
-        <p:spPr>
-          <a:xfrm>
-            <a:off x="838199" y="1825625"/>
-            <a:ext cx="6225209" cy="4351338"/>
-          </a:xfrm>
-        </p:spPr>
-        <p:txBody>
-          <a:bodyPr>
-            <a:normAutofit/>
-          </a:bodyPr>
-          <a:lstStyle/>
-          <a:p>
-            <a:pPr marL="0" indent="0">
-              <a:buNone/>
-            </a:pPr>
-            <a:r>
-              <a:rPr lang="de-DE" dirty="0"/>
-              <a:t>Receiver Operating </a:t>
-            </a:r>
-            <a:r>
-              <a:rPr lang="de-DE" dirty="0" err="1"/>
-              <a:t>Characteristic</a:t>
-            </a:r>
-            <a:endParaRPr lang="de-DE" dirty="0"/>
-          </a:p>
-          <a:p>
-            <a:pPr marL="0" indent="0">
-              <a:buNone/>
-            </a:pPr>
-            <a:endParaRPr lang="de-DE" dirty="0"/>
-          </a:p>
-          <a:p>
-            <a:pPr marL="0" indent="0">
-              <a:buNone/>
-            </a:pPr>
-            <a:r>
-              <a:rPr lang="de-DE" dirty="0" err="1"/>
-              <a:t>plots</a:t>
-            </a:r>
-            <a:r>
-              <a:rPr lang="de-DE" dirty="0"/>
-              <a:t> True Positive Rate (Recall) vs. </a:t>
-            </a:r>
-            <a:r>
-              <a:rPr lang="de-DE" dirty="0" err="1"/>
-              <a:t>False</a:t>
-            </a:r>
-            <a:r>
-              <a:rPr lang="de-DE" dirty="0"/>
-              <a:t> Positive Rate (FPR)</a:t>
-            </a:r>
-          </a:p>
-          <a:p>
-            <a:pPr marL="0" indent="0">
-              <a:buNone/>
-            </a:pPr>
-            <a:endParaRPr lang="de-DE" dirty="0"/>
-          </a:p>
-          <a:p>
-            <a:pPr marL="0" indent="0">
-              <a:buNone/>
-            </a:pPr>
-            <a:r>
-              <a:rPr lang="de-DE" dirty="0" err="1"/>
-              <a:t>key</a:t>
-            </a:r>
-            <a:r>
-              <a:rPr lang="de-DE" dirty="0"/>
-              <a:t> </a:t>
-            </a:r>
-            <a:r>
-              <a:rPr lang="de-DE" dirty="0" err="1"/>
-              <a:t>idea</a:t>
-            </a:r>
-            <a:r>
-              <a:rPr lang="de-DE" dirty="0"/>
-              <a:t>: </a:t>
-            </a:r>
-            <a:r>
-              <a:rPr lang="de-DE" dirty="0" err="1"/>
-              <a:t>shows</a:t>
-            </a:r>
-            <a:r>
-              <a:rPr lang="de-DE" dirty="0"/>
-              <a:t> </a:t>
-            </a:r>
-            <a:r>
-              <a:rPr lang="de-DE" dirty="0" err="1"/>
-              <a:t>performance</a:t>
-            </a:r>
-            <a:r>
-              <a:rPr lang="de-DE" dirty="0"/>
-              <a:t> </a:t>
-            </a:r>
-            <a:r>
-              <a:rPr lang="de-DE" dirty="0" err="1"/>
-              <a:t>across</a:t>
-            </a:r>
-            <a:r>
-              <a:rPr lang="de-DE" dirty="0"/>
-              <a:t> all </a:t>
-            </a:r>
-            <a:r>
-              <a:rPr lang="de-DE" dirty="0" err="1"/>
-              <a:t>thresholds</a:t>
-            </a:r>
-            <a:endParaRPr lang="de-DE" dirty="0"/>
-          </a:p>
-          <a:p>
-            <a:pPr marL="0" indent="0">
-              <a:buNone/>
-            </a:pPr>
-            <a:endParaRPr lang="de-DE" dirty="0"/>
-          </a:p>
-          <a:p>
-            <a:pPr marL="0" indent="0">
-              <a:buNone/>
-            </a:pPr>
-            <a:r>
-              <a:rPr lang="de-DE" dirty="0" err="1"/>
-              <a:t>better</a:t>
-            </a:r>
-            <a:r>
-              <a:rPr lang="de-DE" dirty="0"/>
-              <a:t> </a:t>
-            </a:r>
-            <a:r>
-              <a:rPr lang="de-DE" dirty="0" err="1"/>
-              <a:t>model</a:t>
-            </a:r>
-            <a:r>
-              <a:rPr lang="de-DE" dirty="0"/>
-              <a:t> </a:t>
-            </a:r>
-            <a:r>
-              <a:rPr lang="de-DE" dirty="0">
-                <a:sym typeface="Wingdings" pitchFamily="2" charset="2"/>
-              </a:rPr>
-              <a:t></a:t>
-            </a:r>
-            <a:r>
-              <a:rPr lang="de-DE" dirty="0"/>
-              <a:t> </a:t>
-            </a:r>
-            <a:r>
-              <a:rPr lang="de-DE" dirty="0" err="1"/>
-              <a:t>curve</a:t>
-            </a:r>
-            <a:r>
-              <a:rPr lang="de-DE" dirty="0"/>
-              <a:t> </a:t>
-            </a:r>
-            <a:r>
-              <a:rPr lang="de-DE" dirty="0" err="1"/>
-              <a:t>closer</a:t>
-            </a:r>
-            <a:r>
-              <a:rPr lang="de-DE" dirty="0"/>
-              <a:t> </a:t>
-            </a:r>
-            <a:r>
-              <a:rPr lang="de-DE" dirty="0" err="1"/>
-              <a:t>to</a:t>
-            </a:r>
-            <a:r>
-              <a:rPr lang="de-DE" dirty="0"/>
-              <a:t> top-</a:t>
-            </a:r>
-            <a:r>
-              <a:rPr lang="de-DE" dirty="0" err="1"/>
-              <a:t>left</a:t>
-            </a:r>
-            <a:endParaRPr lang="de-DE" dirty="0"/>
-          </a:p>
-        </p:txBody>
-      </p:sp>
+      <mc:AlternateContent xmlns:mc="http://schemas.openxmlformats.org/markup-compatibility/2006">
+        <mc:Choice xmlns:a14="http://schemas.microsoft.com/office/drawing/2010/main" Requires="a14">
+          <p:sp>
+            <p:nvSpPr>
+              <p:cNvPr id="3" name="Inhaltsplatzhalter 2">
+                <a:extLst>
+                  <a:ext uri="{FF2B5EF4-FFF2-40B4-BE49-F238E27FC236}">
+                    <a16:creationId xmlns:a16="http://schemas.microsoft.com/office/drawing/2014/main" id="{37AD4B36-A164-A513-CF0F-93BF14694857}"/>
+                  </a:ext>
+                </a:extLst>
+              </p:cNvPr>
+              <p:cNvSpPr>
+                <a:spLocks noGrp="1"/>
+              </p:cNvSpPr>
+              <p:nvPr>
+                <p:ph idx="1"/>
+              </p:nvPr>
+            </p:nvSpPr>
+            <p:spPr>
+              <a:xfrm>
+                <a:off x="838199" y="1825625"/>
+                <a:ext cx="6225209" cy="4351338"/>
+              </a:xfrm>
+            </p:spPr>
+            <p:txBody>
+              <a:bodyPr>
+                <a:normAutofit fontScale="92500" lnSpcReduction="20000"/>
+              </a:bodyPr>
+              <a:lstStyle/>
+              <a:p>
+                <a:pPr marL="0" indent="0">
+                  <a:buNone/>
+                </a:pPr>
+                <a:r>
+                  <a:rPr lang="de-DE" b="1" dirty="0"/>
+                  <a:t>R</a:t>
+                </a:r>
+                <a:r>
+                  <a:rPr lang="de-DE" dirty="0"/>
+                  <a:t>eceiver </a:t>
+                </a:r>
+                <a:r>
+                  <a:rPr lang="de-DE" b="1" dirty="0"/>
+                  <a:t>O</a:t>
+                </a:r>
+                <a:r>
+                  <a:rPr lang="de-DE" dirty="0"/>
+                  <a:t>perating </a:t>
+                </a:r>
+                <a:r>
+                  <a:rPr lang="de-DE" b="1" dirty="0" err="1"/>
+                  <a:t>C</a:t>
+                </a:r>
+                <a:r>
+                  <a:rPr lang="de-DE" dirty="0" err="1"/>
+                  <a:t>haracteristic</a:t>
+                </a:r>
+                <a:endParaRPr lang="de-DE" dirty="0"/>
+              </a:p>
+              <a:p>
+                <a:pPr marL="0" indent="0">
+                  <a:buNone/>
+                </a:pPr>
+                <a:endParaRPr lang="de-DE" dirty="0"/>
+              </a:p>
+              <a:p>
+                <a:pPr marL="0" indent="0">
+                  <a:buNone/>
+                </a:pPr>
+                <a:r>
+                  <a:rPr lang="de-DE" dirty="0" err="1"/>
+                  <a:t>plots</a:t>
+                </a:r>
+                <a:r>
+                  <a:rPr lang="de-DE" dirty="0"/>
+                  <a:t> True Positive Rate (Recall) vs. </a:t>
+                </a:r>
+                <a:r>
+                  <a:rPr lang="de-DE" dirty="0" err="1"/>
+                  <a:t>False</a:t>
+                </a:r>
+                <a:r>
+                  <a:rPr lang="de-DE" dirty="0"/>
+                  <a:t> Positive Rate (FPR)</a:t>
+                </a:r>
+              </a:p>
+              <a:p>
+                <a:pPr marL="0" indent="0">
+                  <a:buNone/>
+                </a:pPr>
+                <a:endParaRPr lang="de-DE" dirty="0"/>
+              </a:p>
+              <a:p>
+                <a:pPr marL="0" indent="0">
+                  <a:buNone/>
+                </a:pPr>
+                <a14:m>
+                  <m:oMathPara xmlns:m="http://schemas.openxmlformats.org/officeDocument/2006/math">
+                    <m:oMathParaPr>
+                      <m:jc m:val="centerGroup"/>
+                    </m:oMathParaPr>
+                    <m:oMath xmlns:m="http://schemas.openxmlformats.org/officeDocument/2006/math">
+                      <m:r>
+                        <m:rPr>
+                          <m:sty m:val="p"/>
+                        </m:rPr>
+                        <a:rPr lang="en-US" b="0" i="0" dirty="0" smtClean="0">
+                          <a:latin typeface="Cambria Math" panose="02040503050406030204" pitchFamily="18" charset="0"/>
+                        </a:rPr>
+                        <m:t>FPR</m:t>
+                      </m:r>
+                      <m:r>
+                        <a:rPr lang="de-DE" dirty="0">
+                          <a:latin typeface="Cambria Math" panose="02040503050406030204" pitchFamily="18" charset="0"/>
+                        </a:rPr>
+                        <m:t> =</m:t>
+                      </m:r>
+                      <m:r>
+                        <m:rPr>
+                          <m:sty m:val="p"/>
+                        </m:rPr>
+                        <a:rPr lang="en-US" b="0" i="0" dirty="0" smtClean="0">
+                          <a:latin typeface="Cambria Math" panose="02040503050406030204" pitchFamily="18" charset="0"/>
+                        </a:rPr>
+                        <m:t>FP</m:t>
+                      </m:r>
+                      <m:r>
+                        <a:rPr lang="de-DE" dirty="0">
+                          <a:latin typeface="Cambria Math" panose="02040503050406030204" pitchFamily="18" charset="0"/>
+                        </a:rPr>
+                        <m:t> / (</m:t>
+                      </m:r>
+                      <m:r>
+                        <m:rPr>
+                          <m:sty m:val="p"/>
+                        </m:rPr>
+                        <a:rPr lang="de-DE" dirty="0">
+                          <a:latin typeface="Cambria Math" panose="02040503050406030204" pitchFamily="18" charset="0"/>
+                        </a:rPr>
+                        <m:t>TN</m:t>
+                      </m:r>
+                      <m:r>
+                        <a:rPr lang="de-DE" dirty="0">
+                          <a:latin typeface="Cambria Math" panose="02040503050406030204" pitchFamily="18" charset="0"/>
+                        </a:rPr>
+                        <m:t> + </m:t>
+                      </m:r>
+                      <m:r>
+                        <m:rPr>
+                          <m:sty m:val="p"/>
+                        </m:rPr>
+                        <a:rPr lang="de-DE" dirty="0">
+                          <a:latin typeface="Cambria Math" panose="02040503050406030204" pitchFamily="18" charset="0"/>
+                        </a:rPr>
+                        <m:t>FP</m:t>
+                      </m:r>
+                      <m:r>
+                        <a:rPr lang="de-DE" dirty="0">
+                          <a:latin typeface="Cambria Math" panose="02040503050406030204" pitchFamily="18" charset="0"/>
+                        </a:rPr>
+                        <m:t>)</m:t>
+                      </m:r>
+                    </m:oMath>
+                  </m:oMathPara>
+                </a14:m>
+                <a:endParaRPr lang="de-DE" dirty="0"/>
+              </a:p>
+              <a:p>
+                <a:pPr marL="0" indent="0">
+                  <a:buNone/>
+                </a:pPr>
+                <a:endParaRPr lang="de-DE" dirty="0"/>
+              </a:p>
+              <a:p>
+                <a:pPr marL="0" indent="0">
+                  <a:buNone/>
+                </a:pPr>
+                <a:r>
+                  <a:rPr lang="de-DE" dirty="0" err="1"/>
+                  <a:t>key</a:t>
+                </a:r>
+                <a:r>
+                  <a:rPr lang="de-DE" dirty="0"/>
+                  <a:t> </a:t>
+                </a:r>
+                <a:r>
+                  <a:rPr lang="de-DE" dirty="0" err="1"/>
+                  <a:t>idea</a:t>
+                </a:r>
+                <a:r>
+                  <a:rPr lang="de-DE" dirty="0"/>
+                  <a:t>: </a:t>
+                </a:r>
+                <a:r>
+                  <a:rPr lang="de-DE" dirty="0" err="1"/>
+                  <a:t>shows</a:t>
+                </a:r>
+                <a:r>
+                  <a:rPr lang="de-DE" dirty="0"/>
+                  <a:t> </a:t>
+                </a:r>
+                <a:r>
+                  <a:rPr lang="de-DE" dirty="0" err="1"/>
+                  <a:t>performance</a:t>
+                </a:r>
+                <a:r>
+                  <a:rPr lang="de-DE" dirty="0"/>
+                  <a:t> </a:t>
+                </a:r>
+                <a:r>
+                  <a:rPr lang="de-DE" dirty="0" err="1"/>
+                  <a:t>across</a:t>
+                </a:r>
+                <a:r>
+                  <a:rPr lang="de-DE" dirty="0"/>
+                  <a:t> all </a:t>
+                </a:r>
+                <a:r>
+                  <a:rPr lang="de-DE" dirty="0" err="1"/>
+                  <a:t>thresholds</a:t>
+                </a:r>
+                <a:endParaRPr lang="de-DE" dirty="0"/>
+              </a:p>
+              <a:p>
+                <a:pPr marL="0" indent="0">
+                  <a:buNone/>
+                </a:pPr>
+                <a:endParaRPr lang="de-DE" dirty="0"/>
+              </a:p>
+              <a:p>
+                <a:pPr marL="0" indent="0">
+                  <a:buNone/>
+                </a:pPr>
+                <a:r>
+                  <a:rPr lang="de-DE" dirty="0" err="1"/>
+                  <a:t>better</a:t>
+                </a:r>
+                <a:r>
+                  <a:rPr lang="de-DE" dirty="0"/>
+                  <a:t> </a:t>
+                </a:r>
+                <a:r>
+                  <a:rPr lang="de-DE" dirty="0" err="1"/>
+                  <a:t>model</a:t>
+                </a:r>
+                <a:r>
+                  <a:rPr lang="de-DE" dirty="0"/>
+                  <a:t> </a:t>
+                </a:r>
+                <a:r>
+                  <a:rPr lang="de-DE" dirty="0">
+                    <a:sym typeface="Wingdings" pitchFamily="2" charset="2"/>
+                  </a:rPr>
+                  <a:t></a:t>
+                </a:r>
+                <a:r>
+                  <a:rPr lang="de-DE" dirty="0"/>
+                  <a:t> </a:t>
+                </a:r>
+                <a:r>
+                  <a:rPr lang="de-DE" dirty="0" err="1"/>
+                  <a:t>curve</a:t>
+                </a:r>
+                <a:r>
+                  <a:rPr lang="de-DE" dirty="0"/>
+                  <a:t> </a:t>
+                </a:r>
+                <a:r>
+                  <a:rPr lang="de-DE" dirty="0" err="1"/>
+                  <a:t>closer</a:t>
+                </a:r>
+                <a:r>
+                  <a:rPr lang="de-DE" dirty="0"/>
+                  <a:t> </a:t>
+                </a:r>
+                <a:r>
+                  <a:rPr lang="de-DE" dirty="0" err="1"/>
+                  <a:t>to</a:t>
+                </a:r>
+                <a:r>
+                  <a:rPr lang="de-DE" dirty="0"/>
+                  <a:t> top-</a:t>
+                </a:r>
+                <a:r>
+                  <a:rPr lang="de-DE" dirty="0" err="1"/>
+                  <a:t>left</a:t>
+                </a:r>
+                <a:endParaRPr lang="de-DE" dirty="0"/>
+              </a:p>
+            </p:txBody>
+          </p:sp>
+        </mc:Choice>
+        <mc:Fallback>
+          <p:sp>
+            <p:nvSpPr>
+              <p:cNvPr id="3" name="Inhaltsplatzhalter 2">
+                <a:extLst>
+                  <a:ext uri="{FF2B5EF4-FFF2-40B4-BE49-F238E27FC236}">
+                    <a16:creationId xmlns:a16="http://schemas.microsoft.com/office/drawing/2014/main" id="{37AD4B36-A164-A513-CF0F-93BF14694857}"/>
+                  </a:ext>
+                </a:extLst>
+              </p:cNvPr>
+              <p:cNvSpPr>
+                <a:spLocks noGrp="1" noRot="1" noChangeAspect="1" noMove="1" noResize="1" noEditPoints="1" noAdjustHandles="1" noChangeArrowheads="1" noChangeShapeType="1" noTextEdit="1"/>
+              </p:cNvSpPr>
+              <p:nvPr>
+                <p:ph idx="1"/>
+              </p:nvPr>
+            </p:nvSpPr>
+            <p:spPr>
+              <a:xfrm>
+                <a:off x="838199" y="1825625"/>
+                <a:ext cx="6225209" cy="4351338"/>
+              </a:xfrm>
+              <a:blipFill>
+                <a:blip r:embed="rId3"/>
+                <a:stretch>
+                  <a:fillRect l="-1663" t="-3501"/>
+                </a:stretch>
+              </a:blipFill>
+            </p:spPr>
+            <p:txBody>
+              <a:bodyPr/>
+              <a:lstStyle/>
+              <a:p>
+                <a:r>
+                  <a:rPr lang="de-DE">
+                    <a:noFill/>
+                  </a:rPr>
+                  <a:t> </a:t>
+                </a:r>
+              </a:p>
+            </p:txBody>
+          </p:sp>
+        </mc:Fallback>
+      </mc:AlternateContent>
       <p:sp>
         <p:nvSpPr>
           <p:cNvPr id="4" name="Foliennummernplatzhalter 3">
@@ -6379,10 +6523,10 @@
           <p:nvPr/>
         </p:nvPicPr>
         <p:blipFill>
-          <a:blip>
+          <a:blip r:embed="rId4">
             <a:extLst>
               <a:ext uri="{96DAC541-7B7A-43D3-8B79-37D633B846F1}">
-                <asvg:svgBlip xmlns:asvg="http://schemas.microsoft.com/office/drawing/2016/SVG/main" r:embed="rId3"/>
+                <asvg:svgBlip xmlns:asvg="http://schemas.microsoft.com/office/drawing/2016/SVG/main" r:embed="rId5"/>
               </a:ext>
             </a:extLst>
           </a:blip>
@@ -6797,7 +6941,9 @@
         </p:nvSpPr>
         <p:spPr/>
         <p:txBody>
-          <a:bodyPr/>
+          <a:bodyPr>
+            <a:normAutofit fontScale="92500" lnSpcReduction="20000"/>
+          </a:bodyPr>
           <a:lstStyle/>
           <a:p>
             <a:pPr marL="0" indent="0">
@@ -6937,6 +7083,240 @@
               <a:rPr lang="de-DE" dirty="0"/>
               <a:t>)</a:t>
             </a:r>
+          </a:p>
+          <a:p>
+            <a:pPr marL="0" indent="0">
+              <a:buNone/>
+            </a:pPr>
+            <a:endParaRPr lang="de-DE" dirty="0"/>
+          </a:p>
+          <a:p>
+            <a:pPr marL="0" indent="0">
+              <a:buNone/>
+            </a:pPr>
+            <a:r>
+              <a:rPr lang="de-DE" dirty="0" err="1"/>
+              <a:t>Example</a:t>
+            </a:r>
+            <a:r>
+              <a:rPr lang="de-DE" dirty="0"/>
+              <a:t>: </a:t>
+            </a:r>
+          </a:p>
+          <a:p>
+            <a:r>
+              <a:rPr lang="de-DE" dirty="0"/>
+              <a:t>99% </a:t>
+            </a:r>
+            <a:r>
+              <a:rPr lang="de-DE" dirty="0" err="1"/>
+              <a:t>are</a:t>
+            </a:r>
+            <a:r>
+              <a:rPr lang="de-DE" dirty="0"/>
+              <a:t> „</a:t>
+            </a:r>
+            <a:r>
+              <a:rPr lang="de-DE" dirty="0" err="1"/>
+              <a:t>no</a:t>
+            </a:r>
+            <a:r>
+              <a:rPr lang="de-DE" dirty="0"/>
+              <a:t> </a:t>
+            </a:r>
+            <a:r>
+              <a:rPr lang="de-DE" dirty="0" err="1"/>
+              <a:t>spam</a:t>
+            </a:r>
+            <a:r>
+              <a:rPr lang="de-DE" dirty="0"/>
+              <a:t>“, </a:t>
+            </a:r>
+            <a:r>
+              <a:rPr lang="de-DE" dirty="0" err="1"/>
+              <a:t>model</a:t>
+            </a:r>
+            <a:r>
+              <a:rPr lang="de-DE" dirty="0"/>
+              <a:t> </a:t>
+            </a:r>
+            <a:r>
+              <a:rPr lang="de-DE" dirty="0" err="1"/>
+              <a:t>always</a:t>
+            </a:r>
+            <a:r>
+              <a:rPr lang="de-DE" dirty="0"/>
+              <a:t> </a:t>
+            </a:r>
+            <a:r>
+              <a:rPr lang="de-DE" dirty="0" err="1"/>
+              <a:t>says</a:t>
+            </a:r>
+            <a:r>
+              <a:rPr lang="de-DE" dirty="0"/>
+              <a:t> „</a:t>
+            </a:r>
+            <a:r>
+              <a:rPr lang="de-DE" dirty="0" err="1"/>
+              <a:t>no</a:t>
+            </a:r>
+            <a:r>
+              <a:rPr lang="de-DE" dirty="0"/>
+              <a:t> </a:t>
+            </a:r>
+            <a:r>
+              <a:rPr lang="de-DE" dirty="0" err="1"/>
+              <a:t>spam</a:t>
+            </a:r>
+            <a:r>
+              <a:rPr lang="de-DE" dirty="0"/>
+              <a:t>“</a:t>
+            </a:r>
+          </a:p>
+          <a:p>
+            <a:r>
+              <a:rPr lang="de-DE" dirty="0"/>
+              <a:t>ROC </a:t>
+            </a:r>
+            <a:r>
+              <a:rPr lang="de-DE" dirty="0" err="1"/>
+              <a:t>may</a:t>
+            </a:r>
+            <a:r>
+              <a:rPr lang="de-DE" dirty="0"/>
+              <a:t> still </a:t>
+            </a:r>
+            <a:r>
+              <a:rPr lang="de-DE" dirty="0" err="1"/>
+              <a:t>look</a:t>
+            </a:r>
+            <a:r>
+              <a:rPr lang="de-DE" dirty="0"/>
+              <a:t> „</a:t>
+            </a:r>
+            <a:r>
+              <a:rPr lang="de-DE" dirty="0" err="1"/>
+              <a:t>good</a:t>
+            </a:r>
+            <a:r>
+              <a:rPr lang="de-DE" dirty="0"/>
+              <a:t>“ (</a:t>
+            </a:r>
+            <a:r>
+              <a:rPr lang="de-DE" dirty="0" err="1"/>
+              <a:t>respects</a:t>
+            </a:r>
+            <a:r>
+              <a:rPr lang="de-DE" dirty="0"/>
+              <a:t> TN)</a:t>
+            </a:r>
+          </a:p>
+          <a:p>
+            <a:r>
+              <a:rPr lang="de-DE" dirty="0"/>
+              <a:t>but </a:t>
+            </a:r>
+            <a:r>
+              <a:rPr lang="de-DE" dirty="0" err="1"/>
+              <a:t>precision</a:t>
+            </a:r>
+            <a:r>
+              <a:rPr lang="de-DE" dirty="0"/>
+              <a:t> </a:t>
+            </a:r>
+            <a:r>
+              <a:rPr lang="de-DE" dirty="0" err="1"/>
+              <a:t>bad</a:t>
+            </a:r>
+            <a:r>
+              <a:rPr lang="de-DE" dirty="0"/>
+              <a:t> (not </a:t>
+            </a:r>
+            <a:r>
+              <a:rPr lang="de-DE" dirty="0" err="1"/>
+              <a:t>def</a:t>
+            </a:r>
+            <a:r>
+              <a:rPr lang="de-DE" dirty="0"/>
+              <a:t>.), </a:t>
+            </a:r>
+            <a:r>
+              <a:rPr lang="de-DE" dirty="0" err="1"/>
+              <a:t>recall</a:t>
+            </a:r>
+            <a:r>
+              <a:rPr lang="de-DE" dirty="0"/>
+              <a:t> = 0 </a:t>
+            </a:r>
+          </a:p>
+          <a:p>
+            <a:r>
+              <a:rPr lang="de-DE" dirty="0">
+                <a:sym typeface="Wingdings" panose="05000000000000000000" pitchFamily="2" charset="2"/>
+              </a:rPr>
+              <a:t>PR </a:t>
+            </a:r>
+            <a:r>
+              <a:rPr lang="de-DE" dirty="0" err="1">
+                <a:sym typeface="Wingdings" panose="05000000000000000000" pitchFamily="2" charset="2"/>
+              </a:rPr>
+              <a:t>curve</a:t>
+            </a:r>
+            <a:r>
+              <a:rPr lang="de-DE" dirty="0">
+                <a:sym typeface="Wingdings" panose="05000000000000000000" pitchFamily="2" charset="2"/>
+              </a:rPr>
+              <a:t> </a:t>
+            </a:r>
+            <a:r>
+              <a:rPr lang="de-DE" dirty="0" err="1">
+                <a:sym typeface="Wingdings" panose="05000000000000000000" pitchFamily="2" charset="2"/>
+              </a:rPr>
+              <a:t>detects</a:t>
+            </a:r>
+            <a:r>
+              <a:rPr lang="de-DE" dirty="0">
+                <a:sym typeface="Wingdings" panose="05000000000000000000" pitchFamily="2" charset="2"/>
+              </a:rPr>
+              <a:t> </a:t>
+            </a:r>
+            <a:r>
+              <a:rPr lang="de-DE" dirty="0" err="1">
+                <a:sym typeface="Wingdings" panose="05000000000000000000" pitchFamily="2" charset="2"/>
+              </a:rPr>
+              <a:t>that</a:t>
+            </a:r>
+            <a:r>
+              <a:rPr lang="de-DE" dirty="0">
+                <a:sym typeface="Wingdings" panose="05000000000000000000" pitchFamily="2" charset="2"/>
+              </a:rPr>
+              <a:t> </a:t>
+            </a:r>
+            <a:r>
+              <a:rPr lang="de-DE" dirty="0" err="1">
+                <a:sym typeface="Wingdings" panose="05000000000000000000" pitchFamily="2" charset="2"/>
+              </a:rPr>
+              <a:t>problem</a:t>
+            </a:r>
+            <a:r>
+              <a:rPr lang="de-DE" dirty="0">
+                <a:sym typeface="Wingdings" panose="05000000000000000000" pitchFamily="2" charset="2"/>
+              </a:rPr>
+              <a:t> (</a:t>
+            </a:r>
+            <a:r>
+              <a:rPr lang="de-DE" dirty="0" err="1">
+                <a:sym typeface="Wingdings" panose="05000000000000000000" pitchFamily="2" charset="2"/>
+              </a:rPr>
+              <a:t>ignores</a:t>
+            </a:r>
+            <a:r>
+              <a:rPr lang="de-DE" dirty="0">
+                <a:sym typeface="Wingdings" panose="05000000000000000000" pitchFamily="2" charset="2"/>
+              </a:rPr>
+              <a:t> TN)</a:t>
+            </a:r>
+            <a:endParaRPr lang="de-DE" dirty="0"/>
           </a:p>
         </p:txBody>
       </p:sp>
@@ -6969,6 +7349,206 @@
           </a:p>
         </p:txBody>
       </p:sp>
+      <p:graphicFrame>
+        <p:nvGraphicFramePr>
+          <p:cNvPr id="5" name="Tabelle 4">
+            <a:extLst>
+              <a:ext uri="{FF2B5EF4-FFF2-40B4-BE49-F238E27FC236}">
+                <a16:creationId xmlns:a16="http://schemas.microsoft.com/office/drawing/2014/main" id="{5B3FAAF5-E46E-BCBE-8F26-F139A495E8FF}"/>
+              </a:ext>
+            </a:extLst>
+          </p:cNvPr>
+          <p:cNvGraphicFramePr>
+            <a:graphicFrameLocks noGrp="1"/>
+          </p:cNvGraphicFramePr>
+          <p:nvPr>
+            <p:extLst>
+              <p:ext uri="{D42A27DB-BD31-4B8C-83A1-F6EECF244321}">
+                <p14:modId xmlns:p14="http://schemas.microsoft.com/office/powerpoint/2010/main" val="833267895"/>
+              </p:ext>
+            </p:extLst>
+          </p:nvPr>
+        </p:nvGraphicFramePr>
+        <p:xfrm>
+          <a:off x="7625860" y="4676956"/>
+          <a:ext cx="3727940" cy="1290320"/>
+        </p:xfrm>
+        <a:graphic>
+          <a:graphicData uri="http://schemas.openxmlformats.org/drawingml/2006/table">
+            <a:tbl>
+              <a:tblPr firstRow="1" bandRow="1">
+                <a:tableStyleId>{5C22544A-7EE6-4342-B048-85BDC9FD1C3A}</a:tableStyleId>
+              </a:tblPr>
+              <a:tblGrid>
+                <a:gridCol w="1657978">
+                  <a:extLst>
+                    <a:ext uri="{9D8B030D-6E8A-4147-A177-3AD203B41FA5}">
+                      <a16:colId xmlns:a16="http://schemas.microsoft.com/office/drawing/2014/main" val="3191300630"/>
+                    </a:ext>
+                  </a:extLst>
+                </a:gridCol>
+                <a:gridCol w="1014883">
+                  <a:extLst>
+                    <a:ext uri="{9D8B030D-6E8A-4147-A177-3AD203B41FA5}">
+                      <a16:colId xmlns:a16="http://schemas.microsoft.com/office/drawing/2014/main" val="3988278271"/>
+                    </a:ext>
+                  </a:extLst>
+                </a:gridCol>
+                <a:gridCol w="1055079">
+                  <a:extLst>
+                    <a:ext uri="{9D8B030D-6E8A-4147-A177-3AD203B41FA5}">
+                      <a16:colId xmlns:a16="http://schemas.microsoft.com/office/drawing/2014/main" val="3769724225"/>
+                    </a:ext>
+                  </a:extLst>
+                </a:gridCol>
+              </a:tblGrid>
+              <a:tr h="370840">
+                <a:tc>
+                  <a:txBody>
+                    <a:bodyPr/>
+                    <a:lstStyle/>
+                    <a:p>
+                      <a:endParaRPr lang="de-DE" sz="1500" dirty="0"/>
+                    </a:p>
+                  </a:txBody>
+                  <a:tcPr/>
+                </a:tc>
+                <a:tc>
+                  <a:txBody>
+                    <a:bodyPr/>
+                    <a:lstStyle/>
+                    <a:p>
+                      <a:r>
+                        <a:rPr lang="de-DE" sz="1500" b="0" dirty="0" err="1"/>
+                        <a:t>Predicted</a:t>
+                      </a:r>
+                      <a:r>
+                        <a:rPr lang="de-DE" sz="1500" b="0" dirty="0"/>
+                        <a:t> Spam</a:t>
+                      </a:r>
+                    </a:p>
+                  </a:txBody>
+                  <a:tcPr/>
+                </a:tc>
+                <a:tc>
+                  <a:txBody>
+                    <a:bodyPr/>
+                    <a:lstStyle/>
+                    <a:p>
+                      <a:r>
+                        <a:rPr lang="de-DE" sz="1500" b="0" dirty="0" err="1"/>
+                        <a:t>Predicted</a:t>
+                      </a:r>
+                      <a:r>
+                        <a:rPr lang="de-DE" sz="1500" b="0" dirty="0"/>
+                        <a:t> Not Spam</a:t>
+                      </a:r>
+                    </a:p>
+                  </a:txBody>
+                  <a:tcPr/>
+                </a:tc>
+                <a:extLst>
+                  <a:ext uri="{0D108BD9-81ED-4DB2-BD59-A6C34878D82A}">
+                    <a16:rowId xmlns:a16="http://schemas.microsoft.com/office/drawing/2014/main" val="3546746069"/>
+                  </a:ext>
+                </a:extLst>
+              </a:tr>
+              <a:tr h="370840">
+                <a:tc>
+                  <a:txBody>
+                    <a:bodyPr/>
+                    <a:lstStyle/>
+                    <a:p>
+                      <a:r>
+                        <a:rPr lang="de-DE" sz="1500" dirty="0"/>
+                        <a:t>Actual Spam</a:t>
+                      </a:r>
+                    </a:p>
+                  </a:txBody>
+                  <a:tcPr/>
+                </a:tc>
+                <a:tc>
+                  <a:txBody>
+                    <a:bodyPr/>
+                    <a:lstStyle/>
+                    <a:p>
+                      <a:r>
+                        <a:rPr lang="de-DE" sz="1500" dirty="0"/>
+                        <a:t>0 (TP)</a:t>
+                      </a:r>
+                    </a:p>
+                  </a:txBody>
+                  <a:tcPr/>
+                </a:tc>
+                <a:tc>
+                  <a:txBody>
+                    <a:bodyPr/>
+                    <a:lstStyle/>
+                    <a:p>
+                      <a:r>
+                        <a:rPr lang="de-DE" sz="1500" dirty="0"/>
+                        <a:t>1 (FN)</a:t>
+                      </a:r>
+                    </a:p>
+                  </a:txBody>
+                  <a:tcPr/>
+                </a:tc>
+                <a:extLst>
+                  <a:ext uri="{0D108BD9-81ED-4DB2-BD59-A6C34878D82A}">
+                    <a16:rowId xmlns:a16="http://schemas.microsoft.com/office/drawing/2014/main" val="4217061617"/>
+                  </a:ext>
+                </a:extLst>
+              </a:tr>
+              <a:tr h="370840">
+                <a:tc>
+                  <a:txBody>
+                    <a:bodyPr/>
+                    <a:lstStyle/>
+                    <a:p>
+                      <a:r>
+                        <a:rPr lang="de-DE" sz="1500" dirty="0"/>
+                        <a:t>Actual Not Spam</a:t>
+                      </a:r>
+                    </a:p>
+                  </a:txBody>
+                  <a:tcPr/>
+                </a:tc>
+                <a:tc>
+                  <a:txBody>
+                    <a:bodyPr/>
+                    <a:lstStyle/>
+                    <a:p>
+                      <a:r>
+                        <a:rPr lang="de-DE" sz="1500" dirty="0"/>
+                        <a:t>0 (FP)</a:t>
+                      </a:r>
+                    </a:p>
+                  </a:txBody>
+                  <a:tcPr/>
+                </a:tc>
+                <a:tc>
+                  <a:txBody>
+                    <a:bodyPr/>
+                    <a:lstStyle/>
+                    <a:p>
+                      <a:r>
+                        <a:rPr lang="de-DE" sz="1500" dirty="0"/>
+                        <a:t>99 (TN)</a:t>
+                      </a:r>
+                    </a:p>
+                  </a:txBody>
+                  <a:tcPr/>
+                </a:tc>
+                <a:extLst>
+                  <a:ext uri="{0D108BD9-81ED-4DB2-BD59-A6C34878D82A}">
+                    <a16:rowId xmlns:a16="http://schemas.microsoft.com/office/drawing/2014/main" val="1419384299"/>
+                  </a:ext>
+                </a:extLst>
+              </a:tr>
+            </a:tbl>
+          </a:graphicData>
+        </a:graphic>
+      </p:graphicFrame>
     </p:spTree>
     <p:extLst>
       <p:ext uri="{BB962C8B-B14F-4D97-AF65-F5344CB8AC3E}">
@@ -10828,8 +11408,8 @@
           </p:sp>
         </mc:Fallback>
       </mc:AlternateContent>
-      <mc:AlternateContent xmlns:mc="http://schemas.openxmlformats.org/markup-compatibility/2006" xmlns:a14="http://schemas.microsoft.com/office/drawing/2010/main">
-        <mc:Choice Requires="a14">
+      <mc:AlternateContent xmlns:mc="http://schemas.openxmlformats.org/markup-compatibility/2006">
+        <mc:Choice xmlns:a14="http://schemas.microsoft.com/office/drawing/2010/main" Requires="a14">
           <p:sp>
             <p:nvSpPr>
               <p:cNvPr id="3" name="Inhaltsplatzhalter 2">
@@ -11208,43 +11788,24 @@
                                         </a:rPr>
                                         <m:t>−</m:t>
                                       </m:r>
-                                      <m:sSub>
-                                        <m:sSubPr>
+                                      <m:acc>
+                                        <m:accPr>
+                                          <m:chr m:val="̅"/>
                                           <m:ctrlPr>
-                                            <a:rPr lang="de-DE" i="1">
+                                            <a:rPr lang="de-DE" i="1" smtClean="0">
                                               <a:latin typeface="Cambria Math" panose="02040503050406030204" pitchFamily="18" charset="0"/>
                                             </a:rPr>
                                           </m:ctrlPr>
-                                        </m:sSubPr>
+                                        </m:accPr>
                                         <m:e>
-                                          <m:acc>
-                                            <m:accPr>
-                                              <m:chr m:val="̅"/>
-                                              <m:ctrlPr>
-                                                <a:rPr lang="de-DE" i="1" smtClean="0">
-                                                  <a:latin typeface="Cambria Math" panose="02040503050406030204" pitchFamily="18" charset="0"/>
-                                                </a:rPr>
-                                              </m:ctrlPr>
-                                            </m:accPr>
-                                            <m:e>
-                                              <m:r>
-                                                <a:rPr lang="de-DE" b="0" i="1" smtClean="0">
-                                                  <a:latin typeface="Cambria Math" panose="02040503050406030204" pitchFamily="18" charset="0"/>
-                                                </a:rPr>
-                                                <m:t>𝑦</m:t>
-                                              </m:r>
-                                            </m:e>
-                                          </m:acc>
-                                        </m:e>
-                                        <m:sub>
                                           <m:r>
-                                            <a:rPr lang="de-DE" i="1">
+                                            <a:rPr lang="en-US" b="0" i="1" smtClean="0">
                                               <a:latin typeface="Cambria Math" panose="02040503050406030204" pitchFamily="18" charset="0"/>
                                             </a:rPr>
-                                            <m:t>𝑖</m:t>
+                                            <m:t>𝑦</m:t>
                                           </m:r>
-                                        </m:sub>
-                                      </m:sSub>
+                                        </m:e>
+                                      </m:acc>
                                     </m:e>
                                   </m:d>
                                 </m:e>
@@ -11370,10 +11931,16 @@
                 <a14:m>
                   <m:oMath xmlns:m="http://schemas.openxmlformats.org/officeDocument/2006/math">
                     <m:r>
+                      <a:rPr lang="de-DE" i="1" dirty="0">
+                        <a:latin typeface="Cambria Math" panose="02040503050406030204" pitchFamily="18" charset="0"/>
+                      </a:rPr>
+                      <m:t>&lt;</m:t>
+                    </m:r>
+                    <m:r>
                       <a:rPr lang="de-DE" b="0" i="1" dirty="0" smtClean="0">
                         <a:latin typeface="Cambria Math" panose="02040503050406030204" pitchFamily="18" charset="0"/>
                       </a:rPr>
-                      <m:t>&lt; 0</m:t>
+                      <m:t>0</m:t>
                     </m:r>
                   </m:oMath>
                 </a14:m>
@@ -11416,7 +11983,7 @@
             </p:txBody>
           </p:sp>
         </mc:Choice>
-        <mc:Fallback xmlns="">
+        <mc:Fallback>
           <p:sp>
             <p:nvSpPr>
               <p:cNvPr id="3" name="Inhaltsplatzhalter 2">
@@ -11437,7 +12004,7 @@
               <a:blipFill>
                 <a:blip r:embed="rId3"/>
                 <a:stretch>
-                  <a:fillRect l="-1206" t="-3198"/>
+                  <a:fillRect l="-1217" t="-3081"/>
                 </a:stretch>
               </a:blipFill>
             </p:spPr>
@@ -20834,20 +21401,23 @@
               <a:rPr lang="de-DE" dirty="0"/>
               <a:t>: </a:t>
             </a:r>
-            <a:r>
-              <a:rPr lang="de-DE" dirty="0" err="1"/>
+            <a:br>
+              <a:rPr lang="de-DE" dirty="0"/>
+            </a:br>
+            <a:r>
+              <a:rPr lang="de-DE" b="1" dirty="0" err="1"/>
               <a:t>threshold</a:t>
             </a:r>
             <a:r>
-              <a:rPr lang="de-DE" dirty="0"/>
-              <a:t> </a:t>
-            </a:r>
-            <a:r>
-              <a:rPr lang="de-DE" dirty="0" err="1"/>
+              <a:rPr lang="de-DE" b="1" dirty="0"/>
+              <a:t> </a:t>
+            </a:r>
+            <a:r>
+              <a:rPr lang="de-DE" b="1" dirty="0" err="1"/>
               <a:t>tuning</a:t>
             </a:r>
             <a:r>
-              <a:rPr lang="de-DE" dirty="0"/>
+              <a:rPr lang="de-DE" b="1" dirty="0"/>
               <a:t> </a:t>
             </a:r>
             <a:r>
@@ -20858,6 +21428,9 @@
               <a:rPr lang="de-DE" dirty="0"/>
               <a:t> </a:t>
             </a:r>
+            <a:br>
+              <a:rPr lang="de-DE" dirty="0"/>
+            </a:br>
             <a:r>
               <a:rPr lang="de-DE" dirty="0" err="1"/>
               <a:t>this</a:t>
@@ -20901,6 +21474,9 @@
               <a:rPr lang="de-DE" dirty="0"/>
               <a:t>: </a:t>
             </a:r>
+            <a:br>
+              <a:rPr lang="de-DE" dirty="0"/>
+            </a:br>
             <a:r>
               <a:rPr lang="de-DE" dirty="0" err="1"/>
               <a:t>which</a:t>
@@ -20965,6 +21541,716 @@
           </a:p>
         </p:txBody>
       </p:sp>
+      <p:graphicFrame>
+        <p:nvGraphicFramePr>
+          <p:cNvPr id="7" name="Table 2">
+            <a:extLst>
+              <a:ext uri="{FF2B5EF4-FFF2-40B4-BE49-F238E27FC236}">
+                <a16:creationId xmlns:a16="http://schemas.microsoft.com/office/drawing/2014/main" id="{AF69BA20-7635-BECD-E9F4-D3C4F9F4ECD9}"/>
+              </a:ext>
+            </a:extLst>
+          </p:cNvPr>
+          <p:cNvGraphicFramePr>
+            <a:graphicFrameLocks noGrp="1"/>
+          </p:cNvGraphicFramePr>
+          <p:nvPr>
+            <p:extLst>
+              <p:ext uri="{D42A27DB-BD31-4B8C-83A1-F6EECF244321}">
+                <p14:modId xmlns:p14="http://schemas.microsoft.com/office/powerpoint/2010/main" val="3699471781"/>
+              </p:ext>
+            </p:extLst>
+          </p:nvPr>
+        </p:nvGraphicFramePr>
+        <p:xfrm>
+          <a:off x="5721530" y="3081565"/>
+          <a:ext cx="5632270" cy="1839457"/>
+        </p:xfrm>
+        <a:graphic>
+          <a:graphicData uri="http://schemas.openxmlformats.org/drawingml/2006/table">
+            <a:tbl>
+              <a:tblPr firstRow="1" bandRow="1">
+                <a:tableStyleId>{5C22544A-7EE6-4342-B048-85BDC9FD1C3A}</a:tableStyleId>
+              </a:tblPr>
+              <a:tblGrid>
+                <a:gridCol w="1126454">
+                  <a:extLst>
+                    <a:ext uri="{9D8B030D-6E8A-4147-A177-3AD203B41FA5}">
+                      <a16:colId xmlns:a16="http://schemas.microsoft.com/office/drawing/2014/main" val="20000"/>
+                    </a:ext>
+                  </a:extLst>
+                </a:gridCol>
+                <a:gridCol w="1126454">
+                  <a:extLst>
+                    <a:ext uri="{9D8B030D-6E8A-4147-A177-3AD203B41FA5}">
+                      <a16:colId xmlns:a16="http://schemas.microsoft.com/office/drawing/2014/main" val="20001"/>
+                    </a:ext>
+                  </a:extLst>
+                </a:gridCol>
+                <a:gridCol w="1126454">
+                  <a:extLst>
+                    <a:ext uri="{9D8B030D-6E8A-4147-A177-3AD203B41FA5}">
+                      <a16:colId xmlns:a16="http://schemas.microsoft.com/office/drawing/2014/main" val="20002"/>
+                    </a:ext>
+                  </a:extLst>
+                </a:gridCol>
+                <a:gridCol w="1126454">
+                  <a:extLst>
+                    <a:ext uri="{9D8B030D-6E8A-4147-A177-3AD203B41FA5}">
+                      <a16:colId xmlns:a16="http://schemas.microsoft.com/office/drawing/2014/main" val="20003"/>
+                    </a:ext>
+                  </a:extLst>
+                </a:gridCol>
+                <a:gridCol w="1126454">
+                  <a:extLst>
+                    <a:ext uri="{9D8B030D-6E8A-4147-A177-3AD203B41FA5}">
+                      <a16:colId xmlns:a16="http://schemas.microsoft.com/office/drawing/2014/main" val="20004"/>
+                    </a:ext>
+                  </a:extLst>
+                </a:gridCol>
+              </a:tblGrid>
+              <a:tr h="535217">
+                <a:tc>
+                  <a:txBody>
+                    <a:bodyPr/>
+                    <a:lstStyle/>
+                    <a:p>
+                      <a:r>
+                        <a:rPr lang="en-US" sz="1200" dirty="0"/>
+                        <a:t>t</a:t>
+                      </a:r>
+                      <a:r>
+                        <a:rPr sz="1200" dirty="0"/>
+                        <a:t>hreshold</a:t>
+                      </a:r>
+                    </a:p>
+                  </a:txBody>
+                  <a:tcPr/>
+                </a:tc>
+                <a:tc>
+                  <a:txBody>
+                    <a:bodyPr/>
+                    <a:lstStyle/>
+                    <a:p>
+                      <a:r>
+                        <a:rPr lang="en-US" sz="1200" dirty="0"/>
+                        <a:t>p</a:t>
+                      </a:r>
+                      <a:r>
+                        <a:rPr sz="1200" dirty="0"/>
+                        <a:t>redicted </a:t>
+                      </a:r>
+                      <a:r>
+                        <a:rPr lang="en-US" sz="1200" dirty="0"/>
+                        <a:t>p</a:t>
+                      </a:r>
+                      <a:r>
+                        <a:rPr sz="1200" dirty="0"/>
+                        <a:t>ositives</a:t>
+                      </a:r>
+                    </a:p>
+                  </a:txBody>
+                  <a:tcPr/>
+                </a:tc>
+                <a:tc>
+                  <a:txBody>
+                    <a:bodyPr/>
+                    <a:lstStyle/>
+                    <a:p>
+                      <a:r>
+                        <a:rPr lang="en-US" sz="1200" dirty="0"/>
+                        <a:t>p</a:t>
+                      </a:r>
+                      <a:r>
+                        <a:rPr sz="1200" dirty="0"/>
+                        <a:t>recision</a:t>
+                      </a:r>
+                    </a:p>
+                  </a:txBody>
+                  <a:tcPr/>
+                </a:tc>
+                <a:tc>
+                  <a:txBody>
+                    <a:bodyPr/>
+                    <a:lstStyle/>
+                    <a:p>
+                      <a:r>
+                        <a:rPr lang="en-US" sz="1200" dirty="0"/>
+                        <a:t>r</a:t>
+                      </a:r>
+                      <a:r>
+                        <a:rPr sz="1200" dirty="0"/>
+                        <a:t>ecall</a:t>
+                      </a:r>
+                    </a:p>
+                  </a:txBody>
+                  <a:tcPr/>
+                </a:tc>
+                <a:tc>
+                  <a:txBody>
+                    <a:bodyPr/>
+                    <a:lstStyle/>
+                    <a:p>
+                      <a:r>
+                        <a:rPr lang="en-US" sz="1200" dirty="0"/>
+                        <a:t>i</a:t>
+                      </a:r>
+                      <a:r>
+                        <a:rPr sz="1200" dirty="0"/>
+                        <a:t>nter</a:t>
+                      </a:r>
+                      <a:r>
+                        <a:rPr lang="en-US" sz="1200" dirty="0"/>
+                        <a:t>-</a:t>
+                      </a:r>
+                      <a:r>
+                        <a:rPr sz="1200" dirty="0" err="1"/>
+                        <a:t>pr</a:t>
+                      </a:r>
+                      <a:r>
+                        <a:rPr lang="en-US" sz="1200" dirty="0" err="1"/>
+                        <a:t>e</a:t>
+                      </a:r>
+                      <a:r>
+                        <a:rPr sz="1200" dirty="0" err="1"/>
+                        <a:t>tation</a:t>
+                      </a:r>
+                      <a:endParaRPr sz="1200" dirty="0"/>
+                    </a:p>
+                  </a:txBody>
+                  <a:tcPr/>
+                </a:tc>
+                <a:extLst>
+                  <a:ext uri="{0D108BD9-81ED-4DB2-BD59-A6C34878D82A}">
+                    <a16:rowId xmlns:a16="http://schemas.microsoft.com/office/drawing/2014/main" val="10000"/>
+                  </a:ext>
+                </a:extLst>
+              </a:tr>
+              <a:tr h="535217">
+                <a:tc>
+                  <a:txBody>
+                    <a:bodyPr/>
+                    <a:lstStyle/>
+                    <a:p>
+                      <a:r>
+                        <a:rPr sz="1200"/>
+                        <a:t>0.3</a:t>
+                      </a:r>
+                    </a:p>
+                  </a:txBody>
+                  <a:tcPr/>
+                </a:tc>
+                <a:tc>
+                  <a:txBody>
+                    <a:bodyPr/>
+                    <a:lstStyle/>
+                    <a:p>
+                      <a:r>
+                        <a:rPr lang="en-US" sz="1200" dirty="0"/>
+                        <a:t>h</a:t>
+                      </a:r>
+                      <a:r>
+                        <a:rPr sz="1200" dirty="0"/>
+                        <a:t>igh</a:t>
+                      </a:r>
+                      <a:endParaRPr lang="en-US" sz="1200" dirty="0"/>
+                    </a:p>
+                    <a:p>
+                      <a:r>
+                        <a:rPr lang="de-DE" sz="900" dirty="0"/>
+                        <a:t>(</a:t>
+                      </a:r>
+                      <a:r>
+                        <a:rPr lang="de-DE" sz="900" dirty="0" err="1"/>
+                        <a:t>almost</a:t>
+                      </a:r>
+                      <a:r>
+                        <a:rPr lang="de-DE" sz="900" dirty="0"/>
+                        <a:t> </a:t>
+                      </a:r>
+                      <a:r>
+                        <a:rPr lang="de-DE" sz="900" dirty="0" err="1"/>
+                        <a:t>everything</a:t>
+                      </a:r>
+                      <a:r>
+                        <a:rPr lang="de-DE" sz="900" dirty="0"/>
+                        <a:t> </a:t>
+                      </a:r>
+                      <a:r>
+                        <a:rPr lang="de-DE" sz="900" dirty="0" err="1"/>
+                        <a:t>classified</a:t>
+                      </a:r>
+                      <a:r>
+                        <a:rPr lang="de-DE" sz="900" dirty="0"/>
+                        <a:t> positive)</a:t>
+                      </a:r>
+                      <a:endParaRPr sz="1200" dirty="0"/>
+                    </a:p>
+                  </a:txBody>
+                  <a:tcPr/>
+                </a:tc>
+                <a:tc>
+                  <a:txBody>
+                    <a:bodyPr/>
+                    <a:lstStyle/>
+                    <a:p>
+                      <a:r>
+                        <a:rPr lang="en-US" sz="1200" dirty="0"/>
+                        <a:t>l</a:t>
+                      </a:r>
+                      <a:r>
+                        <a:rPr sz="1200" dirty="0"/>
+                        <a:t>ow</a:t>
+                      </a:r>
+                    </a:p>
+                  </a:txBody>
+                  <a:tcPr/>
+                </a:tc>
+                <a:tc>
+                  <a:txBody>
+                    <a:bodyPr/>
+                    <a:lstStyle/>
+                    <a:p>
+                      <a:r>
+                        <a:rPr lang="en-US" sz="1200" dirty="0"/>
+                        <a:t>h</a:t>
+                      </a:r>
+                      <a:r>
+                        <a:rPr sz="1200" dirty="0"/>
+                        <a:t>igh</a:t>
+                      </a:r>
+                    </a:p>
+                  </a:txBody>
+                  <a:tcPr/>
+                </a:tc>
+                <a:tc>
+                  <a:txBody>
+                    <a:bodyPr/>
+                    <a:lstStyle/>
+                    <a:p>
+                      <a:r>
+                        <a:rPr lang="en-US" sz="1200" dirty="0"/>
+                        <a:t>m</a:t>
+                      </a:r>
+                      <a:r>
+                        <a:rPr sz="1200" dirty="0"/>
+                        <a:t>any false positives</a:t>
+                      </a:r>
+                    </a:p>
+                  </a:txBody>
+                  <a:tcPr/>
+                </a:tc>
+                <a:extLst>
+                  <a:ext uri="{0D108BD9-81ED-4DB2-BD59-A6C34878D82A}">
+                    <a16:rowId xmlns:a16="http://schemas.microsoft.com/office/drawing/2014/main" val="10001"/>
+                  </a:ext>
+                </a:extLst>
+              </a:tr>
+              <a:tr h="755600">
+                <a:tc>
+                  <a:txBody>
+                    <a:bodyPr/>
+                    <a:lstStyle/>
+                    <a:p>
+                      <a:r>
+                        <a:rPr sz="1200" dirty="0"/>
+                        <a:t>0.</a:t>
+                      </a:r>
+                      <a:r>
+                        <a:rPr lang="en-US" sz="1200" dirty="0"/>
+                        <a:t>8</a:t>
+                      </a:r>
+                      <a:endParaRPr sz="1200" dirty="0"/>
+                    </a:p>
+                  </a:txBody>
+                  <a:tcPr/>
+                </a:tc>
+                <a:tc>
+                  <a:txBody>
+                    <a:bodyPr/>
+                    <a:lstStyle/>
+                    <a:p>
+                      <a:r>
+                        <a:rPr lang="en-US" sz="1200" dirty="0"/>
+                        <a:t>l</a:t>
+                      </a:r>
+                      <a:r>
+                        <a:rPr sz="1200" dirty="0"/>
+                        <a:t>ow</a:t>
+                      </a:r>
+                      <a:endParaRPr lang="en-US" sz="1200" dirty="0"/>
+                    </a:p>
+                    <a:p>
+                      <a:r>
+                        <a:rPr lang="de-DE" sz="900" kern="1200" dirty="0">
+                          <a:solidFill>
+                            <a:schemeClr val="dk1"/>
+                          </a:solidFill>
+                          <a:latin typeface="+mn-lt"/>
+                          <a:ea typeface="+mn-ea"/>
+                          <a:cs typeface="+mn-cs"/>
+                        </a:rPr>
+                        <a:t>(</a:t>
+                      </a:r>
+                      <a:r>
+                        <a:rPr lang="de-DE" sz="900" kern="1200" dirty="0" err="1">
+                          <a:solidFill>
+                            <a:schemeClr val="dk1"/>
+                          </a:solidFill>
+                          <a:latin typeface="+mn-lt"/>
+                          <a:ea typeface="+mn-ea"/>
+                          <a:cs typeface="+mn-cs"/>
+                        </a:rPr>
+                        <a:t>only</a:t>
+                      </a:r>
+                      <a:r>
+                        <a:rPr lang="de-DE" sz="900" kern="1200" dirty="0">
+                          <a:solidFill>
+                            <a:schemeClr val="dk1"/>
+                          </a:solidFill>
+                          <a:latin typeface="+mn-lt"/>
+                          <a:ea typeface="+mn-ea"/>
+                          <a:cs typeface="+mn-cs"/>
+                        </a:rPr>
+                        <a:t> </a:t>
+                      </a:r>
+                      <a:r>
+                        <a:rPr lang="de-DE" sz="900" kern="1200" dirty="0" err="1">
+                          <a:solidFill>
+                            <a:schemeClr val="dk1"/>
+                          </a:solidFill>
+                          <a:latin typeface="+mn-lt"/>
+                          <a:ea typeface="+mn-ea"/>
+                          <a:cs typeface="+mn-cs"/>
+                        </a:rPr>
+                        <a:t>almost</a:t>
+                      </a:r>
+                      <a:r>
+                        <a:rPr lang="de-DE" sz="900" kern="1200" dirty="0">
+                          <a:solidFill>
+                            <a:schemeClr val="dk1"/>
+                          </a:solidFill>
+                          <a:latin typeface="+mn-lt"/>
+                          <a:ea typeface="+mn-ea"/>
+                          <a:cs typeface="+mn-cs"/>
+                        </a:rPr>
+                        <a:t> </a:t>
+                      </a:r>
+                      <a:r>
+                        <a:rPr lang="de-DE" sz="900" kern="1200" dirty="0" err="1">
+                          <a:solidFill>
+                            <a:schemeClr val="dk1"/>
+                          </a:solidFill>
+                          <a:latin typeface="+mn-lt"/>
+                          <a:ea typeface="+mn-ea"/>
+                          <a:cs typeface="+mn-cs"/>
+                        </a:rPr>
+                        <a:t>sure</a:t>
+                      </a:r>
+                      <a:r>
+                        <a:rPr lang="de-DE" sz="900" kern="1200" dirty="0">
+                          <a:solidFill>
+                            <a:schemeClr val="dk1"/>
+                          </a:solidFill>
+                          <a:latin typeface="+mn-lt"/>
+                          <a:ea typeface="+mn-ea"/>
+                          <a:cs typeface="+mn-cs"/>
+                        </a:rPr>
+                        <a:t> </a:t>
+                      </a:r>
+                      <a:r>
+                        <a:rPr lang="de-DE" sz="900" kern="1200" dirty="0" err="1">
+                          <a:solidFill>
+                            <a:schemeClr val="dk1"/>
+                          </a:solidFill>
+                          <a:latin typeface="+mn-lt"/>
+                          <a:ea typeface="+mn-ea"/>
+                          <a:cs typeface="+mn-cs"/>
+                        </a:rPr>
+                        <a:t>cases</a:t>
+                      </a:r>
+                      <a:r>
+                        <a:rPr lang="de-DE" sz="900" kern="1200" dirty="0">
+                          <a:solidFill>
+                            <a:schemeClr val="dk1"/>
+                          </a:solidFill>
+                          <a:latin typeface="+mn-lt"/>
+                          <a:ea typeface="+mn-ea"/>
+                          <a:cs typeface="+mn-cs"/>
+                        </a:rPr>
+                        <a:t> </a:t>
+                      </a:r>
+                      <a:r>
+                        <a:rPr lang="de-DE" sz="900" kern="1200" dirty="0" err="1">
+                          <a:solidFill>
+                            <a:schemeClr val="dk1"/>
+                          </a:solidFill>
+                          <a:latin typeface="+mn-lt"/>
+                          <a:ea typeface="+mn-ea"/>
+                          <a:cs typeface="+mn-cs"/>
+                        </a:rPr>
+                        <a:t>classified</a:t>
+                      </a:r>
+                      <a:r>
+                        <a:rPr lang="de-DE" sz="900" kern="1200" dirty="0">
+                          <a:solidFill>
+                            <a:schemeClr val="dk1"/>
+                          </a:solidFill>
+                          <a:latin typeface="+mn-lt"/>
+                          <a:ea typeface="+mn-ea"/>
+                          <a:cs typeface="+mn-cs"/>
+                        </a:rPr>
+                        <a:t> positive)</a:t>
+                      </a:r>
+                      <a:endParaRPr sz="900" kern="1200" dirty="0">
+                        <a:solidFill>
+                          <a:schemeClr val="dk1"/>
+                        </a:solidFill>
+                        <a:latin typeface="+mn-lt"/>
+                        <a:ea typeface="+mn-ea"/>
+                        <a:cs typeface="+mn-cs"/>
+                      </a:endParaRPr>
+                    </a:p>
+                  </a:txBody>
+                  <a:tcPr/>
+                </a:tc>
+                <a:tc>
+                  <a:txBody>
+                    <a:bodyPr/>
+                    <a:lstStyle/>
+                    <a:p>
+                      <a:r>
+                        <a:rPr lang="en-US" sz="1200" dirty="0"/>
+                        <a:t>h</a:t>
+                      </a:r>
+                      <a:r>
+                        <a:rPr sz="1200" dirty="0"/>
+                        <a:t>igh</a:t>
+                      </a:r>
+                    </a:p>
+                  </a:txBody>
+                  <a:tcPr/>
+                </a:tc>
+                <a:tc>
+                  <a:txBody>
+                    <a:bodyPr/>
+                    <a:lstStyle/>
+                    <a:p>
+                      <a:r>
+                        <a:rPr lang="en-US" sz="1200" dirty="0"/>
+                        <a:t>l</a:t>
+                      </a:r>
+                      <a:r>
+                        <a:rPr sz="1200" dirty="0"/>
+                        <a:t>ow</a:t>
+                      </a:r>
+                    </a:p>
+                  </a:txBody>
+                  <a:tcPr/>
+                </a:tc>
+                <a:tc>
+                  <a:txBody>
+                    <a:bodyPr/>
+                    <a:lstStyle/>
+                    <a:p>
+                      <a:r>
+                        <a:rPr lang="en-US" sz="1200" dirty="0"/>
+                        <a:t>o</a:t>
+                      </a:r>
+                      <a:r>
+                        <a:rPr sz="1200" dirty="0"/>
+                        <a:t>nly very confident predictions</a:t>
+                      </a:r>
+                    </a:p>
+                  </a:txBody>
+                  <a:tcPr/>
+                </a:tc>
+                <a:extLst>
+                  <a:ext uri="{0D108BD9-81ED-4DB2-BD59-A6C34878D82A}">
+                    <a16:rowId xmlns:a16="http://schemas.microsoft.com/office/drawing/2014/main" val="10004"/>
+                  </a:ext>
+                </a:extLst>
+              </a:tr>
+            </a:tbl>
+          </a:graphicData>
+        </a:graphic>
+      </p:graphicFrame>
+      <p:graphicFrame>
+        <p:nvGraphicFramePr>
+          <p:cNvPr id="8" name="Table 2">
+            <a:extLst>
+              <a:ext uri="{FF2B5EF4-FFF2-40B4-BE49-F238E27FC236}">
+                <a16:creationId xmlns:a16="http://schemas.microsoft.com/office/drawing/2014/main" id="{6FA12785-0D34-E6A2-015A-281A2997A143}"/>
+              </a:ext>
+            </a:extLst>
+          </p:cNvPr>
+          <p:cNvGraphicFramePr>
+            <a:graphicFrameLocks noGrp="1"/>
+          </p:cNvGraphicFramePr>
+          <p:nvPr>
+            <p:extLst>
+              <p:ext uri="{D42A27DB-BD31-4B8C-83A1-F6EECF244321}">
+                <p14:modId xmlns:p14="http://schemas.microsoft.com/office/powerpoint/2010/main" val="1802688150"/>
+              </p:ext>
+            </p:extLst>
+          </p:nvPr>
+        </p:nvGraphicFramePr>
+        <p:xfrm>
+          <a:off x="5721530" y="5100409"/>
+          <a:ext cx="3378928" cy="979566"/>
+        </p:xfrm>
+        <a:graphic>
+          <a:graphicData uri="http://schemas.openxmlformats.org/drawingml/2006/table">
+            <a:tbl>
+              <a:tblPr firstRow="1" bandRow="1">
+                <a:tableStyleId>{5C22544A-7EE6-4342-B048-85BDC9FD1C3A}</a:tableStyleId>
+              </a:tblPr>
+              <a:tblGrid>
+                <a:gridCol w="1689464">
+                  <a:extLst>
+                    <a:ext uri="{9D8B030D-6E8A-4147-A177-3AD203B41FA5}">
+                      <a16:colId xmlns:a16="http://schemas.microsoft.com/office/drawing/2014/main" val="20000"/>
+                    </a:ext>
+                  </a:extLst>
+                </a:gridCol>
+                <a:gridCol w="1689464">
+                  <a:extLst>
+                    <a:ext uri="{9D8B030D-6E8A-4147-A177-3AD203B41FA5}">
+                      <a16:colId xmlns:a16="http://schemas.microsoft.com/office/drawing/2014/main" val="20001"/>
+                    </a:ext>
+                  </a:extLst>
+                </a:gridCol>
+              </a:tblGrid>
+              <a:tr h="326522">
+                <a:tc>
+                  <a:txBody>
+                    <a:bodyPr/>
+                    <a:lstStyle/>
+                    <a:p>
+                      <a:r>
+                        <a:rPr lang="en-US" sz="1200" dirty="0"/>
+                        <a:t>problem</a:t>
+                      </a:r>
+                      <a:endParaRPr sz="1200" dirty="0"/>
+                    </a:p>
+                  </a:txBody>
+                  <a:tcPr/>
+                </a:tc>
+                <a:tc>
+                  <a:txBody>
+                    <a:bodyPr/>
+                    <a:lstStyle/>
+                    <a:p>
+                      <a:r>
+                        <a:rPr lang="en-US" sz="1200" dirty="0"/>
+                        <a:t>strategy</a:t>
+                      </a:r>
+                      <a:endParaRPr sz="1200" dirty="0"/>
+                    </a:p>
+                  </a:txBody>
+                  <a:tcPr/>
+                </a:tc>
+                <a:extLst>
+                  <a:ext uri="{0D108BD9-81ED-4DB2-BD59-A6C34878D82A}">
+                    <a16:rowId xmlns:a16="http://schemas.microsoft.com/office/drawing/2014/main" val="10000"/>
+                  </a:ext>
+                </a:extLst>
+              </a:tr>
+              <a:tr h="326522">
+                <a:tc>
+                  <a:txBody>
+                    <a:bodyPr/>
+                    <a:lstStyle/>
+                    <a:p>
+                      <a:r>
+                        <a:rPr lang="de-DE" sz="1200" dirty="0" err="1"/>
+                        <a:t>spam</a:t>
+                      </a:r>
+                      <a:r>
+                        <a:rPr lang="de-DE" sz="1200" dirty="0"/>
+                        <a:t> </a:t>
+                      </a:r>
+                      <a:r>
+                        <a:rPr lang="de-DE" sz="1200" dirty="0" err="1"/>
+                        <a:t>classification</a:t>
+                      </a:r>
+                      <a:endParaRPr sz="1200" dirty="0"/>
+                    </a:p>
+                  </a:txBody>
+                  <a:tcPr/>
+                </a:tc>
+                <a:tc>
+                  <a:txBody>
+                    <a:bodyPr/>
+                    <a:lstStyle/>
+                    <a:p>
+                      <a:r>
+                        <a:rPr lang="en-US" sz="1200" dirty="0"/>
+                        <a:t>h</a:t>
+                      </a:r>
+                      <a:r>
+                        <a:rPr sz="1200" dirty="0"/>
+                        <a:t>igh</a:t>
+                      </a:r>
+                      <a:r>
+                        <a:rPr lang="en-US" sz="1200" dirty="0"/>
+                        <a:t> precision</a:t>
+                      </a:r>
+                    </a:p>
+                  </a:txBody>
+                  <a:tcPr/>
+                </a:tc>
+                <a:extLst>
+                  <a:ext uri="{0D108BD9-81ED-4DB2-BD59-A6C34878D82A}">
+                    <a16:rowId xmlns:a16="http://schemas.microsoft.com/office/drawing/2014/main" val="10001"/>
+                  </a:ext>
+                </a:extLst>
+              </a:tr>
+              <a:tr h="326522">
+                <a:tc>
+                  <a:txBody>
+                    <a:bodyPr/>
+                    <a:lstStyle/>
+                    <a:p>
+                      <a:r>
+                        <a:rPr lang="de-DE" sz="1200" dirty="0" err="1"/>
+                        <a:t>cancer</a:t>
+                      </a:r>
+                      <a:r>
+                        <a:rPr lang="de-DE" sz="1200" dirty="0"/>
+                        <a:t> </a:t>
+                      </a:r>
+                      <a:r>
+                        <a:rPr lang="de-DE" sz="1200" dirty="0" err="1"/>
+                        <a:t>diagnosis</a:t>
+                      </a:r>
+                      <a:endParaRPr sz="1200" dirty="0"/>
+                    </a:p>
+                  </a:txBody>
+                  <a:tcPr/>
+                </a:tc>
+                <a:tc>
+                  <a:txBody>
+                    <a:bodyPr/>
+                    <a:lstStyle/>
+                    <a:p>
+                      <a:r>
+                        <a:rPr lang="en-US" sz="1200" dirty="0"/>
+                        <a:t>high recall</a:t>
+                      </a:r>
+                    </a:p>
+                  </a:txBody>
+                  <a:tcPr/>
+                </a:tc>
+                <a:extLst>
+                  <a:ext uri="{0D108BD9-81ED-4DB2-BD59-A6C34878D82A}">
+                    <a16:rowId xmlns:a16="http://schemas.microsoft.com/office/drawing/2014/main" val="412160299"/>
+                  </a:ext>
+                </a:extLst>
+              </a:tr>
+            </a:tbl>
+          </a:graphicData>
+        </a:graphic>
+      </p:graphicFrame>
     </p:spTree>
     <p:extLst>
       <p:ext uri="{BB962C8B-B14F-4D97-AF65-F5344CB8AC3E}">
